--- a/progress/E.2/sprint_E.2_increment_demo.pptx
+++ b/progress/E.2/sprint_E.2_increment_demo.pptx
@@ -2,35 +2,141 @@
 <file path=ppt/presentation.xml><?xml version="1.0" encoding="utf-8"?>
 <p:presentation xmlns:p="http://schemas.openxmlformats.org/presentationml/2006/main">
   <p:sldMasterIdLst>
-    <p:sldMasterId xmlns:r="http://schemas.openxmlformats.org/officeDocument/2006/relationships" id="2147483648" r:id="Reb820c9d050e4033"/>
+    <p:sldMasterId xmlns:r="http://schemas.openxmlformats.org/officeDocument/2006/relationships" id="2147483648" r:id="Rd6c014fa4b6a4145"/>
   </p:sldMasterIdLst>
   <p:notesMasterIdLst>
-    <p:notesMasterId xmlns:r="http://schemas.openxmlformats.org/officeDocument/2006/relationships" r:id="R711a0a19bde1432a"/>
+    <p:notesMasterId xmlns:r="http://schemas.openxmlformats.org/officeDocument/2006/relationships" r:id="R1ececc2f2d514f4c"/>
   </p:notesMasterIdLst>
   <p:sldIdLst>
-    <p:sldId xmlns:r="http://schemas.openxmlformats.org/officeDocument/2006/relationships" id="256" r:id="R1a55e143696e4bc6"/>
-    <p:sldId xmlns:r="http://schemas.openxmlformats.org/officeDocument/2006/relationships" id="257" r:id="Rc0788576a2984e41"/>
-    <p:sldId xmlns:r="http://schemas.openxmlformats.org/officeDocument/2006/relationships" id="258" r:id="R2a28799e3ab343cf"/>
-    <p:sldId xmlns:r="http://schemas.openxmlformats.org/officeDocument/2006/relationships" id="259" r:id="Rcab006b1f19c4ac2"/>
-    <p:sldId xmlns:r="http://schemas.openxmlformats.org/officeDocument/2006/relationships" id="260" r:id="Rc700ede8a55548ac"/>
-    <p:sldId xmlns:r="http://schemas.openxmlformats.org/officeDocument/2006/relationships" id="261" r:id="Rbc7510daa62d4864"/>
-    <p:sldId xmlns:r="http://schemas.openxmlformats.org/officeDocument/2006/relationships" id="262" r:id="R6f3a7735a3344e01"/>
-    <p:sldId xmlns:r="http://schemas.openxmlformats.org/officeDocument/2006/relationships" id="263" r:id="R8238baedd6cd4b28"/>
-    <p:sldId xmlns:r="http://schemas.openxmlformats.org/officeDocument/2006/relationships" id="264" r:id="R01721363c88b40e4"/>
-    <p:sldId xmlns:r="http://schemas.openxmlformats.org/officeDocument/2006/relationships" id="265" r:id="R750b168f24854825"/>
-    <p:sldId xmlns:r="http://schemas.openxmlformats.org/officeDocument/2006/relationships" id="266" r:id="R72e95801725944b1"/>
-    <p:sldId xmlns:r="http://schemas.openxmlformats.org/officeDocument/2006/relationships" id="267" r:id="R976a509761564586"/>
-    <p:sldId xmlns:r="http://schemas.openxmlformats.org/officeDocument/2006/relationships" id="268" r:id="Rae9061a692c54b51"/>
-    <p:sldId xmlns:r="http://schemas.openxmlformats.org/officeDocument/2006/relationships" id="269" r:id="R0c123e30fe5845be"/>
-    <p:sldId xmlns:r="http://schemas.openxmlformats.org/officeDocument/2006/relationships" id="270" r:id="R34b28638756444ea"/>
-    <p:sldId xmlns:r="http://schemas.openxmlformats.org/officeDocument/2006/relationships" id="271" r:id="Rc121da1296f74b7b"/>
-    <p:sldId xmlns:r="http://schemas.openxmlformats.org/officeDocument/2006/relationships" id="272" r:id="R12facdc5d2174b00"/>
-    <p:sldId xmlns:r="http://schemas.openxmlformats.org/officeDocument/2006/relationships" id="273" r:id="Rca7ab1e1f05c4a4c"/>
-    <p:sldId xmlns:r="http://schemas.openxmlformats.org/officeDocument/2006/relationships" id="274" r:id="R36e33801a08f4b84"/>
-    <p:sldId xmlns:r="http://schemas.openxmlformats.org/officeDocument/2006/relationships" id="275" r:id="R8a7e4746aa654fa7"/>
+    <p:sldId xmlns:r="http://schemas.openxmlformats.org/officeDocument/2006/relationships" id="256" r:id="R288bc8429de541b8"/>
+    <p:sldId xmlns:r="http://schemas.openxmlformats.org/officeDocument/2006/relationships" id="257" r:id="R6f0d2973942a422f"/>
+    <p:sldId xmlns:r="http://schemas.openxmlformats.org/officeDocument/2006/relationships" id="258" r:id="Rceccc940f5ca4cc6"/>
+    <p:sldId xmlns:r="http://schemas.openxmlformats.org/officeDocument/2006/relationships" id="259" r:id="R9cc789642fc146f6"/>
+    <p:sldId xmlns:r="http://schemas.openxmlformats.org/officeDocument/2006/relationships" id="260" r:id="R9dd28a6f30904aad"/>
+    <p:sldId xmlns:r="http://schemas.openxmlformats.org/officeDocument/2006/relationships" id="261" r:id="Redd3fae934e14030"/>
+    <p:sldId xmlns:r="http://schemas.openxmlformats.org/officeDocument/2006/relationships" id="262" r:id="Rab831685fd664190"/>
+    <p:sldId xmlns:r="http://schemas.openxmlformats.org/officeDocument/2006/relationships" id="263" r:id="R5d31c22998b44ca7"/>
+    <p:sldId xmlns:r="http://schemas.openxmlformats.org/officeDocument/2006/relationships" id="264" r:id="R5208185545df45f2"/>
+    <p:sldId xmlns:r="http://schemas.openxmlformats.org/officeDocument/2006/relationships" id="265" r:id="R08c341baa9d7451c"/>
+    <p:sldId xmlns:r="http://schemas.openxmlformats.org/officeDocument/2006/relationships" id="266" r:id="Rd54a4995ac994414"/>
+    <p:sldId xmlns:r="http://schemas.openxmlformats.org/officeDocument/2006/relationships" id="267" r:id="Rb8e5c78a7ef84156"/>
+    <p:sldId xmlns:r="http://schemas.openxmlformats.org/officeDocument/2006/relationships" id="268" r:id="R729cb8f1a7d24a71"/>
+    <p:sldId xmlns:r="http://schemas.openxmlformats.org/officeDocument/2006/relationships" id="269" r:id="R0de9940d80e8418b"/>
+    <p:sldId xmlns:r="http://schemas.openxmlformats.org/officeDocument/2006/relationships" id="270" r:id="Rf7d238a38edb4f15"/>
+    <p:sldId xmlns:r="http://schemas.openxmlformats.org/officeDocument/2006/relationships" id="271" r:id="Re4826cf577b34f28"/>
+    <p:sldId xmlns:r="http://schemas.openxmlformats.org/officeDocument/2006/relationships" id="272" r:id="Rc74b462198794037"/>
+    <p:sldId xmlns:r="http://schemas.openxmlformats.org/officeDocument/2006/relationships" id="273" r:id="R94a0f555b04f45b6"/>
+    <p:sldId xmlns:r="http://schemas.openxmlformats.org/officeDocument/2006/relationships" id="274" r:id="R15df6fe994f74797"/>
+    <p:sldId xmlns:r="http://schemas.openxmlformats.org/officeDocument/2006/relationships" id="275" r:id="Ra313fd0712d74024"/>
+    <p:sldId xmlns:r="http://schemas.openxmlformats.org/officeDocument/2006/relationships" id="276" r:id="R33865f49f0564040"/>
+    <p:sldId xmlns:r="http://schemas.openxmlformats.org/officeDocument/2006/relationships" id="277" r:id="R02d03ece45694c3b"/>
   </p:sldIdLst>
   <p:sldSz cx="12192000" cy="6858000"/>
   <p:notesSz cx="6858000" cy="9144000"/>
+  <p:defaultTextStyle>
+    <a:defPPr xmlns:a="http://schemas.openxmlformats.org/drawingml/2006/main">
+      <a:buNone/>
+    </a:defPPr>
+    <a:lvl1pPr xmlns:a="http://schemas.openxmlformats.org/drawingml/2006/main" marL="0" algn="l" defTabSz="914400">
+      <a:buNone/>
+      <a:defRPr sz="1800" kern="1200">
+        <a:solidFill>
+          <a:schemeClr val="tx1"/>
+        </a:solidFill>
+        <a:latin typeface="+mn-lt"/>
+        <a:ea typeface="+mn-lt"/>
+        <a:cs typeface="+mn-lt"/>
+      </a:defRPr>
+    </a:lvl1pPr>
+    <a:lvl2pPr xmlns:a="http://schemas.openxmlformats.org/drawingml/2006/main" marL="457200" algn="l" defTabSz="914400">
+      <a:buNone/>
+      <a:defRPr sz="1800" kern="1200">
+        <a:solidFill>
+          <a:schemeClr val="tx1"/>
+        </a:solidFill>
+        <a:latin typeface="+mn-lt"/>
+        <a:ea typeface="+mn-lt"/>
+        <a:cs typeface="+mn-lt"/>
+      </a:defRPr>
+    </a:lvl2pPr>
+    <a:lvl3pPr xmlns:a="http://schemas.openxmlformats.org/drawingml/2006/main" marL="914400" algn="l" defTabSz="914400">
+      <a:buNone/>
+      <a:defRPr sz="1800" kern="1200">
+        <a:solidFill>
+          <a:schemeClr val="tx1"/>
+        </a:solidFill>
+        <a:latin typeface="+mn-lt"/>
+        <a:ea typeface="+mn-lt"/>
+        <a:cs typeface="+mn-lt"/>
+      </a:defRPr>
+    </a:lvl3pPr>
+    <a:lvl4pPr xmlns:a="http://schemas.openxmlformats.org/drawingml/2006/main" marL="1371600" algn="l" defTabSz="914400">
+      <a:buNone/>
+      <a:defRPr sz="1800" kern="1200">
+        <a:solidFill>
+          <a:schemeClr val="tx1"/>
+        </a:solidFill>
+        <a:latin typeface="+mn-lt"/>
+        <a:ea typeface="+mn-lt"/>
+        <a:cs typeface="+mn-lt"/>
+      </a:defRPr>
+    </a:lvl4pPr>
+    <a:lvl5pPr xmlns:a="http://schemas.openxmlformats.org/drawingml/2006/main" marL="1828800" algn="l" defTabSz="914400">
+      <a:buNone/>
+      <a:defRPr sz="1800" kern="1200">
+        <a:solidFill>
+          <a:schemeClr val="tx1"/>
+        </a:solidFill>
+        <a:latin typeface="+mn-lt"/>
+        <a:ea typeface="+mn-lt"/>
+        <a:cs typeface="+mn-lt"/>
+      </a:defRPr>
+    </a:lvl5pPr>
+    <a:lvl6pPr xmlns:a="http://schemas.openxmlformats.org/drawingml/2006/main" marL="2286000" algn="l" defTabSz="914400">
+      <a:buNone/>
+      <a:defRPr sz="1800" kern="1200">
+        <a:solidFill>
+          <a:schemeClr val="tx1"/>
+        </a:solidFill>
+        <a:latin typeface="+mn-lt"/>
+        <a:ea typeface="+mn-lt"/>
+        <a:cs typeface="+mn-lt"/>
+      </a:defRPr>
+    </a:lvl6pPr>
+    <a:lvl7pPr xmlns:a="http://schemas.openxmlformats.org/drawingml/2006/main" marL="2743200" algn="l" defTabSz="914400">
+      <a:buNone/>
+      <a:defRPr sz="1800" kern="1200">
+        <a:solidFill>
+          <a:schemeClr val="tx1"/>
+        </a:solidFill>
+        <a:latin typeface="+mn-lt"/>
+        <a:ea typeface="+mn-lt"/>
+        <a:cs typeface="+mn-lt"/>
+      </a:defRPr>
+    </a:lvl7pPr>
+    <a:lvl8pPr xmlns:a="http://schemas.openxmlformats.org/drawingml/2006/main" marL="3200400" algn="l" defTabSz="914400">
+      <a:buNone/>
+      <a:defRPr sz="1800" kern="1200">
+        <a:solidFill>
+          <a:schemeClr val="tx1"/>
+        </a:solidFill>
+        <a:latin typeface="+mn-lt"/>
+        <a:ea typeface="+mn-lt"/>
+        <a:cs typeface="+mn-lt"/>
+      </a:defRPr>
+    </a:lvl8pPr>
+    <a:lvl9pPr xmlns:a="http://schemas.openxmlformats.org/drawingml/2006/main" marL="3657600" algn="l" defTabSz="914400">
+      <a:buNone/>
+      <a:defRPr sz="1800" kern="1200">
+        <a:solidFill>
+          <a:schemeClr val="tx1"/>
+        </a:solidFill>
+        <a:latin typeface="+mn-lt"/>
+        <a:ea typeface="+mn-lt"/>
+        <a:cs typeface="+mn-lt"/>
+      </a:defRPr>
+    </a:lvl9pPr>
+  </p:defaultTextStyle>
 </p:presentation>
 </file>
 
@@ -556,12 +662,12 @@
           </a:p>
           <a:p xmlns:a="http://schemas.openxmlformats.org/drawingml/2006/main">
             <a:r>
-              <a:t>https://docs.oracle.com/en/database/oracle/apex/24.2/htmdb/about-working-copies.html</a:t>
-            </a:r>
-          </a:p>
-          <a:p xmlns:a="http://schemas.openxmlformats.org/drawingml/2006/main">
-            <a:r>
-              <a:t>Repository source: refs/apex-lifecycle-management-v3.pdf (pages 12–14, 32)</a:t>
+              <a:t>https://docs.oracle.com/en/database/oracle/sql-developer-command-line/25.3/sqcug/project-command.html</a:t>
+            </a:r>
+          </a:p>
+          <a:p xmlns:a="http://schemas.openxmlformats.org/drawingml/2006/main">
+            <a:r>
+              <a:t>Repository source: refs/apex-lifecycle-management-v3.pdf (pages 18–30)</a:t>
             </a:r>
           </a:p>
           <a:p xmlns:a="http://schemas.openxmlformats.org/drawingml/2006/main">
@@ -726,27 +832,7 @@
           <a:lstStyle xmlns:a="http://schemas.openxmlformats.org/drawingml/2006/main"/>
           <a:p xmlns:a="http://schemas.openxmlformats.org/drawingml/2006/main">
             <a:r>
-              <a:t>Evidence and reproduction: progress/E.2/sprint_E.2_increment_demo.md. Primary Oracle sources and evidence limits: progress/E.2/oracle-gap-analysis.md.</a:t>
-            </a:r>
-          </a:p>
-          <a:p xmlns:a="http://schemas.openxmlformats.org/drawingml/2006/main">
-            <a:r>
-              <a:t>Sources:</a:t>
-            </a:r>
-          </a:p>
-          <a:p xmlns:a="http://schemas.openxmlformats.org/drawingml/2006/main">
-            <a:r>
-              <a:t>https://docs.oracle.com/en/database/oracle/apex/24.2/htmdb/about-working-copies.html</a:t>
-            </a:r>
-          </a:p>
-          <a:p xmlns:a="http://schemas.openxmlformats.org/drawingml/2006/main">
-            <a:r>
-              <a:t>Repository source: refs/apex-lifecycle-management-v3.pdf (pages 12–14, 32)</a:t>
-            </a:r>
-          </a:p>
-          <a:p xmlns:a="http://schemas.openxmlformats.org/drawingml/2006/main">
-            <a:r>
-              <a:t>Walkthrough: progress/E.2/sprint_E.2_increment_demo.md; actual outcomes: progress/E.2/sprint_E.2_tests.md</a:t>
+              <a:t>Source: progress/E.2/repository-layout.md and sprint_E.2_increment_demo.md section 4. Source checkpoint d49bc94; distribution checkpoint d5c3334. Execute these read-only Git commands with git -C .local-apex/e2/e2-20261019-01/repo from the delivery root, or cd into that repo. Inspect both page document-title diffs, generated distribution and exact declaration. E.1 scripts remain in delivery repo. Does not resolve the recorded native verification blocker or establish arbitrary Working Copy strategy compatibility.</a:t>
             </a:r>
           </a:p>
         </p:txBody>
@@ -839,6 +925,11 @@
               <a:t>Walkthrough: progress/E.2/sprint_E.2_increment_demo.md; actual outcomes: progress/E.2/sprint_E.2_tests.md</a:t>
             </a:r>
           </a:p>
+          <a:p xmlns:a="http://schemas.openxmlformats.org/drawingml/2006/main">
+            <a:r>
+              <a:t>Desktop repeat screenshot: progress/E.2/tests/e2_desktop_repeat_merge_full.jpg; captured after the original exercise in a separate disposable Working Copy. The repeat did not apply the merge. Earlier results remain in original evidence.</a:t>
+            </a:r>
+          </a:p>
         </p:txBody>
       </p:sp>
       <p:sp>
@@ -926,17 +1017,12 @@
           </a:p>
           <a:p xmlns:a="http://schemas.openxmlformats.org/drawingml/2006/main">
             <a:r>
-              <a:t>https://docs.oracle.com/en/error-help/db/ora-08177/</a:t>
-            </a:r>
-          </a:p>
-          <a:p xmlns:a="http://schemas.openxmlformats.org/drawingml/2006/main">
-            <a:r>
-              <a:t>https://docs.oracle.com/en/database/oracle/oracle-database/26/admin/oracle-scheduler-concepts.html</a:t>
-            </a:r>
-          </a:p>
-          <a:p xmlns:a="http://schemas.openxmlformats.org/drawingml/2006/main">
-            <a:r>
               <a:t>Walkthrough: progress/E.2/sprint_E.2_increment_demo.md; actual outcomes: progress/E.2/sprint_E.2_tests.md</a:t>
+            </a:r>
+          </a:p>
+          <a:p xmlns:a="http://schemas.openxmlformats.org/drawingml/2006/main">
+            <a:r>
+              <a:t>Desktop repeat screenshot: progress/E.2/tests/e2_desktop_repeat_diff.jpg; captured after the original exercise in a separate disposable Working Copy. The repeat did not apply the merge. Earlier results remain in original evidence.</a:t>
             </a:r>
           </a:p>
         </p:txBody>
@@ -1016,17 +1102,22 @@
           </a:p>
           <a:p xmlns:a="http://schemas.openxmlformats.org/drawingml/2006/main">
             <a:r>
-              <a:t>https://docs.oracle.com/en/database/oracle/sql-developer-command-line/25.3/sqcug/project-command.html</a:t>
-            </a:r>
-          </a:p>
-          <a:p xmlns:a="http://schemas.openxmlformats.org/drawingml/2006/main">
-            <a:r>
-              <a:t>Repository source: refs/apex-lifecycle-management-v3.pdf (pages 18–30)</a:t>
+              <a:t>https://docs.oracle.com/en/database/oracle/apex/24.2/htmdb/about-working-copies.html</a:t>
+            </a:r>
+          </a:p>
+          <a:p xmlns:a="http://schemas.openxmlformats.org/drawingml/2006/main">
+            <a:r>
+              <a:t>Repository source: refs/apex-lifecycle-management-v3.pdf (pages 12–14, 32)</a:t>
             </a:r>
           </a:p>
           <a:p xmlns:a="http://schemas.openxmlformats.org/drawingml/2006/main">
             <a:r>
               <a:t>Walkthrough: progress/E.2/sprint_E.2_increment_demo.md; actual outcomes: progress/E.2/sprint_E.2_tests.md</a:t>
+            </a:r>
+          </a:p>
+          <a:p xmlns:a="http://schemas.openxmlformats.org/drawingml/2006/main">
+            <a:r>
+              <a:t>Desktop repeat screenshot: progress/E.2/tests/e2_desktop_repeat_missing_full.jpg; captured after the original exercise in a separate disposable Working Copy. The repeat did not apply the merge. Earlier results remain in original evidence.</a:t>
             </a:r>
           </a:p>
         </p:txBody>
@@ -1096,7 +1187,7 @@
           <a:lstStyle xmlns:a="http://schemas.openxmlformats.org/drawingml/2006/main"/>
           <a:p xmlns:a="http://schemas.openxmlformats.org/drawingml/2006/main">
             <a:r>
-              <a:t>Actual before/after: identities-upgrade-before.json and identities-upgrade-after.json in the retained run/evidence bundle. E.1 fixed-offset evidence belongs to its own importer.</a:t>
+              <a:t>Evidence and reproduction: progress/E.2/sprint_E.2_increment_demo.md. Primary Oracle sources and evidence limits: progress/E.2/oracle-gap-analysis.md.</a:t>
             </a:r>
           </a:p>
           <a:p xmlns:a="http://schemas.openxmlformats.org/drawingml/2006/main">
@@ -1106,12 +1197,22 @@
           </a:p>
           <a:p xmlns:a="http://schemas.openxmlformats.org/drawingml/2006/main">
             <a:r>
-              <a:t>https://docs.oracle.com/en/database/oracle/apex/24.2/aeapi/SET_OFFSET-Procedure.html</a:t>
-            </a:r>
-          </a:p>
-          <a:p xmlns:a="http://schemas.openxmlformats.org/drawingml/2006/main">
-            <a:r>
-              <a:t>Local actual evidence: identities-upgrade-before.json / identities-upgrade-after.json; no private-report-loss claim.</a:t>
+              <a:t>https://docs.oracle.com/en/database/oracle/apex/24.2/htmdb/about-working-copies.html</a:t>
+            </a:r>
+          </a:p>
+          <a:p xmlns:a="http://schemas.openxmlformats.org/drawingml/2006/main">
+            <a:r>
+              <a:t>Repository source: refs/apex-lifecycle-management-v3.pdf (pages 12–14, 32)</a:t>
+            </a:r>
+          </a:p>
+          <a:p xmlns:a="http://schemas.openxmlformats.org/drawingml/2006/main">
+            <a:r>
+              <a:t>https://docs.oracle.com/en/error-help/db/ora-08177/</a:t>
+            </a:r>
+          </a:p>
+          <a:p xmlns:a="http://schemas.openxmlformats.org/drawingml/2006/main">
+            <a:r>
+              <a:t>https://docs.oracle.com/en/database/oracle/oracle-database/26/admin/oracle-scheduler-concepts.html</a:t>
             </a:r>
           </a:p>
           <a:p xmlns:a="http://schemas.openxmlformats.org/drawingml/2006/main">
@@ -1276,7 +1377,7 @@
           <a:lstStyle xmlns:a="http://schemas.openxmlformats.org/drawingml/2006/main"/>
           <a:p xmlns:a="http://schemas.openxmlformats.org/drawingml/2006/main">
             <a:r>
-              <a:t>Evidence and reproduction: progress/E.2/sprint_E.2_increment_demo.md. Primary Oracle sources and evidence limits: progress/E.2/oracle-gap-analysis.md.</a:t>
+              <a:t>Actual before/after: identities-upgrade-before.json and identities-upgrade-after.json in the retained run/evidence bundle. E.1 fixed-offset evidence belongs to its own importer.</a:t>
             </a:r>
           </a:p>
           <a:p xmlns:a="http://schemas.openxmlformats.org/drawingml/2006/main">
@@ -1286,12 +1387,12 @@
           </a:p>
           <a:p xmlns:a="http://schemas.openxmlformats.org/drawingml/2006/main">
             <a:r>
-              <a:t>https://docs.oracle.com/en/database/oracle/apex/24.2/htmdb/using-shared-component-subscriptions.html</a:t>
-            </a:r>
-          </a:p>
-          <a:p xmlns:a="http://schemas.openxmlformats.org/drawingml/2006/main">
-            <a:r>
-              <a:t>https://semver.org/spec/v2.0.0.html</a:t>
+              <a:t>https://docs.oracle.com/en/database/oracle/apex/24.2/aeapi/SET_OFFSET-Procedure.html</a:t>
+            </a:r>
+          </a:p>
+          <a:p xmlns:a="http://schemas.openxmlformats.org/drawingml/2006/main">
+            <a:r>
+              <a:t>Local actual evidence: identities-upgrade-before.json / identities-upgrade-after.json; no private-report-loss claim.</a:t>
             </a:r>
           </a:p>
           <a:p xmlns:a="http://schemas.openxmlformats.org/drawingml/2006/main">
@@ -1376,7 +1477,12 @@
           </a:p>
           <a:p xmlns:a="http://schemas.openxmlformats.org/drawingml/2006/main">
             <a:r>
-              <a:t>Project requirements/design and actual exercise ledger linked in the walkthrough.</a:t>
+              <a:t>https://docs.oracle.com/en/database/oracle/sql-developer-command-line/25.3/sqcug/project-command.html</a:t>
+            </a:r>
+          </a:p>
+          <a:p xmlns:a="http://schemas.openxmlformats.org/drawingml/2006/main">
+            <a:r>
+              <a:t>Repository source: refs/apex-lifecycle-management-v3.pdf (pages 18–30)</a:t>
             </a:r>
           </a:p>
           <a:p xmlns:a="http://schemas.openxmlformats.org/drawingml/2006/main">
@@ -1546,6 +1652,181 @@
           </a:p>
           <a:p xmlns:a="http://schemas.openxmlformats.org/drawingml/2006/main">
             <a:r>
+              <a:t>https://docs.oracle.com/en/database/oracle/apex/24.2/htmdb/using-shared-component-subscriptions.html</a:t>
+            </a:r>
+          </a:p>
+          <a:p xmlns:a="http://schemas.openxmlformats.org/drawingml/2006/main">
+            <a:r>
+              <a:t>https://semver.org/spec/v2.0.0.html</a:t>
+            </a:r>
+          </a:p>
+          <a:p xmlns:a="http://schemas.openxmlformats.org/drawingml/2006/main">
+            <a:r>
+              <a:t>Walkthrough: progress/E.2/sprint_E.2_increment_demo.md; actual outcomes: progress/E.2/sprint_E.2_tests.md</a:t>
+            </a:r>
+          </a:p>
+        </p:txBody>
+      </p:sp>
+      <p:sp>
+        <p:nvSpPr>
+          <p:cNvPr id="4" name="Slide Number Placeholder 3"/>
+          <p:cNvSpPr>
+            <a:spLocks xmlns:a="http://schemas.openxmlformats.org/drawingml/2006/main" noGrp="1"/>
+          </p:cNvSpPr>
+          <p:nvPr>
+            <p:ph type="sldNum" idx="5"/>
+          </p:nvPr>
+        </p:nvSpPr>
+        <p:spPr/>
+        <p:txBody>
+          <a:bodyPr xmlns:a="http://schemas.openxmlformats.org/drawingml/2006/main"/>
+          <a:lstStyle xmlns:a="http://schemas.openxmlformats.org/drawingml/2006/main"/>
+          <a:p xmlns:a="http://schemas.openxmlformats.org/drawingml/2006/main"/>
+        </p:txBody>
+      </p:sp>
+    </p:spTree>
+  </p:cSld>
+  <p:clrMapOvr>
+    <a:masterClrMapping xmlns:a="http://schemas.openxmlformats.org/drawingml/2006/main"/>
+  </p:clrMapOvr>
+</p:notes>
+</file>
+
+<file path=ppt/notesSlides/notesSlide21.xml><?xml version="1.0" encoding="utf-8"?>
+<p:notes xmlns:p="http://schemas.openxmlformats.org/presentationml/2006/main">
+  <p:cSld>
+    <p:spTree>
+      <p:nvGrpSpPr>
+        <p:cNvPr id="1" name=""/>
+        <p:cNvGrpSpPr/>
+        <p:nvPr/>
+      </p:nvGrpSpPr>
+      <p:grpSpPr>
+        <a:xfrm xmlns:a="http://schemas.openxmlformats.org/drawingml/2006/main"/>
+      </p:grpSpPr>
+      <p:sp>
+        <p:nvSpPr>
+          <p:cNvPr id="2" name="Slide Image Placeholder 1"/>
+          <p:cNvSpPr>
+            <a:spLocks xmlns:a="http://schemas.openxmlformats.org/drawingml/2006/main" noGrp="1"/>
+          </p:cNvSpPr>
+          <p:nvPr>
+            <p:ph type="sldImg" idx="0"/>
+          </p:nvPr>
+        </p:nvSpPr>
+        <p:spPr/>
+      </p:sp>
+      <p:sp>
+        <p:nvSpPr>
+          <p:cNvPr id="3" name="Notes Placeholder 2"/>
+          <p:cNvSpPr>
+            <a:spLocks xmlns:a="http://schemas.openxmlformats.org/drawingml/2006/main" noGrp="1"/>
+          </p:cNvSpPr>
+          <p:nvPr>
+            <p:ph type="body" idx="1"/>
+          </p:nvPr>
+        </p:nvSpPr>
+        <p:spPr/>
+        <p:txBody>
+          <a:bodyPr xmlns:a="http://schemas.openxmlformats.org/drawingml/2006/main"/>
+          <a:lstStyle xmlns:a="http://schemas.openxmlformats.org/drawingml/2006/main"/>
+          <a:p xmlns:a="http://schemas.openxmlformats.org/drawingml/2006/main">
+            <a:r>
+              <a:t>Evidence and reproduction: progress/E.2/sprint_E.2_increment_demo.md. Primary Oracle sources and evidence limits: progress/E.2/oracle-gap-analysis.md.</a:t>
+            </a:r>
+          </a:p>
+          <a:p xmlns:a="http://schemas.openxmlformats.org/drawingml/2006/main">
+            <a:r>
+              <a:t>Sources:</a:t>
+            </a:r>
+          </a:p>
+          <a:p xmlns:a="http://schemas.openxmlformats.org/drawingml/2006/main">
+            <a:r>
+              <a:t>Project requirements/design and actual exercise ledger linked in the walkthrough.</a:t>
+            </a:r>
+          </a:p>
+          <a:p xmlns:a="http://schemas.openxmlformats.org/drawingml/2006/main">
+            <a:r>
+              <a:t>Walkthrough: progress/E.2/sprint_E.2_increment_demo.md; actual outcomes: progress/E.2/sprint_E.2_tests.md</a:t>
+            </a:r>
+          </a:p>
+        </p:txBody>
+      </p:sp>
+      <p:sp>
+        <p:nvSpPr>
+          <p:cNvPr id="4" name="Slide Number Placeholder 3"/>
+          <p:cNvSpPr>
+            <a:spLocks xmlns:a="http://schemas.openxmlformats.org/drawingml/2006/main" noGrp="1"/>
+          </p:cNvSpPr>
+          <p:nvPr>
+            <p:ph type="sldNum" idx="5"/>
+          </p:nvPr>
+        </p:nvSpPr>
+        <p:spPr/>
+        <p:txBody>
+          <a:bodyPr xmlns:a="http://schemas.openxmlformats.org/drawingml/2006/main"/>
+          <a:lstStyle xmlns:a="http://schemas.openxmlformats.org/drawingml/2006/main"/>
+          <a:p xmlns:a="http://schemas.openxmlformats.org/drawingml/2006/main"/>
+        </p:txBody>
+      </p:sp>
+    </p:spTree>
+  </p:cSld>
+  <p:clrMapOvr>
+    <a:masterClrMapping xmlns:a="http://schemas.openxmlformats.org/drawingml/2006/main"/>
+  </p:clrMapOvr>
+</p:notes>
+</file>
+
+<file path=ppt/notesSlides/notesSlide22.xml><?xml version="1.0" encoding="utf-8"?>
+<p:notes xmlns:p="http://schemas.openxmlformats.org/presentationml/2006/main">
+  <p:cSld>
+    <p:spTree>
+      <p:nvGrpSpPr>
+        <p:cNvPr id="1" name=""/>
+        <p:cNvGrpSpPr/>
+        <p:nvPr/>
+      </p:nvGrpSpPr>
+      <p:grpSpPr>
+        <a:xfrm xmlns:a="http://schemas.openxmlformats.org/drawingml/2006/main"/>
+      </p:grpSpPr>
+      <p:sp>
+        <p:nvSpPr>
+          <p:cNvPr id="2" name="Slide Image Placeholder 1"/>
+          <p:cNvSpPr>
+            <a:spLocks xmlns:a="http://schemas.openxmlformats.org/drawingml/2006/main" noGrp="1"/>
+          </p:cNvSpPr>
+          <p:nvPr>
+            <p:ph type="sldImg" idx="0"/>
+          </p:nvPr>
+        </p:nvSpPr>
+        <p:spPr/>
+      </p:sp>
+      <p:sp>
+        <p:nvSpPr>
+          <p:cNvPr id="3" name="Notes Placeholder 2"/>
+          <p:cNvSpPr>
+            <a:spLocks xmlns:a="http://schemas.openxmlformats.org/drawingml/2006/main" noGrp="1"/>
+          </p:cNvSpPr>
+          <p:nvPr>
+            <p:ph type="body" idx="1"/>
+          </p:nvPr>
+        </p:nvSpPr>
+        <p:spPr/>
+        <p:txBody>
+          <a:bodyPr xmlns:a="http://schemas.openxmlformats.org/drawingml/2006/main"/>
+          <a:lstStyle xmlns:a="http://schemas.openxmlformats.org/drawingml/2006/main"/>
+          <a:p xmlns:a="http://schemas.openxmlformats.org/drawingml/2006/main">
+            <a:r>
+              <a:t>Evidence and reproduction: progress/E.2/sprint_E.2_increment_demo.md. Primary Oracle sources and evidence limits: progress/E.2/oracle-gap-analysis.md.</a:t>
+            </a:r>
+          </a:p>
+          <a:p xmlns:a="http://schemas.openxmlformats.org/drawingml/2006/main">
+            <a:r>
+              <a:t>Sources:</a:t>
+            </a:r>
+          </a:p>
+          <a:p xmlns:a="http://schemas.openxmlformats.org/drawingml/2006/main">
+            <a:r>
               <a:t>Project requirements/design and actual exercise ledger linked in the walkthrough.</a:t>
             </a:r>
           </a:p>
@@ -1981,27 +2262,7 @@
           <a:lstStyle xmlns:a="http://schemas.openxmlformats.org/drawingml/2006/main"/>
           <a:p xmlns:a="http://schemas.openxmlformats.org/drawingml/2006/main">
             <a:r>
-              <a:t>Evidence and reproduction: progress/E.2/sprint_E.2_increment_demo.md. Primary Oracle sources and evidence limits: progress/E.2/oracle-gap-analysis.md.</a:t>
-            </a:r>
-          </a:p>
-          <a:p xmlns:a="http://schemas.openxmlformats.org/drawingml/2006/main">
-            <a:r>
-              <a:t>Sources:</a:t>
-            </a:r>
-          </a:p>
-          <a:p xmlns:a="http://schemas.openxmlformats.org/drawingml/2006/main">
-            <a:r>
-              <a:t>https://docs.oracle.com/en/database/oracle/sql-developer-command-line/25.3/sqcug/project-command.html</a:t>
-            </a:r>
-          </a:p>
-          <a:p xmlns:a="http://schemas.openxmlformats.org/drawingml/2006/main">
-            <a:r>
-              <a:t>Repository source: refs/apex-lifecycle-management-v3.pdf (pages 18–30)</a:t>
-            </a:r>
-          </a:p>
-          <a:p xmlns:a="http://schemas.openxmlformats.org/drawingml/2006/main">
-            <a:r>
-              <a:t>Walkthrough: progress/E.2/sprint_E.2_increment_demo.md; actual outcomes: progress/E.2/sprint_E.2_tests.md</a:t>
+              <a:t>Source: progress/E.2/repository-layout.md; actual git ls-files at d5c3334486cac6300a0939a4d84bfcfe70627df9 in .local-apex/e2/e2-20261019-01/repo. Abbreviated actual paths. artifact/ exists locally and is Git-ignored. Dist contains exercise additions/adaptations including component-contract.json and separate APEX changelog, not solely untouched PROJECT output. Live: open the repo and inspect .dbtools, src, dist, artifact. Explain source versus migrations and custom SQL.</a:t>
             </a:r>
           </a:p>
         </p:txBody>
@@ -2279,6 +2540,7 @@
                 <a:spcPts val="0"/>
               </a:spcAft>
               <a:buNone/>
+              <a:defRPr/>
             </a:lvl1pPr>
             <a:lvl2pPr marL="0" indent="0">
               <a:lnSpc>
@@ -2291,6 +2553,7 @@
                 <a:spcPts val="0"/>
               </a:spcAft>
               <a:buNone/>
+              <a:defRPr/>
             </a:lvl2pPr>
             <a:lvl3pPr marL="0" indent="0">
               <a:lnSpc>
@@ -2303,6 +2566,7 @@
                 <a:spcPts val="0"/>
               </a:spcAft>
               <a:buNone/>
+              <a:defRPr/>
             </a:lvl3pPr>
             <a:lvl4pPr marL="0" indent="0">
               <a:lnSpc>
@@ -2315,6 +2579,7 @@
                 <a:spcPts val="0"/>
               </a:spcAft>
               <a:buNone/>
+              <a:defRPr/>
             </a:lvl4pPr>
             <a:lvl5pPr marL="0" indent="0">
               <a:lnSpc>
@@ -2327,6 +2592,7 @@
                 <a:spcPts val="0"/>
               </a:spcAft>
               <a:buNone/>
+              <a:defRPr/>
             </a:lvl5pPr>
             <a:lvl6pPr marL="0" indent="0">
               <a:lnSpc>
@@ -2339,6 +2605,7 @@
                 <a:spcPts val="0"/>
               </a:spcAft>
               <a:buNone/>
+              <a:defRPr/>
             </a:lvl6pPr>
             <a:lvl7pPr marL="0" indent="0">
               <a:lnSpc>
@@ -2351,6 +2618,7 @@
                 <a:spcPts val="0"/>
               </a:spcAft>
               <a:buNone/>
+              <a:defRPr/>
             </a:lvl7pPr>
             <a:lvl8pPr marL="0" indent="0">
               <a:lnSpc>
@@ -2363,6 +2631,7 @@
                 <a:spcPts val="0"/>
               </a:spcAft>
               <a:buNone/>
+              <a:defRPr/>
             </a:lvl8pPr>
             <a:lvl9pPr marL="0" indent="0">
               <a:lnSpc>
@@ -2375,9 +2644,12 @@
                 <a:spcPts val="0"/>
               </a:spcAft>
               <a:buNone/>
+              <a:defRPr/>
             </a:lvl9pPr>
           </a:lstStyle>
-          <a:p xmlns:a="http://schemas.openxmlformats.org/drawingml/2006/main"/>
+          <a:p xmlns:a="http://schemas.openxmlformats.org/drawingml/2006/main">
+            <a:endParaRPr/>
+          </a:p>
         </p:txBody>
       </p:sp>
       <p:sp>
@@ -2436,6 +2708,7 @@
                 <a:spcPts val="0"/>
               </a:spcAft>
               <a:buNone/>
+              <a:defRPr/>
             </a:lvl1pPr>
             <a:lvl2pPr marL="0" indent="0">
               <a:lnSpc>
@@ -2448,6 +2721,7 @@
                 <a:spcPts val="0"/>
               </a:spcAft>
               <a:buNone/>
+              <a:defRPr/>
             </a:lvl2pPr>
             <a:lvl3pPr marL="0" indent="0">
               <a:lnSpc>
@@ -2460,6 +2734,7 @@
                 <a:spcPts val="0"/>
               </a:spcAft>
               <a:buNone/>
+              <a:defRPr/>
             </a:lvl3pPr>
             <a:lvl4pPr marL="0" indent="0">
               <a:lnSpc>
@@ -2472,6 +2747,7 @@
                 <a:spcPts val="0"/>
               </a:spcAft>
               <a:buNone/>
+              <a:defRPr/>
             </a:lvl4pPr>
             <a:lvl5pPr marL="0" indent="0">
               <a:lnSpc>
@@ -2484,6 +2760,7 @@
                 <a:spcPts val="0"/>
               </a:spcAft>
               <a:buNone/>
+              <a:defRPr/>
             </a:lvl5pPr>
             <a:lvl6pPr marL="0" indent="0">
               <a:lnSpc>
@@ -2496,6 +2773,7 @@
                 <a:spcPts val="0"/>
               </a:spcAft>
               <a:buNone/>
+              <a:defRPr/>
             </a:lvl6pPr>
             <a:lvl7pPr marL="0" indent="0">
               <a:lnSpc>
@@ -2508,6 +2786,7 @@
                 <a:spcPts val="0"/>
               </a:spcAft>
               <a:buNone/>
+              <a:defRPr/>
             </a:lvl7pPr>
             <a:lvl8pPr marL="0" indent="0">
               <a:lnSpc>
@@ -2520,6 +2799,7 @@
                 <a:spcPts val="0"/>
               </a:spcAft>
               <a:buNone/>
+              <a:defRPr/>
             </a:lvl8pPr>
             <a:lvl9pPr marL="0" indent="0">
               <a:lnSpc>
@@ -2532,9 +2812,12 @@
                 <a:spcPts val="0"/>
               </a:spcAft>
               <a:buNone/>
+              <a:defRPr/>
             </a:lvl9pPr>
           </a:lstStyle>
-          <a:p xmlns:a="http://schemas.openxmlformats.org/drawingml/2006/main"/>
+          <a:p xmlns:a="http://schemas.openxmlformats.org/drawingml/2006/main">
+            <a:endParaRPr/>
+          </a:p>
         </p:txBody>
       </p:sp>
     </p:spTree>
@@ -2610,6 +2893,7 @@
                 <a:spcPts val="0"/>
               </a:spcAft>
               <a:buNone/>
+              <a:defRPr/>
             </a:lvl1pPr>
             <a:lvl2pPr marL="0" indent="0">
               <a:lnSpc>
@@ -2622,6 +2906,7 @@
                 <a:spcPts val="0"/>
               </a:spcAft>
               <a:buNone/>
+              <a:defRPr/>
             </a:lvl2pPr>
             <a:lvl3pPr marL="0" indent="0">
               <a:lnSpc>
@@ -2634,6 +2919,7 @@
                 <a:spcPts val="0"/>
               </a:spcAft>
               <a:buNone/>
+              <a:defRPr/>
             </a:lvl3pPr>
             <a:lvl4pPr marL="0" indent="0">
               <a:lnSpc>
@@ -2646,6 +2932,7 @@
                 <a:spcPts val="0"/>
               </a:spcAft>
               <a:buNone/>
+              <a:defRPr/>
             </a:lvl4pPr>
             <a:lvl5pPr marL="0" indent="0">
               <a:lnSpc>
@@ -2658,6 +2945,7 @@
                 <a:spcPts val="0"/>
               </a:spcAft>
               <a:buNone/>
+              <a:defRPr/>
             </a:lvl5pPr>
             <a:lvl6pPr marL="0" indent="0">
               <a:lnSpc>
@@ -2670,6 +2958,7 @@
                 <a:spcPts val="0"/>
               </a:spcAft>
               <a:buNone/>
+              <a:defRPr/>
             </a:lvl6pPr>
             <a:lvl7pPr marL="0" indent="0">
               <a:lnSpc>
@@ -2682,6 +2971,7 @@
                 <a:spcPts val="0"/>
               </a:spcAft>
               <a:buNone/>
+              <a:defRPr/>
             </a:lvl7pPr>
             <a:lvl8pPr marL="0" indent="0">
               <a:lnSpc>
@@ -2694,6 +2984,7 @@
                 <a:spcPts val="0"/>
               </a:spcAft>
               <a:buNone/>
+              <a:defRPr/>
             </a:lvl8pPr>
             <a:lvl9pPr marL="0" indent="0">
               <a:lnSpc>
@@ -2706,9 +2997,12 @@
                 <a:spcPts val="0"/>
               </a:spcAft>
               <a:buNone/>
+              <a:defRPr/>
             </a:lvl9pPr>
           </a:lstStyle>
-          <a:p xmlns:a="http://schemas.openxmlformats.org/drawingml/2006/main"/>
+          <a:p xmlns:a="http://schemas.openxmlformats.org/drawingml/2006/main">
+            <a:endParaRPr/>
+          </a:p>
         </p:txBody>
       </p:sp>
     </p:spTree>
@@ -2784,6 +3078,7 @@
                 <a:spcPts val="0"/>
               </a:spcAft>
               <a:buNone/>
+              <a:defRPr/>
             </a:lvl1pPr>
             <a:lvl2pPr marL="0" indent="0">
               <a:lnSpc>
@@ -2796,6 +3091,7 @@
                 <a:spcPts val="0"/>
               </a:spcAft>
               <a:buNone/>
+              <a:defRPr/>
             </a:lvl2pPr>
             <a:lvl3pPr marL="0" indent="0">
               <a:lnSpc>
@@ -2808,6 +3104,7 @@
                 <a:spcPts val="0"/>
               </a:spcAft>
               <a:buNone/>
+              <a:defRPr/>
             </a:lvl3pPr>
             <a:lvl4pPr marL="0" indent="0">
               <a:lnSpc>
@@ -2820,6 +3117,7 @@
                 <a:spcPts val="0"/>
               </a:spcAft>
               <a:buNone/>
+              <a:defRPr/>
             </a:lvl4pPr>
             <a:lvl5pPr marL="0" indent="0">
               <a:lnSpc>
@@ -2832,6 +3130,7 @@
                 <a:spcPts val="0"/>
               </a:spcAft>
               <a:buNone/>
+              <a:defRPr/>
             </a:lvl5pPr>
             <a:lvl6pPr marL="0" indent="0">
               <a:lnSpc>
@@ -2844,6 +3143,7 @@
                 <a:spcPts val="0"/>
               </a:spcAft>
               <a:buNone/>
+              <a:defRPr/>
             </a:lvl6pPr>
             <a:lvl7pPr marL="0" indent="0">
               <a:lnSpc>
@@ -2856,6 +3156,7 @@
                 <a:spcPts val="0"/>
               </a:spcAft>
               <a:buNone/>
+              <a:defRPr/>
             </a:lvl7pPr>
             <a:lvl8pPr marL="0" indent="0">
               <a:lnSpc>
@@ -2868,6 +3169,7 @@
                 <a:spcPts val="0"/>
               </a:spcAft>
               <a:buNone/>
+              <a:defRPr/>
             </a:lvl8pPr>
             <a:lvl9pPr marL="0" indent="0">
               <a:lnSpc>
@@ -2880,9 +3182,12 @@
                 <a:spcPts val="0"/>
               </a:spcAft>
               <a:buNone/>
+              <a:defRPr/>
             </a:lvl9pPr>
           </a:lstStyle>
-          <a:p xmlns:a="http://schemas.openxmlformats.org/drawingml/2006/main"/>
+          <a:p xmlns:a="http://schemas.openxmlformats.org/drawingml/2006/main">
+            <a:endParaRPr/>
+          </a:p>
         </p:txBody>
       </p:sp>
       <p:sp>
@@ -2941,6 +3246,7 @@
                 <a:spcPts val="1200"/>
               </a:spcAft>
               <a:buChar char="•"/>
+              <a:defRPr/>
             </a:lvl1pPr>
             <a:lvl2pPr marL="533400" indent="-228600">
               <a:lnSpc>
@@ -2953,6 +3259,7 @@
                 <a:spcPts val="1200"/>
               </a:spcAft>
               <a:buChar char="•"/>
+              <a:defRPr/>
             </a:lvl2pPr>
             <a:lvl3pPr marL="838200" indent="-228600">
               <a:lnSpc>
@@ -2965,6 +3272,7 @@
                 <a:spcPts val="1200"/>
               </a:spcAft>
               <a:buChar char="•"/>
+              <a:defRPr/>
             </a:lvl3pPr>
             <a:lvl4pPr marL="1143000" indent="-228600">
               <a:lnSpc>
@@ -2977,6 +3285,7 @@
                 <a:spcPts val="1200"/>
               </a:spcAft>
               <a:buChar char="•"/>
+              <a:defRPr/>
             </a:lvl4pPr>
             <a:lvl5pPr marL="1447800" indent="-228600">
               <a:lnSpc>
@@ -2989,6 +3298,7 @@
                 <a:spcPts val="1200"/>
               </a:spcAft>
               <a:buChar char="•"/>
+              <a:defRPr/>
             </a:lvl5pPr>
             <a:lvl6pPr marL="1752600" indent="-228600">
               <a:lnSpc>
@@ -3001,6 +3311,7 @@
                 <a:spcPts val="1200"/>
               </a:spcAft>
               <a:buChar char="•"/>
+              <a:defRPr/>
             </a:lvl6pPr>
             <a:lvl7pPr marL="2057400" indent="-228600">
               <a:lnSpc>
@@ -3013,6 +3324,7 @@
                 <a:spcPts val="1200"/>
               </a:spcAft>
               <a:buChar char="•"/>
+              <a:defRPr/>
             </a:lvl7pPr>
             <a:lvl8pPr marL="2362200" indent="-228600">
               <a:lnSpc>
@@ -3025,6 +3337,7 @@
                 <a:spcPts val="1200"/>
               </a:spcAft>
               <a:buChar char="•"/>
+              <a:defRPr/>
             </a:lvl8pPr>
             <a:lvl9pPr marL="2667000" indent="-228600">
               <a:lnSpc>
@@ -3037,9 +3350,12 @@
                 <a:spcPts val="1200"/>
               </a:spcAft>
               <a:buChar char="•"/>
+              <a:defRPr/>
             </a:lvl9pPr>
           </a:lstStyle>
-          <a:p xmlns:a="http://schemas.openxmlformats.org/drawingml/2006/main"/>
+          <a:p xmlns:a="http://schemas.openxmlformats.org/drawingml/2006/main">
+            <a:endParaRPr/>
+          </a:p>
         </p:txBody>
       </p:sp>
     </p:spTree>
@@ -3115,6 +3431,7 @@
                 <a:spcPts val="0"/>
               </a:spcAft>
               <a:buNone/>
+              <a:defRPr/>
             </a:lvl1pPr>
             <a:lvl2pPr marL="0" indent="0">
               <a:lnSpc>
@@ -3127,6 +3444,7 @@
                 <a:spcPts val="0"/>
               </a:spcAft>
               <a:buNone/>
+              <a:defRPr/>
             </a:lvl2pPr>
             <a:lvl3pPr marL="0" indent="0">
               <a:lnSpc>
@@ -3139,6 +3457,7 @@
                 <a:spcPts val="0"/>
               </a:spcAft>
               <a:buNone/>
+              <a:defRPr/>
             </a:lvl3pPr>
             <a:lvl4pPr marL="0" indent="0">
               <a:lnSpc>
@@ -3151,6 +3470,7 @@
                 <a:spcPts val="0"/>
               </a:spcAft>
               <a:buNone/>
+              <a:defRPr/>
             </a:lvl4pPr>
             <a:lvl5pPr marL="0" indent="0">
               <a:lnSpc>
@@ -3163,6 +3483,7 @@
                 <a:spcPts val="0"/>
               </a:spcAft>
               <a:buNone/>
+              <a:defRPr/>
             </a:lvl5pPr>
             <a:lvl6pPr marL="0" indent="0">
               <a:lnSpc>
@@ -3175,6 +3496,7 @@
                 <a:spcPts val="0"/>
               </a:spcAft>
               <a:buNone/>
+              <a:defRPr/>
             </a:lvl6pPr>
             <a:lvl7pPr marL="0" indent="0">
               <a:lnSpc>
@@ -3187,6 +3509,7 @@
                 <a:spcPts val="0"/>
               </a:spcAft>
               <a:buNone/>
+              <a:defRPr/>
             </a:lvl7pPr>
             <a:lvl8pPr marL="0" indent="0">
               <a:lnSpc>
@@ -3199,6 +3522,7 @@
                 <a:spcPts val="0"/>
               </a:spcAft>
               <a:buNone/>
+              <a:defRPr/>
             </a:lvl8pPr>
             <a:lvl9pPr marL="0" indent="0">
               <a:lnSpc>
@@ -3211,9 +3535,12 @@
                 <a:spcPts val="0"/>
               </a:spcAft>
               <a:buNone/>
+              <a:defRPr/>
             </a:lvl9pPr>
           </a:lstStyle>
-          <a:p xmlns:a="http://schemas.openxmlformats.org/drawingml/2006/main"/>
+          <a:p xmlns:a="http://schemas.openxmlformats.org/drawingml/2006/main">
+            <a:endParaRPr/>
+          </a:p>
         </p:txBody>
       </p:sp>
       <p:sp>
@@ -3272,6 +3599,7 @@
                 <a:spcPts val="1200"/>
               </a:spcAft>
               <a:buChar char="•"/>
+              <a:defRPr/>
             </a:lvl1pPr>
             <a:lvl2pPr marL="533400" indent="-228600">
               <a:lnSpc>
@@ -3284,6 +3612,7 @@
                 <a:spcPts val="1200"/>
               </a:spcAft>
               <a:buChar char="•"/>
+              <a:defRPr/>
             </a:lvl2pPr>
             <a:lvl3pPr marL="838200" indent="-228600">
               <a:lnSpc>
@@ -3296,6 +3625,7 @@
                 <a:spcPts val="1200"/>
               </a:spcAft>
               <a:buChar char="•"/>
+              <a:defRPr/>
             </a:lvl3pPr>
             <a:lvl4pPr marL="1143000" indent="-228600">
               <a:lnSpc>
@@ -3308,6 +3638,7 @@
                 <a:spcPts val="1200"/>
               </a:spcAft>
               <a:buChar char="•"/>
+              <a:defRPr/>
             </a:lvl4pPr>
             <a:lvl5pPr marL="1447800" indent="-228600">
               <a:lnSpc>
@@ -3320,6 +3651,7 @@
                 <a:spcPts val="1200"/>
               </a:spcAft>
               <a:buChar char="•"/>
+              <a:defRPr/>
             </a:lvl5pPr>
             <a:lvl6pPr marL="1752600" indent="-228600">
               <a:lnSpc>
@@ -3332,6 +3664,7 @@
                 <a:spcPts val="1200"/>
               </a:spcAft>
               <a:buChar char="•"/>
+              <a:defRPr/>
             </a:lvl6pPr>
             <a:lvl7pPr marL="2057400" indent="-228600">
               <a:lnSpc>
@@ -3344,6 +3677,7 @@
                 <a:spcPts val="1200"/>
               </a:spcAft>
               <a:buChar char="•"/>
+              <a:defRPr/>
             </a:lvl7pPr>
             <a:lvl8pPr marL="2362200" indent="-228600">
               <a:lnSpc>
@@ -3356,6 +3690,7 @@
                 <a:spcPts val="1200"/>
               </a:spcAft>
               <a:buChar char="•"/>
+              <a:defRPr/>
             </a:lvl8pPr>
             <a:lvl9pPr marL="2667000" indent="-228600">
               <a:lnSpc>
@@ -3368,9 +3703,12 @@
                 <a:spcPts val="1200"/>
               </a:spcAft>
               <a:buChar char="•"/>
+              <a:defRPr/>
             </a:lvl9pPr>
           </a:lstStyle>
-          <a:p xmlns:a="http://schemas.openxmlformats.org/drawingml/2006/main"/>
+          <a:p xmlns:a="http://schemas.openxmlformats.org/drawingml/2006/main">
+            <a:endParaRPr/>
+          </a:p>
         </p:txBody>
       </p:sp>
       <p:sp>
@@ -3429,6 +3767,7 @@
                 <a:spcPts val="1200"/>
               </a:spcAft>
               <a:buChar char="•"/>
+              <a:defRPr/>
             </a:lvl1pPr>
             <a:lvl2pPr marL="533400" indent="-228600">
               <a:lnSpc>
@@ -3441,6 +3780,7 @@
                 <a:spcPts val="1200"/>
               </a:spcAft>
               <a:buChar char="•"/>
+              <a:defRPr/>
             </a:lvl2pPr>
             <a:lvl3pPr marL="838200" indent="-228600">
               <a:lnSpc>
@@ -3453,6 +3793,7 @@
                 <a:spcPts val="1200"/>
               </a:spcAft>
               <a:buChar char="•"/>
+              <a:defRPr/>
             </a:lvl3pPr>
             <a:lvl4pPr marL="1143000" indent="-228600">
               <a:lnSpc>
@@ -3465,6 +3806,7 @@
                 <a:spcPts val="1200"/>
               </a:spcAft>
               <a:buChar char="•"/>
+              <a:defRPr/>
             </a:lvl4pPr>
             <a:lvl5pPr marL="1447800" indent="-228600">
               <a:lnSpc>
@@ -3477,6 +3819,7 @@
                 <a:spcPts val="1200"/>
               </a:spcAft>
               <a:buChar char="•"/>
+              <a:defRPr/>
             </a:lvl5pPr>
             <a:lvl6pPr marL="1752600" indent="-228600">
               <a:lnSpc>
@@ -3489,6 +3832,7 @@
                 <a:spcPts val="1200"/>
               </a:spcAft>
               <a:buChar char="•"/>
+              <a:defRPr/>
             </a:lvl6pPr>
             <a:lvl7pPr marL="2057400" indent="-228600">
               <a:lnSpc>
@@ -3501,6 +3845,7 @@
                 <a:spcPts val="1200"/>
               </a:spcAft>
               <a:buChar char="•"/>
+              <a:defRPr/>
             </a:lvl7pPr>
             <a:lvl8pPr marL="2362200" indent="-228600">
               <a:lnSpc>
@@ -3513,6 +3858,7 @@
                 <a:spcPts val="1200"/>
               </a:spcAft>
               <a:buChar char="•"/>
+              <a:defRPr/>
             </a:lvl8pPr>
             <a:lvl9pPr marL="2667000" indent="-228600">
               <a:lnSpc>
@@ -3525,9 +3871,12 @@
                 <a:spcPts val="1200"/>
               </a:spcAft>
               <a:buChar char="•"/>
+              <a:defRPr/>
             </a:lvl9pPr>
           </a:lstStyle>
-          <a:p xmlns:a="http://schemas.openxmlformats.org/drawingml/2006/main"/>
+          <a:p xmlns:a="http://schemas.openxmlformats.org/drawingml/2006/main">
+            <a:endParaRPr/>
+          </a:p>
         </p:txBody>
       </p:sp>
     </p:spTree>
@@ -3603,6 +3952,7 @@
                 <a:spcPts val="0"/>
               </a:spcAft>
               <a:buNone/>
+              <a:defRPr/>
             </a:lvl1pPr>
             <a:lvl2pPr marL="0" indent="0">
               <a:lnSpc>
@@ -3615,6 +3965,7 @@
                 <a:spcPts val="0"/>
               </a:spcAft>
               <a:buNone/>
+              <a:defRPr/>
             </a:lvl2pPr>
             <a:lvl3pPr marL="0" indent="0">
               <a:lnSpc>
@@ -3627,6 +3978,7 @@
                 <a:spcPts val="0"/>
               </a:spcAft>
               <a:buNone/>
+              <a:defRPr/>
             </a:lvl3pPr>
             <a:lvl4pPr marL="0" indent="0">
               <a:lnSpc>
@@ -3639,6 +3991,7 @@
                 <a:spcPts val="0"/>
               </a:spcAft>
               <a:buNone/>
+              <a:defRPr/>
             </a:lvl4pPr>
             <a:lvl5pPr marL="0" indent="0">
               <a:lnSpc>
@@ -3651,6 +4004,7 @@
                 <a:spcPts val="0"/>
               </a:spcAft>
               <a:buNone/>
+              <a:defRPr/>
             </a:lvl5pPr>
             <a:lvl6pPr marL="0" indent="0">
               <a:lnSpc>
@@ -3663,6 +4017,7 @@
                 <a:spcPts val="0"/>
               </a:spcAft>
               <a:buNone/>
+              <a:defRPr/>
             </a:lvl6pPr>
             <a:lvl7pPr marL="0" indent="0">
               <a:lnSpc>
@@ -3675,6 +4030,7 @@
                 <a:spcPts val="0"/>
               </a:spcAft>
               <a:buNone/>
+              <a:defRPr/>
             </a:lvl7pPr>
             <a:lvl8pPr marL="0" indent="0">
               <a:lnSpc>
@@ -3687,6 +4043,7 @@
                 <a:spcPts val="0"/>
               </a:spcAft>
               <a:buNone/>
+              <a:defRPr/>
             </a:lvl8pPr>
             <a:lvl9pPr marL="0" indent="0">
               <a:lnSpc>
@@ -3699,9 +4056,12 @@
                 <a:spcPts val="0"/>
               </a:spcAft>
               <a:buNone/>
+              <a:defRPr/>
             </a:lvl9pPr>
           </a:lstStyle>
-          <a:p xmlns:a="http://schemas.openxmlformats.org/drawingml/2006/main"/>
+          <a:p xmlns:a="http://schemas.openxmlformats.org/drawingml/2006/main">
+            <a:endParaRPr/>
+          </a:p>
         </p:txBody>
       </p:sp>
       <p:sp>
@@ -3760,6 +4120,7 @@
                 <a:spcPts val="1200"/>
               </a:spcAft>
               <a:buChar char="•"/>
+              <a:defRPr/>
             </a:lvl1pPr>
             <a:lvl2pPr marL="533400" indent="-228600">
               <a:lnSpc>
@@ -3772,6 +4133,7 @@
                 <a:spcPts val="1200"/>
               </a:spcAft>
               <a:buChar char="•"/>
+              <a:defRPr/>
             </a:lvl2pPr>
             <a:lvl3pPr marL="838200" indent="-228600">
               <a:lnSpc>
@@ -3784,6 +4146,7 @@
                 <a:spcPts val="1200"/>
               </a:spcAft>
               <a:buChar char="•"/>
+              <a:defRPr/>
             </a:lvl3pPr>
             <a:lvl4pPr marL="1143000" indent="-228600">
               <a:lnSpc>
@@ -3796,6 +4159,7 @@
                 <a:spcPts val="1200"/>
               </a:spcAft>
               <a:buChar char="•"/>
+              <a:defRPr/>
             </a:lvl4pPr>
             <a:lvl5pPr marL="1447800" indent="-228600">
               <a:lnSpc>
@@ -3808,6 +4172,7 @@
                 <a:spcPts val="1200"/>
               </a:spcAft>
               <a:buChar char="•"/>
+              <a:defRPr/>
             </a:lvl5pPr>
             <a:lvl6pPr marL="1752600" indent="-228600">
               <a:lnSpc>
@@ -3820,6 +4185,7 @@
                 <a:spcPts val="1200"/>
               </a:spcAft>
               <a:buChar char="•"/>
+              <a:defRPr/>
             </a:lvl6pPr>
             <a:lvl7pPr marL="2057400" indent="-228600">
               <a:lnSpc>
@@ -3832,6 +4198,7 @@
                 <a:spcPts val="1200"/>
               </a:spcAft>
               <a:buChar char="•"/>
+              <a:defRPr/>
             </a:lvl7pPr>
             <a:lvl8pPr marL="2362200" indent="-228600">
               <a:lnSpc>
@@ -3844,6 +4211,7 @@
                 <a:spcPts val="1200"/>
               </a:spcAft>
               <a:buChar char="•"/>
+              <a:defRPr/>
             </a:lvl8pPr>
             <a:lvl9pPr marL="2667000" indent="-228600">
               <a:lnSpc>
@@ -3856,9 +4224,12 @@
                 <a:spcPts val="1200"/>
               </a:spcAft>
               <a:buChar char="•"/>
+              <a:defRPr/>
             </a:lvl9pPr>
           </a:lstStyle>
-          <a:p xmlns:a="http://schemas.openxmlformats.org/drawingml/2006/main"/>
+          <a:p xmlns:a="http://schemas.openxmlformats.org/drawingml/2006/main">
+            <a:endParaRPr/>
+          </a:p>
         </p:txBody>
       </p:sp>
     </p:spTree>
@@ -3904,12 +4275,12 @@
   </p:cSld>
   <p:clrMap bg1="lt1" tx1="dk1" bg2="lt2" tx2="dk2" accent1="accent1" accent2="accent2" accent3="accent3" accent4="accent4" accent5="accent5" accent6="accent6" hlink="hlink" folHlink="folHlink"/>
   <p:sldLayoutIdLst>
-    <p:sldLayoutId xmlns:r="http://schemas.openxmlformats.org/officeDocument/2006/relationships" id="2147483649" r:id="Rd054dcab05184c4f"/>
-    <p:sldLayoutId xmlns:r="http://schemas.openxmlformats.org/officeDocument/2006/relationships" id="2147483650" r:id="Re7cca5d3a3ec49c2"/>
-    <p:sldLayoutId xmlns:r="http://schemas.openxmlformats.org/officeDocument/2006/relationships" id="2147483651" r:id="R7cd87e6e5e5c4fba"/>
-    <p:sldLayoutId xmlns:r="http://schemas.openxmlformats.org/officeDocument/2006/relationships" id="2147483652" r:id="R053509f8006a4379"/>
-    <p:sldLayoutId xmlns:r="http://schemas.openxmlformats.org/officeDocument/2006/relationships" id="2147483653" r:id="R3e29f8ff17144e5e"/>
-    <p:sldLayoutId xmlns:r="http://schemas.openxmlformats.org/officeDocument/2006/relationships" id="2147483654" r:id="Ra09ad217f41f4e9c"/>
+    <p:sldLayoutId xmlns:r="http://schemas.openxmlformats.org/officeDocument/2006/relationships" id="2147483649" r:id="Rf130099964314ddb"/>
+    <p:sldLayoutId xmlns:r="http://schemas.openxmlformats.org/officeDocument/2006/relationships" id="2147483650" r:id="R61a23e4124b14d3f"/>
+    <p:sldLayoutId xmlns:r="http://schemas.openxmlformats.org/officeDocument/2006/relationships" id="2147483651" r:id="Rabe3e2758dfb40b2"/>
+    <p:sldLayoutId xmlns:r="http://schemas.openxmlformats.org/officeDocument/2006/relationships" id="2147483652" r:id="R048ec22fba454b35"/>
+    <p:sldLayoutId xmlns:r="http://schemas.openxmlformats.org/officeDocument/2006/relationships" id="2147483653" r:id="R57320981a1a64a22"/>
+    <p:sldLayoutId xmlns:r="http://schemas.openxmlformats.org/officeDocument/2006/relationships" id="2147483654" r:id="R61cfeb0cfcfd48dc"/>
   </p:sldLayoutIdLst>
   <p:txStyles>
     <p:titleStyle>
@@ -4499,6 +4870,7 @@
           </a:lstStyle>
           <a:p xmlns:a="http://schemas.openxmlformats.org/drawingml/2006/main">
             <a:pPr>
+              <a:buNone/>
               <a:defRPr sz="4500" b="1">
                 <a:solidFill>
                   <a:srgbClr val="18334A"/>
@@ -4566,6 +4938,7 @@
           </a:lstStyle>
           <a:p xmlns:a="http://schemas.openxmlformats.org/drawingml/2006/main">
             <a:pPr>
+              <a:buNone/>
               <a:defRPr sz="2550" b="0">
                 <a:solidFill>
                   <a:srgbClr val="285E69"/>
@@ -4589,6 +4962,7 @@
           </a:p>
           <a:p xmlns:a="http://schemas.openxmlformats.org/drawingml/2006/main">
             <a:pPr>
+              <a:buNone/>
               <a:defRPr sz="2550" b="0">
                 <a:solidFill>
                   <a:srgbClr val="285E69"/>
@@ -4656,6 +5030,7 @@
           </a:lstStyle>
           <a:p xmlns:a="http://schemas.openxmlformats.org/drawingml/2006/main">
             <a:pPr>
+              <a:buNone/>
               <a:defRPr sz="1350" b="0">
                 <a:solidFill>
                   <a:srgbClr val="526574"/>
@@ -4713,7 +5088,7 @@
           <p:cNvPr id="4" name="title">
             <a:extLst xmlns:a="http://schemas.openxmlformats.org/drawingml/2006/main">
               <a:ext uri="{FF2B5EF4-FFF2-40B4-BE49-F238E27FC236}">
-                <a16:creationId xmlns:a16="http://schemas.microsoft.com/office/drawing/2014/main" id="{1C799EB8-F45A-4502-B512-7FFDA1BF3759}"/>
+                <a16:creationId xmlns:a16="http://schemas.microsoft.com/office/drawing/2014/main" id="{647200AF-2C9F-4FDC-A840-9E7859F96209}"/>
               </a:ext>
             </a:extLst>
           </p:cNvPr>
@@ -4752,6 +5127,7 @@
           </a:lstStyle>
           <a:p xmlns:a="http://schemas.openxmlformats.org/drawingml/2006/main">
             <a:pPr>
+              <a:buNone/>
               <a:defRPr sz="3300" b="1">
                 <a:solidFill>
                   <a:srgbClr val="18334A"/>
@@ -4770,166 +5146,7 @@
                 <a:ea typeface="Arial"/>
                 <a:cs typeface="Arial"/>
               </a:rPr>
-              <a:t>C · Working Copies feed the same repository</a:t>
-            </a:r>
-          </a:p>
-        </p:txBody>
-      </p:sp>
-      <p:sp>
-        <p:nvSpPr>
-          <p:cNvPr id="2" name="body">
-            <a:extLst xmlns:a="http://schemas.openxmlformats.org/drawingml/2006/main">
-              <a:ext uri="{FF2B5EF4-FFF2-40B4-BE49-F238E27FC236}">
-                <a16:creationId xmlns:a16="http://schemas.microsoft.com/office/drawing/2014/main" id="{8328834B-ED62-49CD-9020-A1DCD48D6CFB}"/>
-              </a:ext>
-            </a:extLst>
-          </p:cNvPr>
-          <p:cNvSpPr>
-            <a:spLocks xmlns:a="http://schemas.openxmlformats.org/drawingml/2006/main" noGrp="1"/>
-          </p:cNvSpPr>
-          <p:nvPr/>
-        </p:nvSpPr>
-        <p:spPr>
-          <a:xfrm xmlns:a="http://schemas.openxmlformats.org/drawingml/2006/main">
-            <a:off x="609600" y="1666875"/>
-            <a:ext cx="10972800" cy="4191000"/>
-          </a:xfrm>
-          <a:prstGeom xmlns:a="http://schemas.openxmlformats.org/drawingml/2006/main" prst="rect">
-            <a:avLst/>
-          </a:prstGeom>
-          <a:noFill xmlns:a="http://schemas.openxmlformats.org/drawingml/2006/main"/>
-          <a:ln xmlns:a="http://schemas.openxmlformats.org/drawingml/2006/main" w="0">
-            <a:noFill/>
-            <a:prstDash val="solid"/>
-          </a:ln>
-        </p:spPr>
-        <p:txBody>
-          <a:bodyPr xmlns:a="http://schemas.openxmlformats.org/drawingml/2006/main"/>
-          <a:lstStyle xmlns:a="http://schemas.openxmlformats.org/drawingml/2006/main">
-            <a:defPPr>
-              <a:defRPr sz="2250" b="0">
-                <a:solidFill>
-                  <a:srgbClr val="18334A"/>
-                </a:solidFill>
-                <a:latin typeface="Arial"/>
-                <a:ea typeface="Arial"/>
-                <a:cs typeface="Arial"/>
-              </a:defRPr>
-            </a:defPPr>
-          </a:lstStyle>
-          <a:p xmlns:a="http://schemas.openxmlformats.org/drawingml/2006/main">
-            <a:pPr>
-              <a:defRPr sz="2250" b="0">
-                <a:solidFill>
-                  <a:srgbClr val="18334A"/>
-                </a:solidFill>
-                <a:latin typeface="Arial"/>
-                <a:ea typeface="Arial"/>
-                <a:cs typeface="Arial"/>
-              </a:defRPr>
-            </a:pPr>
-            <a:r>
-              <a:rPr sz="2250" b="0">
-                <a:solidFill>
-                  <a:srgbClr val="18334A"/>
-                </a:solidFill>
-                <a:latin typeface="Arial"/>
-                <a:ea typeface="Arial"/>
-                <a:cs typeface="Arial"/>
-              </a:rPr>
-              <a:t>Copy page 1 and Main page 2 changed independently.</a:t>
-            </a:r>
-          </a:p>
-          <a:p xmlns:a="http://schemas.openxmlformats.org/drawingml/2006/main">
-            <a:pPr>
-              <a:defRPr sz="2250" b="0">
-                <a:solidFill>
-                  <a:srgbClr val="18334A"/>
-                </a:solidFill>
-                <a:latin typeface="Arial"/>
-                <a:ea typeface="Arial"/>
-                <a:cs typeface="Arial"/>
-              </a:defRPr>
-            </a:pPr>
-            <a:r>
-              <a:rPr sz="2250" b="0">
-                <a:solidFill>
-                  <a:srgbClr val="18334A"/>
-                </a:solidFill>
-                <a:latin typeface="Arial"/>
-                <a:ea typeface="Arial"/>
-                <a:cs typeface="Arial"/>
-              </a:rPr>
-              <a:t>Selective Refresh then Merge retained both agreed edits.</a:t>
-            </a:r>
-          </a:p>
-          <a:p xmlns:a="http://schemas.openxmlformats.org/drawingml/2006/main">
-            <a:pPr>
-              <a:defRPr sz="2250" b="0">
-                <a:solidFill>
-                  <a:srgbClr val="18334A"/>
-                </a:solidFill>
-                <a:latin typeface="Arial"/>
-                <a:ea typeface="Arial"/>
-                <a:cs typeface="Arial"/>
-              </a:defRPr>
-            </a:pPr>
-            <a:r>
-              <a:rPr sz="2250" b="0">
-                <a:solidFill>
-                  <a:srgbClr val="18334A"/>
-                </a:solidFill>
-                <a:latin typeface="Arial"/>
-                <a:ea typeface="Arial"/>
-                <a:cs typeface="Arial"/>
-              </a:rPr>
-              <a:t>Main and copy used the same parsing schema.</a:t>
-            </a:r>
-          </a:p>
-          <a:p xmlns:a="http://schemas.openxmlformats.org/drawingml/2006/main">
-            <a:pPr>
-              <a:defRPr sz="2250" b="0">
-                <a:solidFill>
-                  <a:srgbClr val="18334A"/>
-                </a:solidFill>
-                <a:latin typeface="Arial"/>
-                <a:ea typeface="Arial"/>
-                <a:cs typeface="Arial"/>
-              </a:defRPr>
-            </a:pPr>
-            <a:r>
-              <a:rPr sz="2250" b="0">
-                <a:solidFill>
-                  <a:srgbClr val="18334A"/>
-                </a:solidFill>
-                <a:latin typeface="Arial"/>
-                <a:ea typeface="Arial"/>
-                <a:cs typeface="Arial"/>
-              </a:rPr>
-              <a:t>A team checkpoint is exported from agreed Main.</a:t>
-            </a:r>
-          </a:p>
-          <a:p xmlns:a="http://schemas.openxmlformats.org/drawingml/2006/main">
-            <a:pPr>
-              <a:defRPr sz="2250" b="0">
-                <a:solidFill>
-                  <a:srgbClr val="18334A"/>
-                </a:solidFill>
-                <a:latin typeface="Arial"/>
-                <a:ea typeface="Arial"/>
-                <a:cs typeface="Arial"/>
-              </a:defRPr>
-            </a:pPr>
-            <a:r>
-              <a:rPr sz="2250" b="0">
-                <a:solidFill>
-                  <a:srgbClr val="18334A"/>
-                </a:solidFill>
-                <a:latin typeface="Arial"/>
-                <a:ea typeface="Arial"/>
-                <a:cs typeface="Arial"/>
-              </a:rPr>
-              <a:t>Two no-edit PROJECT captures produced zero source differences.</a:t>
+              <a:t>Existing repository · bounded coexistence</a:t>
             </a:r>
           </a:p>
         </p:txBody>
@@ -4939,7 +5156,7 @@
           <p:cNvPr id="3" name="page">
             <a:extLst xmlns:a="http://schemas.openxmlformats.org/drawingml/2006/main">
               <a:ext uri="{FF2B5EF4-FFF2-40B4-BE49-F238E27FC236}">
-                <a16:creationId xmlns:a16="http://schemas.microsoft.com/office/drawing/2014/main" id="{0600CE13-504B-4D90-AD0B-AF73BD296D67}"/>
+                <a16:creationId xmlns:a16="http://schemas.microsoft.com/office/drawing/2014/main" id="{01E591AA-E4C8-4E5B-A91E-F1218A57F4A9}"/>
               </a:ext>
             </a:extLst>
           </p:cNvPr>
@@ -4978,6 +5195,7 @@
           </a:lstStyle>
           <a:p xmlns:a="http://schemas.openxmlformats.org/drawingml/2006/main">
             <a:pPr>
+              <a:buNone/>
               <a:defRPr sz="1350" b="0">
                 <a:solidFill>
                   <a:srgbClr val="526574"/>
@@ -4997,6 +5215,186 @@
                 <a:cs typeface="Arial"/>
               </a:rPr>
               <a:t>10</a:t>
+            </a:r>
+          </a:p>
+        </p:txBody>
+      </p:sp>
+      <p:sp>
+        <p:nvSpPr>
+          <p:cNvPr id="5" name="body">
+            <a:extLst xmlns:a="http://schemas.openxmlformats.org/drawingml/2006/main">
+              <a:ext uri="{FF2B5EF4-FFF2-40B4-BE49-F238E27FC236}">
+                <a16:creationId xmlns:a16="http://schemas.microsoft.com/office/drawing/2014/main" id="{F538C0BB-A20E-4FE3-873E-86424182A15F}"/>
+              </a:ext>
+            </a:extLst>
+          </p:cNvPr>
+          <p:cNvSpPr>
+            <a:spLocks xmlns:a="http://schemas.openxmlformats.org/drawingml/2006/main" noGrp="1"/>
+          </p:cNvSpPr>
+          <p:nvPr/>
+        </p:nvSpPr>
+        <p:spPr>
+          <a:xfrm xmlns:a="http://schemas.openxmlformats.org/drawingml/2006/main">
+            <a:off x="609600" y="1666875"/>
+            <a:ext cx="10972800" cy="4191000"/>
+          </a:xfrm>
+          <a:prstGeom xmlns:a="http://schemas.openxmlformats.org/drawingml/2006/main" prst="rect">
+            <a:avLst/>
+          </a:prstGeom>
+          <a:noFill xmlns:a="http://schemas.openxmlformats.org/drawingml/2006/main"/>
+          <a:ln xmlns:a="http://schemas.openxmlformats.org/drawingml/2006/main" w="0">
+            <a:noFill/>
+          </a:ln>
+        </p:spPr>
+        <p:txBody>
+          <a:bodyPr xmlns:a="http://schemas.openxmlformats.org/drawingml/2006/main">
+            <a:noAutofit/>
+          </a:bodyPr>
+          <a:lstStyle xmlns:a="http://schemas.openxmlformats.org/drawingml/2006/main">
+            <a:defPPr>
+              <a:defRPr sz="2250">
+                <a:solidFill>
+                  <a:srgbClr val="18334A"/>
+                </a:solidFill>
+                <a:latin typeface="Arial"/>
+                <a:ea typeface="Arial"/>
+                <a:cs typeface="Arial"/>
+              </a:defRPr>
+            </a:defPPr>
+          </a:lstStyle>
+          <a:p xmlns:a="http://schemas.openxmlformats.org/drawingml/2006/main">
+            <a:pPr marL="228600" indent="-152400">
+              <a:spcAft>
+                <a:spcPts val="600"/>
+              </a:spcAft>
+              <a:buChar char="•"/>
+              <a:defRPr sz="2250">
+                <a:solidFill>
+                  <a:srgbClr val="18334A"/>
+                </a:solidFill>
+                <a:latin typeface="Arial"/>
+                <a:ea typeface="Arial"/>
+                <a:cs typeface="Arial"/>
+              </a:defRPr>
+            </a:pPr>
+            <a:r>
+              <a:rPr sz="2250">
+                <a:solidFill>
+                  <a:srgbClr val="18334A"/>
+                </a:solidFill>
+                <a:latin typeface="Arial"/>
+                <a:ea typeface="Arial"/>
+                <a:cs typeface="Arial"/>
+              </a:rPr>
+              <a:t>SQLcl PROJECT init preserved 117 of 118 frozen input files.</a:t>
+            </a:r>
+          </a:p>
+          <a:p xmlns:a="http://schemas.openxmlformats.org/drawingml/2006/main">
+            <a:pPr marL="228600" indent="-152400">
+              <a:spcAft>
+                <a:spcPts val="600"/>
+              </a:spcAft>
+              <a:buChar char="•"/>
+              <a:defRPr sz="2250">
+                <a:solidFill>
+                  <a:srgbClr val="18334A"/>
+                </a:solidFill>
+                <a:latin typeface="Arial"/>
+                <a:ea typeface="Arial"/>
+                <a:cs typeface="Arial"/>
+              </a:defRPr>
+            </a:pPr>
+            <a:r>
+              <a:rPr sz="2250">
+                <a:solidFill>
+                  <a:srgbClr val="18334A"/>
+                </a:solidFill>
+                <a:latin typeface="Arial"/>
+                <a:ea typeface="Arial"/>
+                <a:cs typeface="Arial"/>
+              </a:rPr>
+              <a:t>It overwrote README.md; Git restored the original bytes.</a:t>
+            </a:r>
+          </a:p>
+          <a:p xmlns:a="http://schemas.openxmlformats.org/drawingml/2006/main">
+            <a:pPr marL="228600" indent="-152400">
+              <a:spcAft>
+                <a:spcPts val="600"/>
+              </a:spcAft>
+              <a:buChar char="•"/>
+              <a:defRPr sz="2250">
+                <a:solidFill>
+                  <a:srgbClr val="18334A"/>
+                </a:solidFill>
+                <a:latin typeface="Arial"/>
+                <a:ea typeface="Arial"/>
+                <a:cs typeface="Arial"/>
+              </a:defRPr>
+            </a:pPr>
+            <a:r>
+              <a:rPr sz="2250">
+                <a:solidFill>
+                  <a:srgbClr val="18334A"/>
+                </a:solidFill>
+                <a:latin typeface="Arial"/>
+                <a:ea typeface="Arial"/>
+                <a:cs typeface="Arial"/>
+              </a:rPr>
+              <a:t>Generated README was retained separately.</a:t>
+            </a:r>
+          </a:p>
+          <a:p xmlns:a="http://schemas.openxmlformats.org/drawingml/2006/main">
+            <a:pPr marL="228600" indent="-152400">
+              <a:spcAft>
+                <a:spcPts val="600"/>
+              </a:spcAft>
+              <a:buChar char="•"/>
+              <a:defRPr sz="2250">
+                <a:solidFill>
+                  <a:srgbClr val="18334A"/>
+                </a:solidFill>
+                <a:latin typeface="Arial"/>
+                <a:ea typeface="Arial"/>
+                <a:cs typeface="Arial"/>
+              </a:defRPr>
+            </a:pPr>
+            <a:r>
+              <a:rPr sz="2250">
+                <a:solidFill>
+                  <a:srgbClr val="18334A"/>
+                </a:solidFill>
+                <a:latin typeface="Arial"/>
+                <a:ea typeface="Arial"/>
+                <a:cs typeface="Arial"/>
+              </a:rPr>
+              <a:t>Physical coexistence needs a reviewed adoption procedure.</a:t>
+            </a:r>
+          </a:p>
+          <a:p xmlns:a="http://schemas.openxmlformats.org/drawingml/2006/main">
+            <a:pPr marL="228600" indent="-152400">
+              <a:spcAft>
+                <a:spcPts val="600"/>
+              </a:spcAft>
+              <a:buChar char="•"/>
+              <a:defRPr sz="2250">
+                <a:solidFill>
+                  <a:srgbClr val="18334A"/>
+                </a:solidFill>
+                <a:latin typeface="Arial"/>
+                <a:ea typeface="Arial"/>
+                <a:cs typeface="Arial"/>
+              </a:defRPr>
+            </a:pPr>
+            <a:r>
+              <a:rPr sz="2250">
+                <a:solidFill>
+                  <a:srgbClr val="18334A"/>
+                </a:solidFill>
+                <a:latin typeface="Arial"/>
+                <a:ea typeface="Arial"/>
+                <a:cs typeface="Arial"/>
+              </a:rPr>
+              <a:t>Existing E.1 migration history is not adopted automatically.</a:t>
             </a:r>
           </a:p>
         </p:txBody>
@@ -5004,7 +5402,7 @@
     </p:spTree>
     <p:extLst>
       <p:ext uri="{BB962C8B-B14F-4D97-AF65-F5344CB8AC3E}">
-        <p14:creationId xmlns:p14="http://schemas.microsoft.com/office/powerpoint/2010/main" val="2038360769"/>
+        <p14:creationId xmlns:p14="http://schemas.microsoft.com/office/powerpoint/2010/main" val="1516976207"/>
       </p:ext>
     </p:extLst>
   </p:cSld>
@@ -5032,10 +5430,10 @@
       </p:grpSpPr>
       <p:sp>
         <p:nvSpPr>
-          <p:cNvPr id="5" name="title">
+          <p:cNvPr id="4" name="title">
             <a:extLst xmlns:a="http://schemas.openxmlformats.org/drawingml/2006/main">
               <a:ext uri="{FF2B5EF4-FFF2-40B4-BE49-F238E27FC236}">
-                <a16:creationId xmlns:a16="http://schemas.microsoft.com/office/drawing/2014/main" id="{F098B416-7326-4904-B8BE-2583E7B6868F}"/>
+                <a16:creationId xmlns:a16="http://schemas.microsoft.com/office/drawing/2014/main" id="{1C799EB8-F45A-4502-B512-7FFDA1BF3759}"/>
               </a:ext>
             </a:extLst>
           </p:cNvPr>
@@ -5074,6 +5472,7 @@
           </a:lstStyle>
           <a:p xmlns:a="http://schemas.openxmlformats.org/drawingml/2006/main">
             <a:pPr>
+              <a:buNone/>
               <a:defRPr sz="3300" b="1">
                 <a:solidFill>
                   <a:srgbClr val="18334A"/>
@@ -5092,135 +5491,17 @@
                 <a:ea typeface="Arial"/>
                 <a:cs typeface="Arial"/>
               </a:rPr>
-              <a:t>Selected changes · inspect before confirming</a:t>
-            </a:r>
-          </a:p>
-        </p:txBody>
-      </p:sp>
-      <p:sp>
-        <p:nvSpPr>
-          <p:cNvPr id="2" name="context">
+              <a:t>C · Working Copies feed the same repository</a:t>
+            </a:r>
+          </a:p>
+        </p:txBody>
+      </p:sp>
+      <p:sp>
+        <p:nvSpPr>
+          <p:cNvPr id="3" name="page">
             <a:extLst xmlns:a="http://schemas.openxmlformats.org/drawingml/2006/main">
               <a:ext uri="{FF2B5EF4-FFF2-40B4-BE49-F238E27FC236}">
-                <a16:creationId xmlns:a16="http://schemas.microsoft.com/office/drawing/2014/main" id="{52A3EFCB-B094-4E63-AD65-D7570809061B}"/>
-              </a:ext>
-            </a:extLst>
-          </p:cNvPr>
-          <p:cNvSpPr>
-            <a:spLocks xmlns:a="http://schemas.openxmlformats.org/drawingml/2006/main" noGrp="1"/>
-          </p:cNvSpPr>
-          <p:nvPr/>
-        </p:nvSpPr>
-        <p:spPr>
-          <a:xfrm xmlns:a="http://schemas.openxmlformats.org/drawingml/2006/main">
-            <a:off x="609600" y="1504950"/>
-            <a:ext cx="10972800" cy="1524000"/>
-          </a:xfrm>
-          <a:prstGeom xmlns:a="http://schemas.openxmlformats.org/drawingml/2006/main" prst="rect">
-            <a:avLst/>
-          </a:prstGeom>
-          <a:noFill xmlns:a="http://schemas.openxmlformats.org/drawingml/2006/main"/>
-          <a:ln xmlns:a="http://schemas.openxmlformats.org/drawingml/2006/main" w="0">
-            <a:noFill/>
-            <a:prstDash val="solid"/>
-          </a:ln>
-        </p:spPr>
-        <p:txBody>
-          <a:bodyPr xmlns:a="http://schemas.openxmlformats.org/drawingml/2006/main"/>
-          <a:lstStyle xmlns:a="http://schemas.openxmlformats.org/drawingml/2006/main">
-            <a:defPPr>
-              <a:defRPr sz="2025" b="0">
-                <a:solidFill>
-                  <a:srgbClr val="18334A"/>
-                </a:solidFill>
-                <a:latin typeface="Arial"/>
-                <a:ea typeface="Arial"/>
-                <a:cs typeface="Arial"/>
-              </a:defRPr>
-            </a:defPPr>
-          </a:lstStyle>
-          <a:p xmlns:a="http://schemas.openxmlformats.org/drawingml/2006/main">
-            <a:pPr>
-              <a:defRPr sz="2025" b="0">
-                <a:solidFill>
-                  <a:srgbClr val="18334A"/>
-                </a:solidFill>
-                <a:latin typeface="Arial"/>
-                <a:ea typeface="Arial"/>
-                <a:cs typeface="Arial"/>
-              </a:defRPr>
-            </a:pPr>
-            <a:r>
-              <a:rPr sz="2025" b="0">
-                <a:solidFill>
-                  <a:srgbClr val="18334A"/>
-                </a:solidFill>
-                <a:latin typeface="Arial"/>
-                <a:ea typeface="Arial"/>
-                <a:cs typeface="Arial"/>
-              </a:rPr>
-              <a:t>Native confirmation identifies selected pages and direction.</a:t>
-            </a:r>
-          </a:p>
-          <a:p xmlns:a="http://schemas.openxmlformats.org/drawingml/2006/main">
-            <a:pPr>
-              <a:defRPr sz="2025" b="0">
-                <a:solidFill>
-                  <a:srgbClr val="18334A"/>
-                </a:solidFill>
-                <a:latin typeface="Arial"/>
-                <a:ea typeface="Arial"/>
-                <a:cs typeface="Arial"/>
-              </a:defRPr>
-            </a:pPr>
-            <a:r>
-              <a:rPr sz="2025" b="0">
-                <a:solidFill>
-                  <a:srgbClr val="18334A"/>
-                </a:solidFill>
-                <a:latin typeface="Arial"/>
-                <a:ea typeface="Arial"/>
-                <a:cs typeface="Arial"/>
-              </a:rPr>
-              <a:t>Back up the target before the controlled merge.</a:t>
-            </a:r>
-          </a:p>
-        </p:txBody>
-      </p:sp>
-      <p:pic>
-        <p:nvPicPr>
-          <p:cNvPr id="3" name="">
-            <a:extLst xmlns:a="http://schemas.openxmlformats.org/drawingml/2006/main">
-              <a:ext uri="{FF2B5EF4-FFF2-40B4-BE49-F238E27FC236}">
-                <a16:creationId xmlns:a16="http://schemas.microsoft.com/office/drawing/2014/main" id="{9164F542-2A18-4DA9-8877-6EFBD13D876C}"/>
-              </a:ext>
-            </a:extLst>
-          </p:cNvPr>
-          <p:cNvPicPr>
-            <a:picLocks xmlns:a="http://schemas.openxmlformats.org/drawingml/2006/main" noChangeAspect="1"/>
-          </p:cNvPicPr>
-          <p:nvPr/>
-        </p:nvPicPr>
-        <p:blipFill>
-          <a:blip xmlns:r="http://schemas.openxmlformats.org/officeDocument/2006/relationships" xmlns:a="http://schemas.openxmlformats.org/drawingml/2006/main" r:embed="Rfbf473433c0c470a"/>
-          <a:stretch xmlns:a="http://schemas.openxmlformats.org/drawingml/2006/main"/>
-        </p:blipFill>
-        <p:spPr>
-          <a:xfrm xmlns:a="http://schemas.openxmlformats.org/drawingml/2006/main">
-            <a:off x="5104764" y="3143250"/>
-            <a:ext cx="1982472" cy="3095625"/>
-          </a:xfrm>
-          <a:prstGeom xmlns:a="http://schemas.openxmlformats.org/drawingml/2006/main" prst="rect">
-            <a:avLst/>
-          </a:prstGeom>
-        </p:spPr>
-      </p:pic>
-      <p:sp>
-        <p:nvSpPr>
-          <p:cNvPr id="4" name="page">
-            <a:extLst xmlns:a="http://schemas.openxmlformats.org/drawingml/2006/main">
-              <a:ext uri="{FF2B5EF4-FFF2-40B4-BE49-F238E27FC236}">
-                <a16:creationId xmlns:a16="http://schemas.microsoft.com/office/drawing/2014/main" id="{ED2BBFC3-DDC6-4B82-84EF-7DDFAA41C267}"/>
+                <a16:creationId xmlns:a16="http://schemas.microsoft.com/office/drawing/2014/main" id="{0600CE13-504B-4D90-AD0B-AF73BD296D67}"/>
               </a:ext>
             </a:extLst>
           </p:cNvPr>
@@ -5259,6 +5540,7 @@
           </a:lstStyle>
           <a:p xmlns:a="http://schemas.openxmlformats.org/drawingml/2006/main">
             <a:pPr>
+              <a:buNone/>
               <a:defRPr sz="1350" b="0">
                 <a:solidFill>
                   <a:srgbClr val="526574"/>
@@ -5278,6 +5560,186 @@
                 <a:cs typeface="Arial"/>
               </a:rPr>
               <a:t>11</a:t>
+            </a:r>
+          </a:p>
+        </p:txBody>
+      </p:sp>
+      <p:sp>
+        <p:nvSpPr>
+          <p:cNvPr id="5" name="body">
+            <a:extLst xmlns:a="http://schemas.openxmlformats.org/drawingml/2006/main">
+              <a:ext uri="{FF2B5EF4-FFF2-40B4-BE49-F238E27FC236}">
+                <a16:creationId xmlns:a16="http://schemas.microsoft.com/office/drawing/2014/main" id="{4D7D85DE-F79E-412B-829A-B0C5CD0FBF1D}"/>
+              </a:ext>
+            </a:extLst>
+          </p:cNvPr>
+          <p:cNvSpPr>
+            <a:spLocks xmlns:a="http://schemas.openxmlformats.org/drawingml/2006/main" noGrp="1"/>
+          </p:cNvSpPr>
+          <p:nvPr/>
+        </p:nvSpPr>
+        <p:spPr>
+          <a:xfrm xmlns:a="http://schemas.openxmlformats.org/drawingml/2006/main">
+            <a:off x="609600" y="1666875"/>
+            <a:ext cx="10972800" cy="4191000"/>
+          </a:xfrm>
+          <a:prstGeom xmlns:a="http://schemas.openxmlformats.org/drawingml/2006/main" prst="rect">
+            <a:avLst/>
+          </a:prstGeom>
+          <a:noFill xmlns:a="http://schemas.openxmlformats.org/drawingml/2006/main"/>
+          <a:ln xmlns:a="http://schemas.openxmlformats.org/drawingml/2006/main" w="0">
+            <a:noFill/>
+          </a:ln>
+        </p:spPr>
+        <p:txBody>
+          <a:bodyPr xmlns:a="http://schemas.openxmlformats.org/drawingml/2006/main">
+            <a:noAutofit/>
+          </a:bodyPr>
+          <a:lstStyle xmlns:a="http://schemas.openxmlformats.org/drawingml/2006/main">
+            <a:defPPr>
+              <a:defRPr sz="2250">
+                <a:solidFill>
+                  <a:srgbClr val="18334A"/>
+                </a:solidFill>
+                <a:latin typeface="Arial"/>
+                <a:ea typeface="Arial"/>
+                <a:cs typeface="Arial"/>
+              </a:defRPr>
+            </a:defPPr>
+          </a:lstStyle>
+          <a:p xmlns:a="http://schemas.openxmlformats.org/drawingml/2006/main">
+            <a:pPr marL="228600" indent="-152400">
+              <a:spcAft>
+                <a:spcPts val="600"/>
+              </a:spcAft>
+              <a:buChar char="•"/>
+              <a:defRPr sz="2250">
+                <a:solidFill>
+                  <a:srgbClr val="18334A"/>
+                </a:solidFill>
+                <a:latin typeface="Arial"/>
+                <a:ea typeface="Arial"/>
+                <a:cs typeface="Arial"/>
+              </a:defRPr>
+            </a:pPr>
+            <a:r>
+              <a:rPr sz="2250">
+                <a:solidFill>
+                  <a:srgbClr val="18334A"/>
+                </a:solidFill>
+                <a:latin typeface="Arial"/>
+                <a:ea typeface="Arial"/>
+                <a:cs typeface="Arial"/>
+              </a:rPr>
+              <a:t>Copy page 1 and Main page 2 changed independently.</a:t>
+            </a:r>
+          </a:p>
+          <a:p xmlns:a="http://schemas.openxmlformats.org/drawingml/2006/main">
+            <a:pPr marL="228600" indent="-152400">
+              <a:spcAft>
+                <a:spcPts val="600"/>
+              </a:spcAft>
+              <a:buChar char="•"/>
+              <a:defRPr sz="2250">
+                <a:solidFill>
+                  <a:srgbClr val="18334A"/>
+                </a:solidFill>
+                <a:latin typeface="Arial"/>
+                <a:ea typeface="Arial"/>
+                <a:cs typeface="Arial"/>
+              </a:defRPr>
+            </a:pPr>
+            <a:r>
+              <a:rPr sz="2250">
+                <a:solidFill>
+                  <a:srgbClr val="18334A"/>
+                </a:solidFill>
+                <a:latin typeface="Arial"/>
+                <a:ea typeface="Arial"/>
+                <a:cs typeface="Arial"/>
+              </a:rPr>
+              <a:t>Selective Refresh then Merge retained both agreed edits.</a:t>
+            </a:r>
+          </a:p>
+          <a:p xmlns:a="http://schemas.openxmlformats.org/drawingml/2006/main">
+            <a:pPr marL="228600" indent="-152400">
+              <a:spcAft>
+                <a:spcPts val="600"/>
+              </a:spcAft>
+              <a:buChar char="•"/>
+              <a:defRPr sz="2250">
+                <a:solidFill>
+                  <a:srgbClr val="18334A"/>
+                </a:solidFill>
+                <a:latin typeface="Arial"/>
+                <a:ea typeface="Arial"/>
+                <a:cs typeface="Arial"/>
+              </a:defRPr>
+            </a:pPr>
+            <a:r>
+              <a:rPr sz="2250">
+                <a:solidFill>
+                  <a:srgbClr val="18334A"/>
+                </a:solidFill>
+                <a:latin typeface="Arial"/>
+                <a:ea typeface="Arial"/>
+                <a:cs typeface="Arial"/>
+              </a:rPr>
+              <a:t>Main and copy used the same parsing schema.</a:t>
+            </a:r>
+          </a:p>
+          <a:p xmlns:a="http://schemas.openxmlformats.org/drawingml/2006/main">
+            <a:pPr marL="228600" indent="-152400">
+              <a:spcAft>
+                <a:spcPts val="600"/>
+              </a:spcAft>
+              <a:buChar char="•"/>
+              <a:defRPr sz="2250">
+                <a:solidFill>
+                  <a:srgbClr val="18334A"/>
+                </a:solidFill>
+                <a:latin typeface="Arial"/>
+                <a:ea typeface="Arial"/>
+                <a:cs typeface="Arial"/>
+              </a:defRPr>
+            </a:pPr>
+            <a:r>
+              <a:rPr sz="2250">
+                <a:solidFill>
+                  <a:srgbClr val="18334A"/>
+                </a:solidFill>
+                <a:latin typeface="Arial"/>
+                <a:ea typeface="Arial"/>
+                <a:cs typeface="Arial"/>
+              </a:rPr>
+              <a:t>A team checkpoint is exported from agreed Main.</a:t>
+            </a:r>
+          </a:p>
+          <a:p xmlns:a="http://schemas.openxmlformats.org/drawingml/2006/main">
+            <a:pPr marL="228600" indent="-152400">
+              <a:spcAft>
+                <a:spcPts val="600"/>
+              </a:spcAft>
+              <a:buChar char="•"/>
+              <a:defRPr sz="2250">
+                <a:solidFill>
+                  <a:srgbClr val="18334A"/>
+                </a:solidFill>
+                <a:latin typeface="Arial"/>
+                <a:ea typeface="Arial"/>
+                <a:cs typeface="Arial"/>
+              </a:defRPr>
+            </a:pPr>
+            <a:r>
+              <a:rPr sz="2250">
+                <a:solidFill>
+                  <a:srgbClr val="18334A"/>
+                </a:solidFill>
+                <a:latin typeface="Arial"/>
+                <a:ea typeface="Arial"/>
+                <a:cs typeface="Arial"/>
+              </a:rPr>
+              <a:t>Two no-edit SQLcl PROJECT captures produced zero source differences.</a:t>
             </a:r>
           </a:p>
         </p:txBody>
@@ -5285,7 +5747,7 @@
     </p:spTree>
     <p:extLst>
       <p:ext uri="{BB962C8B-B14F-4D97-AF65-F5344CB8AC3E}">
-        <p14:creationId xmlns:p14="http://schemas.microsoft.com/office/powerpoint/2010/main" val="490645116"/>
+        <p14:creationId xmlns:p14="http://schemas.microsoft.com/office/powerpoint/2010/main" val="2038360769"/>
       </p:ext>
     </p:extLst>
   </p:cSld>
@@ -5313,10 +5775,10 @@
       </p:grpSpPr>
       <p:sp>
         <p:nvSpPr>
-          <p:cNvPr id="5" name="title">
+          <p:cNvPr id="6" name="title">
             <a:extLst xmlns:a="http://schemas.openxmlformats.org/drawingml/2006/main">
               <a:ext uri="{FF2B5EF4-FFF2-40B4-BE49-F238E27FC236}">
-                <a16:creationId xmlns:a16="http://schemas.microsoft.com/office/drawing/2014/main" id="{3A2EDAA5-80ED-482F-AEA4-1D199BAD8364}"/>
+                <a16:creationId xmlns:a16="http://schemas.microsoft.com/office/drawing/2014/main" id="{453F5646-66CC-4705-8491-5F091C783345}"/>
               </a:ext>
             </a:extLst>
           </p:cNvPr>
@@ -5327,8 +5789,8 @@
         </p:nvSpPr>
         <p:spPr>
           <a:xfrm xmlns:a="http://schemas.openxmlformats.org/drawingml/2006/main">
-            <a:off x="609600" y="457200"/>
-            <a:ext cx="10972800" cy="1000125"/>
+            <a:off x="609600" y="523875"/>
+            <a:ext cx="10972800" cy="857250"/>
           </a:xfrm>
           <a:prstGeom xmlns:a="http://schemas.openxmlformats.org/drawingml/2006/main" prst="rect">
             <a:avLst/>
@@ -5336,11 +5798,12 @@
           <a:noFill xmlns:a="http://schemas.openxmlformats.org/drawingml/2006/main"/>
           <a:ln xmlns:a="http://schemas.openxmlformats.org/drawingml/2006/main" w="0">
             <a:noFill/>
-            <a:prstDash val="solid"/>
           </a:ln>
         </p:spPr>
         <p:txBody>
-          <a:bodyPr xmlns:a="http://schemas.openxmlformats.org/drawingml/2006/main"/>
+          <a:bodyPr xmlns:a="http://schemas.openxmlformats.org/drawingml/2006/main">
+            <a:noAutofit/>
+          </a:bodyPr>
           <a:lstStyle xmlns:a="http://schemas.openxmlformats.org/drawingml/2006/main">
             <a:defPPr>
               <a:defRPr sz="3300" b="1">
@@ -5373,17 +5836,17 @@
                 <a:ea typeface="Arial"/>
                 <a:cs typeface="Arial"/>
               </a:rPr>
-              <a:t>Failure · stale page replacement</a:t>
-            </a:r>
-          </a:p>
-        </p:txBody>
-      </p:sp>
-      <p:sp>
-        <p:nvSpPr>
-          <p:cNvPr id="2" name="context">
+              <a:t>Working Copy checkpoint in Git</a:t>
+            </a:r>
+          </a:p>
+        </p:txBody>
+      </p:sp>
+      <p:sp>
+        <p:nvSpPr>
+          <p:cNvPr id="2" name="body">
             <a:extLst xmlns:a="http://schemas.openxmlformats.org/drawingml/2006/main">
               <a:ext uri="{FF2B5EF4-FFF2-40B4-BE49-F238E27FC236}">
-                <a16:creationId xmlns:a16="http://schemas.microsoft.com/office/drawing/2014/main" id="{9BB48B13-6FDD-4EA3-9422-DDF09F027EFA}"/>
+                <a16:creationId xmlns:a16="http://schemas.microsoft.com/office/drawing/2014/main" id="{C2135887-0BC0-4A1A-AC7A-59FF6B62965A}"/>
               </a:ext>
             </a:extLst>
           </p:cNvPr>
@@ -5394,8 +5857,8 @@
         </p:nvSpPr>
         <p:spPr>
           <a:xfrm xmlns:a="http://schemas.openxmlformats.org/drawingml/2006/main">
-            <a:off x="609600" y="1504950"/>
-            <a:ext cx="10972800" cy="1524000"/>
+            <a:off x="609600" y="1666875"/>
+            <a:ext cx="10972800" cy="2952750"/>
           </a:xfrm>
           <a:prstGeom xmlns:a="http://schemas.openxmlformats.org/drawingml/2006/main" prst="rect">
             <a:avLst/>
@@ -5403,14 +5866,15 @@
           <a:noFill xmlns:a="http://schemas.openxmlformats.org/drawingml/2006/main"/>
           <a:ln xmlns:a="http://schemas.openxmlformats.org/drawingml/2006/main" w="0">
             <a:noFill/>
-            <a:prstDash val="solid"/>
           </a:ln>
         </p:spPr>
         <p:txBody>
-          <a:bodyPr xmlns:a="http://schemas.openxmlformats.org/drawingml/2006/main"/>
+          <a:bodyPr xmlns:a="http://schemas.openxmlformats.org/drawingml/2006/main">
+            <a:noAutofit/>
+          </a:bodyPr>
           <a:lstStyle xmlns:a="http://schemas.openxmlformats.org/drawingml/2006/main">
             <a:defPPr>
-              <a:defRPr sz="2025" b="0">
+              <a:defRPr sz="2250" b="0">
                 <a:solidFill>
                   <a:srgbClr val="18334A"/>
                 </a:solidFill>
@@ -5421,145 +5885,120 @@
             </a:defPPr>
           </a:lstStyle>
           <a:p xmlns:a="http://schemas.openxmlformats.org/drawingml/2006/main">
-            <a:pPr>
-              <a:defRPr sz="2025" b="0">
-                <a:solidFill>
-                  <a:srgbClr val="18334A"/>
-                </a:solidFill>
-                <a:latin typeface="Arial"/>
-                <a:ea typeface="Arial"/>
-                <a:cs typeface="Arial"/>
-              </a:defRPr>
-            </a:pPr>
-            <a:r>
-              <a:rPr sz="2025" b="0">
-                <a:solidFill>
-                  <a:srgbClr val="18334A"/>
-                </a:solidFill>
-                <a:latin typeface="Arial"/>
-                <a:ea typeface="Arial"/>
-                <a:cs typeface="Arial"/>
-              </a:rPr>
-              <a:t>Two-way YAML diff exposed conflicting page titles.</a:t>
-            </a:r>
-          </a:p>
-          <a:p xmlns:a="http://schemas.openxmlformats.org/drawingml/2006/main">
-            <a:pPr>
-              <a:defRPr sz="2025" b="0">
-                <a:solidFill>
-                  <a:srgbClr val="18334A"/>
-                </a:solidFill>
-                <a:latin typeface="Arial"/>
-                <a:ea typeface="Arial"/>
-                <a:cs typeface="Arial"/>
-              </a:defRPr>
-            </a:pPr>
-            <a:r>
-              <a:rPr sz="2025" b="0">
-                <a:solidFill>
-                  <a:srgbClr val="18334A"/>
-                </a:solidFill>
-                <a:latin typeface="Arial"/>
-                <a:ea typeface="Arial"/>
-                <a:cs typeface="Arial"/>
-              </a:rPr>
-              <a:t>Deliberate merge replaced the newer Main title.</a:t>
-            </a:r>
-          </a:p>
-          <a:p xmlns:a="http://schemas.openxmlformats.org/drawingml/2006/main">
-            <a:pPr>
-              <a:defRPr sz="2025" b="0">
-                <a:solidFill>
-                  <a:srgbClr val="18334A"/>
-                </a:solidFill>
-                <a:latin typeface="Arial"/>
-                <a:ea typeface="Arial"/>
-                <a:cs typeface="Arial"/>
-              </a:defRPr>
-            </a:pPr>
-            <a:r>
-              <a:rPr sz="2025" b="0">
-                <a:solidFill>
-                  <a:srgbClr val="18334A"/>
-                </a:solidFill>
-                <a:latin typeface="Arial"/>
-                <a:ea typeface="Arial"/>
-                <a:cs typeface="Arial"/>
-              </a:rPr>
-              <a:t>Recovery: restore Main → selective Refresh → explicit reapply.</a:t>
-            </a:r>
-          </a:p>
-          <a:p xmlns:a="http://schemas.openxmlformats.org/drawingml/2006/main">
-            <a:pPr>
-              <a:defRPr sz="2025" b="0">
-                <a:solidFill>
-                  <a:srgbClr val="18334A"/>
-                </a:solidFill>
-                <a:latin typeface="Arial"/>
-                <a:ea typeface="Arial"/>
-                <a:cs typeface="Arial"/>
-              </a:defRPr>
-            </a:pPr>
-            <a:r>
-              <a:rPr sz="2025" b="0">
-                <a:solidFill>
-                  <a:srgbClr val="18334A"/>
-                </a:solidFill>
-                <a:latin typeface="Arial"/>
-                <a:ea typeface="Arial"/>
-                <a:cs typeface="Arial"/>
-              </a:rPr>
-              <a:t>This requires coordination; it is not a three-way conflict resolver.</a:t>
-            </a:r>
-          </a:p>
-        </p:txBody>
-      </p:sp>
-      <p:pic>
-        <p:nvPicPr>
-          <p:cNvPr id="3" name="">
+            <a:pPr marL="228600" indent="-152400">
+              <a:spcAft>
+                <a:spcPts val="1000"/>
+              </a:spcAft>
+              <a:buChar char="•"/>
+              <a:defRPr sz="2250" b="0">
+                <a:solidFill>
+                  <a:srgbClr val="18334A"/>
+                </a:solidFill>
+                <a:latin typeface="Arial"/>
+                <a:ea typeface="Arial"/>
+                <a:cs typeface="Arial"/>
+              </a:defRPr>
+            </a:pPr>
+            <a:r>
+              <a:t>Integrate selected Working Copy changes into agreed Main.</a:t>
+            </a:r>
+          </a:p>
+          <a:p xmlns:a="http://schemas.openxmlformats.org/drawingml/2006/main">
+            <a:pPr marL="228600" indent="-152400">
+              <a:spcAft>
+                <a:spcPts val="1000"/>
+              </a:spcAft>
+              <a:buChar char="•"/>
+              <a:defRPr sz="2250" b="0">
+                <a:solidFill>
+                  <a:srgbClr val="18334A"/>
+                </a:solidFill>
+                <a:latin typeface="Arial"/>
+                <a:ea typeface="Arial"/>
+                <a:cs typeface="Arial"/>
+              </a:defRPr>
+            </a:pPr>
+            <a:r>
+              <a:t>Capture Main into the same src/database/ application path.</a:t>
+            </a:r>
+          </a:p>
+          <a:p xmlns:a="http://schemas.openxmlformats.org/drawingml/2006/main">
+            <a:pPr marL="228600" indent="-152400">
+              <a:spcAft>
+                <a:spcPts val="1000"/>
+              </a:spcAft>
+              <a:buChar char="•"/>
+              <a:defRPr sz="2250" b="0">
+                <a:solidFill>
+                  <a:srgbClr val="18334A"/>
+                </a:solidFill>
+                <a:latin typeface="Arial"/>
+                <a:ea typeface="Arial"/>
+                <a:cs typeface="Arial"/>
+              </a:defRPr>
+            </a:pPr>
+            <a:r>
+              <a:t>Review page YAML and SQL; stage the native distribution.</a:t>
+            </a:r>
+          </a:p>
+          <a:p xmlns:a="http://schemas.openxmlformats.org/drawingml/2006/main">
+            <a:pPr marL="228600" indent="-152400">
+              <a:spcAft>
+                <a:spcPts val="1000"/>
+              </a:spcAft>
+              <a:buChar char="•"/>
+              <a:defRPr sz="2250" b="0">
+                <a:solidFill>
+                  <a:srgbClr val="18334A"/>
+                </a:solidFill>
+                <a:latin typeface="Arial"/>
+                <a:ea typeface="Arial"/>
+                <a:cs typeface="Arial"/>
+              </a:defRPr>
+            </a:pPr>
+            <a:r>
+              <a:t>Retain the E.1 admission validator and added contract binding.</a:t>
+            </a:r>
+          </a:p>
+          <a:p xmlns:a="http://schemas.openxmlformats.org/drawingml/2006/main">
+            <a:pPr marL="228600" indent="-152400">
+              <a:spcAft>
+                <a:spcPts val="1000"/>
+              </a:spcAft>
+              <a:buChar char="•"/>
+              <a:defRPr sz="2250" b="0">
+                <a:solidFill>
+                  <a:srgbClr val="18334A"/>
+                </a:solidFill>
+                <a:latin typeface="Arial"/>
+                <a:ea typeface="Arial"/>
+                <a:cs typeface="Arial"/>
+              </a:defRPr>
+            </a:pPr>
+            <a:r>
+              <a:t>The demonstrated path needs no separate Working Copy source tree.</a:t>
+            </a:r>
+          </a:p>
+        </p:txBody>
+      </p:sp>
+      <p:sp>
+        <p:nvSpPr>
+          <p:cNvPr id="3" name="commands">
             <a:extLst xmlns:a="http://schemas.openxmlformats.org/drawingml/2006/main">
               <a:ext uri="{FF2B5EF4-FFF2-40B4-BE49-F238E27FC236}">
-                <a16:creationId xmlns:a16="http://schemas.microsoft.com/office/drawing/2014/main" id="{9FE8102E-BD2A-400F-8229-7653D78EAEB6}"/>
+                <a16:creationId xmlns:a16="http://schemas.microsoft.com/office/drawing/2014/main" id="{3F06818C-E49B-4F8C-A986-00D17714B45A}"/>
               </a:ext>
             </a:extLst>
           </p:cNvPr>
-          <p:cNvPicPr>
-            <a:picLocks xmlns:a="http://schemas.openxmlformats.org/drawingml/2006/main" noChangeAspect="1"/>
-          </p:cNvPicPr>
+          <p:cNvSpPr>
+            <a:spLocks xmlns:a="http://schemas.openxmlformats.org/drawingml/2006/main" noGrp="1"/>
+          </p:cNvSpPr>
           <p:nvPr/>
-        </p:nvPicPr>
-        <p:blipFill>
-          <a:blip xmlns:r="http://schemas.openxmlformats.org/officeDocument/2006/relationships" xmlns:a="http://schemas.openxmlformats.org/drawingml/2006/main" r:embed="R2a659b8fcf9e43fa"/>
-          <a:stretch xmlns:a="http://schemas.openxmlformats.org/drawingml/2006/main"/>
-        </p:blipFill>
+        </p:nvSpPr>
         <p:spPr>
           <a:xfrm xmlns:a="http://schemas.openxmlformats.org/drawingml/2006/main">
-            <a:off x="5104880" y="3143250"/>
-            <a:ext cx="1982241" cy="3095625"/>
-          </a:xfrm>
-          <a:prstGeom xmlns:a="http://schemas.openxmlformats.org/drawingml/2006/main" prst="rect">
-            <a:avLst/>
-          </a:prstGeom>
-        </p:spPr>
-      </p:pic>
-      <p:sp>
-        <p:nvSpPr>
-          <p:cNvPr id="4" name="page">
-            <a:extLst xmlns:a="http://schemas.openxmlformats.org/drawingml/2006/main">
-              <a:ext uri="{FF2B5EF4-FFF2-40B4-BE49-F238E27FC236}">
-                <a16:creationId xmlns:a16="http://schemas.microsoft.com/office/drawing/2014/main" id="{B2F1AB2D-2D04-4145-9A9A-7FD291E711DB}"/>
-              </a:ext>
-            </a:extLst>
-          </p:cNvPr>
-          <p:cNvSpPr>
-            <a:spLocks xmlns:a="http://schemas.openxmlformats.org/drawingml/2006/main" noGrp="1"/>
-          </p:cNvSpPr>
-          <p:nvPr/>
-        </p:nvSpPr>
-        <p:spPr>
-          <a:xfrm xmlns:a="http://schemas.openxmlformats.org/drawingml/2006/main">
-            <a:off x="11334750" y="6429375"/>
-            <a:ext cx="476250" cy="266700"/>
+            <a:off x="609600" y="4905375"/>
+            <a:ext cx="10972800" cy="952500"/>
           </a:xfrm>
           <a:prstGeom xmlns:a="http://schemas.openxmlformats.org/drawingml/2006/main" prst="rect">
             <a:avLst/>
@@ -5567,38 +6006,198 @@
           <a:noFill xmlns:a="http://schemas.openxmlformats.org/drawingml/2006/main"/>
           <a:ln xmlns:a="http://schemas.openxmlformats.org/drawingml/2006/main" w="0">
             <a:noFill/>
-            <a:prstDash val="solid"/>
           </a:ln>
         </p:spPr>
         <p:txBody>
-          <a:bodyPr xmlns:a="http://schemas.openxmlformats.org/drawingml/2006/main"/>
+          <a:bodyPr xmlns:a="http://schemas.openxmlformats.org/drawingml/2006/main">
+            <a:noAutofit/>
+          </a:bodyPr>
           <a:lstStyle xmlns:a="http://schemas.openxmlformats.org/drawingml/2006/main">
             <a:defPPr>
-              <a:defRPr sz="1350" b="0">
-                <a:solidFill>
-                  <a:srgbClr val="526574"/>
-                </a:solidFill>
-                <a:latin typeface="Arial"/>
-                <a:ea typeface="Arial"/>
-                <a:cs typeface="Arial"/>
+              <a:defRPr sz="1875" b="0">
+                <a:solidFill>
+                  <a:srgbClr val="18334A"/>
+                </a:solidFill>
+                <a:latin typeface="Courier"/>
+                <a:ea typeface="Courier"/>
+                <a:cs typeface="Courier"/>
               </a:defRPr>
             </a:defPPr>
           </a:lstStyle>
           <a:p xmlns:a="http://schemas.openxmlformats.org/drawingml/2006/main">
             <a:pPr>
-              <a:defRPr sz="1350" b="0">
-                <a:solidFill>
-                  <a:srgbClr val="526574"/>
-                </a:solidFill>
-                <a:latin typeface="Arial"/>
-                <a:ea typeface="Arial"/>
-                <a:cs typeface="Arial"/>
-              </a:defRPr>
-            </a:pPr>
-            <a:r>
-              <a:rPr sz="1350" b="0">
-                <a:solidFill>
-                  <a:srgbClr val="526574"/>
+              <a:defRPr sz="1875" b="0">
+                <a:solidFill>
+                  <a:srgbClr val="18334A"/>
+                </a:solidFill>
+                <a:latin typeface="Courier"/>
+                <a:ea typeface="Courier"/>
+                <a:cs typeface="Courier"/>
+              </a:defRPr>
+            </a:pPr>
+            <a:r>
+              <a:rPr sz="1875" b="0">
+                <a:solidFill>
+                  <a:srgbClr val="18334A"/>
+                </a:solidFill>
+                <a:latin typeface="Courier"/>
+                <a:ea typeface="Courier"/>
+                <a:cs typeface="Courier"/>
+              </a:rPr>
+              <a:t>git diff --stat e2-before-working-copy d5c3334</a:t>
+            </a:r>
+          </a:p>
+          <a:p xmlns:a="http://schemas.openxmlformats.org/drawingml/2006/main">
+            <a:pPr>
+              <a:defRPr sz="1875" b="0">
+                <a:solidFill>
+                  <a:srgbClr val="18334A"/>
+                </a:solidFill>
+                <a:latin typeface="Courier"/>
+                <a:ea typeface="Courier"/>
+                <a:cs typeface="Courier"/>
+              </a:defRPr>
+            </a:pPr>
+            <a:r>
+              <a:rPr sz="1875" b="0">
+                <a:solidFill>
+                  <a:srgbClr val="18334A"/>
+                </a:solidFill>
+                <a:latin typeface="Courier"/>
+                <a:ea typeface="Courier"/>
+                <a:cs typeface="Courier"/>
+              </a:rPr>
+              <a:t>git show d5c3334:dist/component-contract.json</a:t>
+            </a:r>
+          </a:p>
+        </p:txBody>
+      </p:sp>
+      <p:sp>
+        <p:nvSpPr>
+          <p:cNvPr id="4" name="context">
+            <a:extLst xmlns:a="http://schemas.openxmlformats.org/drawingml/2006/main">
+              <a:ext uri="{FF2B5EF4-FFF2-40B4-BE49-F238E27FC236}">
+                <a16:creationId xmlns:a16="http://schemas.microsoft.com/office/drawing/2014/main" id="{3C2B8EFB-2BF5-441D-AED7-81FA48A01602}"/>
+              </a:ext>
+            </a:extLst>
+          </p:cNvPr>
+          <p:cNvSpPr>
+            <a:spLocks xmlns:a="http://schemas.openxmlformats.org/drawingml/2006/main" noGrp="1"/>
+          </p:cNvSpPr>
+          <p:nvPr/>
+        </p:nvSpPr>
+        <p:spPr>
+          <a:xfrm xmlns:a="http://schemas.openxmlformats.org/drawingml/2006/main">
+            <a:off x="609600" y="6048375"/>
+            <a:ext cx="10972800" cy="381000"/>
+          </a:xfrm>
+          <a:prstGeom xmlns:a="http://schemas.openxmlformats.org/drawingml/2006/main" prst="rect">
+            <a:avLst/>
+          </a:prstGeom>
+          <a:noFill xmlns:a="http://schemas.openxmlformats.org/drawingml/2006/main"/>
+          <a:ln xmlns:a="http://schemas.openxmlformats.org/drawingml/2006/main" w="0">
+            <a:noFill/>
+          </a:ln>
+        </p:spPr>
+        <p:txBody>
+          <a:bodyPr xmlns:a="http://schemas.openxmlformats.org/drawingml/2006/main">
+            <a:noAutofit/>
+          </a:bodyPr>
+          <a:lstStyle xmlns:a="http://schemas.openxmlformats.org/drawingml/2006/main">
+            <a:defPPr>
+              <a:defRPr sz="1725" b="0">
+                <a:solidFill>
+                  <a:srgbClr val="18334A"/>
+                </a:solidFill>
+                <a:latin typeface="Arial"/>
+                <a:ea typeface="Arial"/>
+                <a:cs typeface="Arial"/>
+              </a:defRPr>
+            </a:defPPr>
+          </a:lstStyle>
+          <a:p xmlns:a="http://schemas.openxmlformats.org/drawingml/2006/main">
+            <a:pPr>
+              <a:defRPr sz="1725" b="0">
+                <a:solidFill>
+                  <a:srgbClr val="18334A"/>
+                </a:solidFill>
+                <a:latin typeface="Arial"/>
+                <a:ea typeface="Arial"/>
+                <a:cs typeface="Arial"/>
+              </a:defRPr>
+            </a:pPr>
+            <a:r>
+              <a:rPr sz="1725" b="0">
+                <a:solidFill>
+                  <a:srgbClr val="18334A"/>
+                </a:solidFill>
+                <a:latin typeface="Arial"/>
+                <a:ea typeface="Arial"/>
+                <a:cs typeface="Arial"/>
+              </a:rPr>
+              <a:t>Live inspection: run inside the retained application repository.</a:t>
+            </a:r>
+          </a:p>
+        </p:txBody>
+      </p:sp>
+      <p:sp>
+        <p:nvSpPr>
+          <p:cNvPr id="5" name="page">
+            <a:extLst xmlns:a="http://schemas.openxmlformats.org/drawingml/2006/main">
+              <a:ext uri="{FF2B5EF4-FFF2-40B4-BE49-F238E27FC236}">
+                <a16:creationId xmlns:a16="http://schemas.microsoft.com/office/drawing/2014/main" id="{AA1F1500-1793-4104-B9C7-9BFC4B75BEE1}"/>
+              </a:ext>
+            </a:extLst>
+          </p:cNvPr>
+          <p:cNvSpPr>
+            <a:spLocks xmlns:a="http://schemas.openxmlformats.org/drawingml/2006/main" noGrp="1"/>
+          </p:cNvSpPr>
+          <p:nvPr/>
+        </p:nvSpPr>
+        <p:spPr>
+          <a:xfrm xmlns:a="http://schemas.openxmlformats.org/drawingml/2006/main">
+            <a:off x="11239500" y="6477000"/>
+            <a:ext cx="523875" cy="238125"/>
+          </a:xfrm>
+          <a:prstGeom xmlns:a="http://schemas.openxmlformats.org/drawingml/2006/main" prst="rect">
+            <a:avLst/>
+          </a:prstGeom>
+          <a:noFill xmlns:a="http://schemas.openxmlformats.org/drawingml/2006/main"/>
+          <a:ln xmlns:a="http://schemas.openxmlformats.org/drawingml/2006/main" w="0">
+            <a:noFill/>
+          </a:ln>
+        </p:spPr>
+        <p:txBody>
+          <a:bodyPr xmlns:a="http://schemas.openxmlformats.org/drawingml/2006/main">
+            <a:noAutofit/>
+          </a:bodyPr>
+          <a:lstStyle xmlns:a="http://schemas.openxmlformats.org/drawingml/2006/main">
+            <a:defPPr>
+              <a:defRPr sz="1050" b="0">
+                <a:solidFill>
+                  <a:srgbClr val="18334A"/>
+                </a:solidFill>
+                <a:latin typeface="Arial"/>
+                <a:ea typeface="Arial"/>
+                <a:cs typeface="Arial"/>
+              </a:defRPr>
+            </a:defPPr>
+          </a:lstStyle>
+          <a:p xmlns:a="http://schemas.openxmlformats.org/drawingml/2006/main">
+            <a:pPr>
+              <a:defRPr sz="1050" b="0">
+                <a:solidFill>
+                  <a:srgbClr val="18334A"/>
+                </a:solidFill>
+                <a:latin typeface="Arial"/>
+                <a:ea typeface="Arial"/>
+                <a:cs typeface="Arial"/>
+              </a:defRPr>
+            </a:pPr>
+            <a:r>
+              <a:rPr sz="1050" b="0">
+                <a:solidFill>
+                  <a:srgbClr val="18334A"/>
                 </a:solidFill>
                 <a:latin typeface="Arial"/>
                 <a:ea typeface="Arial"/>
@@ -5612,7 +6211,7 @@
     </p:spTree>
     <p:extLst>
       <p:ext uri="{BB962C8B-B14F-4D97-AF65-F5344CB8AC3E}">
-        <p14:creationId xmlns:p14="http://schemas.microsoft.com/office/powerpoint/2010/main" val="819921320"/>
+        <p14:creationId xmlns:p14="http://schemas.microsoft.com/office/powerpoint/2010/main" val="80013457"/>
       </p:ext>
     </p:extLst>
   </p:cSld>
@@ -5643,7 +6242,7 @@
           <p:cNvPr id="5" name="title">
             <a:extLst xmlns:a="http://schemas.openxmlformats.org/drawingml/2006/main">
               <a:ext uri="{FF2B5EF4-FFF2-40B4-BE49-F238E27FC236}">
-                <a16:creationId xmlns:a16="http://schemas.microsoft.com/office/drawing/2014/main" id="{52E72B96-042E-4D8E-9AE5-781044A7FA90}"/>
+                <a16:creationId xmlns:a16="http://schemas.microsoft.com/office/drawing/2014/main" id="{F098B416-7326-4904-B8BE-2583E7B6868F}"/>
               </a:ext>
             </a:extLst>
           </p:cNvPr>
@@ -5682,6 +6281,7 @@
           </a:lstStyle>
           <a:p xmlns:a="http://schemas.openxmlformats.org/drawingml/2006/main">
             <a:pPr>
+              <a:buNone/>
               <a:defRPr sz="3300" b="1">
                 <a:solidFill>
                   <a:srgbClr val="18334A"/>
@@ -5700,158 +6300,17 @@
                 <a:ea typeface="Arial"/>
                 <a:cs typeface="Arial"/>
               </a:rPr>
-              <a:t>Deletion · explicit Main decision</a:t>
-            </a:r>
-          </a:p>
-        </p:txBody>
-      </p:sp>
-      <p:sp>
-        <p:nvSpPr>
-          <p:cNvPr id="2" name="context">
-            <a:extLst xmlns:a="http://schemas.openxmlformats.org/drawingml/2006/main">
-              <a:ext uri="{FF2B5EF4-FFF2-40B4-BE49-F238E27FC236}">
-                <a16:creationId xmlns:a16="http://schemas.microsoft.com/office/drawing/2014/main" id="{22319704-1C2A-4888-91B2-7CB9B8A450C8}"/>
-              </a:ext>
-            </a:extLst>
-          </p:cNvPr>
-          <p:cNvSpPr>
-            <a:spLocks xmlns:a="http://schemas.openxmlformats.org/drawingml/2006/main" noGrp="1"/>
-          </p:cNvSpPr>
-          <p:nvPr/>
-        </p:nvSpPr>
-        <p:spPr>
-          <a:xfrm xmlns:a="http://schemas.openxmlformats.org/drawingml/2006/main">
-            <a:off x="609600" y="1504950"/>
-            <a:ext cx="10972800" cy="1524000"/>
-          </a:xfrm>
-          <a:prstGeom xmlns:a="http://schemas.openxmlformats.org/drawingml/2006/main" prst="rect">
-            <a:avLst/>
-          </a:prstGeom>
-          <a:noFill xmlns:a="http://schemas.openxmlformats.org/drawingml/2006/main"/>
-          <a:ln xmlns:a="http://schemas.openxmlformats.org/drawingml/2006/main" w="0">
-            <a:noFill/>
-            <a:prstDash val="solid"/>
-          </a:ln>
-        </p:spPr>
-        <p:txBody>
-          <a:bodyPr xmlns:a="http://schemas.openxmlformats.org/drawingml/2006/main"/>
-          <a:lstStyle xmlns:a="http://schemas.openxmlformats.org/drawingml/2006/main">
-            <a:defPPr>
-              <a:defRPr sz="2025" b="0">
-                <a:solidFill>
-                  <a:srgbClr val="18334A"/>
-                </a:solidFill>
-                <a:latin typeface="Arial"/>
-                <a:ea typeface="Arial"/>
-                <a:cs typeface="Arial"/>
-              </a:defRPr>
-            </a:defPPr>
-          </a:lstStyle>
-          <a:p xmlns:a="http://schemas.openxmlformats.org/drawingml/2006/main">
-            <a:pPr>
-              <a:defRPr sz="2025" b="0">
-                <a:solidFill>
-                  <a:srgbClr val="18334A"/>
-                </a:solidFill>
-                <a:latin typeface="Arial"/>
-                <a:ea typeface="Arial"/>
-                <a:cs typeface="Arial"/>
-              </a:defRPr>
-            </a:pPr>
-            <a:r>
-              <a:rPr sz="2025" b="0">
-                <a:solidFill>
-                  <a:srgbClr val="18334A"/>
-                </a:solidFill>
-                <a:latin typeface="Arial"/>
-                <a:ea typeface="Arial"/>
-                <a:cs typeface="Arial"/>
-              </a:rPr>
-              <a:t>Deleting copy page 2 produced Missing component differences.</a:t>
-            </a:r>
-          </a:p>
-          <a:p xmlns:a="http://schemas.openxmlformats.org/drawingml/2006/main">
-            <a:pPr>
-              <a:defRPr sz="2025" b="0">
-                <a:solidFill>
-                  <a:srgbClr val="18334A"/>
-                </a:solidFill>
-                <a:latin typeface="Arial"/>
-                <a:ea typeface="Arial"/>
-                <a:cs typeface="Arial"/>
-              </a:defRPr>
-            </a:pPr>
-            <a:r>
-              <a:rPr sz="2025" b="0">
-                <a:solidFill>
-                  <a:srgbClr val="18334A"/>
-                </a:solidFill>
-                <a:latin typeface="Arial"/>
-                <a:ea typeface="Arial"/>
-                <a:cs typeface="Arial"/>
-              </a:rPr>
-              <a:t>The agreed Main checkpoint retained page 2.</a:t>
-            </a:r>
-          </a:p>
-          <a:p xmlns:a="http://schemas.openxmlformats.org/drawingml/2006/main">
-            <a:pPr>
-              <a:defRPr sz="2025" b="0">
-                <a:solidFill>
-                  <a:srgbClr val="18334A"/>
-                </a:solidFill>
-                <a:latin typeface="Arial"/>
-                <a:ea typeface="Arial"/>
-                <a:cs typeface="Arial"/>
-              </a:defRPr>
-            </a:pPr>
-            <a:r>
-              <a:rPr sz="2025" b="0">
-                <a:solidFill>
-                  <a:srgbClr val="18334A"/>
-                </a:solidFill>
-                <a:latin typeface="Arial"/>
-                <a:ea typeface="Arial"/>
-                <a:cs typeface="Arial"/>
-              </a:rPr>
-              <a:t>Abandoning the copy left Main intact.</a:t>
-            </a:r>
-          </a:p>
-        </p:txBody>
-      </p:sp>
-      <p:pic>
-        <p:nvPicPr>
-          <p:cNvPr id="3" name="">
-            <a:extLst xmlns:a="http://schemas.openxmlformats.org/drawingml/2006/main">
-              <a:ext uri="{FF2B5EF4-FFF2-40B4-BE49-F238E27FC236}">
-                <a16:creationId xmlns:a16="http://schemas.microsoft.com/office/drawing/2014/main" id="{17A2FE29-6AFC-49D1-8FD3-02EE8ABFA82C}"/>
-              </a:ext>
-            </a:extLst>
-          </p:cNvPr>
-          <p:cNvPicPr>
-            <a:picLocks xmlns:a="http://schemas.openxmlformats.org/drawingml/2006/main" noChangeAspect="1"/>
-          </p:cNvPicPr>
-          <p:nvPr/>
-        </p:nvPicPr>
-        <p:blipFill>
-          <a:blip xmlns:r="http://schemas.openxmlformats.org/officeDocument/2006/relationships" xmlns:a="http://schemas.openxmlformats.org/drawingml/2006/main" r:embed="Rcf783d8a9e1447e9"/>
-          <a:stretch xmlns:a="http://schemas.openxmlformats.org/drawingml/2006/main"/>
-        </p:blipFill>
-        <p:spPr>
-          <a:xfrm xmlns:a="http://schemas.openxmlformats.org/drawingml/2006/main">
-            <a:off x="5104764" y="3143250"/>
-            <a:ext cx="1982472" cy="3095625"/>
-          </a:xfrm>
-          <a:prstGeom xmlns:a="http://schemas.openxmlformats.org/drawingml/2006/main" prst="rect">
-            <a:avLst/>
-          </a:prstGeom>
-        </p:spPr>
-      </p:pic>
+              <a:t>Selected changes · inspect before confirming</a:t>
+            </a:r>
+          </a:p>
+        </p:txBody>
+      </p:sp>
       <p:sp>
         <p:nvSpPr>
           <p:cNvPr id="4" name="page">
             <a:extLst xmlns:a="http://schemas.openxmlformats.org/drawingml/2006/main">
               <a:ext uri="{FF2B5EF4-FFF2-40B4-BE49-F238E27FC236}">
-                <a16:creationId xmlns:a16="http://schemas.microsoft.com/office/drawing/2014/main" id="{BCD7CAFE-1782-4572-9181-59CC1486B7CC}"/>
+                <a16:creationId xmlns:a16="http://schemas.microsoft.com/office/drawing/2014/main" id="{ED2BBFC3-DDC6-4B82-84EF-7DDFAA41C267}"/>
               </a:ext>
             </a:extLst>
           </p:cNvPr>
@@ -5890,6 +6349,7 @@
           </a:lstStyle>
           <a:p xmlns:a="http://schemas.openxmlformats.org/drawingml/2006/main">
             <a:pPr>
+              <a:buNone/>
               <a:defRPr sz="1350" b="0">
                 <a:solidFill>
                   <a:srgbClr val="526574"/>
@@ -5913,10 +6373,140 @@
           </a:p>
         </p:txBody>
       </p:sp>
+      <p:sp>
+        <p:nvSpPr>
+          <p:cNvPr id="6" name="context">
+            <a:extLst xmlns:a="http://schemas.openxmlformats.org/drawingml/2006/main">
+              <a:ext uri="{FF2B5EF4-FFF2-40B4-BE49-F238E27FC236}">
+                <a16:creationId xmlns:a16="http://schemas.microsoft.com/office/drawing/2014/main" id="{400532AF-E743-41DE-8793-B2F9EA0EDD0D}"/>
+              </a:ext>
+            </a:extLst>
+          </p:cNvPr>
+          <p:cNvSpPr>
+            <a:spLocks xmlns:a="http://schemas.openxmlformats.org/drawingml/2006/main" noGrp="1"/>
+          </p:cNvSpPr>
+          <p:nvPr/>
+        </p:nvSpPr>
+        <p:spPr>
+          <a:xfrm xmlns:a="http://schemas.openxmlformats.org/drawingml/2006/main">
+            <a:off x="609600" y="1428750"/>
+            <a:ext cx="10972800" cy="857250"/>
+          </a:xfrm>
+          <a:prstGeom xmlns:a="http://schemas.openxmlformats.org/drawingml/2006/main" prst="rect">
+            <a:avLst/>
+          </a:prstGeom>
+          <a:noFill xmlns:a="http://schemas.openxmlformats.org/drawingml/2006/main"/>
+          <a:ln xmlns:a="http://schemas.openxmlformats.org/drawingml/2006/main" w="0">
+            <a:noFill/>
+          </a:ln>
+        </p:spPr>
+        <p:txBody>
+          <a:bodyPr xmlns:a="http://schemas.openxmlformats.org/drawingml/2006/main">
+            <a:noAutofit/>
+          </a:bodyPr>
+          <a:lstStyle xmlns:a="http://schemas.openxmlformats.org/drawingml/2006/main">
+            <a:defPPr>
+              <a:defRPr sz="1875">
+                <a:solidFill>
+                  <a:srgbClr val="18334A"/>
+                </a:solidFill>
+                <a:latin typeface="Arial"/>
+                <a:ea typeface="Arial"/>
+                <a:cs typeface="Arial"/>
+              </a:defRPr>
+            </a:defPPr>
+          </a:lstStyle>
+          <a:p xmlns:a="http://schemas.openxmlformats.org/drawingml/2006/main">
+            <a:pPr marL="228600" indent="-152400">
+              <a:spcAft>
+                <a:spcPts val="600"/>
+              </a:spcAft>
+              <a:buChar char="•"/>
+              <a:defRPr sz="1875">
+                <a:solidFill>
+                  <a:srgbClr val="18334A"/>
+                </a:solidFill>
+                <a:latin typeface="Arial"/>
+                <a:ea typeface="Arial"/>
+                <a:cs typeface="Arial"/>
+              </a:defRPr>
+            </a:pPr>
+            <a:r>
+              <a:rPr sz="1875">
+                <a:solidFill>
+                  <a:srgbClr val="18334A"/>
+                </a:solidFill>
+                <a:latin typeface="Arial"/>
+                <a:ea typeface="Arial"/>
+                <a:cs typeface="Arial"/>
+              </a:rPr>
+              <a:t>Only Home / PAGE:1 is selected; target backup is checked.</a:t>
+            </a:r>
+          </a:p>
+          <a:p xmlns:a="http://schemas.openxmlformats.org/drawingml/2006/main">
+            <a:pPr marL="228600" indent="-152400">
+              <a:spcAft>
+                <a:spcPts val="600"/>
+              </a:spcAft>
+              <a:buChar char="•"/>
+              <a:defRPr sz="1875">
+                <a:solidFill>
+                  <a:srgbClr val="18334A"/>
+                </a:solidFill>
+                <a:latin typeface="Arial"/>
+                <a:ea typeface="Arial"/>
+                <a:cs typeface="Arial"/>
+              </a:defRPr>
+            </a:pPr>
+            <a:r>
+              <a:rPr sz="1875">
+                <a:solidFill>
+                  <a:srgbClr val="18334A"/>
+                </a:solidFill>
+                <a:latin typeface="Arial"/>
+                <a:ea typeface="Arial"/>
+                <a:cs typeface="Arial"/>
+              </a:rPr>
+              <a:t>Desktop walkthrough repeat — confirmation captured, merge not applied.</a:t>
+            </a:r>
+          </a:p>
+        </p:txBody>
+      </p:sp>
+      <p:pic>
+        <p:nvPicPr>
+          <p:cNvPr id="7" name="Picture 6">
+            <a:extLst xmlns:a="http://schemas.openxmlformats.org/drawingml/2006/main">
+              <a:ext uri="{FF2B5EF4-FFF2-40B4-BE49-F238E27FC236}">
+                <a16:creationId xmlns:a16="http://schemas.microsoft.com/office/drawing/2014/main" id="{8E39727F-7327-4348-90A5-C27124863B64}"/>
+              </a:ext>
+            </a:extLst>
+          </p:cNvPr>
+          <p:cNvPicPr>
+            <a:picLocks xmlns:a="http://schemas.openxmlformats.org/drawingml/2006/main" noChangeAspect="1"/>
+          </p:cNvPicPr>
+          <p:nvPr/>
+        </p:nvPicPr>
+        <p:blipFill>
+          <a:blip xmlns:r="http://schemas.openxmlformats.org/officeDocument/2006/relationships" xmlns:a="http://schemas.openxmlformats.org/drawingml/2006/main" r:embed="Rb5847eb37366463a"/>
+          <a:srcRect xmlns:a="http://schemas.openxmlformats.org/drawingml/2006/main" l="0" t="-591" r="23000" b="45000"/>
+          <a:stretch xmlns:a="http://schemas.openxmlformats.org/drawingml/2006/main">
+            <a:fillRect l="0" t="0" r="0" b="0"/>
+          </a:stretch>
+        </p:blipFill>
+        <p:spPr>
+          <a:xfrm xmlns:a="http://schemas.openxmlformats.org/drawingml/2006/main">
+            <a:off x="1855603" y="2181532"/>
+            <a:ext cx="8480794" cy="4247843"/>
+          </a:xfrm>
+          <a:prstGeom xmlns:a="http://schemas.openxmlformats.org/drawingml/2006/main" prst="rect">
+            <a:avLst/>
+          </a:prstGeom>
+        </p:spPr>
+      </p:pic>
     </p:spTree>
     <p:extLst>
       <p:ext uri="{BB962C8B-B14F-4D97-AF65-F5344CB8AC3E}">
-        <p14:creationId xmlns:p14="http://schemas.microsoft.com/office/powerpoint/2010/main" val="914178358"/>
+        <p14:creationId xmlns:p14="http://schemas.microsoft.com/office/powerpoint/2010/main" val="490645116"/>
       </p:ext>
     </p:extLst>
   </p:cSld>
@@ -5944,10 +6534,10 @@
       </p:grpSpPr>
       <p:sp>
         <p:nvSpPr>
-          <p:cNvPr id="4" name="title">
+          <p:cNvPr id="5" name="title">
             <a:extLst xmlns:a="http://schemas.openxmlformats.org/drawingml/2006/main">
               <a:ext uri="{FF2B5EF4-FFF2-40B4-BE49-F238E27FC236}">
-                <a16:creationId xmlns:a16="http://schemas.microsoft.com/office/drawing/2014/main" id="{3001DBF9-A26B-4CF3-832B-A9F9433CA16B}"/>
+                <a16:creationId xmlns:a16="http://schemas.microsoft.com/office/drawing/2014/main" id="{3A2EDAA5-80ED-482F-AEA4-1D199BAD8364}"/>
               </a:ext>
             </a:extLst>
           </p:cNvPr>
@@ -5986,6 +6576,7 @@
           </a:lstStyle>
           <a:p xmlns:a="http://schemas.openxmlformats.org/drawingml/2006/main">
             <a:pPr>
+              <a:buNone/>
               <a:defRPr sz="3300" b="1">
                 <a:solidFill>
                   <a:srgbClr val="18334A"/>
@@ -6004,176 +6595,17 @@
                 <a:ea typeface="Arial"/>
                 <a:cs typeface="Arial"/>
               </a:rPr>
-              <a:t>Usability · asynchronous comparison</a:t>
-            </a:r>
-          </a:p>
-        </p:txBody>
-      </p:sp>
-      <p:sp>
-        <p:nvSpPr>
-          <p:cNvPr id="2" name="body">
+              <a:t>Failure · stale page replacement</a:t>
+            </a:r>
+          </a:p>
+        </p:txBody>
+      </p:sp>
+      <p:sp>
+        <p:nvSpPr>
+          <p:cNvPr id="4" name="page">
             <a:extLst xmlns:a="http://schemas.openxmlformats.org/drawingml/2006/main">
               <a:ext uri="{FF2B5EF4-FFF2-40B4-BE49-F238E27FC236}">
-                <a16:creationId xmlns:a16="http://schemas.microsoft.com/office/drawing/2014/main" id="{6BFCC5FA-18B9-43BB-8152-4F935A4B2CA6}"/>
-              </a:ext>
-            </a:extLst>
-          </p:cNvPr>
-          <p:cNvSpPr>
-            <a:spLocks xmlns:a="http://schemas.openxmlformats.org/drawingml/2006/main" noGrp="1"/>
-          </p:cNvSpPr>
-          <p:nvPr/>
-        </p:nvSpPr>
-        <p:spPr>
-          <a:xfrm xmlns:a="http://schemas.openxmlformats.org/drawingml/2006/main">
-            <a:off x="609600" y="1666875"/>
-            <a:ext cx="10972800" cy="4191000"/>
-          </a:xfrm>
-          <a:prstGeom xmlns:a="http://schemas.openxmlformats.org/drawingml/2006/main" prst="rect">
-            <a:avLst/>
-          </a:prstGeom>
-          <a:noFill xmlns:a="http://schemas.openxmlformats.org/drawingml/2006/main"/>
-          <a:ln xmlns:a="http://schemas.openxmlformats.org/drawingml/2006/main" w="0">
-            <a:noFill/>
-            <a:prstDash val="solid"/>
-          </a:ln>
-        </p:spPr>
-        <p:txBody>
-          <a:bodyPr xmlns:a="http://schemas.openxmlformats.org/drawingml/2006/main"/>
-          <a:lstStyle xmlns:a="http://schemas.openxmlformats.org/drawingml/2006/main">
-            <a:defPPr>
-              <a:defRPr sz="2250" b="0">
-                <a:solidFill>
-                  <a:srgbClr val="18334A"/>
-                </a:solidFill>
-                <a:latin typeface="Arial"/>
-                <a:ea typeface="Arial"/>
-                <a:cs typeface="Arial"/>
-              </a:defRPr>
-            </a:defPPr>
-          </a:lstStyle>
-          <a:p xmlns:a="http://schemas.openxmlformats.org/drawingml/2006/main">
-            <a:pPr>
-              <a:defRPr sz="2250" b="0">
-                <a:solidFill>
-                  <a:srgbClr val="18334A"/>
-                </a:solidFill>
-                <a:latin typeface="Arial"/>
-                <a:ea typeface="Arial"/>
-                <a:cs typeface="Arial"/>
-              </a:defRPr>
-            </a:pPr>
-            <a:r>
-              <a:rPr sz="2250" b="0">
-                <a:solidFill>
-                  <a:srgbClr val="18334A"/>
-                </a:solidFill>
-                <a:latin typeface="Arial"/>
-                <a:ea typeface="Arial"/>
-                <a:cs typeface="Arial"/>
-              </a:rPr>
-              <a:t>Wait for comparison completion; initial zero counts were transient.</a:t>
-            </a:r>
-          </a:p>
-          <a:p xmlns:a="http://schemas.openxmlformats.org/drawingml/2006/main">
-            <a:pPr>
-              <a:defRPr sz="2250" b="0">
-                <a:solidFill>
-                  <a:srgbClr val="18334A"/>
-                </a:solidFill>
-                <a:latin typeface="Arial"/>
-                <a:ea typeface="Arial"/>
-                <a:cs typeface="Arial"/>
-              </a:defRPr>
-            </a:pPr>
-            <a:r>
-              <a:rPr sz="2250" b="0">
-                <a:solidFill>
-                  <a:srgbClr val="18334A"/>
-                </a:solidFill>
-                <a:latin typeface="Arial"/>
-                <a:ea typeface="Arial"/>
-                <a:cs typeface="Arial"/>
-              </a:rPr>
-              <a:t>One comparison failed ORA-08177; read-only retry succeeded.</a:t>
-            </a:r>
-          </a:p>
-          <a:p xmlns:a="http://schemas.openxmlformats.org/drawingml/2006/main">
-            <a:pPr>
-              <a:defRPr sz="2250" b="0">
-                <a:solidFill>
-                  <a:srgbClr val="18334A"/>
-                </a:solidFill>
-                <a:latin typeface="Arial"/>
-                <a:ea typeface="Arial"/>
-                <a:cs typeface="Arial"/>
-              </a:defRPr>
-            </a:pPr>
-            <a:r>
-              <a:rPr sz="2250" b="0">
-                <a:solidFill>
-                  <a:srgbClr val="18334A"/>
-                </a:solidFill>
-                <a:latin typeface="Arial"/>
-                <a:ea typeface="Arial"/>
-                <a:cs typeface="Arial"/>
-              </a:rPr>
-              <a:t>Scheduler limits were raised from 1 to 10 with approval.</a:t>
-            </a:r>
-          </a:p>
-          <a:p xmlns:a="http://schemas.openxmlformats.org/drawingml/2006/main">
-            <a:pPr>
-              <a:defRPr sz="2250" b="0">
-                <a:solidFill>
-                  <a:srgbClr val="18334A"/>
-                </a:solidFill>
-                <a:latin typeface="Arial"/>
-                <a:ea typeface="Arial"/>
-                <a:cs typeface="Arial"/>
-              </a:defRPr>
-            </a:pPr>
-            <a:r>
-              <a:rPr sz="2250" b="0">
-                <a:solidFill>
-                  <a:srgbClr val="18334A"/>
-                </a:solidFill>
-                <a:latin typeface="Arial"/>
-                <a:ea typeface="Arial"/>
-                <a:cs typeface="Arial"/>
-              </a:rPr>
-              <a:t>Earlier completion preceded the change: no speedup claim.</a:t>
-            </a:r>
-          </a:p>
-          <a:p xmlns:a="http://schemas.openxmlformats.org/drawingml/2006/main">
-            <a:pPr>
-              <a:defRPr sz="2250" b="0">
-                <a:solidFill>
-                  <a:srgbClr val="18334A"/>
-                </a:solidFill>
-                <a:latin typeface="Arial"/>
-                <a:ea typeface="Arial"/>
-                <a:cs typeface="Arial"/>
-              </a:defRPr>
-            </a:pPr>
-            <a:r>
-              <a:rPr sz="2250" b="0">
-                <a:solidFill>
-                  <a:srgbClr val="18334A"/>
-                </a:solidFill>
-                <a:latin typeface="Arial"/>
-                <a:ea typeface="Arial"/>
-                <a:cs typeface="Arial"/>
-              </a:rPr>
-              <a:t>No multi-user page-lock contention is claimed.</a:t>
-            </a:r>
-          </a:p>
-        </p:txBody>
-      </p:sp>
-      <p:sp>
-        <p:nvSpPr>
-          <p:cNvPr id="3" name="page">
-            <a:extLst xmlns:a="http://schemas.openxmlformats.org/drawingml/2006/main">
-              <a:ext uri="{FF2B5EF4-FFF2-40B4-BE49-F238E27FC236}">
-                <a16:creationId xmlns:a16="http://schemas.microsoft.com/office/drawing/2014/main" id="{FBD0D349-C599-408A-8CAD-AB9B18CFFF95}"/>
+                <a16:creationId xmlns:a16="http://schemas.microsoft.com/office/drawing/2014/main" id="{B2F1AB2D-2D04-4145-9A9A-7FD291E711DB}"/>
               </a:ext>
             </a:extLst>
           </p:cNvPr>
@@ -6212,6 +6644,7 @@
           </a:lstStyle>
           <a:p xmlns:a="http://schemas.openxmlformats.org/drawingml/2006/main">
             <a:pPr>
+              <a:buNone/>
               <a:defRPr sz="1350" b="0">
                 <a:solidFill>
                   <a:srgbClr val="526574"/>
@@ -6235,10 +6668,137 @@
           </a:p>
         </p:txBody>
       </p:sp>
+      <p:sp>
+        <p:nvSpPr>
+          <p:cNvPr id="6" name="context">
+            <a:extLst xmlns:a="http://schemas.openxmlformats.org/drawingml/2006/main">
+              <a:ext uri="{FF2B5EF4-FFF2-40B4-BE49-F238E27FC236}">
+                <a16:creationId xmlns:a16="http://schemas.microsoft.com/office/drawing/2014/main" id="{941A57D3-EA43-4F6C-8D3F-6A56887A9005}"/>
+              </a:ext>
+            </a:extLst>
+          </p:cNvPr>
+          <p:cNvSpPr>
+            <a:spLocks xmlns:a="http://schemas.openxmlformats.org/drawingml/2006/main" noGrp="1"/>
+          </p:cNvSpPr>
+          <p:nvPr/>
+        </p:nvSpPr>
+        <p:spPr>
+          <a:xfrm xmlns:a="http://schemas.openxmlformats.org/drawingml/2006/main">
+            <a:off x="609600" y="1428750"/>
+            <a:ext cx="10972800" cy="857250"/>
+          </a:xfrm>
+          <a:prstGeom xmlns:a="http://schemas.openxmlformats.org/drawingml/2006/main" prst="rect">
+            <a:avLst/>
+          </a:prstGeom>
+          <a:noFill xmlns:a="http://schemas.openxmlformats.org/drawingml/2006/main"/>
+          <a:ln xmlns:a="http://schemas.openxmlformats.org/drawingml/2006/main" w="0">
+            <a:noFill/>
+          </a:ln>
+        </p:spPr>
+        <p:txBody>
+          <a:bodyPr xmlns:a="http://schemas.openxmlformats.org/drawingml/2006/main">
+            <a:noAutofit/>
+          </a:bodyPr>
+          <a:lstStyle xmlns:a="http://schemas.openxmlformats.org/drawingml/2006/main">
+            <a:defPPr>
+              <a:defRPr sz="1875">
+                <a:solidFill>
+                  <a:srgbClr val="18334A"/>
+                </a:solidFill>
+                <a:latin typeface="Arial"/>
+                <a:ea typeface="Arial"/>
+                <a:cs typeface="Arial"/>
+              </a:defRPr>
+            </a:defPPr>
+          </a:lstStyle>
+          <a:p xmlns:a="http://schemas.openxmlformats.org/drawingml/2006/main">
+            <a:pPr marL="228600" indent="-152400">
+              <a:spcAft>
+                <a:spcPts val="600"/>
+              </a:spcAft>
+              <a:buChar char="•"/>
+              <a:defRPr sz="1875">
+                <a:solidFill>
+                  <a:srgbClr val="18334A"/>
+                </a:solidFill>
+                <a:latin typeface="Arial"/>
+                <a:ea typeface="Arial"/>
+                <a:cs typeface="Arial"/>
+              </a:defRPr>
+            </a:pPr>
+            <a:r>
+              <a:rPr sz="1875">
+                <a:solidFill>
+                  <a:srgbClr val="18334A"/>
+                </a:solidFill>
+                <a:latin typeface="Arial"/>
+                <a:ea typeface="Arial"/>
+                <a:cs typeface="Arial"/>
+              </a:rPr>
+              <a:t>Main and Working Copy titles are readable side by side.</a:t>
+            </a:r>
+          </a:p>
+          <a:p xmlns:a="http://schemas.openxmlformats.org/drawingml/2006/main">
+            <a:pPr marL="228600" indent="-152400">
+              <a:spcAft>
+                <a:spcPts val="600"/>
+              </a:spcAft>
+              <a:buChar char="•"/>
+              <a:defRPr sz="1875">
+                <a:solidFill>
+                  <a:srgbClr val="18334A"/>
+                </a:solidFill>
+                <a:latin typeface="Arial"/>
+                <a:ea typeface="Arial"/>
+                <a:cs typeface="Arial"/>
+              </a:defRPr>
+            </a:pPr>
+            <a:r>
+              <a:rPr sz="1875">
+                <a:solidFill>
+                  <a:srgbClr val="18334A"/>
+                </a:solidFill>
+                <a:latin typeface="Arial"/>
+                <a:ea typeface="Arial"/>
+                <a:cs typeface="Arial"/>
+              </a:rPr>
+              <a:t>Desktop view repeat; the earlier overwrite/recovery remains in the evidence ledger.</a:t>
+            </a:r>
+          </a:p>
+        </p:txBody>
+      </p:sp>
+      <p:pic>
+        <p:nvPicPr>
+          <p:cNvPr id="7" name="Picture 6">
+            <a:extLst xmlns:a="http://schemas.openxmlformats.org/drawingml/2006/main">
+              <a:ext uri="{FF2B5EF4-FFF2-40B4-BE49-F238E27FC236}">
+                <a16:creationId xmlns:a16="http://schemas.microsoft.com/office/drawing/2014/main" id="{7B8343EE-8AFE-45AF-957D-C0B7E0744C52}"/>
+              </a:ext>
+            </a:extLst>
+          </p:cNvPr>
+          <p:cNvPicPr>
+            <a:picLocks xmlns:a="http://schemas.openxmlformats.org/drawingml/2006/main" noChangeAspect="1"/>
+          </p:cNvPicPr>
+          <p:nvPr/>
+        </p:nvPicPr>
+        <p:blipFill>
+          <a:blip xmlns:r="http://schemas.openxmlformats.org/officeDocument/2006/relationships" xmlns:a="http://schemas.openxmlformats.org/drawingml/2006/main" r:embed="R1149d97ffdfb44db"/>
+          <a:stretch xmlns:a="http://schemas.openxmlformats.org/drawingml/2006/main"/>
+        </p:blipFill>
+        <p:spPr>
+          <a:xfrm xmlns:a="http://schemas.openxmlformats.org/drawingml/2006/main">
+            <a:off x="2062716" y="2677837"/>
+            <a:ext cx="7707679" cy="3390474"/>
+          </a:xfrm>
+          <a:prstGeom xmlns:a="http://schemas.openxmlformats.org/drawingml/2006/main" prst="rect">
+            <a:avLst/>
+          </a:prstGeom>
+        </p:spPr>
+      </p:pic>
     </p:spTree>
     <p:extLst>
       <p:ext uri="{BB962C8B-B14F-4D97-AF65-F5344CB8AC3E}">
-        <p14:creationId xmlns:p14="http://schemas.microsoft.com/office/powerpoint/2010/main" val="881472611"/>
+        <p14:creationId xmlns:p14="http://schemas.microsoft.com/office/powerpoint/2010/main" val="819921320"/>
       </p:ext>
     </p:extLst>
   </p:cSld>
@@ -6266,10 +6826,10 @@
       </p:grpSpPr>
       <p:sp>
         <p:nvSpPr>
-          <p:cNvPr id="4" name="title">
+          <p:cNvPr id="5" name="title">
             <a:extLst xmlns:a="http://schemas.openxmlformats.org/drawingml/2006/main">
               <a:ext uri="{FF2B5EF4-FFF2-40B4-BE49-F238E27FC236}">
-                <a16:creationId xmlns:a16="http://schemas.microsoft.com/office/drawing/2014/main" id="{37936FCD-DA35-4C25-BF69-4829EEAC19C9}"/>
+                <a16:creationId xmlns:a16="http://schemas.microsoft.com/office/drawing/2014/main" id="{52E72B96-042E-4D8E-9AE5-781044A7FA90}"/>
               </a:ext>
             </a:extLst>
           </p:cNvPr>
@@ -6308,6 +6868,7 @@
           </a:lstStyle>
           <a:p xmlns:a="http://schemas.openxmlformats.org/drawingml/2006/main">
             <a:pPr>
+              <a:buNone/>
               <a:defRPr sz="3300" b="1">
                 <a:solidFill>
                   <a:srgbClr val="18334A"/>
@@ -6326,176 +6887,17 @@
                 <a:ea typeface="Arial"/>
                 <a:cs typeface="Arial"/>
               </a:rPr>
-              <a:t>Reconstruct the combined checkpoint</a:t>
-            </a:r>
-          </a:p>
-        </p:txBody>
-      </p:sp>
-      <p:sp>
-        <p:nvSpPr>
-          <p:cNvPr id="2" name="body">
+              <a:t>Deletion · explicit Main decision</a:t>
+            </a:r>
+          </a:p>
+        </p:txBody>
+      </p:sp>
+      <p:sp>
+        <p:nvSpPr>
+          <p:cNvPr id="4" name="page">
             <a:extLst xmlns:a="http://schemas.openxmlformats.org/drawingml/2006/main">
               <a:ext uri="{FF2B5EF4-FFF2-40B4-BE49-F238E27FC236}">
-                <a16:creationId xmlns:a16="http://schemas.microsoft.com/office/drawing/2014/main" id="{2ABCFF24-777E-4D16-975B-C402C81E0A40}"/>
-              </a:ext>
-            </a:extLst>
-          </p:cNvPr>
-          <p:cNvSpPr>
-            <a:spLocks xmlns:a="http://schemas.openxmlformats.org/drawingml/2006/main" noGrp="1"/>
-          </p:cNvSpPr>
-          <p:nvPr/>
-        </p:nvSpPr>
-        <p:spPr>
-          <a:xfrm xmlns:a="http://schemas.openxmlformats.org/drawingml/2006/main">
-            <a:off x="609600" y="1666875"/>
-            <a:ext cx="10972800" cy="4191000"/>
-          </a:xfrm>
-          <a:prstGeom xmlns:a="http://schemas.openxmlformats.org/drawingml/2006/main" prst="rect">
-            <a:avLst/>
-          </a:prstGeom>
-          <a:noFill xmlns:a="http://schemas.openxmlformats.org/drawingml/2006/main"/>
-          <a:ln xmlns:a="http://schemas.openxmlformats.org/drawingml/2006/main" w="0">
-            <a:noFill/>
-            <a:prstDash val="solid"/>
-          </a:ln>
-        </p:spPr>
-        <p:txBody>
-          <a:bodyPr xmlns:a="http://schemas.openxmlformats.org/drawingml/2006/main"/>
-          <a:lstStyle xmlns:a="http://schemas.openxmlformats.org/drawingml/2006/main">
-            <a:defPPr>
-              <a:defRPr sz="2250" b="0">
-                <a:solidFill>
-                  <a:srgbClr val="18334A"/>
-                </a:solidFill>
-                <a:latin typeface="Arial"/>
-                <a:ea typeface="Arial"/>
-                <a:cs typeface="Arial"/>
-              </a:defRPr>
-            </a:defPPr>
-          </a:lstStyle>
-          <a:p xmlns:a="http://schemas.openxmlformats.org/drawingml/2006/main">
-            <a:pPr>
-              <a:defRPr sz="2250" b="0">
-                <a:solidFill>
-                  <a:srgbClr val="18334A"/>
-                </a:solidFill>
-                <a:latin typeface="Arial"/>
-                <a:ea typeface="Arial"/>
-                <a:cs typeface="Arial"/>
-              </a:defRPr>
-            </a:pPr>
-            <a:r>
-              <a:rPr sz="2250" b="0">
-                <a:solidFill>
-                  <a:srgbClr val="18334A"/>
-                </a:solidFill>
-                <a:latin typeface="Arial"/>
-                <a:ea typeface="Arial"/>
-                <a:cs typeface="Arial"/>
-              </a:rPr>
-              <a:t>Both page titles survived native fresh/populated delivery.</a:t>
-            </a:r>
-          </a:p>
-          <a:p xmlns:a="http://schemas.openxmlformats.org/drawingml/2006/main">
-            <a:pPr>
-              <a:defRPr sz="2250" b="0">
-                <a:solidFill>
-                  <a:srgbClr val="18334A"/>
-                </a:solidFill>
-                <a:latin typeface="Arial"/>
-                <a:ea typeface="Arial"/>
-                <a:cs typeface="Arial"/>
-              </a:defRPr>
-            </a:pPr>
-            <a:r>
-              <a:rPr sz="2250" b="0">
-                <a:solidFill>
-                  <a:srgbClr val="18334A"/>
-                </a:solidFill>
-                <a:latin typeface="Arial"/>
-                <a:ea typeface="Arial"/>
-                <a:cs typeface="Arial"/>
-              </a:rPr>
-              <a:t>The same Main state also reconstructed by split export/import.</a:t>
-            </a:r>
-          </a:p>
-          <a:p xmlns:a="http://schemas.openxmlformats.org/drawingml/2006/main">
-            <a:pPr>
-              <a:defRPr sz="2250" b="0">
-                <a:solidFill>
-                  <a:srgbClr val="18334A"/>
-                </a:solidFill>
-                <a:latin typeface="Arial"/>
-                <a:ea typeface="Arial"/>
-                <a:cs typeface="Arial"/>
-              </a:defRPr>
-            </a:pPr>
-            <a:r>
-              <a:rPr sz="2250" b="0">
-                <a:solidFill>
-                  <a:srgbClr val="18334A"/>
-                </a:solidFill>
-                <a:latin typeface="Arial"/>
-                <a:ea typeface="Arial"/>
-                <a:cs typeface="Arial"/>
-              </a:rPr>
-              <a:t>Actual LOV values and Hello World passed database checks.</a:t>
-            </a:r>
-          </a:p>
-          <a:p xmlns:a="http://schemas.openxmlformats.org/drawingml/2006/main">
-            <a:pPr>
-              <a:defRPr sz="2250" b="0">
-                <a:solidFill>
-                  <a:srgbClr val="18334A"/>
-                </a:solidFill>
-                <a:latin typeface="Arial"/>
-                <a:ea typeface="Arial"/>
-                <a:cs typeface="Arial"/>
-              </a:defRPr>
-            </a:pPr>
-            <a:r>
-              <a:rPr sz="2250" b="0">
-                <a:solidFill>
-                  <a:srgbClr val="18334A"/>
-                </a:solidFill>
-                <a:latin typeface="Arial"/>
-                <a:ea typeface="Arial"/>
-                <a:cs typeface="Arial"/>
-              </a:rPr>
-              <a:t>Browser inspection showed the retained populated history row.</a:t>
-            </a:r>
-          </a:p>
-          <a:p xmlns:a="http://schemas.openxmlformats.org/drawingml/2006/main">
-            <a:pPr>
-              <a:defRPr sz="2250" b="0">
-                <a:solidFill>
-                  <a:srgbClr val="18334A"/>
-                </a:solidFill>
-                <a:latin typeface="Arial"/>
-                <a:ea typeface="Arial"/>
-                <a:cs typeface="Arial"/>
-              </a:defRPr>
-            </a:pPr>
-            <a:r>
-              <a:rPr sz="2250" b="0">
-                <a:solidFill>
-                  <a:srgbClr val="18334A"/>
-                </a:solidFill>
-                <a:latin typeface="Arial"/>
-                <a:ea typeface="Arial"/>
-                <a:cs typeface="Arial"/>
-              </a:rPr>
-              <a:t>The paths retain distinct migration responsibilities.</a:t>
-            </a:r>
-          </a:p>
-        </p:txBody>
-      </p:sp>
-      <p:sp>
-        <p:nvSpPr>
-          <p:cNvPr id="3" name="page">
-            <a:extLst xmlns:a="http://schemas.openxmlformats.org/drawingml/2006/main">
-              <a:ext uri="{FF2B5EF4-FFF2-40B4-BE49-F238E27FC236}">
-                <a16:creationId xmlns:a16="http://schemas.microsoft.com/office/drawing/2014/main" id="{617DAF96-9C66-4900-8856-2569AB77988C}"/>
+                <a16:creationId xmlns:a16="http://schemas.microsoft.com/office/drawing/2014/main" id="{BCD7CAFE-1782-4572-9181-59CC1486B7CC}"/>
               </a:ext>
             </a:extLst>
           </p:cNvPr>
@@ -6534,6 +6936,7 @@
           </a:lstStyle>
           <a:p xmlns:a="http://schemas.openxmlformats.org/drawingml/2006/main">
             <a:pPr>
+              <a:buNone/>
               <a:defRPr sz="1350" b="0">
                 <a:solidFill>
                   <a:srgbClr val="526574"/>
@@ -6557,10 +6960,140 @@
           </a:p>
         </p:txBody>
       </p:sp>
+      <p:sp>
+        <p:nvSpPr>
+          <p:cNvPr id="6" name="context">
+            <a:extLst xmlns:a="http://schemas.openxmlformats.org/drawingml/2006/main">
+              <a:ext uri="{FF2B5EF4-FFF2-40B4-BE49-F238E27FC236}">
+                <a16:creationId xmlns:a16="http://schemas.microsoft.com/office/drawing/2014/main" id="{FBEE45F2-B9E0-4FBD-89F8-A493E0570CE3}"/>
+              </a:ext>
+            </a:extLst>
+          </p:cNvPr>
+          <p:cNvSpPr>
+            <a:spLocks xmlns:a="http://schemas.openxmlformats.org/drawingml/2006/main" noGrp="1"/>
+          </p:cNvSpPr>
+          <p:nvPr/>
+        </p:nvSpPr>
+        <p:spPr>
+          <a:xfrm xmlns:a="http://schemas.openxmlformats.org/drawingml/2006/main">
+            <a:off x="609600" y="1428750"/>
+            <a:ext cx="10972800" cy="857250"/>
+          </a:xfrm>
+          <a:prstGeom xmlns:a="http://schemas.openxmlformats.org/drawingml/2006/main" prst="rect">
+            <a:avLst/>
+          </a:prstGeom>
+          <a:noFill xmlns:a="http://schemas.openxmlformats.org/drawingml/2006/main"/>
+          <a:ln xmlns:a="http://schemas.openxmlformats.org/drawingml/2006/main" w="0">
+            <a:noFill/>
+          </a:ln>
+        </p:spPr>
+        <p:txBody>
+          <a:bodyPr xmlns:a="http://schemas.openxmlformats.org/drawingml/2006/main">
+            <a:noAutofit/>
+          </a:bodyPr>
+          <a:lstStyle xmlns:a="http://schemas.openxmlformats.org/drawingml/2006/main">
+            <a:defPPr>
+              <a:defRPr sz="1875">
+                <a:solidFill>
+                  <a:srgbClr val="18334A"/>
+                </a:solidFill>
+                <a:latin typeface="Arial"/>
+                <a:ea typeface="Arial"/>
+                <a:cs typeface="Arial"/>
+              </a:defRPr>
+            </a:defPPr>
+          </a:lstStyle>
+          <a:p xmlns:a="http://schemas.openxmlformats.org/drawingml/2006/main">
+            <a:pPr marL="228600" indent="-152400">
+              <a:spcAft>
+                <a:spcPts val="600"/>
+              </a:spcAft>
+              <a:buChar char="•"/>
+              <a:defRPr sz="1875">
+                <a:solidFill>
+                  <a:srgbClr val="18334A"/>
+                </a:solidFill>
+                <a:latin typeface="Arial"/>
+                <a:ea typeface="Arial"/>
+                <a:cs typeface="Arial"/>
+              </a:defRPr>
+            </a:pPr>
+            <a:r>
+              <a:rPr sz="1875">
+                <a:solidFill>
+                  <a:srgbClr val="18334A"/>
+                </a:solidFill>
+                <a:latin typeface="Arial"/>
+                <a:ea typeface="Arial"/>
+                <a:cs typeface="Arial"/>
+              </a:rPr>
+              <a:t>Missing includes the deleted page and related shared components.</a:t>
+            </a:r>
+          </a:p>
+          <a:p xmlns:a="http://schemas.openxmlformats.org/drawingml/2006/main">
+            <a:pPr marL="228600" indent="-152400">
+              <a:spcAft>
+                <a:spcPts val="600"/>
+              </a:spcAft>
+              <a:buChar char="•"/>
+              <a:defRPr sz="1875">
+                <a:solidFill>
+                  <a:srgbClr val="18334A"/>
+                </a:solidFill>
+                <a:latin typeface="Arial"/>
+                <a:ea typeface="Arial"/>
+                <a:cs typeface="Arial"/>
+              </a:defRPr>
+            </a:pPr>
+            <a:r>
+              <a:rPr sz="1875">
+                <a:solidFill>
+                  <a:srgbClr val="18334A"/>
+                </a:solidFill>
+                <a:latin typeface="Arial"/>
+                <a:ea typeface="Arial"/>
+                <a:cs typeface="Arial"/>
+              </a:rPr>
+              <a:t>Desktop walkthrough repeat in a disposable copy; Main is retained.</a:t>
+            </a:r>
+          </a:p>
+        </p:txBody>
+      </p:sp>
+      <p:pic>
+        <p:nvPicPr>
+          <p:cNvPr id="7" name="Picture 6">
+            <a:extLst xmlns:a="http://schemas.openxmlformats.org/drawingml/2006/main">
+              <a:ext uri="{FF2B5EF4-FFF2-40B4-BE49-F238E27FC236}">
+                <a16:creationId xmlns:a16="http://schemas.microsoft.com/office/drawing/2014/main" id="{2FCE315D-66B8-4E21-BE58-9854282510C0}"/>
+              </a:ext>
+            </a:extLst>
+          </p:cNvPr>
+          <p:cNvPicPr>
+            <a:picLocks xmlns:a="http://schemas.openxmlformats.org/drawingml/2006/main" noChangeAspect="1"/>
+          </p:cNvPicPr>
+          <p:nvPr/>
+        </p:nvPicPr>
+        <p:blipFill rotWithShape="1">
+          <a:blip xmlns:r="http://schemas.openxmlformats.org/officeDocument/2006/relationships" xmlns:a="http://schemas.openxmlformats.org/drawingml/2006/main" r:embed="Rcc139be719134936"/>
+          <a:srcRect xmlns:a="http://schemas.openxmlformats.org/drawingml/2006/main" l="-364" t="33" r="22814" b="29625"/>
+          <a:stretch xmlns:a="http://schemas.openxmlformats.org/drawingml/2006/main">
+            <a:fillRect l="0" t="0" r="0" b="0"/>
+          </a:stretch>
+        </p:blipFill>
+        <p:spPr>
+          <a:xfrm xmlns:a="http://schemas.openxmlformats.org/drawingml/2006/main">
+            <a:off x="2243469" y="2341600"/>
+            <a:ext cx="6707301" cy="4221125"/>
+          </a:xfrm>
+          <a:prstGeom xmlns:a="http://schemas.openxmlformats.org/drawingml/2006/main" prst="rect">
+            <a:avLst/>
+          </a:prstGeom>
+        </p:spPr>
+      </p:pic>
     </p:spTree>
     <p:extLst>
       <p:ext uri="{BB962C8B-B14F-4D97-AF65-F5344CB8AC3E}">
-        <p14:creationId xmlns:p14="http://schemas.microsoft.com/office/powerpoint/2010/main" val="877878380"/>
+        <p14:creationId xmlns:p14="http://schemas.microsoft.com/office/powerpoint/2010/main" val="914178358"/>
       </p:ext>
     </p:extLst>
   </p:cSld>
@@ -6591,7 +7124,7 @@
           <p:cNvPr id="4" name="title">
             <a:extLst xmlns:a="http://schemas.openxmlformats.org/drawingml/2006/main">
               <a:ext uri="{FF2B5EF4-FFF2-40B4-BE49-F238E27FC236}">
-                <a16:creationId xmlns:a16="http://schemas.microsoft.com/office/drawing/2014/main" id="{A63F14DF-4679-4C82-851B-D855A08CD2AC}"/>
+                <a16:creationId xmlns:a16="http://schemas.microsoft.com/office/drawing/2014/main" id="{3001DBF9-A26B-4CF3-832B-A9F9433CA16B}"/>
               </a:ext>
             </a:extLst>
           </p:cNvPr>
@@ -6630,6 +7163,7 @@
           </a:lstStyle>
           <a:p xmlns:a="http://schemas.openxmlformats.org/drawingml/2006/main">
             <a:pPr>
+              <a:buNone/>
               <a:defRPr sz="3300" b="1">
                 <a:solidFill>
                   <a:srgbClr val="18334A"/>
@@ -6648,166 +7182,7 @@
                 <a:ea typeface="Arial"/>
                 <a:cs typeface="Arial"/>
               </a:rPr>
-              <a:t>Identity gap · changed mapped import</a:t>
-            </a:r>
-          </a:p>
-        </p:txBody>
-      </p:sp>
-      <p:sp>
-        <p:nvSpPr>
-          <p:cNvPr id="2" name="body">
-            <a:extLst xmlns:a="http://schemas.openxmlformats.org/drawingml/2006/main">
-              <a:ext uri="{FF2B5EF4-FFF2-40B4-BE49-F238E27FC236}">
-                <a16:creationId xmlns:a16="http://schemas.microsoft.com/office/drawing/2014/main" id="{3098CD22-5FED-4BDB-A70B-98D2213C3793}"/>
-              </a:ext>
-            </a:extLst>
-          </p:cNvPr>
-          <p:cNvSpPr>
-            <a:spLocks xmlns:a="http://schemas.openxmlformats.org/drawingml/2006/main" noGrp="1"/>
-          </p:cNvSpPr>
-          <p:nvPr/>
-        </p:nvSpPr>
-        <p:spPr>
-          <a:xfrm xmlns:a="http://schemas.openxmlformats.org/drawingml/2006/main">
-            <a:off x="609600" y="1666875"/>
-            <a:ext cx="10972800" cy="4191000"/>
-          </a:xfrm>
-          <a:prstGeom xmlns:a="http://schemas.openxmlformats.org/drawingml/2006/main" prst="rect">
-            <a:avLst/>
-          </a:prstGeom>
-          <a:noFill xmlns:a="http://schemas.openxmlformats.org/drawingml/2006/main"/>
-          <a:ln xmlns:a="http://schemas.openxmlformats.org/drawingml/2006/main" w="0">
-            <a:noFill/>
-            <a:prstDash val="solid"/>
-          </a:ln>
-        </p:spPr>
-        <p:txBody>
-          <a:bodyPr xmlns:a="http://schemas.openxmlformats.org/drawingml/2006/main"/>
-          <a:lstStyle xmlns:a="http://schemas.openxmlformats.org/drawingml/2006/main">
-            <a:defPPr>
-              <a:defRPr sz="2250" b="0">
-                <a:solidFill>
-                  <a:srgbClr val="18334A"/>
-                </a:solidFill>
-                <a:latin typeface="Arial"/>
-                <a:ea typeface="Arial"/>
-                <a:cs typeface="Arial"/>
-              </a:defRPr>
-            </a:defPPr>
-          </a:lstStyle>
-          <a:p xmlns:a="http://schemas.openxmlformats.org/drawingml/2006/main">
-            <a:pPr>
-              <a:defRPr sz="2250" b="0">
-                <a:solidFill>
-                  <a:srgbClr val="18334A"/>
-                </a:solidFill>
-                <a:latin typeface="Arial"/>
-                <a:ea typeface="Arial"/>
-                <a:cs typeface="Arial"/>
-              </a:defRPr>
-            </a:pPr>
-            <a:r>
-              <a:rPr sz="2250" b="0">
-                <a:solidFill>
-                  <a:srgbClr val="18334A"/>
-                </a:solidFill>
-                <a:latin typeface="Arial"/>
-                <a:ea typeface="Arial"/>
-                <a:cs typeface="Arial"/>
-              </a:rPr>
-              <a:t>All observed region IDs changed on populated replacement.</a:t>
-            </a:r>
-          </a:p>
-          <a:p xmlns:a="http://schemas.openxmlformats.org/drawingml/2006/main">
-            <a:pPr>
-              <a:defRPr sz="2250" b="0">
-                <a:solidFill>
-                  <a:srgbClr val="18334A"/>
-                </a:solidFill>
-                <a:latin typeface="Arial"/>
-                <a:ea typeface="Arial"/>
-                <a:cs typeface="Arial"/>
-              </a:defRPr>
-            </a:pPr>
-            <a:r>
-              <a:rPr sz="2250" b="0">
-                <a:solidFill>
-                  <a:srgbClr val="18334A"/>
-                </a:solidFill>
-                <a:latin typeface="Arial"/>
-                <a:ea typeface="Arial"/>
-                <a:cs typeface="Arial"/>
-              </a:rPr>
-              <a:t>Data, LOV values, greeting and document titles survived.</a:t>
-            </a:r>
-          </a:p>
-          <a:p xmlns:a="http://schemas.openxmlformats.org/drawingml/2006/main">
-            <a:pPr>
-              <a:defRPr sz="2250" b="0">
-                <a:solidFill>
-                  <a:srgbClr val="18334A"/>
-                </a:solidFill>
-                <a:latin typeface="Arial"/>
-                <a:ea typeface="Arial"/>
-                <a:cs typeface="Arial"/>
-              </a:defRPr>
-            </a:pPr>
-            <a:r>
-              <a:rPr sz="2250" b="0">
-                <a:solidFill>
-                  <a:srgbClr val="18334A"/>
-                </a:solidFill>
-                <a:latin typeface="Arial"/>
-                <a:ea typeface="Arial"/>
-                <a:cs typeface="Arial"/>
-              </a:rPr>
-              <a:t>Stable runtime component identity remains unqualified.</a:t>
-            </a:r>
-          </a:p>
-          <a:p xmlns:a="http://schemas.openxmlformats.org/drawingml/2006/main">
-            <a:pPr>
-              <a:defRPr sz="2250" b="0">
-                <a:solidFill>
-                  <a:srgbClr val="18334A"/>
-                </a:solidFill>
-                <a:latin typeface="Arial"/>
-                <a:ea typeface="Arial"/>
-                <a:cs typeface="Arial"/>
-              </a:defRPr>
-            </a:pPr>
-            <a:r>
-              <a:rPr sz="2250" b="0">
-                <a:solidFill>
-                  <a:srgbClr val="18334A"/>
-                </a:solidFill>
-                <a:latin typeface="Arial"/>
-                <a:ea typeface="Arial"/>
-                <a:cs typeface="Arial"/>
-              </a:rPr>
-              <a:t>No private saved-report loss was measured.</a:t>
-            </a:r>
-          </a:p>
-          <a:p xmlns:a="http://schemas.openxmlformats.org/drawingml/2006/main">
-            <a:pPr>
-              <a:defRPr sz="2250" b="0">
-                <a:solidFill>
-                  <a:srgbClr val="18334A"/>
-                </a:solidFill>
-                <a:latin typeface="Arial"/>
-                <a:ea typeface="Arial"/>
-                <a:cs typeface="Arial"/>
-              </a:defRPr>
-            </a:pPr>
-            <a:r>
-              <a:rPr sz="2250" b="0">
-                <a:solidFill>
-                  <a:srgbClr val="18334A"/>
-                </a:solidFill>
-                <a:latin typeface="Arial"/>
-                <a:ea typeface="Arial"/>
-                <a:cs typeface="Arial"/>
-              </a:rPr>
-              <a:t>Qualify a supported fixed-offset/native configuration path next.</a:t>
+              <a:t>Usability · asynchronous comparison</a:t>
             </a:r>
           </a:p>
         </p:txBody>
@@ -6817,7 +7192,7 @@
           <p:cNvPr id="3" name="page">
             <a:extLst xmlns:a="http://schemas.openxmlformats.org/drawingml/2006/main">
               <a:ext uri="{FF2B5EF4-FFF2-40B4-BE49-F238E27FC236}">
-                <a16:creationId xmlns:a16="http://schemas.microsoft.com/office/drawing/2014/main" id="{5AAC463E-5733-4306-B692-1C752E5CC36E}"/>
+                <a16:creationId xmlns:a16="http://schemas.microsoft.com/office/drawing/2014/main" id="{FBD0D349-C599-408A-8CAD-AB9B18CFFF95}"/>
               </a:ext>
             </a:extLst>
           </p:cNvPr>
@@ -6856,6 +7231,7 @@
           </a:lstStyle>
           <a:p xmlns:a="http://schemas.openxmlformats.org/drawingml/2006/main">
             <a:pPr>
+              <a:buNone/>
               <a:defRPr sz="1350" b="0">
                 <a:solidFill>
                   <a:srgbClr val="526574"/>
@@ -6875,6 +7251,186 @@
                 <a:cs typeface="Arial"/>
               </a:rPr>
               <a:t>16</a:t>
+            </a:r>
+          </a:p>
+        </p:txBody>
+      </p:sp>
+      <p:sp>
+        <p:nvSpPr>
+          <p:cNvPr id="5" name="body">
+            <a:extLst xmlns:a="http://schemas.openxmlformats.org/drawingml/2006/main">
+              <a:ext uri="{FF2B5EF4-FFF2-40B4-BE49-F238E27FC236}">
+                <a16:creationId xmlns:a16="http://schemas.microsoft.com/office/drawing/2014/main" id="{622B9BBC-8F95-49AD-90B2-AA36030CC416}"/>
+              </a:ext>
+            </a:extLst>
+          </p:cNvPr>
+          <p:cNvSpPr>
+            <a:spLocks xmlns:a="http://schemas.openxmlformats.org/drawingml/2006/main" noGrp="1"/>
+          </p:cNvSpPr>
+          <p:nvPr/>
+        </p:nvSpPr>
+        <p:spPr>
+          <a:xfrm xmlns:a="http://schemas.openxmlformats.org/drawingml/2006/main">
+            <a:off x="609600" y="1666875"/>
+            <a:ext cx="10972800" cy="4191000"/>
+          </a:xfrm>
+          <a:prstGeom xmlns:a="http://schemas.openxmlformats.org/drawingml/2006/main" prst="rect">
+            <a:avLst/>
+          </a:prstGeom>
+          <a:noFill xmlns:a="http://schemas.openxmlformats.org/drawingml/2006/main"/>
+          <a:ln xmlns:a="http://schemas.openxmlformats.org/drawingml/2006/main" w="0">
+            <a:noFill/>
+          </a:ln>
+        </p:spPr>
+        <p:txBody>
+          <a:bodyPr xmlns:a="http://schemas.openxmlformats.org/drawingml/2006/main">
+            <a:noAutofit/>
+          </a:bodyPr>
+          <a:lstStyle xmlns:a="http://schemas.openxmlformats.org/drawingml/2006/main">
+            <a:defPPr>
+              <a:defRPr sz="2250">
+                <a:solidFill>
+                  <a:srgbClr val="18334A"/>
+                </a:solidFill>
+                <a:latin typeface="Arial"/>
+                <a:ea typeface="Arial"/>
+                <a:cs typeface="Arial"/>
+              </a:defRPr>
+            </a:defPPr>
+          </a:lstStyle>
+          <a:p xmlns:a="http://schemas.openxmlformats.org/drawingml/2006/main">
+            <a:pPr marL="228600" indent="-152400">
+              <a:spcAft>
+                <a:spcPts val="600"/>
+              </a:spcAft>
+              <a:buChar char="•"/>
+              <a:defRPr sz="2250">
+                <a:solidFill>
+                  <a:srgbClr val="18334A"/>
+                </a:solidFill>
+                <a:latin typeface="Arial"/>
+                <a:ea typeface="Arial"/>
+                <a:cs typeface="Arial"/>
+              </a:defRPr>
+            </a:pPr>
+            <a:r>
+              <a:rPr sz="2250">
+                <a:solidFill>
+                  <a:srgbClr val="18334A"/>
+                </a:solidFill>
+                <a:latin typeface="Arial"/>
+                <a:ea typeface="Arial"/>
+                <a:cs typeface="Arial"/>
+              </a:rPr>
+              <a:t>Wait for comparison completion; initial zero counts were transient.</a:t>
+            </a:r>
+          </a:p>
+          <a:p xmlns:a="http://schemas.openxmlformats.org/drawingml/2006/main">
+            <a:pPr marL="228600" indent="-152400">
+              <a:spcAft>
+                <a:spcPts val="600"/>
+              </a:spcAft>
+              <a:buChar char="•"/>
+              <a:defRPr sz="2250">
+                <a:solidFill>
+                  <a:srgbClr val="18334A"/>
+                </a:solidFill>
+                <a:latin typeface="Arial"/>
+                <a:ea typeface="Arial"/>
+                <a:cs typeface="Arial"/>
+              </a:defRPr>
+            </a:pPr>
+            <a:r>
+              <a:rPr sz="2250">
+                <a:solidFill>
+                  <a:srgbClr val="18334A"/>
+                </a:solidFill>
+                <a:latin typeface="Arial"/>
+                <a:ea typeface="Arial"/>
+                <a:cs typeface="Arial"/>
+              </a:rPr>
+              <a:t>One comparison failed ORA-08177; read-only retry succeeded.</a:t>
+            </a:r>
+          </a:p>
+          <a:p xmlns:a="http://schemas.openxmlformats.org/drawingml/2006/main">
+            <a:pPr marL="228600" indent="-152400">
+              <a:spcAft>
+                <a:spcPts val="600"/>
+              </a:spcAft>
+              <a:buChar char="•"/>
+              <a:defRPr sz="2250">
+                <a:solidFill>
+                  <a:srgbClr val="18334A"/>
+                </a:solidFill>
+                <a:latin typeface="Arial"/>
+                <a:ea typeface="Arial"/>
+                <a:cs typeface="Arial"/>
+              </a:defRPr>
+            </a:pPr>
+            <a:r>
+              <a:rPr sz="2250">
+                <a:solidFill>
+                  <a:srgbClr val="18334A"/>
+                </a:solidFill>
+                <a:latin typeface="Arial"/>
+                <a:ea typeface="Arial"/>
+                <a:cs typeface="Arial"/>
+              </a:rPr>
+              <a:t>Scheduler limits were raised from 1 to 10 with approval.</a:t>
+            </a:r>
+          </a:p>
+          <a:p xmlns:a="http://schemas.openxmlformats.org/drawingml/2006/main">
+            <a:pPr marL="228600" indent="-152400">
+              <a:spcAft>
+                <a:spcPts val="600"/>
+              </a:spcAft>
+              <a:buChar char="•"/>
+              <a:defRPr sz="2250">
+                <a:solidFill>
+                  <a:srgbClr val="18334A"/>
+                </a:solidFill>
+                <a:latin typeface="Arial"/>
+                <a:ea typeface="Arial"/>
+                <a:cs typeface="Arial"/>
+              </a:defRPr>
+            </a:pPr>
+            <a:r>
+              <a:rPr sz="2250">
+                <a:solidFill>
+                  <a:srgbClr val="18334A"/>
+                </a:solidFill>
+                <a:latin typeface="Arial"/>
+                <a:ea typeface="Arial"/>
+                <a:cs typeface="Arial"/>
+              </a:rPr>
+              <a:t>Earlier completion preceded the change: no speedup claim.</a:t>
+            </a:r>
+          </a:p>
+          <a:p xmlns:a="http://schemas.openxmlformats.org/drawingml/2006/main">
+            <a:pPr marL="228600" indent="-152400">
+              <a:spcAft>
+                <a:spcPts val="600"/>
+              </a:spcAft>
+              <a:buChar char="•"/>
+              <a:defRPr sz="2250">
+                <a:solidFill>
+                  <a:srgbClr val="18334A"/>
+                </a:solidFill>
+                <a:latin typeface="Arial"/>
+                <a:ea typeface="Arial"/>
+                <a:cs typeface="Arial"/>
+              </a:defRPr>
+            </a:pPr>
+            <a:r>
+              <a:rPr sz="2250">
+                <a:solidFill>
+                  <a:srgbClr val="18334A"/>
+                </a:solidFill>
+                <a:latin typeface="Arial"/>
+                <a:ea typeface="Arial"/>
+                <a:cs typeface="Arial"/>
+              </a:rPr>
+              <a:t>No multi-user page-lock contention is claimed.</a:t>
             </a:r>
           </a:p>
         </p:txBody>
@@ -6882,7 +7438,7 @@
     </p:spTree>
     <p:extLst>
       <p:ext uri="{BB962C8B-B14F-4D97-AF65-F5344CB8AC3E}">
-        <p14:creationId xmlns:p14="http://schemas.microsoft.com/office/powerpoint/2010/main" val="1394122988"/>
+        <p14:creationId xmlns:p14="http://schemas.microsoft.com/office/powerpoint/2010/main" val="881472611"/>
       </p:ext>
     </p:extLst>
   </p:cSld>
@@ -6913,7 +7469,7 @@
           <p:cNvPr id="4" name="title">
             <a:extLst xmlns:a="http://schemas.openxmlformats.org/drawingml/2006/main">
               <a:ext uri="{FF2B5EF4-FFF2-40B4-BE49-F238E27FC236}">
-                <a16:creationId xmlns:a16="http://schemas.microsoft.com/office/drawing/2014/main" id="{1E397A6B-DF5F-405C-9A9A-2BDB1E7BA54A}"/>
+                <a16:creationId xmlns:a16="http://schemas.microsoft.com/office/drawing/2014/main" id="{37936FCD-DA35-4C25-BF69-4829EEAC19C9}"/>
               </a:ext>
             </a:extLst>
           </p:cNvPr>
@@ -6952,6 +7508,7 @@
           </a:lstStyle>
           <a:p xmlns:a="http://schemas.openxmlformats.org/drawingml/2006/main">
             <a:pPr>
+              <a:buNone/>
               <a:defRPr sz="3300" b="1">
                 <a:solidFill>
                   <a:srgbClr val="18334A"/>
@@ -6970,166 +7527,7 @@
                 <a:ea typeface="Arial"/>
                 <a:cs typeface="Arial"/>
               </a:rPr>
-              <a:t>D · Retain requirement-specific admission</a:t>
-            </a:r>
-          </a:p>
-        </p:txBody>
-      </p:sp>
-      <p:sp>
-        <p:nvSpPr>
-          <p:cNvPr id="2" name="body">
-            <a:extLst xmlns:a="http://schemas.openxmlformats.org/drawingml/2006/main">
-              <a:ext uri="{FF2B5EF4-FFF2-40B4-BE49-F238E27FC236}">
-                <a16:creationId xmlns:a16="http://schemas.microsoft.com/office/drawing/2014/main" id="{11F88025-5160-448C-8F00-447C14ACFADF}"/>
-              </a:ext>
-            </a:extLst>
-          </p:cNvPr>
-          <p:cNvSpPr>
-            <a:spLocks xmlns:a="http://schemas.openxmlformats.org/drawingml/2006/main" noGrp="1"/>
-          </p:cNvSpPr>
-          <p:nvPr/>
-        </p:nvSpPr>
-        <p:spPr>
-          <a:xfrm xmlns:a="http://schemas.openxmlformats.org/drawingml/2006/main">
-            <a:off x="609600" y="1666875"/>
-            <a:ext cx="10972800" cy="4191000"/>
-          </a:xfrm>
-          <a:prstGeom xmlns:a="http://schemas.openxmlformats.org/drawingml/2006/main" prst="rect">
-            <a:avLst/>
-          </a:prstGeom>
-          <a:noFill xmlns:a="http://schemas.openxmlformats.org/drawingml/2006/main"/>
-          <a:ln xmlns:a="http://schemas.openxmlformats.org/drawingml/2006/main" w="0">
-            <a:noFill/>
-            <a:prstDash val="solid"/>
-          </a:ln>
-        </p:spPr>
-        <p:txBody>
-          <a:bodyPr xmlns:a="http://schemas.openxmlformats.org/drawingml/2006/main"/>
-          <a:lstStyle xmlns:a="http://schemas.openxmlformats.org/drawingml/2006/main">
-            <a:defPPr>
-              <a:defRPr sz="2250" b="0">
-                <a:solidFill>
-                  <a:srgbClr val="18334A"/>
-                </a:solidFill>
-                <a:latin typeface="Arial"/>
-                <a:ea typeface="Arial"/>
-                <a:cs typeface="Arial"/>
-              </a:defRPr>
-            </a:defPPr>
-          </a:lstStyle>
-          <a:p xmlns:a="http://schemas.openxmlformats.org/drawingml/2006/main">
-            <a:pPr>
-              <a:defRPr sz="2250" b="0">
-                <a:solidFill>
-                  <a:srgbClr val="18334A"/>
-                </a:solidFill>
-                <a:latin typeface="Arial"/>
-                <a:ea typeface="Arial"/>
-                <a:cs typeface="Arial"/>
-              </a:defRPr>
-            </a:pPr>
-            <a:r>
-              <a:rPr sz="2250" b="0">
-                <a:solidFill>
-                  <a:srgbClr val="18334A"/>
-                </a:solidFill>
-                <a:latin typeface="Arial"/>
-                <a:ea typeface="Arial"/>
-                <a:cs typeface="Arial"/>
-              </a:rPr>
-              <a:t>Reuse the E.1 validator; native ZIP carries the declaration.</a:t>
-            </a:r>
-          </a:p>
-          <a:p xmlns:a="http://schemas.openxmlformats.org/drawingml/2006/main">
-            <a:pPr>
-              <a:defRPr sz="2250" b="0">
-                <a:solidFill>
-                  <a:srgbClr val="18334A"/>
-                </a:solidFill>
-                <a:latin typeface="Arial"/>
-                <a:ea typeface="Arial"/>
-                <a:cs typeface="Arial"/>
-              </a:defRPr>
-            </a:pPr>
-            <a:r>
-              <a:rPr sz="2250" b="0">
-                <a:solidFill>
-                  <a:srgbClr val="18334A"/>
-                </a:solidFill>
-                <a:latin typeface="Arial"/>
-                <a:ea typeface="Arial"/>
-                <a:cs typeface="Arial"/>
-              </a:rPr>
-              <a:t>Bind source, declaration, exact bytes and observed target state.</a:t>
-            </a:r>
-          </a:p>
-          <a:p xmlns:a="http://schemas.openxmlformats.org/drawingml/2006/main">
-            <a:pPr>
-              <a:defRPr sz="2250" b="0">
-                <a:solidFill>
-                  <a:srgbClr val="18334A"/>
-                </a:solidFill>
-                <a:latin typeface="Arial"/>
-                <a:ea typeface="Arial"/>
-                <a:cs typeface="Arial"/>
-              </a:defRPr>
-            </a:pPr>
-            <a:r>
-              <a:rPr sz="2250" b="0">
-                <a:solidFill>
-                  <a:srgbClr val="18334A"/>
-                </a:solidFill>
-                <a:latin typeface="Arial"/>
-                <a:ea typeface="Arial"/>
-                <a:cs typeface="Arial"/>
-              </a:rPr>
-              <a:t>Reject incompatible/missing/unknown declarations, altered bytes</a:t>
-            </a:r>
-          </a:p>
-          <a:p xmlns:a="http://schemas.openxmlformats.org/drawingml/2006/main">
-            <a:pPr>
-              <a:defRPr sz="2250" b="0">
-                <a:solidFill>
-                  <a:srgbClr val="18334A"/>
-                </a:solidFill>
-                <a:latin typeface="Arial"/>
-                <a:ea typeface="Arial"/>
-                <a:cs typeface="Arial"/>
-              </a:defRPr>
-            </a:pPr>
-            <a:r>
-              <a:rPr sz="2250" b="0">
-                <a:solidFill>
-                  <a:srgbClr val="18334A"/>
-                </a:solidFill>
-                <a:latin typeface="Arial"/>
-                <a:ea typeface="Arial"/>
-                <a:cs typeface="Arial"/>
-              </a:rPr>
-              <a:t>and missing receipts before invoking native deployment.</a:t>
-            </a:r>
-          </a:p>
-          <a:p xmlns:a="http://schemas.openxmlformats.org/drawingml/2006/main">
-            <a:pPr>
-              <a:defRPr sz="2250" b="0">
-                <a:solidFill>
-                  <a:srgbClr val="18334A"/>
-                </a:solidFill>
-                <a:latin typeface="Arial"/>
-                <a:ea typeface="Arial"/>
-                <a:cs typeface="Arial"/>
-              </a:defRPr>
-            </a:pPr>
-            <a:r>
-              <a:rPr sz="2250" b="0">
-                <a:solidFill>
-                  <a:srgbClr val="18334A"/>
-                </a:solidFill>
-                <a:latin typeface="Arial"/>
-                <a:ea typeface="Arial"/>
-                <a:cs typeface="Arial"/>
-              </a:rPr>
-              <a:t>The bridge does not establish full drift/failure fencing.</a:t>
+              <a:t>Reconstruct the combined checkpoint</a:t>
             </a:r>
           </a:p>
         </p:txBody>
@@ -7139,7 +7537,7 @@
           <p:cNvPr id="3" name="page">
             <a:extLst xmlns:a="http://schemas.openxmlformats.org/drawingml/2006/main">
               <a:ext uri="{FF2B5EF4-FFF2-40B4-BE49-F238E27FC236}">
-                <a16:creationId xmlns:a16="http://schemas.microsoft.com/office/drawing/2014/main" id="{C310B5B8-81F7-4764-A62B-FE72DD3DF8E8}"/>
+                <a16:creationId xmlns:a16="http://schemas.microsoft.com/office/drawing/2014/main" id="{617DAF96-9C66-4900-8856-2569AB77988C}"/>
               </a:ext>
             </a:extLst>
           </p:cNvPr>
@@ -7178,6 +7576,7 @@
           </a:lstStyle>
           <a:p xmlns:a="http://schemas.openxmlformats.org/drawingml/2006/main">
             <a:pPr>
+              <a:buNone/>
               <a:defRPr sz="1350" b="0">
                 <a:solidFill>
                   <a:srgbClr val="526574"/>
@@ -7197,6 +7596,186 @@
                 <a:cs typeface="Arial"/>
               </a:rPr>
               <a:t>17</a:t>
+            </a:r>
+          </a:p>
+        </p:txBody>
+      </p:sp>
+      <p:sp>
+        <p:nvSpPr>
+          <p:cNvPr id="5" name="body">
+            <a:extLst xmlns:a="http://schemas.openxmlformats.org/drawingml/2006/main">
+              <a:ext uri="{FF2B5EF4-FFF2-40B4-BE49-F238E27FC236}">
+                <a16:creationId xmlns:a16="http://schemas.microsoft.com/office/drawing/2014/main" id="{47C31803-BCB5-4B89-8729-9AC9CBE13FA0}"/>
+              </a:ext>
+            </a:extLst>
+          </p:cNvPr>
+          <p:cNvSpPr>
+            <a:spLocks xmlns:a="http://schemas.openxmlformats.org/drawingml/2006/main" noGrp="1"/>
+          </p:cNvSpPr>
+          <p:nvPr/>
+        </p:nvSpPr>
+        <p:spPr>
+          <a:xfrm xmlns:a="http://schemas.openxmlformats.org/drawingml/2006/main">
+            <a:off x="609600" y="1666875"/>
+            <a:ext cx="10972800" cy="4191000"/>
+          </a:xfrm>
+          <a:prstGeom xmlns:a="http://schemas.openxmlformats.org/drawingml/2006/main" prst="rect">
+            <a:avLst/>
+          </a:prstGeom>
+          <a:noFill xmlns:a="http://schemas.openxmlformats.org/drawingml/2006/main"/>
+          <a:ln xmlns:a="http://schemas.openxmlformats.org/drawingml/2006/main" w="0">
+            <a:noFill/>
+          </a:ln>
+        </p:spPr>
+        <p:txBody>
+          <a:bodyPr xmlns:a="http://schemas.openxmlformats.org/drawingml/2006/main">
+            <a:noAutofit/>
+          </a:bodyPr>
+          <a:lstStyle xmlns:a="http://schemas.openxmlformats.org/drawingml/2006/main">
+            <a:defPPr>
+              <a:defRPr sz="2250">
+                <a:solidFill>
+                  <a:srgbClr val="18334A"/>
+                </a:solidFill>
+                <a:latin typeface="Arial"/>
+                <a:ea typeface="Arial"/>
+                <a:cs typeface="Arial"/>
+              </a:defRPr>
+            </a:defPPr>
+          </a:lstStyle>
+          <a:p xmlns:a="http://schemas.openxmlformats.org/drawingml/2006/main">
+            <a:pPr marL="228600" indent="-152400">
+              <a:spcAft>
+                <a:spcPts val="600"/>
+              </a:spcAft>
+              <a:buChar char="•"/>
+              <a:defRPr sz="2250">
+                <a:solidFill>
+                  <a:srgbClr val="18334A"/>
+                </a:solidFill>
+                <a:latin typeface="Arial"/>
+                <a:ea typeface="Arial"/>
+                <a:cs typeface="Arial"/>
+              </a:defRPr>
+            </a:pPr>
+            <a:r>
+              <a:rPr sz="2250">
+                <a:solidFill>
+                  <a:srgbClr val="18334A"/>
+                </a:solidFill>
+                <a:latin typeface="Arial"/>
+                <a:ea typeface="Arial"/>
+                <a:cs typeface="Arial"/>
+              </a:rPr>
+              <a:t>Both page titles survived native fresh/populated delivery.</a:t>
+            </a:r>
+          </a:p>
+          <a:p xmlns:a="http://schemas.openxmlformats.org/drawingml/2006/main">
+            <a:pPr marL="228600" indent="-152400">
+              <a:spcAft>
+                <a:spcPts val="600"/>
+              </a:spcAft>
+              <a:buChar char="•"/>
+              <a:defRPr sz="2250">
+                <a:solidFill>
+                  <a:srgbClr val="18334A"/>
+                </a:solidFill>
+                <a:latin typeface="Arial"/>
+                <a:ea typeface="Arial"/>
+                <a:cs typeface="Arial"/>
+              </a:defRPr>
+            </a:pPr>
+            <a:r>
+              <a:rPr sz="2250">
+                <a:solidFill>
+                  <a:srgbClr val="18334A"/>
+                </a:solidFill>
+                <a:latin typeface="Arial"/>
+                <a:ea typeface="Arial"/>
+                <a:cs typeface="Arial"/>
+              </a:rPr>
+              <a:t>The same Main state also reconstructed by split export/import.</a:t>
+            </a:r>
+          </a:p>
+          <a:p xmlns:a="http://schemas.openxmlformats.org/drawingml/2006/main">
+            <a:pPr marL="228600" indent="-152400">
+              <a:spcAft>
+                <a:spcPts val="600"/>
+              </a:spcAft>
+              <a:buChar char="•"/>
+              <a:defRPr sz="2250">
+                <a:solidFill>
+                  <a:srgbClr val="18334A"/>
+                </a:solidFill>
+                <a:latin typeface="Arial"/>
+                <a:ea typeface="Arial"/>
+                <a:cs typeface="Arial"/>
+              </a:defRPr>
+            </a:pPr>
+            <a:r>
+              <a:rPr sz="2250">
+                <a:solidFill>
+                  <a:srgbClr val="18334A"/>
+                </a:solidFill>
+                <a:latin typeface="Arial"/>
+                <a:ea typeface="Arial"/>
+                <a:cs typeface="Arial"/>
+              </a:rPr>
+              <a:t>Actual LOV values and Hello World passed database checks.</a:t>
+            </a:r>
+          </a:p>
+          <a:p xmlns:a="http://schemas.openxmlformats.org/drawingml/2006/main">
+            <a:pPr marL="228600" indent="-152400">
+              <a:spcAft>
+                <a:spcPts val="600"/>
+              </a:spcAft>
+              <a:buChar char="•"/>
+              <a:defRPr sz="2250">
+                <a:solidFill>
+                  <a:srgbClr val="18334A"/>
+                </a:solidFill>
+                <a:latin typeface="Arial"/>
+                <a:ea typeface="Arial"/>
+                <a:cs typeface="Arial"/>
+              </a:defRPr>
+            </a:pPr>
+            <a:r>
+              <a:rPr sz="2250">
+                <a:solidFill>
+                  <a:srgbClr val="18334A"/>
+                </a:solidFill>
+                <a:latin typeface="Arial"/>
+                <a:ea typeface="Arial"/>
+                <a:cs typeface="Arial"/>
+              </a:rPr>
+              <a:t>Browser inspection showed the retained populated history row.</a:t>
+            </a:r>
+          </a:p>
+          <a:p xmlns:a="http://schemas.openxmlformats.org/drawingml/2006/main">
+            <a:pPr marL="228600" indent="-152400">
+              <a:spcAft>
+                <a:spcPts val="600"/>
+              </a:spcAft>
+              <a:buChar char="•"/>
+              <a:defRPr sz="2250">
+                <a:solidFill>
+                  <a:srgbClr val="18334A"/>
+                </a:solidFill>
+                <a:latin typeface="Arial"/>
+                <a:ea typeface="Arial"/>
+                <a:cs typeface="Arial"/>
+              </a:defRPr>
+            </a:pPr>
+            <a:r>
+              <a:rPr sz="2250">
+                <a:solidFill>
+                  <a:srgbClr val="18334A"/>
+                </a:solidFill>
+                <a:latin typeface="Arial"/>
+                <a:ea typeface="Arial"/>
+                <a:cs typeface="Arial"/>
+              </a:rPr>
+              <a:t>The paths retain distinct migration responsibilities.</a:t>
             </a:r>
           </a:p>
         </p:txBody>
@@ -7204,7 +7783,7 @@
     </p:spTree>
     <p:extLst>
       <p:ext uri="{BB962C8B-B14F-4D97-AF65-F5344CB8AC3E}">
-        <p14:creationId xmlns:p14="http://schemas.microsoft.com/office/powerpoint/2010/main" val="1050759156"/>
+        <p14:creationId xmlns:p14="http://schemas.microsoft.com/office/powerpoint/2010/main" val="877878380"/>
       </p:ext>
     </p:extLst>
   </p:cSld>
@@ -7235,7 +7814,7 @@
           <p:cNvPr id="4" name="title">
             <a:extLst xmlns:a="http://schemas.openxmlformats.org/drawingml/2006/main">
               <a:ext uri="{FF2B5EF4-FFF2-40B4-BE49-F238E27FC236}">
-                <a16:creationId xmlns:a16="http://schemas.microsoft.com/office/drawing/2014/main" id="{57B2D2C6-5DB8-44B9-93A9-DD9A2F06EB79}"/>
+                <a16:creationId xmlns:a16="http://schemas.microsoft.com/office/drawing/2014/main" id="{A63F14DF-4679-4C82-851B-D855A08CD2AC}"/>
               </a:ext>
             </a:extLst>
           </p:cNvPr>
@@ -7274,6 +7853,7 @@
           </a:lstStyle>
           <a:p xmlns:a="http://schemas.openxmlformats.org/drawingml/2006/main">
             <a:pPr>
+              <a:buNone/>
               <a:defRPr sz="3300" b="1">
                 <a:solidFill>
                   <a:srgbClr val="18334A"/>
@@ -7292,166 +7872,7 @@
                 <a:ea typeface="Arial"/>
                 <a:cs typeface="Arial"/>
               </a:rPr>
-              <a:t>Component contracts and validation</a:t>
-            </a:r>
-          </a:p>
-        </p:txBody>
-      </p:sp>
-      <p:sp>
-        <p:nvSpPr>
-          <p:cNvPr id="2" name="body">
-            <a:extLst xmlns:a="http://schemas.openxmlformats.org/drawingml/2006/main">
-              <a:ext uri="{FF2B5EF4-FFF2-40B4-BE49-F238E27FC236}">
-                <a16:creationId xmlns:a16="http://schemas.microsoft.com/office/drawing/2014/main" id="{E352D998-3BD8-41E8-A9E0-300F816E9965}"/>
-              </a:ext>
-            </a:extLst>
-          </p:cNvPr>
-          <p:cNvSpPr>
-            <a:spLocks xmlns:a="http://schemas.openxmlformats.org/drawingml/2006/main" noGrp="1"/>
-          </p:cNvSpPr>
-          <p:nvPr/>
-        </p:nvSpPr>
-        <p:spPr>
-          <a:xfrm xmlns:a="http://schemas.openxmlformats.org/drawingml/2006/main">
-            <a:off x="609600" y="1666875"/>
-            <a:ext cx="10972800" cy="4191000"/>
-          </a:xfrm>
-          <a:prstGeom xmlns:a="http://schemas.openxmlformats.org/drawingml/2006/main" prst="rect">
-            <a:avLst/>
-          </a:prstGeom>
-          <a:noFill xmlns:a="http://schemas.openxmlformats.org/drawingml/2006/main"/>
-          <a:ln xmlns:a="http://schemas.openxmlformats.org/drawingml/2006/main" w="0">
-            <a:noFill/>
-            <a:prstDash val="solid"/>
-          </a:ln>
-        </p:spPr>
-        <p:txBody>
-          <a:bodyPr xmlns:a="http://schemas.openxmlformats.org/drawingml/2006/main"/>
-          <a:lstStyle xmlns:a="http://schemas.openxmlformats.org/drawingml/2006/main">
-            <a:defPPr>
-              <a:defRPr sz="2250" b="0">
-                <a:solidFill>
-                  <a:srgbClr val="18334A"/>
-                </a:solidFill>
-                <a:latin typeface="Arial"/>
-                <a:ea typeface="Arial"/>
-                <a:cs typeface="Arial"/>
-              </a:defRPr>
-            </a:defPPr>
-          </a:lstStyle>
-          <a:p xmlns:a="http://schemas.openxmlformats.org/drawingml/2006/main">
-            <a:pPr>
-              <a:defRPr sz="2250" b="0">
-                <a:solidFill>
-                  <a:srgbClr val="18334A"/>
-                </a:solidFill>
-                <a:latin typeface="Arial"/>
-                <a:ea typeface="Arial"/>
-                <a:cs typeface="Arial"/>
-              </a:defRPr>
-            </a:pPr>
-            <a:r>
-              <a:rPr sz="2250" b="0">
-                <a:solidFill>
-                  <a:srgbClr val="18334A"/>
-                </a:solidFill>
-                <a:latin typeface="Arial"/>
-                <a:ea typeface="Arial"/>
-                <a:cs typeface="Arial"/>
-              </a:rPr>
-              <a:t>A subscription is one APEX dependency mechanism.</a:t>
-            </a:r>
-          </a:p>
-          <a:p xmlns:a="http://schemas.openxmlformats.org/drawingml/2006/main">
-            <a:pPr>
-              <a:defRPr sz="2250" b="0">
-                <a:solidFill>
-                  <a:srgbClr val="18334A"/>
-                </a:solidFill>
-                <a:latin typeface="Arial"/>
-                <a:ea typeface="Arial"/>
-                <a:cs typeface="Arial"/>
-              </a:defRPr>
-            </a:pPr>
-            <a:r>
-              <a:rPr sz="2250" b="0">
-                <a:solidFill>
-                  <a:srgbClr val="18334A"/>
-                </a:solidFill>
-                <a:latin typeface="Arial"/>
-                <a:ea typeface="Arial"/>
-                <a:cs typeface="Arial"/>
-              </a:rPr>
-              <a:t>LOV return codes and behavior belong to the component contract.</a:t>
-            </a:r>
-          </a:p>
-          <a:p xmlns:a="http://schemas.openxmlformats.org/drawingml/2006/main">
-            <a:pPr>
-              <a:defRPr sz="2250" b="0">
-                <a:solidFill>
-                  <a:srgbClr val="18334A"/>
-                </a:solidFill>
-                <a:latin typeface="Arial"/>
-                <a:ea typeface="Arial"/>
-                <a:cs typeface="Arial"/>
-              </a:defRPr>
-            </a:pPr>
-            <a:r>
-              <a:rPr sz="2250" b="0">
-                <a:solidFill>
-                  <a:srgbClr val="18334A"/>
-                </a:solidFill>
-                <a:latin typeface="Arial"/>
-                <a:ea typeface="Arial"/>
-                <a:cs typeface="Arial"/>
-              </a:rPr>
-              <a:t>Version labels do not infer compatibility. PBI-052 owns the mapping.</a:t>
-            </a:r>
-          </a:p>
-          <a:p xmlns:a="http://schemas.openxmlformats.org/drawingml/2006/main">
-            <a:pPr>
-              <a:defRPr sz="2250" b="0">
-                <a:solidFill>
-                  <a:srgbClr val="18334A"/>
-                </a:solidFill>
-                <a:latin typeface="Arial"/>
-                <a:ea typeface="Arial"/>
-                <a:cs typeface="Arial"/>
-              </a:defRPr>
-            </a:pPr>
-            <a:r>
-              <a:rPr sz="2250" b="0">
-                <a:solidFill>
-                  <a:srgbClr val="18334A"/>
-                </a:solidFill>
-                <a:latin typeface="Arial"/>
-                <a:ea typeface="Arial"/>
-                <a:cs typeface="Arial"/>
-              </a:rPr>
-              <a:t>Compose utPLSQL, coverage, audits, browser checks and admission</a:t>
-            </a:r>
-          </a:p>
-          <a:p xmlns:a="http://schemas.openxmlformats.org/drawingml/2006/main">
-            <a:pPr>
-              <a:defRPr sz="2250" b="0">
-                <a:solidFill>
-                  <a:srgbClr val="18334A"/>
-                </a:solidFill>
-                <a:latin typeface="Arial"/>
-                <a:ea typeface="Arial"/>
-                <a:cs typeface="Arial"/>
-              </a:defRPr>
-            </a:pPr>
-            <a:r>
-              <a:rPr sz="2250" b="0">
-                <a:solidFill>
-                  <a:srgbClr val="18334A"/>
-                </a:solidFill>
-                <a:latin typeface="Arial"/>
-                <a:ea typeface="Arial"/>
-                <a:cs typeface="Arial"/>
-              </a:rPr>
-              <a:t>around the same candidate identity; each addresses different risks.</a:t>
+              <a:t>Identity gap · changed mapped import</a:t>
             </a:r>
           </a:p>
         </p:txBody>
@@ -7461,7 +7882,7 @@
           <p:cNvPr id="3" name="page">
             <a:extLst xmlns:a="http://schemas.openxmlformats.org/drawingml/2006/main">
               <a:ext uri="{FF2B5EF4-FFF2-40B4-BE49-F238E27FC236}">
-                <a16:creationId xmlns:a16="http://schemas.microsoft.com/office/drawing/2014/main" id="{B9A89135-0CB7-4A14-BBEE-112DF2EFE566}"/>
+                <a16:creationId xmlns:a16="http://schemas.microsoft.com/office/drawing/2014/main" id="{5AAC463E-5733-4306-B692-1C752E5CC36E}"/>
               </a:ext>
             </a:extLst>
           </p:cNvPr>
@@ -7500,6 +7921,7 @@
           </a:lstStyle>
           <a:p xmlns:a="http://schemas.openxmlformats.org/drawingml/2006/main">
             <a:pPr>
+              <a:buNone/>
               <a:defRPr sz="1350" b="0">
                 <a:solidFill>
                   <a:srgbClr val="526574"/>
@@ -7519,6 +7941,186 @@
                 <a:cs typeface="Arial"/>
               </a:rPr>
               <a:t>18</a:t>
+            </a:r>
+          </a:p>
+        </p:txBody>
+      </p:sp>
+      <p:sp>
+        <p:nvSpPr>
+          <p:cNvPr id="5" name="body">
+            <a:extLst xmlns:a="http://schemas.openxmlformats.org/drawingml/2006/main">
+              <a:ext uri="{FF2B5EF4-FFF2-40B4-BE49-F238E27FC236}">
+                <a16:creationId xmlns:a16="http://schemas.microsoft.com/office/drawing/2014/main" id="{3BD384D4-F0D9-49D1-87CD-2FAE44A4149E}"/>
+              </a:ext>
+            </a:extLst>
+          </p:cNvPr>
+          <p:cNvSpPr>
+            <a:spLocks xmlns:a="http://schemas.openxmlformats.org/drawingml/2006/main" noGrp="1"/>
+          </p:cNvSpPr>
+          <p:nvPr/>
+        </p:nvSpPr>
+        <p:spPr>
+          <a:xfrm xmlns:a="http://schemas.openxmlformats.org/drawingml/2006/main">
+            <a:off x="609600" y="1666875"/>
+            <a:ext cx="10972800" cy="4191000"/>
+          </a:xfrm>
+          <a:prstGeom xmlns:a="http://schemas.openxmlformats.org/drawingml/2006/main" prst="rect">
+            <a:avLst/>
+          </a:prstGeom>
+          <a:noFill xmlns:a="http://schemas.openxmlformats.org/drawingml/2006/main"/>
+          <a:ln xmlns:a="http://schemas.openxmlformats.org/drawingml/2006/main" w="0">
+            <a:noFill/>
+          </a:ln>
+        </p:spPr>
+        <p:txBody>
+          <a:bodyPr xmlns:a="http://schemas.openxmlformats.org/drawingml/2006/main">
+            <a:noAutofit/>
+          </a:bodyPr>
+          <a:lstStyle xmlns:a="http://schemas.openxmlformats.org/drawingml/2006/main">
+            <a:defPPr>
+              <a:defRPr sz="2250">
+                <a:solidFill>
+                  <a:srgbClr val="18334A"/>
+                </a:solidFill>
+                <a:latin typeface="Arial"/>
+                <a:ea typeface="Arial"/>
+                <a:cs typeface="Arial"/>
+              </a:defRPr>
+            </a:defPPr>
+          </a:lstStyle>
+          <a:p xmlns:a="http://schemas.openxmlformats.org/drawingml/2006/main">
+            <a:pPr marL="228600" indent="-152400">
+              <a:spcAft>
+                <a:spcPts val="600"/>
+              </a:spcAft>
+              <a:buChar char="•"/>
+              <a:defRPr sz="2250">
+                <a:solidFill>
+                  <a:srgbClr val="18334A"/>
+                </a:solidFill>
+                <a:latin typeface="Arial"/>
+                <a:ea typeface="Arial"/>
+                <a:cs typeface="Arial"/>
+              </a:defRPr>
+            </a:pPr>
+            <a:r>
+              <a:rPr sz="2250">
+                <a:solidFill>
+                  <a:srgbClr val="18334A"/>
+                </a:solidFill>
+                <a:latin typeface="Arial"/>
+                <a:ea typeface="Arial"/>
+                <a:cs typeface="Arial"/>
+              </a:rPr>
+              <a:t>All observed region IDs changed on populated replacement.</a:t>
+            </a:r>
+          </a:p>
+          <a:p xmlns:a="http://schemas.openxmlformats.org/drawingml/2006/main">
+            <a:pPr marL="228600" indent="-152400">
+              <a:spcAft>
+                <a:spcPts val="600"/>
+              </a:spcAft>
+              <a:buChar char="•"/>
+              <a:defRPr sz="2250">
+                <a:solidFill>
+                  <a:srgbClr val="18334A"/>
+                </a:solidFill>
+                <a:latin typeface="Arial"/>
+                <a:ea typeface="Arial"/>
+                <a:cs typeface="Arial"/>
+              </a:defRPr>
+            </a:pPr>
+            <a:r>
+              <a:rPr sz="2250">
+                <a:solidFill>
+                  <a:srgbClr val="18334A"/>
+                </a:solidFill>
+                <a:latin typeface="Arial"/>
+                <a:ea typeface="Arial"/>
+                <a:cs typeface="Arial"/>
+              </a:rPr>
+              <a:t>Data, LOV values, greeting and document titles survived.</a:t>
+            </a:r>
+          </a:p>
+          <a:p xmlns:a="http://schemas.openxmlformats.org/drawingml/2006/main">
+            <a:pPr marL="228600" indent="-152400">
+              <a:spcAft>
+                <a:spcPts val="600"/>
+              </a:spcAft>
+              <a:buChar char="•"/>
+              <a:defRPr sz="2250">
+                <a:solidFill>
+                  <a:srgbClr val="18334A"/>
+                </a:solidFill>
+                <a:latin typeface="Arial"/>
+                <a:ea typeface="Arial"/>
+                <a:cs typeface="Arial"/>
+              </a:defRPr>
+            </a:pPr>
+            <a:r>
+              <a:rPr sz="2250">
+                <a:solidFill>
+                  <a:srgbClr val="18334A"/>
+                </a:solidFill>
+                <a:latin typeface="Arial"/>
+                <a:ea typeface="Arial"/>
+                <a:cs typeface="Arial"/>
+              </a:rPr>
+              <a:t>Stable runtime component identity remains unqualified.</a:t>
+            </a:r>
+          </a:p>
+          <a:p xmlns:a="http://schemas.openxmlformats.org/drawingml/2006/main">
+            <a:pPr marL="228600" indent="-152400">
+              <a:spcAft>
+                <a:spcPts val="600"/>
+              </a:spcAft>
+              <a:buChar char="•"/>
+              <a:defRPr sz="2250">
+                <a:solidFill>
+                  <a:srgbClr val="18334A"/>
+                </a:solidFill>
+                <a:latin typeface="Arial"/>
+                <a:ea typeface="Arial"/>
+                <a:cs typeface="Arial"/>
+              </a:defRPr>
+            </a:pPr>
+            <a:r>
+              <a:rPr sz="2250">
+                <a:solidFill>
+                  <a:srgbClr val="18334A"/>
+                </a:solidFill>
+                <a:latin typeface="Arial"/>
+                <a:ea typeface="Arial"/>
+                <a:cs typeface="Arial"/>
+              </a:rPr>
+              <a:t>No private saved-report loss was measured.</a:t>
+            </a:r>
+          </a:p>
+          <a:p xmlns:a="http://schemas.openxmlformats.org/drawingml/2006/main">
+            <a:pPr marL="228600" indent="-152400">
+              <a:spcAft>
+                <a:spcPts val="600"/>
+              </a:spcAft>
+              <a:buChar char="•"/>
+              <a:defRPr sz="2250">
+                <a:solidFill>
+                  <a:srgbClr val="18334A"/>
+                </a:solidFill>
+                <a:latin typeface="Arial"/>
+                <a:ea typeface="Arial"/>
+                <a:cs typeface="Arial"/>
+              </a:defRPr>
+            </a:pPr>
+            <a:r>
+              <a:rPr sz="2250">
+                <a:solidFill>
+                  <a:srgbClr val="18334A"/>
+                </a:solidFill>
+                <a:latin typeface="Arial"/>
+                <a:ea typeface="Arial"/>
+                <a:cs typeface="Arial"/>
+              </a:rPr>
+              <a:t>Qualify a supported fixed-offset/native configuration path next.</a:t>
             </a:r>
           </a:p>
         </p:txBody>
@@ -7526,7 +8128,7 @@
     </p:spTree>
     <p:extLst>
       <p:ext uri="{BB962C8B-B14F-4D97-AF65-F5344CB8AC3E}">
-        <p14:creationId xmlns:p14="http://schemas.microsoft.com/office/powerpoint/2010/main" val="855423678"/>
+        <p14:creationId xmlns:p14="http://schemas.microsoft.com/office/powerpoint/2010/main" val="1394122988"/>
       </p:ext>
     </p:extLst>
   </p:cSld>
@@ -7557,7 +8159,7 @@
           <p:cNvPr id="4" name="title">
             <a:extLst xmlns:a="http://schemas.openxmlformats.org/drawingml/2006/main">
               <a:ext uri="{FF2B5EF4-FFF2-40B4-BE49-F238E27FC236}">
-                <a16:creationId xmlns:a16="http://schemas.microsoft.com/office/drawing/2014/main" id="{361757A0-443B-45D5-B34C-35C7D8AFC367}"/>
+                <a16:creationId xmlns:a16="http://schemas.microsoft.com/office/drawing/2014/main" id="{1E397A6B-DF5F-405C-9A9A-2BDB1E7BA54A}"/>
               </a:ext>
             </a:extLst>
           </p:cNvPr>
@@ -7596,6 +8198,7 @@
           </a:lstStyle>
           <a:p xmlns:a="http://schemas.openxmlformats.org/drawingml/2006/main">
             <a:pPr>
+              <a:buNone/>
               <a:defRPr sz="3300" b="1">
                 <a:solidFill>
                   <a:srgbClr val="18334A"/>
@@ -7614,189 +8217,7 @@
                 <a:ea typeface="Arial"/>
                 <a:cs typeface="Arial"/>
               </a:rPr>
-              <a:t>Dependency-ordered follow-up</a:t>
-            </a:r>
-          </a:p>
-        </p:txBody>
-      </p:sp>
-      <p:sp>
-        <p:nvSpPr>
-          <p:cNvPr id="2" name="body">
-            <a:extLst xmlns:a="http://schemas.openxmlformats.org/drawingml/2006/main">
-              <a:ext uri="{FF2B5EF4-FFF2-40B4-BE49-F238E27FC236}">
-                <a16:creationId xmlns:a16="http://schemas.microsoft.com/office/drawing/2014/main" id="{4F53DD1E-5E7C-495D-B199-1834BCD98D23}"/>
-              </a:ext>
-            </a:extLst>
-          </p:cNvPr>
-          <p:cNvSpPr>
-            <a:spLocks xmlns:a="http://schemas.openxmlformats.org/drawingml/2006/main" noGrp="1"/>
-          </p:cNvSpPr>
-          <p:nvPr/>
-        </p:nvSpPr>
-        <p:spPr>
-          <a:xfrm xmlns:a="http://schemas.openxmlformats.org/drawingml/2006/main">
-            <a:off x="609600" y="1666875"/>
-            <a:ext cx="10972800" cy="4191000"/>
-          </a:xfrm>
-          <a:prstGeom xmlns:a="http://schemas.openxmlformats.org/drawingml/2006/main" prst="rect">
-            <a:avLst/>
-          </a:prstGeom>
-          <a:noFill xmlns:a="http://schemas.openxmlformats.org/drawingml/2006/main"/>
-          <a:ln xmlns:a="http://schemas.openxmlformats.org/drawingml/2006/main" w="0">
-            <a:noFill/>
-            <a:prstDash val="solid"/>
-          </a:ln>
-        </p:spPr>
-        <p:txBody>
-          <a:bodyPr xmlns:a="http://schemas.openxmlformats.org/drawingml/2006/main"/>
-          <a:lstStyle xmlns:a="http://schemas.openxmlformats.org/drawingml/2006/main">
-            <a:defPPr>
-              <a:defRPr sz="2250" b="0">
-                <a:solidFill>
-                  <a:srgbClr val="18334A"/>
-                </a:solidFill>
-                <a:latin typeface="Arial"/>
-                <a:ea typeface="Arial"/>
-                <a:cs typeface="Arial"/>
-              </a:defRPr>
-            </a:defPPr>
-          </a:lstStyle>
-          <a:p xmlns:a="http://schemas.openxmlformats.org/drawingml/2006/main">
-            <a:pPr>
-              <a:defRPr sz="2250" b="0">
-                <a:solidFill>
-                  <a:srgbClr val="18334A"/>
-                </a:solidFill>
-                <a:latin typeface="Arial"/>
-                <a:ea typeface="Arial"/>
-                <a:cs typeface="Arial"/>
-              </a:defRPr>
-            </a:pPr>
-            <a:r>
-              <a:rPr sz="2250" b="0">
-                <a:solidFill>
-                  <a:srgbClr val="18334A"/>
-                </a:solidFill>
-                <a:latin typeface="Arial"/>
-                <a:ea typeface="Arial"/>
-                <a:cs typeface="Arial"/>
-              </a:rPr>
-              <a:t>1. Stabilize policies, identity and toolchain: 028/029/037.</a:t>
-            </a:r>
-          </a:p>
-          <a:p xmlns:a="http://schemas.openxmlformats.org/drawingml/2006/main">
-            <a:pPr>
-              <a:defRPr sz="2250" b="0">
-                <a:solidFill>
-                  <a:srgbClr val="18334A"/>
-                </a:solidFill>
-                <a:latin typeface="Arial"/>
-                <a:ea typeface="Arial"/>
-                <a:cs typeface="Arial"/>
-              </a:defRPr>
-            </a:pPr>
-            <a:r>
-              <a:rPr sz="2250" b="0">
-                <a:solidFill>
-                  <a:srgbClr val="18334A"/>
-                </a:solidFill>
-                <a:latin typeface="Arial"/>
-                <a:ea typeface="Arial"/>
-                <a:cs typeface="Arial"/>
-              </a:rPr>
-              <a:t>2. Capture, migration authority and artifacts: 020/037/038.</a:t>
-            </a:r>
-          </a:p>
-          <a:p xmlns:a="http://schemas.openxmlformats.org/drawingml/2006/main">
-            <a:pPr>
-              <a:defRPr sz="2250" b="0">
-                <a:solidFill>
-                  <a:srgbClr val="18334A"/>
-                </a:solidFill>
-                <a:latin typeface="Arial"/>
-                <a:ea typeface="Arial"/>
-                <a:cs typeface="Arial"/>
-              </a:defRPr>
-            </a:pPr>
-            <a:r>
-              <a:rPr sz="2250" b="0">
-                <a:solidFill>
-                  <a:srgbClr val="18334A"/>
-                </a:solidFill>
-                <a:latin typeface="Arial"/>
-                <a:ea typeface="Arial"/>
-                <a:cs typeface="Arial"/>
-              </a:rPr>
-              <a:t>3. Coordination and synchronization: 019/039/042.</a:t>
-            </a:r>
-          </a:p>
-          <a:p xmlns:a="http://schemas.openxmlformats.org/drawingml/2006/main">
-            <a:pPr>
-              <a:defRPr sz="2250" b="0">
-                <a:solidFill>
-                  <a:srgbClr val="18334A"/>
-                </a:solidFill>
-                <a:latin typeface="Arial"/>
-                <a:ea typeface="Arial"/>
-                <a:cs typeface="Arial"/>
-              </a:defRPr>
-            </a:pPr>
-            <a:r>
-              <a:rPr sz="2250" b="0">
-                <a:solidFill>
-                  <a:srgbClr val="18334A"/>
-                </a:solidFill>
-                <a:latin typeface="Arial"/>
-                <a:ea typeface="Arial"/>
-                <a:cs typeface="Arial"/>
-              </a:rPr>
-              <a:t>4. Admission, drift, recovery, provenance: 021–024/031/045; 052.</a:t>
-            </a:r>
-          </a:p>
-          <a:p xmlns:a="http://schemas.openxmlformats.org/drawingml/2006/main">
-            <a:pPr>
-              <a:defRPr sz="2250" b="0">
-                <a:solidFill>
-                  <a:srgbClr val="18334A"/>
-                </a:solidFill>
-                <a:latin typeface="Arial"/>
-                <a:ea typeface="Arial"/>
-                <a:cs typeface="Arial"/>
-              </a:defRPr>
-            </a:pPr>
-            <a:r>
-              <a:rPr sz="2250" b="0">
-                <a:solidFill>
-                  <a:srgbClr val="18334A"/>
-                </a:solidFill>
-                <a:latin typeface="Arial"/>
-                <a:ea typeface="Arial"/>
-                <a:cs typeface="Arial"/>
-              </a:rPr>
-              <a:t>5. Validation, pipelines and reproduction: 034/040/041/030/043/017/046/047.</a:t>
-            </a:r>
-          </a:p>
-          <a:p xmlns:a="http://schemas.openxmlformats.org/drawingml/2006/main">
-            <a:pPr>
-              <a:defRPr sz="2250" b="0">
-                <a:solidFill>
-                  <a:srgbClr val="18334A"/>
-                </a:solidFill>
-                <a:latin typeface="Arial"/>
-                <a:ea typeface="Arial"/>
-                <a:cs typeface="Arial"/>
-              </a:defRPr>
-            </a:pPr>
-            <a:r>
-              <a:rPr sz="2250" b="0">
-                <a:solidFill>
-                  <a:srgbClr val="18334A"/>
-                </a:solidFill>
-                <a:latin typeface="Arial"/>
-                <a:ea typeface="Arial"/>
-                <a:cs typeface="Arial"/>
-              </a:rPr>
-              <a:t>6. Complex Foundation upgrades: 048–050 in E.5.</a:t>
+              <a:t>D · Retain requirement-specific admission</a:t>
             </a:r>
           </a:p>
         </p:txBody>
@@ -7806,7 +8227,7 @@
           <p:cNvPr id="3" name="page">
             <a:extLst xmlns:a="http://schemas.openxmlformats.org/drawingml/2006/main">
               <a:ext uri="{FF2B5EF4-FFF2-40B4-BE49-F238E27FC236}">
-                <a16:creationId xmlns:a16="http://schemas.microsoft.com/office/drawing/2014/main" id="{6AB39BD0-D6B2-40F3-9E34-720623A901DC}"/>
+                <a16:creationId xmlns:a16="http://schemas.microsoft.com/office/drawing/2014/main" id="{C310B5B8-81F7-4764-A62B-FE72DD3DF8E8}"/>
               </a:ext>
             </a:extLst>
           </p:cNvPr>
@@ -7845,6 +8266,7 @@
           </a:lstStyle>
           <a:p xmlns:a="http://schemas.openxmlformats.org/drawingml/2006/main">
             <a:pPr>
+              <a:buNone/>
               <a:defRPr sz="1350" b="0">
                 <a:solidFill>
                   <a:srgbClr val="526574"/>
@@ -7864,6 +8286,159 @@
                 <a:cs typeface="Arial"/>
               </a:rPr>
               <a:t>19</a:t>
+            </a:r>
+          </a:p>
+        </p:txBody>
+      </p:sp>
+      <p:sp>
+        <p:nvSpPr>
+          <p:cNvPr id="5" name="body">
+            <a:extLst xmlns:a="http://schemas.openxmlformats.org/drawingml/2006/main">
+              <a:ext uri="{FF2B5EF4-FFF2-40B4-BE49-F238E27FC236}">
+                <a16:creationId xmlns:a16="http://schemas.microsoft.com/office/drawing/2014/main" id="{C88B5322-3183-4F4F-BA05-BF69DA3CD23C}"/>
+              </a:ext>
+            </a:extLst>
+          </p:cNvPr>
+          <p:cNvSpPr>
+            <a:spLocks xmlns:a="http://schemas.openxmlformats.org/drawingml/2006/main" noGrp="1"/>
+          </p:cNvSpPr>
+          <p:nvPr/>
+        </p:nvSpPr>
+        <p:spPr>
+          <a:xfrm xmlns:a="http://schemas.openxmlformats.org/drawingml/2006/main">
+            <a:off x="609600" y="1666875"/>
+            <a:ext cx="10972800" cy="4191000"/>
+          </a:xfrm>
+          <a:prstGeom xmlns:a="http://schemas.openxmlformats.org/drawingml/2006/main" prst="rect">
+            <a:avLst/>
+          </a:prstGeom>
+          <a:noFill xmlns:a="http://schemas.openxmlformats.org/drawingml/2006/main"/>
+          <a:ln xmlns:a="http://schemas.openxmlformats.org/drawingml/2006/main" w="0">
+            <a:noFill/>
+          </a:ln>
+        </p:spPr>
+        <p:txBody>
+          <a:bodyPr xmlns:a="http://schemas.openxmlformats.org/drawingml/2006/main">
+            <a:noAutofit/>
+          </a:bodyPr>
+          <a:lstStyle xmlns:a="http://schemas.openxmlformats.org/drawingml/2006/main">
+            <a:defPPr>
+              <a:defRPr sz="2250">
+                <a:solidFill>
+                  <a:srgbClr val="18334A"/>
+                </a:solidFill>
+                <a:latin typeface="Arial"/>
+                <a:ea typeface="Arial"/>
+                <a:cs typeface="Arial"/>
+              </a:defRPr>
+            </a:defPPr>
+          </a:lstStyle>
+          <a:p xmlns:a="http://schemas.openxmlformats.org/drawingml/2006/main">
+            <a:pPr marL="228600" indent="-152400">
+              <a:spcAft>
+                <a:spcPts val="600"/>
+              </a:spcAft>
+              <a:buChar char="•"/>
+              <a:defRPr sz="2250">
+                <a:solidFill>
+                  <a:srgbClr val="18334A"/>
+                </a:solidFill>
+                <a:latin typeface="Arial"/>
+                <a:ea typeface="Arial"/>
+                <a:cs typeface="Arial"/>
+              </a:defRPr>
+            </a:pPr>
+            <a:r>
+              <a:rPr sz="2250">
+                <a:solidFill>
+                  <a:srgbClr val="18334A"/>
+                </a:solidFill>
+                <a:latin typeface="Arial"/>
+                <a:ea typeface="Arial"/>
+                <a:cs typeface="Arial"/>
+              </a:rPr>
+              <a:t>Reuse the E.1 validator; native ZIP carries the declaration.</a:t>
+            </a:r>
+          </a:p>
+          <a:p xmlns:a="http://schemas.openxmlformats.org/drawingml/2006/main">
+            <a:pPr marL="228600" indent="-152400">
+              <a:spcAft>
+                <a:spcPts val="600"/>
+              </a:spcAft>
+              <a:buChar char="•"/>
+              <a:defRPr sz="2250">
+                <a:solidFill>
+                  <a:srgbClr val="18334A"/>
+                </a:solidFill>
+                <a:latin typeface="Arial"/>
+                <a:ea typeface="Arial"/>
+                <a:cs typeface="Arial"/>
+              </a:defRPr>
+            </a:pPr>
+            <a:r>
+              <a:rPr sz="2250">
+                <a:solidFill>
+                  <a:srgbClr val="18334A"/>
+                </a:solidFill>
+                <a:latin typeface="Arial"/>
+                <a:ea typeface="Arial"/>
+                <a:cs typeface="Arial"/>
+              </a:rPr>
+              <a:t>Bind source, declaration, exact bytes and observed target state.</a:t>
+            </a:r>
+          </a:p>
+          <a:p xmlns:a="http://schemas.openxmlformats.org/drawingml/2006/main">
+            <a:pPr marL="228600" indent="-152400">
+              <a:spcAft>
+                <a:spcPts val="600"/>
+              </a:spcAft>
+              <a:buChar char="•"/>
+              <a:defRPr sz="2250">
+                <a:solidFill>
+                  <a:srgbClr val="18334A"/>
+                </a:solidFill>
+                <a:latin typeface="Arial"/>
+                <a:ea typeface="Arial"/>
+                <a:cs typeface="Arial"/>
+              </a:defRPr>
+            </a:pPr>
+            <a:r>
+              <a:rPr sz="2250">
+                <a:solidFill>
+                  <a:srgbClr val="18334A"/>
+                </a:solidFill>
+                <a:latin typeface="Arial"/>
+                <a:ea typeface="Arial"/>
+                <a:cs typeface="Arial"/>
+              </a:rPr>
+              <a:t>Reject incompatible/missing/unknown declarations, altered bytes and missing receipts before invoking native deployment.</a:t>
+            </a:r>
+          </a:p>
+          <a:p xmlns:a="http://schemas.openxmlformats.org/drawingml/2006/main">
+            <a:pPr marL="228600" indent="-152400">
+              <a:spcAft>
+                <a:spcPts val="600"/>
+              </a:spcAft>
+              <a:buChar char="•"/>
+              <a:defRPr sz="2250">
+                <a:solidFill>
+                  <a:srgbClr val="18334A"/>
+                </a:solidFill>
+                <a:latin typeface="Arial"/>
+                <a:ea typeface="Arial"/>
+                <a:cs typeface="Arial"/>
+              </a:defRPr>
+            </a:pPr>
+            <a:r>
+              <a:rPr sz="2250">
+                <a:solidFill>
+                  <a:srgbClr val="18334A"/>
+                </a:solidFill>
+                <a:latin typeface="Arial"/>
+                <a:ea typeface="Arial"/>
+                <a:cs typeface="Arial"/>
+              </a:rPr>
+              <a:t>The bridge does not establish full drift/failure fencing.</a:t>
             </a:r>
           </a:p>
         </p:txBody>
@@ -7871,7 +8446,7 @@
     </p:spTree>
     <p:extLst>
       <p:ext uri="{BB962C8B-B14F-4D97-AF65-F5344CB8AC3E}">
-        <p14:creationId xmlns:p14="http://schemas.microsoft.com/office/powerpoint/2010/main" val="524872485"/>
+        <p14:creationId xmlns:p14="http://schemas.microsoft.com/office/powerpoint/2010/main" val="1050759156"/>
       </p:ext>
     </p:extLst>
   </p:cSld>
@@ -7941,6 +8516,7 @@
           </a:lstStyle>
           <a:p xmlns:a="http://schemas.openxmlformats.org/drawingml/2006/main">
             <a:pPr>
+              <a:buNone/>
               <a:defRPr sz="3300" b="1">
                 <a:solidFill>
                   <a:srgbClr val="18334A"/>
@@ -8008,6 +8584,7 @@
           </a:lstStyle>
           <a:p xmlns:a="http://schemas.openxmlformats.org/drawingml/2006/main">
             <a:pPr>
+              <a:buNone/>
               <a:defRPr sz="2250" b="0">
                 <a:solidFill>
                   <a:srgbClr val="18334A"/>
@@ -8031,6 +8608,7 @@
           </a:p>
           <a:p xmlns:a="http://schemas.openxmlformats.org/drawingml/2006/main">
             <a:pPr>
+              <a:buNone/>
               <a:defRPr sz="2250" b="0">
                 <a:solidFill>
                   <a:srgbClr val="18334A"/>
@@ -8049,11 +8627,12 @@
                 <a:ea typeface="Arial"/>
                 <a:cs typeface="Arial"/>
               </a:rPr>
-              <a:t>2. PROJECT capture and delivery</a:t>
+              <a:t>2. SQLcl PROJECT capture and delivery</a:t>
             </a:r>
           </a:p>
           <a:p xmlns:a="http://schemas.openxmlformats.org/drawingml/2006/main">
             <a:pPr>
+              <a:buNone/>
               <a:defRPr sz="2250" b="0">
                 <a:solidFill>
                   <a:srgbClr val="18334A"/>
@@ -8077,6 +8656,7 @@
           </a:p>
           <a:p xmlns:a="http://schemas.openxmlformats.org/drawingml/2006/main">
             <a:pPr>
+              <a:buNone/>
               <a:defRPr sz="2250" b="0">
                 <a:solidFill>
                   <a:srgbClr val="18334A"/>
@@ -8100,6 +8680,7 @@
           </a:p>
           <a:p xmlns:a="http://schemas.openxmlformats.org/drawingml/2006/main">
             <a:pPr>
+              <a:buNone/>
               <a:defRPr sz="2250" b="0">
                 <a:solidFill>
                   <a:srgbClr val="18334A"/>
@@ -8167,6 +8748,7 @@
           </a:lstStyle>
           <a:p xmlns:a="http://schemas.openxmlformats.org/drawingml/2006/main">
             <a:pPr>
+              <a:buNone/>
               <a:defRPr sz="1350" b="0">
                 <a:solidFill>
                   <a:srgbClr val="526574"/>
@@ -8224,7 +8806,7 @@
           <p:cNvPr id="4" name="title">
             <a:extLst xmlns:a="http://schemas.openxmlformats.org/drawingml/2006/main">
               <a:ext uri="{FF2B5EF4-FFF2-40B4-BE49-F238E27FC236}">
-                <a16:creationId xmlns:a16="http://schemas.microsoft.com/office/drawing/2014/main" id="{7DD24736-D89A-4895-9900-924BFDA2A8C1}"/>
+                <a16:creationId xmlns:a16="http://schemas.microsoft.com/office/drawing/2014/main" id="{57B2D2C6-5DB8-44B9-93A9-DD9A2F06EB79}"/>
               </a:ext>
             </a:extLst>
           </p:cNvPr>
@@ -8263,6 +8845,7 @@
           </a:lstStyle>
           <a:p xmlns:a="http://schemas.openxmlformats.org/drawingml/2006/main">
             <a:pPr>
+              <a:buNone/>
               <a:defRPr sz="3300" b="1">
                 <a:solidFill>
                   <a:srgbClr val="18334A"/>
@@ -8281,7 +8864,325 @@
                 <a:ea typeface="Arial"/>
                 <a:cs typeface="Arial"/>
               </a:rPr>
-              <a:t>Review and decide together</a:t>
+              <a:t>Component contracts and validation</a:t>
+            </a:r>
+          </a:p>
+        </p:txBody>
+      </p:sp>
+      <p:sp>
+        <p:nvSpPr>
+          <p:cNvPr id="3" name="page">
+            <a:extLst xmlns:a="http://schemas.openxmlformats.org/drawingml/2006/main">
+              <a:ext uri="{FF2B5EF4-FFF2-40B4-BE49-F238E27FC236}">
+                <a16:creationId xmlns:a16="http://schemas.microsoft.com/office/drawing/2014/main" id="{B9A89135-0CB7-4A14-BBEE-112DF2EFE566}"/>
+              </a:ext>
+            </a:extLst>
+          </p:cNvPr>
+          <p:cNvSpPr>
+            <a:spLocks xmlns:a="http://schemas.openxmlformats.org/drawingml/2006/main" noGrp="1"/>
+          </p:cNvSpPr>
+          <p:nvPr/>
+        </p:nvSpPr>
+        <p:spPr>
+          <a:xfrm xmlns:a="http://schemas.openxmlformats.org/drawingml/2006/main">
+            <a:off x="11334750" y="6429375"/>
+            <a:ext cx="476250" cy="266700"/>
+          </a:xfrm>
+          <a:prstGeom xmlns:a="http://schemas.openxmlformats.org/drawingml/2006/main" prst="rect">
+            <a:avLst/>
+          </a:prstGeom>
+          <a:noFill xmlns:a="http://schemas.openxmlformats.org/drawingml/2006/main"/>
+          <a:ln xmlns:a="http://schemas.openxmlformats.org/drawingml/2006/main" w="0">
+            <a:noFill/>
+            <a:prstDash val="solid"/>
+          </a:ln>
+        </p:spPr>
+        <p:txBody>
+          <a:bodyPr xmlns:a="http://schemas.openxmlformats.org/drawingml/2006/main"/>
+          <a:lstStyle xmlns:a="http://schemas.openxmlformats.org/drawingml/2006/main">
+            <a:defPPr>
+              <a:defRPr sz="1350" b="0">
+                <a:solidFill>
+                  <a:srgbClr val="526574"/>
+                </a:solidFill>
+                <a:latin typeface="Arial"/>
+                <a:ea typeface="Arial"/>
+                <a:cs typeface="Arial"/>
+              </a:defRPr>
+            </a:defPPr>
+          </a:lstStyle>
+          <a:p xmlns:a="http://schemas.openxmlformats.org/drawingml/2006/main">
+            <a:pPr>
+              <a:buNone/>
+              <a:defRPr sz="1350" b="0">
+                <a:solidFill>
+                  <a:srgbClr val="526574"/>
+                </a:solidFill>
+                <a:latin typeface="Arial"/>
+                <a:ea typeface="Arial"/>
+                <a:cs typeface="Arial"/>
+              </a:defRPr>
+            </a:pPr>
+            <a:r>
+              <a:rPr sz="1350" b="0">
+                <a:solidFill>
+                  <a:srgbClr val="526574"/>
+                </a:solidFill>
+                <a:latin typeface="Arial"/>
+                <a:ea typeface="Arial"/>
+                <a:cs typeface="Arial"/>
+              </a:rPr>
+              <a:t>20</a:t>
+            </a:r>
+          </a:p>
+        </p:txBody>
+      </p:sp>
+      <p:sp>
+        <p:nvSpPr>
+          <p:cNvPr id="5" name="body">
+            <a:extLst xmlns:a="http://schemas.openxmlformats.org/drawingml/2006/main">
+              <a:ext uri="{FF2B5EF4-FFF2-40B4-BE49-F238E27FC236}">
+                <a16:creationId xmlns:a16="http://schemas.microsoft.com/office/drawing/2014/main" id="{6259CBC2-3915-46D3-87BC-D18A2EB78443}"/>
+              </a:ext>
+            </a:extLst>
+          </p:cNvPr>
+          <p:cNvSpPr>
+            <a:spLocks xmlns:a="http://schemas.openxmlformats.org/drawingml/2006/main" noGrp="1"/>
+          </p:cNvSpPr>
+          <p:nvPr/>
+        </p:nvSpPr>
+        <p:spPr>
+          <a:xfrm xmlns:a="http://schemas.openxmlformats.org/drawingml/2006/main">
+            <a:off x="609600" y="1666875"/>
+            <a:ext cx="10972800" cy="4191000"/>
+          </a:xfrm>
+          <a:prstGeom xmlns:a="http://schemas.openxmlformats.org/drawingml/2006/main" prst="rect">
+            <a:avLst/>
+          </a:prstGeom>
+          <a:noFill xmlns:a="http://schemas.openxmlformats.org/drawingml/2006/main"/>
+          <a:ln xmlns:a="http://schemas.openxmlformats.org/drawingml/2006/main" w="0">
+            <a:noFill/>
+          </a:ln>
+        </p:spPr>
+        <p:txBody>
+          <a:bodyPr xmlns:a="http://schemas.openxmlformats.org/drawingml/2006/main">
+            <a:noAutofit/>
+          </a:bodyPr>
+          <a:lstStyle xmlns:a="http://schemas.openxmlformats.org/drawingml/2006/main">
+            <a:defPPr>
+              <a:defRPr sz="2250">
+                <a:solidFill>
+                  <a:srgbClr val="18334A"/>
+                </a:solidFill>
+                <a:latin typeface="Arial"/>
+                <a:ea typeface="Arial"/>
+                <a:cs typeface="Arial"/>
+              </a:defRPr>
+            </a:defPPr>
+          </a:lstStyle>
+          <a:p xmlns:a="http://schemas.openxmlformats.org/drawingml/2006/main">
+            <a:pPr marL="228600" indent="-152400">
+              <a:spcAft>
+                <a:spcPts val="600"/>
+              </a:spcAft>
+              <a:buChar char="•"/>
+              <a:defRPr sz="2250">
+                <a:solidFill>
+                  <a:srgbClr val="18334A"/>
+                </a:solidFill>
+                <a:latin typeface="Arial"/>
+                <a:ea typeface="Arial"/>
+                <a:cs typeface="Arial"/>
+              </a:defRPr>
+            </a:pPr>
+            <a:r>
+              <a:rPr sz="2250">
+                <a:solidFill>
+                  <a:srgbClr val="18334A"/>
+                </a:solidFill>
+                <a:latin typeface="Arial"/>
+                <a:ea typeface="Arial"/>
+                <a:cs typeface="Arial"/>
+              </a:rPr>
+              <a:t>A subscription is one APEX dependency mechanism.</a:t>
+            </a:r>
+          </a:p>
+          <a:p xmlns:a="http://schemas.openxmlformats.org/drawingml/2006/main">
+            <a:pPr marL="228600" indent="-152400">
+              <a:spcAft>
+                <a:spcPts val="600"/>
+              </a:spcAft>
+              <a:buChar char="•"/>
+              <a:defRPr sz="2250">
+                <a:solidFill>
+                  <a:srgbClr val="18334A"/>
+                </a:solidFill>
+                <a:latin typeface="Arial"/>
+                <a:ea typeface="Arial"/>
+                <a:cs typeface="Arial"/>
+              </a:defRPr>
+            </a:pPr>
+            <a:r>
+              <a:rPr sz="2250">
+                <a:solidFill>
+                  <a:srgbClr val="18334A"/>
+                </a:solidFill>
+                <a:latin typeface="Arial"/>
+                <a:ea typeface="Arial"/>
+                <a:cs typeface="Arial"/>
+              </a:rPr>
+              <a:t>LOV return codes and behavior belong to the component contract.</a:t>
+            </a:r>
+          </a:p>
+          <a:p xmlns:a="http://schemas.openxmlformats.org/drawingml/2006/main">
+            <a:pPr marL="228600" indent="-152400">
+              <a:spcAft>
+                <a:spcPts val="600"/>
+              </a:spcAft>
+              <a:buChar char="•"/>
+              <a:defRPr sz="2250">
+                <a:solidFill>
+                  <a:srgbClr val="18334A"/>
+                </a:solidFill>
+                <a:latin typeface="Arial"/>
+                <a:ea typeface="Arial"/>
+                <a:cs typeface="Arial"/>
+              </a:defRPr>
+            </a:pPr>
+            <a:r>
+              <a:rPr sz="2250">
+                <a:solidFill>
+                  <a:srgbClr val="18334A"/>
+                </a:solidFill>
+                <a:latin typeface="Arial"/>
+                <a:ea typeface="Arial"/>
+                <a:cs typeface="Arial"/>
+              </a:rPr>
+              <a:t>Version labels do not infer compatibility. PBI-052 owns the mapping.</a:t>
+            </a:r>
+          </a:p>
+          <a:p xmlns:a="http://schemas.openxmlformats.org/drawingml/2006/main">
+            <a:pPr marL="228600" indent="-152400">
+              <a:spcAft>
+                <a:spcPts val="600"/>
+              </a:spcAft>
+              <a:buChar char="•"/>
+              <a:defRPr sz="2250">
+                <a:solidFill>
+                  <a:srgbClr val="18334A"/>
+                </a:solidFill>
+                <a:latin typeface="Arial"/>
+                <a:ea typeface="Arial"/>
+                <a:cs typeface="Arial"/>
+              </a:defRPr>
+            </a:pPr>
+            <a:r>
+              <a:rPr sz="2250">
+                <a:solidFill>
+                  <a:srgbClr val="18334A"/>
+                </a:solidFill>
+                <a:latin typeface="Arial"/>
+                <a:ea typeface="Arial"/>
+                <a:cs typeface="Arial"/>
+              </a:rPr>
+              <a:t>Compose utPLSQL, coverage, audits, browser checks and admission around the same candidate identity; each addresses different risks.</a:t>
+            </a:r>
+          </a:p>
+        </p:txBody>
+      </p:sp>
+    </p:spTree>
+    <p:extLst>
+      <p:ext uri="{BB962C8B-B14F-4D97-AF65-F5344CB8AC3E}">
+        <p14:creationId xmlns:p14="http://schemas.microsoft.com/office/powerpoint/2010/main" val="855423678"/>
+      </p:ext>
+    </p:extLst>
+  </p:cSld>
+</p:sld>
+</file>
+
+<file path=ppt/slides/slide21.xml><?xml version="1.0" encoding="utf-8"?>
+<p:sld xmlns:p="http://schemas.openxmlformats.org/presentationml/2006/main">
+  <p:cSld>
+    <p:bg>
+      <p:bgPr>
+        <a:solidFill xmlns:a="http://schemas.openxmlformats.org/drawingml/2006/main">
+          <a:srgbClr val="FFFFFF"/>
+        </a:solidFill>
+      </p:bgPr>
+    </p:bg>
+    <p:spTree>
+      <p:nvGrpSpPr>
+        <p:cNvPr id="1" name=""/>
+        <p:cNvGrpSpPr/>
+        <p:nvPr/>
+      </p:nvGrpSpPr>
+      <p:grpSpPr>
+        <a:xfrm xmlns:a="http://schemas.openxmlformats.org/drawingml/2006/main"/>
+      </p:grpSpPr>
+      <p:sp>
+        <p:nvSpPr>
+          <p:cNvPr id="4" name="title">
+            <a:extLst xmlns:a="http://schemas.openxmlformats.org/drawingml/2006/main">
+              <a:ext uri="{FF2B5EF4-FFF2-40B4-BE49-F238E27FC236}">
+                <a16:creationId xmlns:a16="http://schemas.microsoft.com/office/drawing/2014/main" id="{361757A0-443B-45D5-B34C-35C7D8AFC367}"/>
+              </a:ext>
+            </a:extLst>
+          </p:cNvPr>
+          <p:cNvSpPr>
+            <a:spLocks xmlns:a="http://schemas.openxmlformats.org/drawingml/2006/main" noGrp="1"/>
+          </p:cNvSpPr>
+          <p:nvPr/>
+        </p:nvSpPr>
+        <p:spPr>
+          <a:xfrm xmlns:a="http://schemas.openxmlformats.org/drawingml/2006/main">
+            <a:off x="609600" y="457200"/>
+            <a:ext cx="10972800" cy="1000125"/>
+          </a:xfrm>
+          <a:prstGeom xmlns:a="http://schemas.openxmlformats.org/drawingml/2006/main" prst="rect">
+            <a:avLst/>
+          </a:prstGeom>
+          <a:noFill xmlns:a="http://schemas.openxmlformats.org/drawingml/2006/main"/>
+          <a:ln xmlns:a="http://schemas.openxmlformats.org/drawingml/2006/main" w="0">
+            <a:noFill/>
+            <a:prstDash val="solid"/>
+          </a:ln>
+        </p:spPr>
+        <p:txBody>
+          <a:bodyPr xmlns:a="http://schemas.openxmlformats.org/drawingml/2006/main"/>
+          <a:lstStyle xmlns:a="http://schemas.openxmlformats.org/drawingml/2006/main">
+            <a:defPPr>
+              <a:defRPr sz="3300" b="1">
+                <a:solidFill>
+                  <a:srgbClr val="18334A"/>
+                </a:solidFill>
+                <a:latin typeface="Arial"/>
+                <a:ea typeface="Arial"/>
+                <a:cs typeface="Arial"/>
+              </a:defRPr>
+            </a:defPPr>
+          </a:lstStyle>
+          <a:p xmlns:a="http://schemas.openxmlformats.org/drawingml/2006/main">
+            <a:pPr>
+              <a:buNone/>
+              <a:defRPr sz="3300" b="1">
+                <a:solidFill>
+                  <a:srgbClr val="18334A"/>
+                </a:solidFill>
+                <a:latin typeface="Arial"/>
+                <a:ea typeface="Arial"/>
+                <a:cs typeface="Arial"/>
+              </a:defRPr>
+            </a:pPr>
+            <a:r>
+              <a:rPr sz="3300" b="1">
+                <a:solidFill>
+                  <a:srgbClr val="18334A"/>
+                </a:solidFill>
+                <a:latin typeface="Arial"/>
+                <a:ea typeface="Arial"/>
+                <a:cs typeface="Arial"/>
+              </a:rPr>
+              <a:t>Dependency-ordered follow-up</a:t>
             </a:r>
           </a:p>
         </p:txBody>
@@ -8291,7 +9192,7 @@
           <p:cNvPr id="2" name="body">
             <a:extLst xmlns:a="http://schemas.openxmlformats.org/drawingml/2006/main">
               <a:ext uri="{FF2B5EF4-FFF2-40B4-BE49-F238E27FC236}">
-                <a16:creationId xmlns:a16="http://schemas.microsoft.com/office/drawing/2014/main" id="{26036B0C-9799-4524-B2E9-AE0B5E1DF47B}"/>
+                <a16:creationId xmlns:a16="http://schemas.microsoft.com/office/drawing/2014/main" id="{4F53DD1E-5E7C-495D-B199-1834BCD98D23}"/>
               </a:ext>
             </a:extLst>
           </p:cNvPr>
@@ -8330,6 +9231,7 @@
           </a:lstStyle>
           <a:p xmlns:a="http://schemas.openxmlformats.org/drawingml/2006/main">
             <a:pPr>
+              <a:buNone/>
               <a:defRPr sz="2250" b="0">
                 <a:solidFill>
                   <a:srgbClr val="18334A"/>
@@ -8348,11 +9250,12 @@
                 <a:ea typeface="Arial"/>
                 <a:cs typeface="Arial"/>
               </a:rPr>
-              <a:t>Inspect sources and receipts; repeat selected exercises.</a:t>
+              <a:t>1. Stabilize policies, identity and toolchain: 028/029/037.</a:t>
             </a:r>
           </a:p>
           <a:p xmlns:a="http://schemas.openxmlformats.org/drawingml/2006/main">
             <a:pPr>
+              <a:buNone/>
               <a:defRPr sz="2250" b="0">
                 <a:solidFill>
                   <a:srgbClr val="18334A"/>
@@ -8371,11 +9274,12 @@
                 <a:ea typeface="Arial"/>
                 <a:cs typeface="Arial"/>
               </a:rPr>
-              <a:t>Assess PROJECT as an optional qualified path.</a:t>
+              <a:t>2. Capture, migration authority and artifacts: 020/037/038.</a:t>
             </a:r>
           </a:p>
           <a:p xmlns:a="http://schemas.openxmlformats.org/drawingml/2006/main">
             <a:pPr>
+              <a:buNone/>
               <a:defRPr sz="2250" b="0">
                 <a:solidFill>
                   <a:srgbClr val="18334A"/>
@@ -8394,11 +9298,12 @@
                 <a:ea typeface="Arial"/>
                 <a:cs typeface="Arial"/>
               </a:rPr>
-              <a:t>Assess Working Copies with explicit coordination policy.</a:t>
+              <a:t>3. Coordination and synchronization: 019/039/042.</a:t>
             </a:r>
           </a:p>
           <a:p xmlns:a="http://schemas.openxmlformats.org/drawingml/2006/main">
             <a:pPr>
+              <a:buNone/>
               <a:defRPr sz="2250" b="0">
                 <a:solidFill>
                   <a:srgbClr val="18334A"/>
@@ -8417,11 +9322,12 @@
                 <a:ea typeface="Arial"/>
                 <a:cs typeface="Arial"/>
               </a:rPr>
-              <a:t>Keep useful E.1 controls; avoid duplicate source/migration authority.</a:t>
+              <a:t>4. Admission, drift, recovery, provenance: 021–024/031/045; 052.</a:t>
             </a:r>
           </a:p>
           <a:p xmlns:a="http://schemas.openxmlformats.org/drawingml/2006/main">
             <a:pPr>
+              <a:buNone/>
               <a:defRPr sz="2250" b="0">
                 <a:solidFill>
                   <a:srgbClr val="18334A"/>
@@ -8440,7 +9346,31 @@
                 <a:ea typeface="Arial"/>
                 <a:cs typeface="Arial"/>
               </a:rPr>
-              <a:t>Record feedback and the Product Owner handover decision.</a:t>
+              <a:t>5. Validation, pipelines and reproduction: 034/040/041/030/043/017/046/047.</a:t>
+            </a:r>
+          </a:p>
+          <a:p xmlns:a="http://schemas.openxmlformats.org/drawingml/2006/main">
+            <a:pPr>
+              <a:buNone/>
+              <a:defRPr sz="2250" b="0">
+                <a:solidFill>
+                  <a:srgbClr val="18334A"/>
+                </a:solidFill>
+                <a:latin typeface="Arial"/>
+                <a:ea typeface="Arial"/>
+                <a:cs typeface="Arial"/>
+              </a:defRPr>
+            </a:pPr>
+            <a:r>
+              <a:rPr sz="2250" b="0">
+                <a:solidFill>
+                  <a:srgbClr val="18334A"/>
+                </a:solidFill>
+                <a:latin typeface="Arial"/>
+                <a:ea typeface="Arial"/>
+                <a:cs typeface="Arial"/>
+              </a:rPr>
+              <a:t>6. Complex Foundation upgrades: 048–050 in E.5.</a:t>
             </a:r>
           </a:p>
         </p:txBody>
@@ -8450,7 +9380,7 @@
           <p:cNvPr id="3" name="page">
             <a:extLst xmlns:a="http://schemas.openxmlformats.org/drawingml/2006/main">
               <a:ext uri="{FF2B5EF4-FFF2-40B4-BE49-F238E27FC236}">
-                <a16:creationId xmlns:a16="http://schemas.microsoft.com/office/drawing/2014/main" id="{3384D0E6-BC68-4390-9688-7FC4EAB72F35}"/>
+                <a16:creationId xmlns:a16="http://schemas.microsoft.com/office/drawing/2014/main" id="{6AB39BD0-D6B2-40F3-9E34-720623A901DC}"/>
               </a:ext>
             </a:extLst>
           </p:cNvPr>
@@ -8489,6 +9419,7 @@
           </a:lstStyle>
           <a:p xmlns:a="http://schemas.openxmlformats.org/drawingml/2006/main">
             <a:pPr>
+              <a:buNone/>
               <a:defRPr sz="1350" b="0">
                 <a:solidFill>
                   <a:srgbClr val="526574"/>
@@ -8507,7 +9438,352 @@
                 <a:ea typeface="Arial"/>
                 <a:cs typeface="Arial"/>
               </a:rPr>
-              <a:t>20</a:t>
+              <a:t>21</a:t>
+            </a:r>
+          </a:p>
+        </p:txBody>
+      </p:sp>
+    </p:spTree>
+    <p:extLst>
+      <p:ext uri="{BB962C8B-B14F-4D97-AF65-F5344CB8AC3E}">
+        <p14:creationId xmlns:p14="http://schemas.microsoft.com/office/powerpoint/2010/main" val="524872485"/>
+      </p:ext>
+    </p:extLst>
+  </p:cSld>
+</p:sld>
+</file>
+
+<file path=ppt/slides/slide22.xml><?xml version="1.0" encoding="utf-8"?>
+<p:sld xmlns:p="http://schemas.openxmlformats.org/presentationml/2006/main">
+  <p:cSld>
+    <p:bg>
+      <p:bgPr>
+        <a:solidFill xmlns:a="http://schemas.openxmlformats.org/drawingml/2006/main">
+          <a:srgbClr val="FFFFFF"/>
+        </a:solidFill>
+      </p:bgPr>
+    </p:bg>
+    <p:spTree>
+      <p:nvGrpSpPr>
+        <p:cNvPr id="1" name=""/>
+        <p:cNvGrpSpPr/>
+        <p:nvPr/>
+      </p:nvGrpSpPr>
+      <p:grpSpPr>
+        <a:xfrm xmlns:a="http://schemas.openxmlformats.org/drawingml/2006/main"/>
+      </p:grpSpPr>
+      <p:sp>
+        <p:nvSpPr>
+          <p:cNvPr id="4" name="title">
+            <a:extLst xmlns:a="http://schemas.openxmlformats.org/drawingml/2006/main">
+              <a:ext uri="{FF2B5EF4-FFF2-40B4-BE49-F238E27FC236}">
+                <a16:creationId xmlns:a16="http://schemas.microsoft.com/office/drawing/2014/main" id="{7DD24736-D89A-4895-9900-924BFDA2A8C1}"/>
+              </a:ext>
+            </a:extLst>
+          </p:cNvPr>
+          <p:cNvSpPr>
+            <a:spLocks xmlns:a="http://schemas.openxmlformats.org/drawingml/2006/main" noGrp="1"/>
+          </p:cNvSpPr>
+          <p:nvPr/>
+        </p:nvSpPr>
+        <p:spPr>
+          <a:xfrm xmlns:a="http://schemas.openxmlformats.org/drawingml/2006/main">
+            <a:off x="609600" y="457200"/>
+            <a:ext cx="10972800" cy="1000125"/>
+          </a:xfrm>
+          <a:prstGeom xmlns:a="http://schemas.openxmlformats.org/drawingml/2006/main" prst="rect">
+            <a:avLst/>
+          </a:prstGeom>
+          <a:noFill xmlns:a="http://schemas.openxmlformats.org/drawingml/2006/main"/>
+          <a:ln xmlns:a="http://schemas.openxmlformats.org/drawingml/2006/main" w="0">
+            <a:noFill/>
+            <a:prstDash val="solid"/>
+          </a:ln>
+        </p:spPr>
+        <p:txBody>
+          <a:bodyPr xmlns:a="http://schemas.openxmlformats.org/drawingml/2006/main"/>
+          <a:lstStyle xmlns:a="http://schemas.openxmlformats.org/drawingml/2006/main">
+            <a:defPPr>
+              <a:defRPr sz="3300" b="1">
+                <a:solidFill>
+                  <a:srgbClr val="18334A"/>
+                </a:solidFill>
+                <a:latin typeface="Arial"/>
+                <a:ea typeface="Arial"/>
+                <a:cs typeface="Arial"/>
+              </a:defRPr>
+            </a:defPPr>
+          </a:lstStyle>
+          <a:p xmlns:a="http://schemas.openxmlformats.org/drawingml/2006/main">
+            <a:pPr>
+              <a:buNone/>
+              <a:defRPr sz="3300" b="1">
+                <a:solidFill>
+                  <a:srgbClr val="18334A"/>
+                </a:solidFill>
+                <a:latin typeface="Arial"/>
+                <a:ea typeface="Arial"/>
+                <a:cs typeface="Arial"/>
+              </a:defRPr>
+            </a:pPr>
+            <a:r>
+              <a:rPr sz="3300" b="1">
+                <a:solidFill>
+                  <a:srgbClr val="18334A"/>
+                </a:solidFill>
+                <a:latin typeface="Arial"/>
+                <a:ea typeface="Arial"/>
+                <a:cs typeface="Arial"/>
+              </a:rPr>
+              <a:t>Review and decide together</a:t>
+            </a:r>
+          </a:p>
+        </p:txBody>
+      </p:sp>
+      <p:sp>
+        <p:nvSpPr>
+          <p:cNvPr id="3" name="page">
+            <a:extLst xmlns:a="http://schemas.openxmlformats.org/drawingml/2006/main">
+              <a:ext uri="{FF2B5EF4-FFF2-40B4-BE49-F238E27FC236}">
+                <a16:creationId xmlns:a16="http://schemas.microsoft.com/office/drawing/2014/main" id="{3384D0E6-BC68-4390-9688-7FC4EAB72F35}"/>
+              </a:ext>
+            </a:extLst>
+          </p:cNvPr>
+          <p:cNvSpPr>
+            <a:spLocks xmlns:a="http://schemas.openxmlformats.org/drawingml/2006/main" noGrp="1"/>
+          </p:cNvSpPr>
+          <p:nvPr/>
+        </p:nvSpPr>
+        <p:spPr>
+          <a:xfrm xmlns:a="http://schemas.openxmlformats.org/drawingml/2006/main">
+            <a:off x="11334750" y="6429375"/>
+            <a:ext cx="476250" cy="266700"/>
+          </a:xfrm>
+          <a:prstGeom xmlns:a="http://schemas.openxmlformats.org/drawingml/2006/main" prst="rect">
+            <a:avLst/>
+          </a:prstGeom>
+          <a:noFill xmlns:a="http://schemas.openxmlformats.org/drawingml/2006/main"/>
+          <a:ln xmlns:a="http://schemas.openxmlformats.org/drawingml/2006/main" w="0">
+            <a:noFill/>
+            <a:prstDash val="solid"/>
+          </a:ln>
+        </p:spPr>
+        <p:txBody>
+          <a:bodyPr xmlns:a="http://schemas.openxmlformats.org/drawingml/2006/main"/>
+          <a:lstStyle xmlns:a="http://schemas.openxmlformats.org/drawingml/2006/main">
+            <a:defPPr>
+              <a:defRPr sz="1350" b="0">
+                <a:solidFill>
+                  <a:srgbClr val="526574"/>
+                </a:solidFill>
+                <a:latin typeface="Arial"/>
+                <a:ea typeface="Arial"/>
+                <a:cs typeface="Arial"/>
+              </a:defRPr>
+            </a:defPPr>
+          </a:lstStyle>
+          <a:p xmlns:a="http://schemas.openxmlformats.org/drawingml/2006/main">
+            <a:pPr>
+              <a:buNone/>
+              <a:defRPr sz="1350" b="0">
+                <a:solidFill>
+                  <a:srgbClr val="526574"/>
+                </a:solidFill>
+                <a:latin typeface="Arial"/>
+                <a:ea typeface="Arial"/>
+                <a:cs typeface="Arial"/>
+              </a:defRPr>
+            </a:pPr>
+            <a:r>
+              <a:rPr sz="1350" b="0">
+                <a:solidFill>
+                  <a:srgbClr val="526574"/>
+                </a:solidFill>
+                <a:latin typeface="Arial"/>
+                <a:ea typeface="Arial"/>
+                <a:cs typeface="Arial"/>
+              </a:rPr>
+              <a:t>22</a:t>
+            </a:r>
+          </a:p>
+        </p:txBody>
+      </p:sp>
+      <p:sp>
+        <p:nvSpPr>
+          <p:cNvPr id="5" name="body">
+            <a:extLst xmlns:a="http://schemas.openxmlformats.org/drawingml/2006/main">
+              <a:ext uri="{FF2B5EF4-FFF2-40B4-BE49-F238E27FC236}">
+                <a16:creationId xmlns:a16="http://schemas.microsoft.com/office/drawing/2014/main" id="{86E033C5-A17F-40C6-82A4-4A0CBBF11A08}"/>
+              </a:ext>
+            </a:extLst>
+          </p:cNvPr>
+          <p:cNvSpPr>
+            <a:spLocks xmlns:a="http://schemas.openxmlformats.org/drawingml/2006/main" noGrp="1"/>
+          </p:cNvSpPr>
+          <p:nvPr/>
+        </p:nvSpPr>
+        <p:spPr>
+          <a:xfrm xmlns:a="http://schemas.openxmlformats.org/drawingml/2006/main">
+            <a:off x="609600" y="1666875"/>
+            <a:ext cx="10972800" cy="4191000"/>
+          </a:xfrm>
+          <a:prstGeom xmlns:a="http://schemas.openxmlformats.org/drawingml/2006/main" prst="rect">
+            <a:avLst/>
+          </a:prstGeom>
+          <a:noFill xmlns:a="http://schemas.openxmlformats.org/drawingml/2006/main"/>
+          <a:ln xmlns:a="http://schemas.openxmlformats.org/drawingml/2006/main" w="0">
+            <a:noFill/>
+          </a:ln>
+        </p:spPr>
+        <p:txBody>
+          <a:bodyPr xmlns:a="http://schemas.openxmlformats.org/drawingml/2006/main">
+            <a:noAutofit/>
+          </a:bodyPr>
+          <a:lstStyle xmlns:a="http://schemas.openxmlformats.org/drawingml/2006/main">
+            <a:defPPr>
+              <a:defRPr sz="2250">
+                <a:solidFill>
+                  <a:srgbClr val="18334A"/>
+                </a:solidFill>
+                <a:latin typeface="Arial"/>
+                <a:ea typeface="Arial"/>
+                <a:cs typeface="Arial"/>
+              </a:defRPr>
+            </a:defPPr>
+          </a:lstStyle>
+          <a:p xmlns:a="http://schemas.openxmlformats.org/drawingml/2006/main">
+            <a:pPr marL="228600" indent="-152400">
+              <a:spcAft>
+                <a:spcPts val="600"/>
+              </a:spcAft>
+              <a:buChar char="•"/>
+              <a:defRPr sz="2250">
+                <a:solidFill>
+                  <a:srgbClr val="18334A"/>
+                </a:solidFill>
+                <a:latin typeface="Arial"/>
+                <a:ea typeface="Arial"/>
+                <a:cs typeface="Arial"/>
+              </a:defRPr>
+            </a:pPr>
+            <a:r>
+              <a:rPr sz="2250">
+                <a:solidFill>
+                  <a:srgbClr val="18334A"/>
+                </a:solidFill>
+                <a:latin typeface="Arial"/>
+                <a:ea typeface="Arial"/>
+                <a:cs typeface="Arial"/>
+              </a:rPr>
+              <a:t>Inspect sources and receipts; repeat selected exercises.</a:t>
+            </a:r>
+          </a:p>
+          <a:p xmlns:a="http://schemas.openxmlformats.org/drawingml/2006/main">
+            <a:pPr marL="228600" indent="-152400">
+              <a:spcAft>
+                <a:spcPts val="600"/>
+              </a:spcAft>
+              <a:buChar char="•"/>
+              <a:defRPr sz="2250">
+                <a:solidFill>
+                  <a:srgbClr val="18334A"/>
+                </a:solidFill>
+                <a:latin typeface="Arial"/>
+                <a:ea typeface="Arial"/>
+                <a:cs typeface="Arial"/>
+              </a:defRPr>
+            </a:pPr>
+            <a:r>
+              <a:rPr sz="2250">
+                <a:solidFill>
+                  <a:srgbClr val="18334A"/>
+                </a:solidFill>
+                <a:latin typeface="Arial"/>
+                <a:ea typeface="Arial"/>
+                <a:cs typeface="Arial"/>
+              </a:rPr>
+              <a:t>Assess SQLcl PROJECT as an optional qualified path.</a:t>
+            </a:r>
+          </a:p>
+          <a:p xmlns:a="http://schemas.openxmlformats.org/drawingml/2006/main">
+            <a:pPr marL="228600" indent="-152400">
+              <a:spcAft>
+                <a:spcPts val="600"/>
+              </a:spcAft>
+              <a:buChar char="•"/>
+              <a:defRPr sz="2250">
+                <a:solidFill>
+                  <a:srgbClr val="18334A"/>
+                </a:solidFill>
+                <a:latin typeface="Arial"/>
+                <a:ea typeface="Arial"/>
+                <a:cs typeface="Arial"/>
+              </a:defRPr>
+            </a:pPr>
+            <a:r>
+              <a:rPr sz="2250">
+                <a:solidFill>
+                  <a:srgbClr val="18334A"/>
+                </a:solidFill>
+                <a:latin typeface="Arial"/>
+                <a:ea typeface="Arial"/>
+                <a:cs typeface="Arial"/>
+              </a:rPr>
+              <a:t>Assess Working Copies with explicit coordination policy.</a:t>
+            </a:r>
+          </a:p>
+          <a:p xmlns:a="http://schemas.openxmlformats.org/drawingml/2006/main">
+            <a:pPr marL="228600" indent="-152400">
+              <a:spcAft>
+                <a:spcPts val="600"/>
+              </a:spcAft>
+              <a:buChar char="•"/>
+              <a:defRPr sz="2250">
+                <a:solidFill>
+                  <a:srgbClr val="18334A"/>
+                </a:solidFill>
+                <a:latin typeface="Arial"/>
+                <a:ea typeface="Arial"/>
+                <a:cs typeface="Arial"/>
+              </a:defRPr>
+            </a:pPr>
+            <a:r>
+              <a:rPr sz="2250">
+                <a:solidFill>
+                  <a:srgbClr val="18334A"/>
+                </a:solidFill>
+                <a:latin typeface="Arial"/>
+                <a:ea typeface="Arial"/>
+                <a:cs typeface="Arial"/>
+              </a:rPr>
+              <a:t>Keep useful E.1 controls; avoid duplicate source/migration authority.</a:t>
+            </a:r>
+          </a:p>
+          <a:p xmlns:a="http://schemas.openxmlformats.org/drawingml/2006/main">
+            <a:pPr marL="228600" indent="-152400">
+              <a:spcAft>
+                <a:spcPts val="600"/>
+              </a:spcAft>
+              <a:buChar char="•"/>
+              <a:defRPr sz="2250">
+                <a:solidFill>
+                  <a:srgbClr val="18334A"/>
+                </a:solidFill>
+                <a:latin typeface="Arial"/>
+                <a:ea typeface="Arial"/>
+                <a:cs typeface="Arial"/>
+              </a:defRPr>
+            </a:pPr>
+            <a:r>
+              <a:rPr sz="2250">
+                <a:solidFill>
+                  <a:srgbClr val="18334A"/>
+                </a:solidFill>
+                <a:latin typeface="Arial"/>
+                <a:ea typeface="Arial"/>
+                <a:cs typeface="Arial"/>
+              </a:rPr>
+              <a:t>Record feedback and the Product Owner handover decision.</a:t>
             </a:r>
           </a:p>
         </p:txBody>
@@ -8585,6 +9861,7 @@
           </a:lstStyle>
           <a:p xmlns:a="http://schemas.openxmlformats.org/drawingml/2006/main">
             <a:pPr>
+              <a:buNone/>
               <a:defRPr sz="3300" b="1">
                 <a:solidFill>
                   <a:srgbClr val="18334A"/>
@@ -8604,165 +9881,6 @@
                 <a:cs typeface="Arial"/>
               </a:rPr>
               <a:t>One checkpoint, complementary capabilities</a:t>
-            </a:r>
-          </a:p>
-        </p:txBody>
-      </p:sp>
-      <p:sp>
-        <p:nvSpPr>
-          <p:cNvPr id="2" name="body">
-            <a:extLst xmlns:a="http://schemas.openxmlformats.org/drawingml/2006/main">
-              <a:ext uri="{FF2B5EF4-FFF2-40B4-BE49-F238E27FC236}">
-                <a16:creationId xmlns:a16="http://schemas.microsoft.com/office/drawing/2014/main" id="{F007C53A-31A1-4E58-9B74-15FECD8683F6}"/>
-              </a:ext>
-            </a:extLst>
-          </p:cNvPr>
-          <p:cNvSpPr>
-            <a:spLocks xmlns:a="http://schemas.openxmlformats.org/drawingml/2006/main" noGrp="1"/>
-          </p:cNvSpPr>
-          <p:nvPr/>
-        </p:nvSpPr>
-        <p:spPr>
-          <a:xfrm xmlns:a="http://schemas.openxmlformats.org/drawingml/2006/main">
-            <a:off x="609600" y="1666875"/>
-            <a:ext cx="10972800" cy="4191000"/>
-          </a:xfrm>
-          <a:prstGeom xmlns:a="http://schemas.openxmlformats.org/drawingml/2006/main" prst="rect">
-            <a:avLst/>
-          </a:prstGeom>
-          <a:noFill xmlns:a="http://schemas.openxmlformats.org/drawingml/2006/main"/>
-          <a:ln xmlns:a="http://schemas.openxmlformats.org/drawingml/2006/main" w="0">
-            <a:noFill/>
-            <a:prstDash val="solid"/>
-          </a:ln>
-        </p:spPr>
-        <p:txBody>
-          <a:bodyPr xmlns:a="http://schemas.openxmlformats.org/drawingml/2006/main"/>
-          <a:lstStyle xmlns:a="http://schemas.openxmlformats.org/drawingml/2006/main">
-            <a:defPPr>
-              <a:defRPr sz="2250" b="0">
-                <a:solidFill>
-                  <a:srgbClr val="18334A"/>
-                </a:solidFill>
-                <a:latin typeface="Arial"/>
-                <a:ea typeface="Arial"/>
-                <a:cs typeface="Arial"/>
-              </a:defRPr>
-            </a:defPPr>
-          </a:lstStyle>
-          <a:p xmlns:a="http://schemas.openxmlformats.org/drawingml/2006/main">
-            <a:pPr>
-              <a:defRPr sz="2250" b="0">
-                <a:solidFill>
-                  <a:srgbClr val="18334A"/>
-                </a:solidFill>
-                <a:latin typeface="Arial"/>
-                <a:ea typeface="Arial"/>
-                <a:cs typeface="Arial"/>
-              </a:defRPr>
-            </a:pPr>
-            <a:r>
-              <a:rPr sz="2250" b="0">
-                <a:solidFill>
-                  <a:srgbClr val="18334A"/>
-                </a:solidFill>
-                <a:latin typeface="Arial"/>
-                <a:ea typeface="Arial"/>
-                <a:cs typeface="Arial"/>
-              </a:rPr>
-              <a:t>APEX Main owns the agreed authoring state.</a:t>
-            </a:r>
-          </a:p>
-          <a:p xmlns:a="http://schemas.openxmlformats.org/drawingml/2006/main">
-            <a:pPr>
-              <a:defRPr sz="2250" b="0">
-                <a:solidFill>
-                  <a:srgbClr val="18334A"/>
-                </a:solidFill>
-                <a:latin typeface="Arial"/>
-                <a:ea typeface="Arial"/>
-                <a:cs typeface="Arial"/>
-              </a:defRPr>
-            </a:pPr>
-            <a:r>
-              <a:rPr sz="2250" b="0">
-                <a:solidFill>
-                  <a:srgbClr val="18334A"/>
-                </a:solidFill>
-                <a:latin typeface="Arial"/>
-                <a:ea typeface="Arial"/>
-                <a:cs typeface="Arial"/>
-              </a:rPr>
-              <a:t>Working Copies support selected metadata changes.</a:t>
-            </a:r>
-          </a:p>
-          <a:p xmlns:a="http://schemas.openxmlformats.org/drawingml/2006/main">
-            <a:pPr>
-              <a:defRPr sz="2250" b="0">
-                <a:solidFill>
-                  <a:srgbClr val="18334A"/>
-                </a:solidFill>
-                <a:latin typeface="Arial"/>
-                <a:ea typeface="Arial"/>
-                <a:cs typeface="Arial"/>
-              </a:defRPr>
-            </a:pPr>
-            <a:r>
-              <a:rPr sz="2250" b="0">
-                <a:solidFill>
-                  <a:srgbClr val="18334A"/>
-                </a:solidFill>
-                <a:latin typeface="Arial"/>
-                <a:ea typeface="Arial"/>
-                <a:cs typeface="Arial"/>
-              </a:rPr>
-              <a:t>PROJECT captures Main and stages native migrations.</a:t>
-            </a:r>
-          </a:p>
-          <a:p xmlns:a="http://schemas.openxmlformats.org/drawingml/2006/main">
-            <a:pPr>
-              <a:defRPr sz="2250" b="0">
-                <a:solidFill>
-                  <a:srgbClr val="18334A"/>
-                </a:solidFill>
-                <a:latin typeface="Arial"/>
-                <a:ea typeface="Arial"/>
-                <a:cs typeface="Arial"/>
-              </a:defRPr>
-            </a:pPr>
-            <a:r>
-              <a:rPr sz="2250" b="0">
-                <a:solidFill>
-                  <a:srgbClr val="18334A"/>
-                </a:solidFill>
-                <a:latin typeface="Arial"/>
-                <a:ea typeface="Arial"/>
-                <a:cs typeface="Arial"/>
-              </a:rPr>
-              <a:t>Git retains reviewed source and distribution.</a:t>
-            </a:r>
-          </a:p>
-          <a:p xmlns:a="http://schemas.openxmlformats.org/drawingml/2006/main">
-            <a:pPr>
-              <a:defRPr sz="2250" b="0">
-                <a:solidFill>
-                  <a:srgbClr val="18334A"/>
-                </a:solidFill>
-                <a:latin typeface="Arial"/>
-                <a:ea typeface="Arial"/>
-                <a:cs typeface="Arial"/>
-              </a:defRPr>
-            </a:pPr>
-            <a:r>
-              <a:rPr sz="2250" b="0">
-                <a:solidFill>
-                  <a:srgbClr val="18334A"/>
-                </a:solidFill>
-                <a:latin typeface="Arial"/>
-                <a:ea typeface="Arial"/>
-                <a:cs typeface="Arial"/>
-              </a:rPr>
-              <a:t>E.1 controls remain where requirements need them.</a:t>
             </a:r>
           </a:p>
         </p:txBody>
@@ -8811,6 +9929,7 @@
           </a:lstStyle>
           <a:p xmlns:a="http://schemas.openxmlformats.org/drawingml/2006/main">
             <a:pPr>
+              <a:buNone/>
               <a:defRPr sz="1350" b="0">
                 <a:solidFill>
                   <a:srgbClr val="526574"/>
@@ -8830,6 +9949,186 @@
                 <a:cs typeface="Arial"/>
               </a:rPr>
               <a:t>3</a:t>
+            </a:r>
+          </a:p>
+        </p:txBody>
+      </p:sp>
+      <p:sp>
+        <p:nvSpPr>
+          <p:cNvPr id="5" name="body">
+            <a:extLst xmlns:a="http://schemas.openxmlformats.org/drawingml/2006/main">
+              <a:ext uri="{FF2B5EF4-FFF2-40B4-BE49-F238E27FC236}">
+                <a16:creationId xmlns:a16="http://schemas.microsoft.com/office/drawing/2014/main" id="{5990076B-CBB4-4BFC-940A-F1419EF75EC3}"/>
+              </a:ext>
+            </a:extLst>
+          </p:cNvPr>
+          <p:cNvSpPr>
+            <a:spLocks xmlns:a="http://schemas.openxmlformats.org/drawingml/2006/main" noGrp="1"/>
+          </p:cNvSpPr>
+          <p:nvPr/>
+        </p:nvSpPr>
+        <p:spPr>
+          <a:xfrm xmlns:a="http://schemas.openxmlformats.org/drawingml/2006/main">
+            <a:off x="609600" y="1666875"/>
+            <a:ext cx="10972800" cy="4191000"/>
+          </a:xfrm>
+          <a:prstGeom xmlns:a="http://schemas.openxmlformats.org/drawingml/2006/main" prst="rect">
+            <a:avLst/>
+          </a:prstGeom>
+          <a:noFill xmlns:a="http://schemas.openxmlformats.org/drawingml/2006/main"/>
+          <a:ln xmlns:a="http://schemas.openxmlformats.org/drawingml/2006/main" w="0">
+            <a:noFill/>
+          </a:ln>
+        </p:spPr>
+        <p:txBody>
+          <a:bodyPr xmlns:a="http://schemas.openxmlformats.org/drawingml/2006/main">
+            <a:noAutofit/>
+          </a:bodyPr>
+          <a:lstStyle xmlns:a="http://schemas.openxmlformats.org/drawingml/2006/main">
+            <a:defPPr>
+              <a:defRPr sz="2250">
+                <a:solidFill>
+                  <a:srgbClr val="18334A"/>
+                </a:solidFill>
+                <a:latin typeface="Arial"/>
+                <a:ea typeface="Arial"/>
+                <a:cs typeface="Arial"/>
+              </a:defRPr>
+            </a:defPPr>
+          </a:lstStyle>
+          <a:p xmlns:a="http://schemas.openxmlformats.org/drawingml/2006/main">
+            <a:pPr marL="228600" indent="-152400">
+              <a:spcAft>
+                <a:spcPts val="600"/>
+              </a:spcAft>
+              <a:buChar char="•"/>
+              <a:defRPr sz="2250">
+                <a:solidFill>
+                  <a:srgbClr val="18334A"/>
+                </a:solidFill>
+                <a:latin typeface="Arial"/>
+                <a:ea typeface="Arial"/>
+                <a:cs typeface="Arial"/>
+              </a:defRPr>
+            </a:pPr>
+            <a:r>
+              <a:rPr sz="2250">
+                <a:solidFill>
+                  <a:srgbClr val="18334A"/>
+                </a:solidFill>
+                <a:latin typeface="Arial"/>
+                <a:ea typeface="Arial"/>
+                <a:cs typeface="Arial"/>
+              </a:rPr>
+              <a:t>APEX Main owns the agreed authoring state.</a:t>
+            </a:r>
+          </a:p>
+          <a:p xmlns:a="http://schemas.openxmlformats.org/drawingml/2006/main">
+            <a:pPr marL="228600" indent="-152400">
+              <a:spcAft>
+                <a:spcPts val="600"/>
+              </a:spcAft>
+              <a:buChar char="•"/>
+              <a:defRPr sz="2250">
+                <a:solidFill>
+                  <a:srgbClr val="18334A"/>
+                </a:solidFill>
+                <a:latin typeface="Arial"/>
+                <a:ea typeface="Arial"/>
+                <a:cs typeface="Arial"/>
+              </a:defRPr>
+            </a:pPr>
+            <a:r>
+              <a:rPr sz="2250">
+                <a:solidFill>
+                  <a:srgbClr val="18334A"/>
+                </a:solidFill>
+                <a:latin typeface="Arial"/>
+                <a:ea typeface="Arial"/>
+                <a:cs typeface="Arial"/>
+              </a:rPr>
+              <a:t>Working Copies support selected metadata changes.</a:t>
+            </a:r>
+          </a:p>
+          <a:p xmlns:a="http://schemas.openxmlformats.org/drawingml/2006/main">
+            <a:pPr marL="228600" indent="-152400">
+              <a:spcAft>
+                <a:spcPts val="600"/>
+              </a:spcAft>
+              <a:buChar char="•"/>
+              <a:defRPr sz="2250">
+                <a:solidFill>
+                  <a:srgbClr val="18334A"/>
+                </a:solidFill>
+                <a:latin typeface="Arial"/>
+                <a:ea typeface="Arial"/>
+                <a:cs typeface="Arial"/>
+              </a:defRPr>
+            </a:pPr>
+            <a:r>
+              <a:rPr sz="2250">
+                <a:solidFill>
+                  <a:srgbClr val="18334A"/>
+                </a:solidFill>
+                <a:latin typeface="Arial"/>
+                <a:ea typeface="Arial"/>
+                <a:cs typeface="Arial"/>
+              </a:rPr>
+              <a:t>SQLcl PROJECT captures Main and stages native migrations.</a:t>
+            </a:r>
+          </a:p>
+          <a:p xmlns:a="http://schemas.openxmlformats.org/drawingml/2006/main">
+            <a:pPr marL="228600" indent="-152400">
+              <a:spcAft>
+                <a:spcPts val="600"/>
+              </a:spcAft>
+              <a:buChar char="•"/>
+              <a:defRPr sz="2250">
+                <a:solidFill>
+                  <a:srgbClr val="18334A"/>
+                </a:solidFill>
+                <a:latin typeface="Arial"/>
+                <a:ea typeface="Arial"/>
+                <a:cs typeface="Arial"/>
+              </a:defRPr>
+            </a:pPr>
+            <a:r>
+              <a:rPr sz="2250">
+                <a:solidFill>
+                  <a:srgbClr val="18334A"/>
+                </a:solidFill>
+                <a:latin typeface="Arial"/>
+                <a:ea typeface="Arial"/>
+                <a:cs typeface="Arial"/>
+              </a:rPr>
+              <a:t>Git retains reviewed source and distribution.</a:t>
+            </a:r>
+          </a:p>
+          <a:p xmlns:a="http://schemas.openxmlformats.org/drawingml/2006/main">
+            <a:pPr marL="228600" indent="-152400">
+              <a:spcAft>
+                <a:spcPts val="600"/>
+              </a:spcAft>
+              <a:buChar char="•"/>
+              <a:defRPr sz="2250">
+                <a:solidFill>
+                  <a:srgbClr val="18334A"/>
+                </a:solidFill>
+                <a:latin typeface="Arial"/>
+                <a:ea typeface="Arial"/>
+                <a:cs typeface="Arial"/>
+              </a:defRPr>
+            </a:pPr>
+            <a:r>
+              <a:rPr sz="2250">
+                <a:solidFill>
+                  <a:srgbClr val="18334A"/>
+                </a:solidFill>
+                <a:latin typeface="Arial"/>
+                <a:ea typeface="Arial"/>
+                <a:cs typeface="Arial"/>
+              </a:rPr>
+              <a:t>E.1 controls remain where requirements need them.</a:t>
             </a:r>
           </a:p>
         </p:txBody>
@@ -8907,6 +10206,7 @@
           </a:lstStyle>
           <a:p xmlns:a="http://schemas.openxmlformats.org/drawingml/2006/main">
             <a:pPr>
+              <a:buNone/>
               <a:defRPr sz="3300" b="1">
                 <a:solidFill>
                   <a:srgbClr val="18334A"/>
@@ -8925,166 +10225,7 @@
                 <a:ea typeface="Arial"/>
                 <a:cs typeface="Arial"/>
               </a:rPr>
-              <a:t>Scope and honest evidence</a:t>
-            </a:r>
-          </a:p>
-        </p:txBody>
-      </p:sp>
-      <p:sp>
-        <p:nvSpPr>
-          <p:cNvPr id="2" name="body">
-            <a:extLst xmlns:a="http://schemas.openxmlformats.org/drawingml/2006/main">
-              <a:ext uri="{FF2B5EF4-FFF2-40B4-BE49-F238E27FC236}">
-                <a16:creationId xmlns:a16="http://schemas.microsoft.com/office/drawing/2014/main" id="{AF2687B7-B5A6-4661-891D-02EE46E379EA}"/>
-              </a:ext>
-            </a:extLst>
-          </p:cNvPr>
-          <p:cNvSpPr>
-            <a:spLocks xmlns:a="http://schemas.openxmlformats.org/drawingml/2006/main" noGrp="1"/>
-          </p:cNvSpPr>
-          <p:nvPr/>
-        </p:nvSpPr>
-        <p:spPr>
-          <a:xfrm xmlns:a="http://schemas.openxmlformats.org/drawingml/2006/main">
-            <a:off x="609600" y="1666875"/>
-            <a:ext cx="10972800" cy="4191000"/>
-          </a:xfrm>
-          <a:prstGeom xmlns:a="http://schemas.openxmlformats.org/drawingml/2006/main" prst="rect">
-            <a:avLst/>
-          </a:prstGeom>
-          <a:noFill xmlns:a="http://schemas.openxmlformats.org/drawingml/2006/main"/>
-          <a:ln xmlns:a="http://schemas.openxmlformats.org/drawingml/2006/main" w="0">
-            <a:noFill/>
-            <a:prstDash val="solid"/>
-          </a:ln>
-        </p:spPr>
-        <p:txBody>
-          <a:bodyPr xmlns:a="http://schemas.openxmlformats.org/drawingml/2006/main"/>
-          <a:lstStyle xmlns:a="http://schemas.openxmlformats.org/drawingml/2006/main">
-            <a:defPPr>
-              <a:defRPr sz="2250" b="0">
-                <a:solidFill>
-                  <a:srgbClr val="18334A"/>
-                </a:solidFill>
-                <a:latin typeface="Arial"/>
-                <a:ea typeface="Arial"/>
-                <a:cs typeface="Arial"/>
-              </a:defRPr>
-            </a:defPPr>
-          </a:lstStyle>
-          <a:p xmlns:a="http://schemas.openxmlformats.org/drawingml/2006/main">
-            <a:pPr>
-              <a:defRPr sz="2250" b="0">
-                <a:solidFill>
-                  <a:srgbClr val="18334A"/>
-                </a:solidFill>
-                <a:latin typeface="Arial"/>
-                <a:ea typeface="Arial"/>
-                <a:cs typeface="Arial"/>
-              </a:defRPr>
-            </a:pPr>
-            <a:r>
-              <a:rPr sz="2250" b="0">
-                <a:solidFill>
-                  <a:srgbClr val="18334A"/>
-                </a:solidFill>
-                <a:latin typeface="Arial"/>
-                <a:ea typeface="Arial"/>
-                <a:cs typeface="Arial"/>
-              </a:rPr>
-              <a:t>Disposable Elaboration fixture; preserved E.1 history.</a:t>
-            </a:r>
-          </a:p>
-          <a:p xmlns:a="http://schemas.openxmlformats.org/drawingml/2006/main">
-            <a:pPr>
-              <a:defRPr sz="2250" b="0">
-                <a:solidFill>
-                  <a:srgbClr val="18334A"/>
-                </a:solidFill>
-                <a:latin typeface="Arial"/>
-                <a:ea typeface="Arial"/>
-                <a:cs typeface="Arial"/>
-              </a:defRPr>
-            </a:pPr>
-            <a:r>
-              <a:rPr sz="2250" b="0">
-                <a:solidFill>
-                  <a:srgbClr val="18334A"/>
-                </a:solidFill>
-                <a:latin typeface="Arial"/>
-                <a:ea typeface="Arial"/>
-                <a:cs typeface="Arial"/>
-              </a:rPr>
-              <a:t>APEX 24.2.0 · SQLcl 25.3.0.274.1210</a:t>
-            </a:r>
-          </a:p>
-          <a:p xmlns:a="http://schemas.openxmlformats.org/drawingml/2006/main">
-            <a:pPr>
-              <a:defRPr sz="2250" b="0">
-                <a:solidFill>
-                  <a:srgbClr val="18334A"/>
-                </a:solidFill>
-                <a:latin typeface="Arial"/>
-                <a:ea typeface="Arial"/>
-                <a:cs typeface="Arial"/>
-              </a:defRPr>
-            </a:pPr>
-            <a:r>
-              <a:rPr sz="2250" b="0">
-                <a:solidFill>
-                  <a:srgbClr val="18334A"/>
-                </a:solidFill>
-                <a:latin typeface="Arial"/>
-                <a:ea typeface="Arial"/>
-                <a:cs typeface="Arial"/>
-              </a:rPr>
-              <a:t>Oracle AI Database 26ai Free, 23.26.3.0.0</a:t>
-            </a:r>
-          </a:p>
-          <a:p xmlns:a="http://schemas.openxmlformats.org/drawingml/2006/main">
-            <a:pPr>
-              <a:defRPr sz="2250" b="0">
-                <a:solidFill>
-                  <a:srgbClr val="18334A"/>
-                </a:solidFill>
-                <a:latin typeface="Arial"/>
-                <a:ea typeface="Arial"/>
-                <a:cs typeface="Arial"/>
-              </a:defRPr>
-            </a:pPr>
-            <a:r>
-              <a:rPr sz="2250" b="0">
-                <a:solidFill>
-                  <a:srgbClr val="18334A"/>
-                </a:solidFill>
-                <a:latin typeface="Arial"/>
-                <a:ea typeface="Arial"/>
-                <a:cs typeface="Arial"/>
-              </a:rPr>
-              <a:t>Owned authoring, fresh and populated targets.</a:t>
-            </a:r>
-          </a:p>
-          <a:p xmlns:a="http://schemas.openxmlformats.org/drawingml/2006/main">
-            <a:pPr>
-              <a:defRPr sz="2250" b="0">
-                <a:solidFill>
-                  <a:srgbClr val="18334A"/>
-                </a:solidFill>
-                <a:latin typeface="Arial"/>
-                <a:ea typeface="Arial"/>
-                <a:cs typeface="Arial"/>
-              </a:defRPr>
-            </a:pPr>
-            <a:r>
-              <a:rPr sz="2250" b="0">
-                <a:solidFill>
-                  <a:srgbClr val="18334A"/>
-                </a:solidFill>
-                <a:latin typeface="Arial"/>
-                <a:ea typeface="Arial"/>
-                <a:cs typeface="Arial"/>
-              </a:rPr>
-              <a:t>No production adoption or complex Foundation upgrade.</a:t>
+              <a:t>Scope and evidence</a:t>
             </a:r>
           </a:p>
         </p:txBody>
@@ -9133,6 +10274,7 @@
           </a:lstStyle>
           <a:p xmlns:a="http://schemas.openxmlformats.org/drawingml/2006/main">
             <a:pPr>
+              <a:buNone/>
               <a:defRPr sz="1350" b="0">
                 <a:solidFill>
                   <a:srgbClr val="526574"/>
@@ -9152,6 +10294,186 @@
                 <a:cs typeface="Arial"/>
               </a:rPr>
               <a:t>4</a:t>
+            </a:r>
+          </a:p>
+        </p:txBody>
+      </p:sp>
+      <p:sp>
+        <p:nvSpPr>
+          <p:cNvPr id="5" name="body">
+            <a:extLst xmlns:a="http://schemas.openxmlformats.org/drawingml/2006/main">
+              <a:ext uri="{FF2B5EF4-FFF2-40B4-BE49-F238E27FC236}">
+                <a16:creationId xmlns:a16="http://schemas.microsoft.com/office/drawing/2014/main" id="{0B77E810-48A8-4A12-95AE-AADFBEC784F5}"/>
+              </a:ext>
+            </a:extLst>
+          </p:cNvPr>
+          <p:cNvSpPr>
+            <a:spLocks xmlns:a="http://schemas.openxmlformats.org/drawingml/2006/main" noGrp="1"/>
+          </p:cNvSpPr>
+          <p:nvPr/>
+        </p:nvSpPr>
+        <p:spPr>
+          <a:xfrm xmlns:a="http://schemas.openxmlformats.org/drawingml/2006/main">
+            <a:off x="609600" y="1666875"/>
+            <a:ext cx="10972800" cy="4191000"/>
+          </a:xfrm>
+          <a:prstGeom xmlns:a="http://schemas.openxmlformats.org/drawingml/2006/main" prst="rect">
+            <a:avLst/>
+          </a:prstGeom>
+          <a:noFill xmlns:a="http://schemas.openxmlformats.org/drawingml/2006/main"/>
+          <a:ln xmlns:a="http://schemas.openxmlformats.org/drawingml/2006/main" w="0">
+            <a:noFill/>
+          </a:ln>
+        </p:spPr>
+        <p:txBody>
+          <a:bodyPr xmlns:a="http://schemas.openxmlformats.org/drawingml/2006/main">
+            <a:noAutofit/>
+          </a:bodyPr>
+          <a:lstStyle xmlns:a="http://schemas.openxmlformats.org/drawingml/2006/main">
+            <a:defPPr>
+              <a:defRPr sz="2250">
+                <a:solidFill>
+                  <a:srgbClr val="18334A"/>
+                </a:solidFill>
+                <a:latin typeface="Arial"/>
+                <a:ea typeface="Arial"/>
+                <a:cs typeface="Arial"/>
+              </a:defRPr>
+            </a:defPPr>
+          </a:lstStyle>
+          <a:p xmlns:a="http://schemas.openxmlformats.org/drawingml/2006/main">
+            <a:pPr marL="228600" indent="-152400">
+              <a:spcAft>
+                <a:spcPts val="600"/>
+              </a:spcAft>
+              <a:buChar char="•"/>
+              <a:defRPr sz="2250">
+                <a:solidFill>
+                  <a:srgbClr val="18334A"/>
+                </a:solidFill>
+                <a:latin typeface="Arial"/>
+                <a:ea typeface="Arial"/>
+                <a:cs typeface="Arial"/>
+              </a:defRPr>
+            </a:pPr>
+            <a:r>
+              <a:rPr sz="2250">
+                <a:solidFill>
+                  <a:srgbClr val="18334A"/>
+                </a:solidFill>
+                <a:latin typeface="Arial"/>
+                <a:ea typeface="Arial"/>
+                <a:cs typeface="Arial"/>
+              </a:rPr>
+              <a:t>Disposable Elaboration fixture; preserved E.1 history.</a:t>
+            </a:r>
+          </a:p>
+          <a:p xmlns:a="http://schemas.openxmlformats.org/drawingml/2006/main">
+            <a:pPr marL="228600" indent="-152400">
+              <a:spcAft>
+                <a:spcPts val="600"/>
+              </a:spcAft>
+              <a:buChar char="•"/>
+              <a:defRPr sz="2250">
+                <a:solidFill>
+                  <a:srgbClr val="18334A"/>
+                </a:solidFill>
+                <a:latin typeface="Arial"/>
+                <a:ea typeface="Arial"/>
+                <a:cs typeface="Arial"/>
+              </a:defRPr>
+            </a:pPr>
+            <a:r>
+              <a:rPr sz="2250">
+                <a:solidFill>
+                  <a:srgbClr val="18334A"/>
+                </a:solidFill>
+                <a:latin typeface="Arial"/>
+                <a:ea typeface="Arial"/>
+                <a:cs typeface="Arial"/>
+              </a:rPr>
+              <a:t>APEX 24.2.0 · SQLcl 25.3.0.274.1210</a:t>
+            </a:r>
+          </a:p>
+          <a:p xmlns:a="http://schemas.openxmlformats.org/drawingml/2006/main">
+            <a:pPr marL="228600" indent="-152400">
+              <a:spcAft>
+                <a:spcPts val="600"/>
+              </a:spcAft>
+              <a:buChar char="•"/>
+              <a:defRPr sz="2250">
+                <a:solidFill>
+                  <a:srgbClr val="18334A"/>
+                </a:solidFill>
+                <a:latin typeface="Arial"/>
+                <a:ea typeface="Arial"/>
+                <a:cs typeface="Arial"/>
+              </a:defRPr>
+            </a:pPr>
+            <a:r>
+              <a:rPr sz="2250">
+                <a:solidFill>
+                  <a:srgbClr val="18334A"/>
+                </a:solidFill>
+                <a:latin typeface="Arial"/>
+                <a:ea typeface="Arial"/>
+                <a:cs typeface="Arial"/>
+              </a:rPr>
+              <a:t>Oracle AI Database 26ai Free, 23.26.3.0.0</a:t>
+            </a:r>
+          </a:p>
+          <a:p xmlns:a="http://schemas.openxmlformats.org/drawingml/2006/main">
+            <a:pPr marL="228600" indent="-152400">
+              <a:spcAft>
+                <a:spcPts val="600"/>
+              </a:spcAft>
+              <a:buChar char="•"/>
+              <a:defRPr sz="2250">
+                <a:solidFill>
+                  <a:srgbClr val="18334A"/>
+                </a:solidFill>
+                <a:latin typeface="Arial"/>
+                <a:ea typeface="Arial"/>
+                <a:cs typeface="Arial"/>
+              </a:defRPr>
+            </a:pPr>
+            <a:r>
+              <a:rPr sz="2250">
+                <a:solidFill>
+                  <a:srgbClr val="18334A"/>
+                </a:solidFill>
+                <a:latin typeface="Arial"/>
+                <a:ea typeface="Arial"/>
+                <a:cs typeface="Arial"/>
+              </a:rPr>
+              <a:t>Owned authoring, fresh and populated targets.</a:t>
+            </a:r>
+          </a:p>
+          <a:p xmlns:a="http://schemas.openxmlformats.org/drawingml/2006/main">
+            <a:pPr marL="228600" indent="-152400">
+              <a:spcAft>
+                <a:spcPts val="600"/>
+              </a:spcAft>
+              <a:buChar char="•"/>
+              <a:defRPr sz="2250">
+                <a:solidFill>
+                  <a:srgbClr val="18334A"/>
+                </a:solidFill>
+                <a:latin typeface="Arial"/>
+                <a:ea typeface="Arial"/>
+                <a:cs typeface="Arial"/>
+              </a:defRPr>
+            </a:pPr>
+            <a:r>
+              <a:rPr sz="2250">
+                <a:solidFill>
+                  <a:srgbClr val="18334A"/>
+                </a:solidFill>
+                <a:latin typeface="Arial"/>
+                <a:ea typeface="Arial"/>
+                <a:cs typeface="Arial"/>
+              </a:rPr>
+              <a:t>No production adoption or complex Foundation upgrade.</a:t>
             </a:r>
           </a:p>
         </p:txBody>
@@ -9229,6 +10551,7 @@
           </a:lstStyle>
           <a:p xmlns:a="http://schemas.openxmlformats.org/drawingml/2006/main">
             <a:pPr>
+              <a:buNone/>
               <a:defRPr sz="3300" b="1">
                 <a:solidFill>
                   <a:srgbClr val="18334A"/>
@@ -9248,96 +10571,6 @@
                 <a:cs typeface="Arial"/>
               </a:rPr>
               <a:t>A · Inspect before mutation</a:t>
-            </a:r>
-          </a:p>
-        </p:txBody>
-      </p:sp>
-      <p:sp>
-        <p:nvSpPr>
-          <p:cNvPr id="2" name="body">
-            <a:extLst xmlns:a="http://schemas.openxmlformats.org/drawingml/2006/main">
-              <a:ext uri="{FF2B5EF4-FFF2-40B4-BE49-F238E27FC236}">
-                <a16:creationId xmlns:a16="http://schemas.microsoft.com/office/drawing/2014/main" id="{16CA7247-13C5-4E83-981D-8493A59CA9AB}"/>
-              </a:ext>
-            </a:extLst>
-          </p:cNvPr>
-          <p:cNvSpPr>
-            <a:spLocks xmlns:a="http://schemas.openxmlformats.org/drawingml/2006/main" noGrp="1"/>
-          </p:cNvSpPr>
-          <p:nvPr/>
-        </p:nvSpPr>
-        <p:spPr>
-          <a:xfrm xmlns:a="http://schemas.openxmlformats.org/drawingml/2006/main">
-            <a:off x="609600" y="1666875"/>
-            <a:ext cx="10972800" cy="2095500"/>
-          </a:xfrm>
-          <a:prstGeom xmlns:a="http://schemas.openxmlformats.org/drawingml/2006/main" prst="rect">
-            <a:avLst/>
-          </a:prstGeom>
-          <a:noFill xmlns:a="http://schemas.openxmlformats.org/drawingml/2006/main"/>
-          <a:ln xmlns:a="http://schemas.openxmlformats.org/drawingml/2006/main" w="0">
-            <a:noFill/>
-            <a:prstDash val="solid"/>
-          </a:ln>
-        </p:spPr>
-        <p:txBody>
-          <a:bodyPr xmlns:a="http://schemas.openxmlformats.org/drawingml/2006/main"/>
-          <a:lstStyle xmlns:a="http://schemas.openxmlformats.org/drawingml/2006/main">
-            <a:defPPr>
-              <a:defRPr sz="2250" b="0">
-                <a:solidFill>
-                  <a:srgbClr val="18334A"/>
-                </a:solidFill>
-                <a:latin typeface="Arial"/>
-                <a:ea typeface="Arial"/>
-                <a:cs typeface="Arial"/>
-              </a:defRPr>
-            </a:defPPr>
-          </a:lstStyle>
-          <a:p xmlns:a="http://schemas.openxmlformats.org/drawingml/2006/main">
-            <a:pPr>
-              <a:defRPr sz="2250" b="0">
-                <a:solidFill>
-                  <a:srgbClr val="18334A"/>
-                </a:solidFill>
-                <a:latin typeface="Arial"/>
-                <a:ea typeface="Arial"/>
-                <a:cs typeface="Arial"/>
-              </a:defRPr>
-            </a:pPr>
-            <a:r>
-              <a:rPr sz="2250" b="0">
-                <a:solidFill>
-                  <a:srgbClr val="18334A"/>
-                </a:solidFill>
-                <a:latin typeface="Arial"/>
-                <a:ea typeface="Arial"/>
-                <a:cs typeface="Arial"/>
-              </a:rPr>
-              <a:t>Identify the retained run, exact versions and owned resources.</a:t>
-            </a:r>
-          </a:p>
-          <a:p xmlns:a="http://schemas.openxmlformats.org/drawingml/2006/main">
-            <a:pPr>
-              <a:defRPr sz="2250" b="0">
-                <a:solidFill>
-                  <a:srgbClr val="18334A"/>
-                </a:solidFill>
-                <a:latin typeface="Arial"/>
-                <a:ea typeface="Arial"/>
-                <a:cs typeface="Arial"/>
-              </a:defRPr>
-            </a:pPr>
-            <a:r>
-              <a:rPr sz="2250" b="0">
-                <a:solidFill>
-                  <a:srgbClr val="18334A"/>
-                </a:solidFill>
-                <a:latin typeface="Arial"/>
-                <a:ea typeface="Arial"/>
-                <a:cs typeface="Arial"/>
-              </a:rPr>
-              <a:t>Missing infrastructure requires an explicit lab decision.</a:t>
             </a:r>
           </a:p>
         </p:txBody>
@@ -9378,21 +10611,22 @@
                 <a:solidFill>
                   <a:srgbClr val="205D69"/>
                 </a:solidFill>
-                <a:latin typeface="Arial"/>
-                <a:ea typeface="Arial"/>
-                <a:cs typeface="Arial"/>
+                <a:latin typeface="Courier"/>
+                <a:ea typeface="Courier"/>
+                <a:cs typeface="Courier"/>
               </a:defRPr>
             </a:defPPr>
           </a:lstStyle>
           <a:p xmlns:a="http://schemas.openxmlformats.org/drawingml/2006/main">
             <a:pPr>
+              <a:buNone/>
               <a:defRPr sz="1950" b="0">
                 <a:solidFill>
                   <a:srgbClr val="205D69"/>
                 </a:solidFill>
-                <a:latin typeface="Arial"/>
-                <a:ea typeface="Arial"/>
-                <a:cs typeface="Arial"/>
+                <a:latin typeface="Courier"/>
+                <a:ea typeface="Courier"/>
+                <a:cs typeface="Courier"/>
               </a:defRPr>
             </a:pPr>
             <a:r>
@@ -9400,22 +10634,23 @@
                 <a:solidFill>
                   <a:srgbClr val="205D69"/>
                 </a:solidFill>
-                <a:latin typeface="Arial"/>
-                <a:ea typeface="Arial"/>
-                <a:cs typeface="Arial"/>
+                <a:latin typeface="Courier"/>
+                <a:ea typeface="Courier"/>
+                <a:cs typeface="Courier"/>
               </a:rPr>
               <a:t>E2_RUN=e2-20261019-01</a:t>
             </a:r>
           </a:p>
           <a:p xmlns:a="http://schemas.openxmlformats.org/drawingml/2006/main">
             <a:pPr>
+              <a:buNone/>
               <a:defRPr sz="1950" b="0">
                 <a:solidFill>
                   <a:srgbClr val="205D69"/>
                 </a:solidFill>
-                <a:latin typeface="Arial"/>
-                <a:ea typeface="Arial"/>
-                <a:cs typeface="Arial"/>
+                <a:latin typeface="Courier"/>
+                <a:ea typeface="Courier"/>
+                <a:cs typeface="Courier"/>
               </a:defRPr>
             </a:pPr>
             <a:r>
@@ -9423,22 +10658,23 @@
                 <a:solidFill>
                   <a:srgbClr val="205D69"/>
                 </a:solidFill>
-                <a:latin typeface="Arial"/>
-                <a:ea typeface="Arial"/>
-                <a:cs typeface="Arial"/>
+                <a:latin typeface="Courier"/>
+                <a:ea typeface="Courier"/>
+                <a:cs typeface="Courier"/>
               </a:rPr>
               <a:t>bash scripts/cicd-oracle-lifecycle-A_prepare.sh \</a:t>
             </a:r>
           </a:p>
           <a:p xmlns:a="http://schemas.openxmlformats.org/drawingml/2006/main">
             <a:pPr>
+              <a:buNone/>
               <a:defRPr sz="1950" b="0">
                 <a:solidFill>
                   <a:srgbClr val="205D69"/>
                 </a:solidFill>
-                <a:latin typeface="Arial"/>
-                <a:ea typeface="Arial"/>
-                <a:cs typeface="Arial"/>
+                <a:latin typeface="Courier"/>
+                <a:ea typeface="Courier"/>
+                <a:cs typeface="Courier"/>
               </a:defRPr>
             </a:pPr>
             <a:r>
@@ -9446,9 +10682,9 @@
                 <a:solidFill>
                   <a:srgbClr val="205D69"/>
                 </a:solidFill>
-                <a:latin typeface="Arial"/>
-                <a:ea typeface="Arial"/>
-                <a:cs typeface="Arial"/>
+                <a:latin typeface="Courier"/>
+                <a:ea typeface="Courier"/>
+                <a:cs typeface="Courier"/>
               </a:rPr>
               <a:t>  --preflight --run "$E2_RUN"</a:t>
             </a:r>
@@ -9499,6 +10735,7 @@
           </a:lstStyle>
           <a:p xmlns:a="http://schemas.openxmlformats.org/drawingml/2006/main">
             <a:pPr>
+              <a:buNone/>
               <a:defRPr sz="1350" b="0">
                 <a:solidFill>
                   <a:srgbClr val="526574"/>
@@ -9518,6 +10755,105 @@
                 <a:cs typeface="Arial"/>
               </a:rPr>
               <a:t>5</a:t>
+            </a:r>
+          </a:p>
+        </p:txBody>
+      </p:sp>
+      <p:sp>
+        <p:nvSpPr>
+          <p:cNvPr id="6" name="body">
+            <a:extLst xmlns:a="http://schemas.openxmlformats.org/drawingml/2006/main">
+              <a:ext uri="{FF2B5EF4-FFF2-40B4-BE49-F238E27FC236}">
+                <a16:creationId xmlns:a16="http://schemas.microsoft.com/office/drawing/2014/main" id="{5AFD38E0-A261-4ACA-B79A-825042CC8678}"/>
+              </a:ext>
+            </a:extLst>
+          </p:cNvPr>
+          <p:cNvSpPr>
+            <a:spLocks xmlns:a="http://schemas.openxmlformats.org/drawingml/2006/main" noGrp="1"/>
+          </p:cNvSpPr>
+          <p:nvPr/>
+        </p:nvSpPr>
+        <p:spPr>
+          <a:xfrm xmlns:a="http://schemas.openxmlformats.org/drawingml/2006/main">
+            <a:off x="609600" y="1666875"/>
+            <a:ext cx="10972800" cy="2095500"/>
+          </a:xfrm>
+          <a:prstGeom xmlns:a="http://schemas.openxmlformats.org/drawingml/2006/main" prst="rect">
+            <a:avLst/>
+          </a:prstGeom>
+          <a:noFill xmlns:a="http://schemas.openxmlformats.org/drawingml/2006/main"/>
+          <a:ln xmlns:a="http://schemas.openxmlformats.org/drawingml/2006/main" w="0">
+            <a:noFill/>
+          </a:ln>
+        </p:spPr>
+        <p:txBody>
+          <a:bodyPr xmlns:a="http://schemas.openxmlformats.org/drawingml/2006/main">
+            <a:noAutofit/>
+          </a:bodyPr>
+          <a:lstStyle xmlns:a="http://schemas.openxmlformats.org/drawingml/2006/main">
+            <a:defPPr>
+              <a:defRPr sz="2250">
+                <a:solidFill>
+                  <a:srgbClr val="18334A"/>
+                </a:solidFill>
+                <a:latin typeface="Arial"/>
+                <a:ea typeface="Arial"/>
+                <a:cs typeface="Arial"/>
+              </a:defRPr>
+            </a:defPPr>
+          </a:lstStyle>
+          <a:p xmlns:a="http://schemas.openxmlformats.org/drawingml/2006/main">
+            <a:pPr marL="228600" indent="-152400">
+              <a:spcAft>
+                <a:spcPts val="600"/>
+              </a:spcAft>
+              <a:buChar char="•"/>
+              <a:defRPr sz="2250">
+                <a:solidFill>
+                  <a:srgbClr val="18334A"/>
+                </a:solidFill>
+                <a:latin typeface="Arial"/>
+                <a:ea typeface="Arial"/>
+                <a:cs typeface="Arial"/>
+              </a:defRPr>
+            </a:pPr>
+            <a:r>
+              <a:rPr sz="2250">
+                <a:solidFill>
+                  <a:srgbClr val="18334A"/>
+                </a:solidFill>
+                <a:latin typeface="Arial"/>
+                <a:ea typeface="Arial"/>
+                <a:cs typeface="Arial"/>
+              </a:rPr>
+              <a:t>Identify the retained run, exact versions and owned resources.</a:t>
+            </a:r>
+          </a:p>
+          <a:p xmlns:a="http://schemas.openxmlformats.org/drawingml/2006/main">
+            <a:pPr marL="228600" indent="-152400">
+              <a:spcAft>
+                <a:spcPts val="600"/>
+              </a:spcAft>
+              <a:buChar char="•"/>
+              <a:defRPr sz="2250">
+                <a:solidFill>
+                  <a:srgbClr val="18334A"/>
+                </a:solidFill>
+                <a:latin typeface="Arial"/>
+                <a:ea typeface="Arial"/>
+                <a:cs typeface="Arial"/>
+              </a:defRPr>
+            </a:pPr>
+            <a:r>
+              <a:rPr sz="2250">
+                <a:solidFill>
+                  <a:srgbClr val="18334A"/>
+                </a:solidFill>
+                <a:latin typeface="Arial"/>
+                <a:ea typeface="Arial"/>
+                <a:cs typeface="Arial"/>
+              </a:rPr>
+              <a:t>Missing infrastructure requires an explicit lab decision.</a:t>
             </a:r>
           </a:p>
         </p:txBody>
@@ -9595,6 +10931,7 @@
           </a:lstStyle>
           <a:p xmlns:a="http://schemas.openxmlformats.org/drawingml/2006/main">
             <a:pPr>
+              <a:buNone/>
               <a:defRPr sz="3300" b="1">
                 <a:solidFill>
                   <a:srgbClr val="18334A"/>
@@ -9613,166 +10950,7 @@
                 <a:ea typeface="Arial"/>
                 <a:cs typeface="Arial"/>
               </a:rPr>
-              <a:t>B · Native PROJECT journey</a:t>
-            </a:r>
-          </a:p>
-        </p:txBody>
-      </p:sp>
-      <p:sp>
-        <p:nvSpPr>
-          <p:cNvPr id="2" name="body">
-            <a:extLst xmlns:a="http://schemas.openxmlformats.org/drawingml/2006/main">
-              <a:ext uri="{FF2B5EF4-FFF2-40B4-BE49-F238E27FC236}">
-                <a16:creationId xmlns:a16="http://schemas.microsoft.com/office/drawing/2014/main" id="{C21B8CE3-B493-4DF4-A3B4-86969B5E4011}"/>
-              </a:ext>
-            </a:extLst>
-          </p:cNvPr>
-          <p:cNvSpPr>
-            <a:spLocks xmlns:a="http://schemas.openxmlformats.org/drawingml/2006/main" noGrp="1"/>
-          </p:cNvSpPr>
-          <p:nvPr/>
-        </p:nvSpPr>
-        <p:spPr>
-          <a:xfrm xmlns:a="http://schemas.openxmlformats.org/drawingml/2006/main">
-            <a:off x="609600" y="1666875"/>
-            <a:ext cx="10972800" cy="4191000"/>
-          </a:xfrm>
-          <a:prstGeom xmlns:a="http://schemas.openxmlformats.org/drawingml/2006/main" prst="rect">
-            <a:avLst/>
-          </a:prstGeom>
-          <a:noFill xmlns:a="http://schemas.openxmlformats.org/drawingml/2006/main"/>
-          <a:ln xmlns:a="http://schemas.openxmlformats.org/drawingml/2006/main" w="0">
-            <a:noFill/>
-            <a:prstDash val="solid"/>
-          </a:ln>
-        </p:spPr>
-        <p:txBody>
-          <a:bodyPr xmlns:a="http://schemas.openxmlformats.org/drawingml/2006/main"/>
-          <a:lstStyle xmlns:a="http://schemas.openxmlformats.org/drawingml/2006/main">
-            <a:defPPr>
-              <a:defRPr sz="2250" b="0">
-                <a:solidFill>
-                  <a:srgbClr val="18334A"/>
-                </a:solidFill>
-                <a:latin typeface="Arial"/>
-                <a:ea typeface="Arial"/>
-                <a:cs typeface="Arial"/>
-              </a:defRPr>
-            </a:defPPr>
-          </a:lstStyle>
-          <a:p xmlns:a="http://schemas.openxmlformats.org/drawingml/2006/main">
-            <a:pPr>
-              <a:defRPr sz="2250" b="0">
-                <a:solidFill>
-                  <a:srgbClr val="18334A"/>
-                </a:solidFill>
-                <a:latin typeface="Arial"/>
-                <a:ea typeface="Arial"/>
-                <a:cs typeface="Arial"/>
-              </a:defRPr>
-            </a:pPr>
-            <a:r>
-              <a:rPr sz="2250" b="0">
-                <a:solidFill>
-                  <a:srgbClr val="18334A"/>
-                </a:solidFill>
-                <a:latin typeface="Arial"/>
-                <a:ea typeface="Arial"/>
-                <a:cs typeface="Arial"/>
-              </a:rPr>
-              <a:t>Initialize one Git repository. Capture Main plus schema.</a:t>
-            </a:r>
-          </a:p>
-          <a:p xmlns:a="http://schemas.openxmlformats.org/drawingml/2006/main">
-            <a:pPr>
-              <a:defRPr sz="2250" b="0">
-                <a:solidFill>
-                  <a:srgbClr val="18334A"/>
-                </a:solidFill>
-                <a:latin typeface="Arial"/>
-                <a:ea typeface="Arial"/>
-                <a:cs typeface="Arial"/>
-              </a:defRPr>
-            </a:pPr>
-            <a:r>
-              <a:rPr sz="2250" b="0">
-                <a:solidFill>
-                  <a:srgbClr val="18334A"/>
-                </a:solidFill>
-                <a:latin typeface="Arial"/>
-                <a:ea typeface="Arial"/>
-                <a:cs typeface="Arial"/>
-              </a:rPr>
-              <a:t>Review native staging and intentional seed/patch SQL.</a:t>
-            </a:r>
-          </a:p>
-          <a:p xmlns:a="http://schemas.openxmlformats.org/drawingml/2006/main">
-            <a:pPr>
-              <a:defRPr sz="2250" b="0">
-                <a:solidFill>
-                  <a:srgbClr val="18334A"/>
-                </a:solidFill>
-                <a:latin typeface="Arial"/>
-                <a:ea typeface="Arial"/>
-                <a:cs typeface="Arial"/>
-              </a:defRPr>
-            </a:pPr>
-            <a:r>
-              <a:rPr sz="2250" b="0">
-                <a:solidFill>
-                  <a:srgbClr val="18334A"/>
-                </a:solidFill>
-                <a:latin typeface="Arial"/>
-                <a:ea typeface="Arial"/>
-                <a:cs typeface="Arial"/>
-              </a:rPr>
-              <a:t>Generate a prerelease candidate; bind exact bytes.</a:t>
-            </a:r>
-          </a:p>
-          <a:p xmlns:a="http://schemas.openxmlformats.org/drawingml/2006/main">
-            <a:pPr>
-              <a:defRPr sz="2250" b="0">
-                <a:solidFill>
-                  <a:srgbClr val="18334A"/>
-                </a:solidFill>
-                <a:latin typeface="Arial"/>
-                <a:ea typeface="Arial"/>
-                <a:cs typeface="Arial"/>
-              </a:defRPr>
-            </a:pPr>
-            <a:r>
-              <a:rPr sz="2250" b="0">
-                <a:solidFill>
-                  <a:srgbClr val="18334A"/>
-                </a:solidFill>
-                <a:latin typeface="Arial"/>
-                <a:ea typeface="Arial"/>
-                <a:cs typeface="Arial"/>
-              </a:rPr>
-              <a:t>Qualify fresh install before populated-target upgrade.</a:t>
-            </a:r>
-          </a:p>
-          <a:p xmlns:a="http://schemas.openxmlformats.org/drawingml/2006/main">
-            <a:pPr>
-              <a:defRPr sz="2250" b="0">
-                <a:solidFill>
-                  <a:srgbClr val="18334A"/>
-                </a:solidFill>
-                <a:latin typeface="Arial"/>
-                <a:ea typeface="Arial"/>
-                <a:cs typeface="Arial"/>
-              </a:defRPr>
-            </a:pPr>
-            <a:r>
-              <a:rPr sz="2250" b="0">
-                <a:solidFill>
-                  <a:srgbClr val="18334A"/>
-                </a:solidFill>
-                <a:latin typeface="Arial"/>
-                <a:ea typeface="Arial"/>
-                <a:cs typeface="Arial"/>
-              </a:rPr>
-              <a:t>Inspect repeat behavior and retained user data.</a:t>
+              <a:t>B · Native SQLcl PROJECT journey</a:t>
             </a:r>
           </a:p>
         </p:txBody>
@@ -9821,6 +10999,7 @@
           </a:lstStyle>
           <a:p xmlns:a="http://schemas.openxmlformats.org/drawingml/2006/main">
             <a:pPr>
+              <a:buNone/>
               <a:defRPr sz="1350" b="0">
                 <a:solidFill>
                   <a:srgbClr val="526574"/>
@@ -9840,6 +11019,186 @@
                 <a:cs typeface="Arial"/>
               </a:rPr>
               <a:t>6</a:t>
+            </a:r>
+          </a:p>
+        </p:txBody>
+      </p:sp>
+      <p:sp>
+        <p:nvSpPr>
+          <p:cNvPr id="5" name="body">
+            <a:extLst xmlns:a="http://schemas.openxmlformats.org/drawingml/2006/main">
+              <a:ext uri="{FF2B5EF4-FFF2-40B4-BE49-F238E27FC236}">
+                <a16:creationId xmlns:a16="http://schemas.microsoft.com/office/drawing/2014/main" id="{0C37A645-BA6B-4E3D-8284-A687A04A642B}"/>
+              </a:ext>
+            </a:extLst>
+          </p:cNvPr>
+          <p:cNvSpPr>
+            <a:spLocks xmlns:a="http://schemas.openxmlformats.org/drawingml/2006/main" noGrp="1"/>
+          </p:cNvSpPr>
+          <p:nvPr/>
+        </p:nvSpPr>
+        <p:spPr>
+          <a:xfrm xmlns:a="http://schemas.openxmlformats.org/drawingml/2006/main">
+            <a:off x="609600" y="1666875"/>
+            <a:ext cx="10972800" cy="4191000"/>
+          </a:xfrm>
+          <a:prstGeom xmlns:a="http://schemas.openxmlformats.org/drawingml/2006/main" prst="rect">
+            <a:avLst/>
+          </a:prstGeom>
+          <a:noFill xmlns:a="http://schemas.openxmlformats.org/drawingml/2006/main"/>
+          <a:ln xmlns:a="http://schemas.openxmlformats.org/drawingml/2006/main" w="0">
+            <a:noFill/>
+          </a:ln>
+        </p:spPr>
+        <p:txBody>
+          <a:bodyPr xmlns:a="http://schemas.openxmlformats.org/drawingml/2006/main">
+            <a:noAutofit/>
+          </a:bodyPr>
+          <a:lstStyle xmlns:a="http://schemas.openxmlformats.org/drawingml/2006/main">
+            <a:defPPr>
+              <a:defRPr sz="2250">
+                <a:solidFill>
+                  <a:srgbClr val="18334A"/>
+                </a:solidFill>
+                <a:latin typeface="Arial"/>
+                <a:ea typeface="Arial"/>
+                <a:cs typeface="Arial"/>
+              </a:defRPr>
+            </a:defPPr>
+          </a:lstStyle>
+          <a:p xmlns:a="http://schemas.openxmlformats.org/drawingml/2006/main">
+            <a:pPr marL="228600" indent="-152400">
+              <a:spcAft>
+                <a:spcPts val="600"/>
+              </a:spcAft>
+              <a:buChar char="•"/>
+              <a:defRPr sz="2250">
+                <a:solidFill>
+                  <a:srgbClr val="18334A"/>
+                </a:solidFill>
+                <a:latin typeface="Arial"/>
+                <a:ea typeface="Arial"/>
+                <a:cs typeface="Arial"/>
+              </a:defRPr>
+            </a:pPr>
+            <a:r>
+              <a:rPr sz="2250">
+                <a:solidFill>
+                  <a:srgbClr val="18334A"/>
+                </a:solidFill>
+                <a:latin typeface="Arial"/>
+                <a:ea typeface="Arial"/>
+                <a:cs typeface="Arial"/>
+              </a:rPr>
+              <a:t>Initialize one Git repository. Capture Main plus schema.</a:t>
+            </a:r>
+          </a:p>
+          <a:p xmlns:a="http://schemas.openxmlformats.org/drawingml/2006/main">
+            <a:pPr marL="228600" indent="-152400">
+              <a:spcAft>
+                <a:spcPts val="600"/>
+              </a:spcAft>
+              <a:buChar char="•"/>
+              <a:defRPr sz="2250">
+                <a:solidFill>
+                  <a:srgbClr val="18334A"/>
+                </a:solidFill>
+                <a:latin typeface="Arial"/>
+                <a:ea typeface="Arial"/>
+                <a:cs typeface="Arial"/>
+              </a:defRPr>
+            </a:pPr>
+            <a:r>
+              <a:rPr sz="2250">
+                <a:solidFill>
+                  <a:srgbClr val="18334A"/>
+                </a:solidFill>
+                <a:latin typeface="Arial"/>
+                <a:ea typeface="Arial"/>
+                <a:cs typeface="Arial"/>
+              </a:rPr>
+              <a:t>Review native staging and intentional seed/patch SQL.</a:t>
+            </a:r>
+          </a:p>
+          <a:p xmlns:a="http://schemas.openxmlformats.org/drawingml/2006/main">
+            <a:pPr marL="228600" indent="-152400">
+              <a:spcAft>
+                <a:spcPts val="600"/>
+              </a:spcAft>
+              <a:buChar char="•"/>
+              <a:defRPr sz="2250">
+                <a:solidFill>
+                  <a:srgbClr val="18334A"/>
+                </a:solidFill>
+                <a:latin typeface="Arial"/>
+                <a:ea typeface="Arial"/>
+                <a:cs typeface="Arial"/>
+              </a:defRPr>
+            </a:pPr>
+            <a:r>
+              <a:rPr sz="2250">
+                <a:solidFill>
+                  <a:srgbClr val="18334A"/>
+                </a:solidFill>
+                <a:latin typeface="Arial"/>
+                <a:ea typeface="Arial"/>
+                <a:cs typeface="Arial"/>
+              </a:rPr>
+              <a:t>Generate a prerelease candidate; bind exact bytes.</a:t>
+            </a:r>
+          </a:p>
+          <a:p xmlns:a="http://schemas.openxmlformats.org/drawingml/2006/main">
+            <a:pPr marL="228600" indent="-152400">
+              <a:spcAft>
+                <a:spcPts val="600"/>
+              </a:spcAft>
+              <a:buChar char="•"/>
+              <a:defRPr sz="2250">
+                <a:solidFill>
+                  <a:srgbClr val="18334A"/>
+                </a:solidFill>
+                <a:latin typeface="Arial"/>
+                <a:ea typeface="Arial"/>
+                <a:cs typeface="Arial"/>
+              </a:defRPr>
+            </a:pPr>
+            <a:r>
+              <a:rPr sz="2250">
+                <a:solidFill>
+                  <a:srgbClr val="18334A"/>
+                </a:solidFill>
+                <a:latin typeface="Arial"/>
+                <a:ea typeface="Arial"/>
+                <a:cs typeface="Arial"/>
+              </a:rPr>
+              <a:t>Qualify fresh install before populated-target upgrade.</a:t>
+            </a:r>
+          </a:p>
+          <a:p xmlns:a="http://schemas.openxmlformats.org/drawingml/2006/main">
+            <a:pPr marL="228600" indent="-152400">
+              <a:spcAft>
+                <a:spcPts val="600"/>
+              </a:spcAft>
+              <a:buChar char="•"/>
+              <a:defRPr sz="2250">
+                <a:solidFill>
+                  <a:srgbClr val="18334A"/>
+                </a:solidFill>
+                <a:latin typeface="Arial"/>
+                <a:ea typeface="Arial"/>
+                <a:cs typeface="Arial"/>
+              </a:defRPr>
+            </a:pPr>
+            <a:r>
+              <a:rPr sz="2250">
+                <a:solidFill>
+                  <a:srgbClr val="18334A"/>
+                </a:solidFill>
+                <a:latin typeface="Arial"/>
+                <a:ea typeface="Arial"/>
+                <a:cs typeface="Arial"/>
+              </a:rPr>
+              <a:t>Inspect repeat behavior and retained user data.</a:t>
             </a:r>
           </a:p>
         </p:txBody>
@@ -9875,10 +11234,10 @@
       </p:grpSpPr>
       <p:sp>
         <p:nvSpPr>
-          <p:cNvPr id="4" name="title">
+          <p:cNvPr id="6" name="title">
             <a:extLst xmlns:a="http://schemas.openxmlformats.org/drawingml/2006/main">
               <a:ext uri="{FF2B5EF4-FFF2-40B4-BE49-F238E27FC236}">
-                <a16:creationId xmlns:a16="http://schemas.microsoft.com/office/drawing/2014/main" id="{30B22EE1-60B4-4C4E-AAFF-6C1B09238408}"/>
+                <a16:creationId xmlns:a16="http://schemas.microsoft.com/office/drawing/2014/main" id="{0F47DE0A-8357-4C82-BFC2-0E56F2CAB0AD}"/>
               </a:ext>
             </a:extLst>
           </p:cNvPr>
@@ -9889,8 +11248,8 @@
         </p:nvSpPr>
         <p:spPr>
           <a:xfrm xmlns:a="http://schemas.openxmlformats.org/drawingml/2006/main">
-            <a:off x="609600" y="457200"/>
-            <a:ext cx="10972800" cy="1000125"/>
+            <a:off x="609600" y="523875"/>
+            <a:ext cx="10972800" cy="857250"/>
           </a:xfrm>
           <a:prstGeom xmlns:a="http://schemas.openxmlformats.org/drawingml/2006/main" prst="rect">
             <a:avLst/>
@@ -9898,11 +11257,12 @@
           <a:noFill xmlns:a="http://schemas.openxmlformats.org/drawingml/2006/main"/>
           <a:ln xmlns:a="http://schemas.openxmlformats.org/drawingml/2006/main" w="0">
             <a:noFill/>
-            <a:prstDash val="solid"/>
           </a:ln>
         </p:spPr>
         <p:txBody>
-          <a:bodyPr xmlns:a="http://schemas.openxmlformats.org/drawingml/2006/main"/>
+          <a:bodyPr xmlns:a="http://schemas.openxmlformats.org/drawingml/2006/main">
+            <a:noAutofit/>
+          </a:bodyPr>
           <a:lstStyle xmlns:a="http://schemas.openxmlformats.org/drawingml/2006/main">
             <a:defPPr>
               <a:defRPr sz="3300" b="1">
@@ -9935,17 +11295,17 @@
                 <a:ea typeface="Arial"/>
                 <a:cs typeface="Arial"/>
               </a:rPr>
-              <a:t>Supported mapping, deliberate data changes</a:t>
-            </a:r>
-          </a:p>
-        </p:txBody>
-      </p:sp>
-      <p:sp>
-        <p:nvSpPr>
-          <p:cNvPr id="2" name="body">
+              <a:t>SQLcl PROJECT repository layout</a:t>
+            </a:r>
+          </a:p>
+        </p:txBody>
+      </p:sp>
+      <p:sp>
+        <p:nvSpPr>
+          <p:cNvPr id="2" name="tree">
             <a:extLst xmlns:a="http://schemas.openxmlformats.org/drawingml/2006/main">
               <a:ext uri="{FF2B5EF4-FFF2-40B4-BE49-F238E27FC236}">
-                <a16:creationId xmlns:a16="http://schemas.microsoft.com/office/drawing/2014/main" id="{088F8FDE-6D5F-4643-90E6-A2A1DFA80C77}"/>
+                <a16:creationId xmlns:a16="http://schemas.microsoft.com/office/drawing/2014/main" id="{EE969EF4-6E6A-4C42-9495-C2F25997346F}"/>
               </a:ext>
             </a:extLst>
           </p:cNvPr>
@@ -9957,7 +11317,7 @@
         <p:spPr>
           <a:xfrm xmlns:a="http://schemas.openxmlformats.org/drawingml/2006/main">
             <a:off x="609600" y="1666875"/>
-            <a:ext cx="10972800" cy="4191000"/>
+            <a:ext cx="5953125" cy="4095750"/>
           </a:xfrm>
           <a:prstGeom xmlns:a="http://schemas.openxmlformats.org/drawingml/2006/main" prst="rect">
             <a:avLst/>
@@ -9965,146 +11325,377 @@
           <a:noFill xmlns:a="http://schemas.openxmlformats.org/drawingml/2006/main"/>
           <a:ln xmlns:a="http://schemas.openxmlformats.org/drawingml/2006/main" w="0">
             <a:noFill/>
-            <a:prstDash val="solid"/>
           </a:ln>
         </p:spPr>
         <p:txBody>
-          <a:bodyPr xmlns:a="http://schemas.openxmlformats.org/drawingml/2006/main"/>
+          <a:bodyPr xmlns:a="http://schemas.openxmlformats.org/drawingml/2006/main">
+            <a:noAutofit/>
+          </a:bodyPr>
           <a:lstStyle xmlns:a="http://schemas.openxmlformats.org/drawingml/2006/main">
             <a:defPPr>
-              <a:defRPr sz="2250" b="0">
-                <a:solidFill>
-                  <a:srgbClr val="18334A"/>
-                </a:solidFill>
-                <a:latin typeface="Arial"/>
-                <a:ea typeface="Arial"/>
-                <a:cs typeface="Arial"/>
+              <a:defRPr sz="1650" b="0">
+                <a:solidFill>
+                  <a:srgbClr val="18334A"/>
+                </a:solidFill>
+                <a:latin typeface="Courier"/>
+                <a:ea typeface="Courier"/>
+                <a:cs typeface="Courier"/>
               </a:defRPr>
             </a:defPPr>
           </a:lstStyle>
           <a:p xmlns:a="http://schemas.openxmlformats.org/drawingml/2006/main">
             <a:pPr>
-              <a:defRPr sz="2250" b="0">
-                <a:solidFill>
-                  <a:srgbClr val="18334A"/>
-                </a:solidFill>
-                <a:latin typeface="Arial"/>
-                <a:ea typeface="Arial"/>
-                <a:cs typeface="Arial"/>
-              </a:defRPr>
-            </a:pPr>
-            <a:r>
-              <a:rPr sz="2250" b="0">
-                <a:solidFill>
-                  <a:srgbClr val="18334A"/>
-                </a:solidFill>
-                <a:latin typeface="Arial"/>
-                <a:ea typeface="Arial"/>
-                <a:cs typeface="Arial"/>
-              </a:rPr>
-              <a:t>Oracle defaults-file hook maps workspace, schema and app ID.</a:t>
+              <a:defRPr sz="1650" b="0">
+                <a:solidFill>
+                  <a:srgbClr val="18334A"/>
+                </a:solidFill>
+                <a:latin typeface="Courier"/>
+                <a:ea typeface="Courier"/>
+                <a:cs typeface="Courier"/>
+              </a:defRPr>
+            </a:pPr>
+            <a:r>
+              <a:rPr sz="1650" b="0">
+                <a:solidFill>
+                  <a:srgbClr val="18334A"/>
+                </a:solidFill>
+                <a:latin typeface="Courier"/>
+                <a:ea typeface="Courier"/>
+                <a:cs typeface="Courier"/>
+              </a:rPr>
+              <a:t>repo/</a:t>
             </a:r>
           </a:p>
           <a:p xmlns:a="http://schemas.openxmlformats.org/drawingml/2006/main">
             <a:pPr>
-              <a:defRPr sz="2250" b="0">
-                <a:solidFill>
-                  <a:srgbClr val="18334A"/>
-                </a:solidFill>
-                <a:latin typeface="Arial"/>
-                <a:ea typeface="Arial"/>
-                <a:cs typeface="Arial"/>
-              </a:defRPr>
-            </a:pPr>
-            <a:r>
-              <a:rPr sz="2250" b="0">
-                <a:solidFill>
-                  <a:srgbClr val="18334A"/>
-                </a:solidFill>
-                <a:latin typeface="Arial"/>
-                <a:ea typeface="Arial"/>
-                <a:cs typeface="Arial"/>
-              </a:rPr>
-              <a:t>Initial native install: 7 changesets. Patch fresh: 9.</a:t>
+              <a:defRPr sz="1650" b="0">
+                <a:solidFill>
+                  <a:srgbClr val="18334A"/>
+                </a:solidFill>
+                <a:latin typeface="Courier"/>
+                <a:ea typeface="Courier"/>
+                <a:cs typeface="Courier"/>
+              </a:defRPr>
+            </a:pPr>
+            <a:r>
+              <a:rPr sz="1650" b="0">
+                <a:solidFill>
+                  <a:srgbClr val="18334A"/>
+                </a:solidFill>
+                <a:latin typeface="Courier"/>
+                <a:ea typeface="Courier"/>
+                <a:cs typeface="Courier"/>
+              </a:rPr>
+              <a:t>|-- .dbtools/</a:t>
             </a:r>
           </a:p>
           <a:p xmlns:a="http://schemas.openxmlformats.org/drawingml/2006/main">
             <a:pPr>
-              <a:defRPr sz="2250" b="0">
-                <a:solidFill>
-                  <a:srgbClr val="18334A"/>
-                </a:solidFill>
-                <a:latin typeface="Arial"/>
-                <a:ea typeface="Arial"/>
-                <a:cs typeface="Arial"/>
-              </a:defRPr>
-            </a:pPr>
-            <a:r>
-              <a:rPr sz="2250" b="0">
-                <a:solidFill>
-                  <a:srgbClr val="18334A"/>
-                </a:solidFill>
-                <a:latin typeface="Arial"/>
-                <a:ea typeface="Arial"/>
-                <a:cs typeface="Arial"/>
-              </a:rPr>
-              <a:t>Populated patch: 3 run / 6 previous; repeat: 0 run.</a:t>
+              <a:defRPr sz="1650" b="0">
+                <a:solidFill>
+                  <a:srgbClr val="18334A"/>
+                </a:solidFill>
+                <a:latin typeface="Courier"/>
+                <a:ea typeface="Courier"/>
+                <a:cs typeface="Courier"/>
+              </a:defRPr>
+            </a:pPr>
+            <a:r>
+              <a:rPr sz="1650" b="0">
+                <a:solidFill>
+                  <a:srgbClr val="18334A"/>
+                </a:solidFill>
+                <a:latin typeface="Courier"/>
+                <a:ea typeface="Courier"/>
+                <a:cs typeface="Courier"/>
+              </a:rPr>
+              <a:t>|-- src/database/e2_0254c95f_a/</a:t>
             </a:r>
           </a:p>
           <a:p xmlns:a="http://schemas.openxmlformats.org/drawingml/2006/main">
             <a:pPr>
-              <a:defRPr sz="2250" b="0">
-                <a:solidFill>
-                  <a:srgbClr val="18334A"/>
-                </a:solidFill>
-                <a:latin typeface="Arial"/>
-                <a:ea typeface="Arial"/>
-                <a:cs typeface="Arial"/>
-              </a:defRPr>
-            </a:pPr>
-            <a:r>
-              <a:rPr sz="2250" b="0">
-                <a:solidFill>
-                  <a:srgbClr val="18334A"/>
-                </a:solidFill>
-                <a:latin typeface="Arial"/>
-                <a:ea typeface="Arial"/>
-                <a:cs typeface="Arial"/>
-              </a:rPr>
-              <a:t>Retained user setting and exact history fields survived.</a:t>
+              <a:defRPr sz="1650" b="0">
+                <a:solidFill>
+                  <a:srgbClr val="18334A"/>
+                </a:solidFill>
+                <a:latin typeface="Courier"/>
+                <a:ea typeface="Courier"/>
+                <a:cs typeface="Courier"/>
+              </a:defRPr>
+            </a:pPr>
+            <a:r>
+              <a:rPr sz="1650" b="0">
+                <a:solidFill>
+                  <a:srgbClr val="18334A"/>
+                </a:solidFill>
+                <a:latin typeface="Courier"/>
+                <a:ea typeface="Courier"/>
+                <a:cs typeface="Courier"/>
+              </a:rPr>
+              <a:t>|   |-- apex_apps/f821788/</a:t>
             </a:r>
           </a:p>
           <a:p xmlns:a="http://schemas.openxmlformats.org/drawingml/2006/main">
             <a:pPr>
-              <a:defRPr sz="2250" b="0">
-                <a:solidFill>
-                  <a:srgbClr val="18334A"/>
-                </a:solidFill>
-                <a:latin typeface="Arial"/>
-                <a:ea typeface="Arial"/>
-                <a:cs typeface="Arial"/>
-              </a:defRPr>
-            </a:pPr>
-            <a:r>
-              <a:rPr sz="2250" b="0">
-                <a:solidFill>
-                  <a:srgbClr val="18334A"/>
-                </a:solidFill>
-                <a:latin typeface="Arial"/>
-                <a:ea typeface="Arial"/>
-                <a:cs typeface="Arial"/>
-              </a:rPr>
-              <a:t>Candidate success does not authorize formal release.</a:t>
-            </a:r>
-          </a:p>
-        </p:txBody>
-      </p:sp>
-      <p:sp>
-        <p:nvSpPr>
-          <p:cNvPr id="3" name="page">
+              <a:defRPr sz="1650" b="0">
+                <a:solidFill>
+                  <a:srgbClr val="18334A"/>
+                </a:solidFill>
+                <a:latin typeface="Courier"/>
+                <a:ea typeface="Courier"/>
+                <a:cs typeface="Courier"/>
+              </a:defRPr>
+            </a:pPr>
+            <a:r>
+              <a:rPr sz="1650" b="0">
+                <a:solidFill>
+                  <a:srgbClr val="18334A"/>
+                </a:solidFill>
+                <a:latin typeface="Courier"/>
+                <a:ea typeface="Courier"/>
+                <a:cs typeface="Courier"/>
+              </a:rPr>
+              <a:t>|   |   |-- f821788.sql</a:t>
+            </a:r>
+          </a:p>
+          <a:p xmlns:a="http://schemas.openxmlformats.org/drawingml/2006/main">
+            <a:pPr>
+              <a:defRPr sz="1650" b="0">
+                <a:solidFill>
+                  <a:srgbClr val="18334A"/>
+                </a:solidFill>
+                <a:latin typeface="Courier"/>
+                <a:ea typeface="Courier"/>
+                <a:cs typeface="Courier"/>
+              </a:defRPr>
+            </a:pPr>
+            <a:r>
+              <a:rPr sz="1650" b="0">
+                <a:solidFill>
+                  <a:srgbClr val="18334A"/>
+                </a:solidFill>
+                <a:latin typeface="Courier"/>
+                <a:ea typeface="Courier"/>
+                <a:cs typeface="Courier"/>
+              </a:rPr>
+              <a:t>|   |   `-- readable/application/</a:t>
+            </a:r>
+          </a:p>
+          <a:p xmlns:a="http://schemas.openxmlformats.org/drawingml/2006/main">
+            <a:pPr>
+              <a:defRPr sz="1650" b="0">
+                <a:solidFill>
+                  <a:srgbClr val="18334A"/>
+                </a:solidFill>
+                <a:latin typeface="Courier"/>
+                <a:ea typeface="Courier"/>
+                <a:cs typeface="Courier"/>
+              </a:defRPr>
+            </a:pPr>
+            <a:r>
+              <a:rPr sz="1650" b="0">
+                <a:solidFill>
+                  <a:srgbClr val="18334A"/>
+                </a:solidFill>
+                <a:latin typeface="Courier"/>
+                <a:ea typeface="Courier"/>
+                <a:cs typeface="Courier"/>
+              </a:rPr>
+              <a:t>|   |-- package_specs/</a:t>
+            </a:r>
+          </a:p>
+          <a:p xmlns:a="http://schemas.openxmlformats.org/drawingml/2006/main">
+            <a:pPr>
+              <a:defRPr sz="1650" b="0">
+                <a:solidFill>
+                  <a:srgbClr val="18334A"/>
+                </a:solidFill>
+                <a:latin typeface="Courier"/>
+                <a:ea typeface="Courier"/>
+                <a:cs typeface="Courier"/>
+              </a:defRPr>
+            </a:pPr>
+            <a:r>
+              <a:rPr sz="1650" b="0">
+                <a:solidFill>
+                  <a:srgbClr val="18334A"/>
+                </a:solidFill>
+                <a:latin typeface="Courier"/>
+                <a:ea typeface="Courier"/>
+                <a:cs typeface="Courier"/>
+              </a:rPr>
+              <a:t>|   |-- package_bodies/</a:t>
+            </a:r>
+          </a:p>
+          <a:p xmlns:a="http://schemas.openxmlformats.org/drawingml/2006/main">
+            <a:pPr>
+              <a:defRPr sz="1650" b="0">
+                <a:solidFill>
+                  <a:srgbClr val="18334A"/>
+                </a:solidFill>
+                <a:latin typeface="Courier"/>
+                <a:ea typeface="Courier"/>
+                <a:cs typeface="Courier"/>
+              </a:defRPr>
+            </a:pPr>
+            <a:r>
+              <a:rPr sz="1650" b="0">
+                <a:solidFill>
+                  <a:srgbClr val="18334A"/>
+                </a:solidFill>
+                <a:latin typeface="Courier"/>
+                <a:ea typeface="Courier"/>
+                <a:cs typeface="Courier"/>
+              </a:rPr>
+              <a:t>|   `-- tables/</a:t>
+            </a:r>
+          </a:p>
+          <a:p xmlns:a="http://schemas.openxmlformats.org/drawingml/2006/main">
+            <a:pPr>
+              <a:defRPr sz="1650" b="0">
+                <a:solidFill>
+                  <a:srgbClr val="18334A"/>
+                </a:solidFill>
+                <a:latin typeface="Courier"/>
+                <a:ea typeface="Courier"/>
+                <a:cs typeface="Courier"/>
+              </a:defRPr>
+            </a:pPr>
+            <a:r>
+              <a:rPr sz="1650" b="0">
+                <a:solidFill>
+                  <a:srgbClr val="18334A"/>
+                </a:solidFill>
+                <a:latin typeface="Courier"/>
+                <a:ea typeface="Courier"/>
+                <a:cs typeface="Courier"/>
+              </a:rPr>
+              <a:t>|-- dist/</a:t>
+            </a:r>
+          </a:p>
+          <a:p xmlns:a="http://schemas.openxmlformats.org/drawingml/2006/main">
+            <a:pPr>
+              <a:defRPr sz="1650" b="0">
+                <a:solidFill>
+                  <a:srgbClr val="18334A"/>
+                </a:solidFill>
+                <a:latin typeface="Courier"/>
+                <a:ea typeface="Courier"/>
+                <a:cs typeface="Courier"/>
+              </a:defRPr>
+            </a:pPr>
+            <a:r>
+              <a:rPr sz="1650" b="0">
+                <a:solidFill>
+                  <a:srgbClr val="18334A"/>
+                </a:solidFill>
+                <a:latin typeface="Courier"/>
+                <a:ea typeface="Courier"/>
+                <a:cs typeface="Courier"/>
+              </a:rPr>
+              <a:t>|   |-- install.sql</a:t>
+            </a:r>
+          </a:p>
+          <a:p xmlns:a="http://schemas.openxmlformats.org/drawingml/2006/main">
+            <a:pPr>
+              <a:defRPr sz="1650" b="0">
+                <a:solidFill>
+                  <a:srgbClr val="18334A"/>
+                </a:solidFill>
+                <a:latin typeface="Courier"/>
+                <a:ea typeface="Courier"/>
+                <a:cs typeface="Courier"/>
+              </a:defRPr>
+            </a:pPr>
+            <a:r>
+              <a:rPr sz="1650" b="0">
+                <a:solidFill>
+                  <a:srgbClr val="18334A"/>
+                </a:solidFill>
+                <a:latin typeface="Courier"/>
+                <a:ea typeface="Courier"/>
+                <a:cs typeface="Courier"/>
+              </a:rPr>
+              <a:t>|   |-- component-contract.json</a:t>
+            </a:r>
+          </a:p>
+          <a:p xmlns:a="http://schemas.openxmlformats.org/drawingml/2006/main">
+            <a:pPr>
+              <a:defRPr sz="1650" b="0">
+                <a:solidFill>
+                  <a:srgbClr val="18334A"/>
+                </a:solidFill>
+                <a:latin typeface="Courier"/>
+                <a:ea typeface="Courier"/>
+                <a:cs typeface="Courier"/>
+              </a:defRPr>
+            </a:pPr>
+            <a:r>
+              <a:rPr sz="1650" b="0">
+                <a:solidFill>
+                  <a:srgbClr val="18334A"/>
+                </a:solidFill>
+                <a:latin typeface="Courier"/>
+                <a:ea typeface="Courier"/>
+                <a:cs typeface="Courier"/>
+              </a:rPr>
+              <a:t>|   |-- releases/</a:t>
+            </a:r>
+          </a:p>
+          <a:p xmlns:a="http://schemas.openxmlformats.org/drawingml/2006/main">
+            <a:pPr>
+              <a:defRPr sz="1650" b="0">
+                <a:solidFill>
+                  <a:srgbClr val="18334A"/>
+                </a:solidFill>
+                <a:latin typeface="Courier"/>
+                <a:ea typeface="Courier"/>
+                <a:cs typeface="Courier"/>
+              </a:defRPr>
+            </a:pPr>
+            <a:r>
+              <a:rPr sz="1650" b="0">
+                <a:solidFill>
+                  <a:srgbClr val="18334A"/>
+                </a:solidFill>
+                <a:latin typeface="Courier"/>
+                <a:ea typeface="Courier"/>
+                <a:cs typeface="Courier"/>
+              </a:rPr>
+              <a:t>|   `-- utils/</a:t>
+            </a:r>
+          </a:p>
+          <a:p xmlns:a="http://schemas.openxmlformats.org/drawingml/2006/main">
+            <a:pPr>
+              <a:defRPr sz="1650" b="0">
+                <a:solidFill>
+                  <a:srgbClr val="18334A"/>
+                </a:solidFill>
+                <a:latin typeface="Courier"/>
+                <a:ea typeface="Courier"/>
+                <a:cs typeface="Courier"/>
+              </a:defRPr>
+            </a:pPr>
+            <a:r>
+              <a:rPr sz="1650" b="0">
+                <a:solidFill>
+                  <a:srgbClr val="18334A"/>
+                </a:solidFill>
+                <a:latin typeface="Courier"/>
+                <a:ea typeface="Courier"/>
+                <a:cs typeface="Courier"/>
+              </a:rPr>
+              <a:t>`-- artifact/  [Git-ignored]</a:t>
+            </a:r>
+          </a:p>
+        </p:txBody>
+      </p:sp>
+      <p:sp>
+        <p:nvSpPr>
+          <p:cNvPr id="3" name="body">
             <a:extLst xmlns:a="http://schemas.openxmlformats.org/drawingml/2006/main">
               <a:ext uri="{FF2B5EF4-FFF2-40B4-BE49-F238E27FC236}">
-                <a16:creationId xmlns:a16="http://schemas.microsoft.com/office/drawing/2014/main" id="{FCD5A5B4-59F5-460B-B873-72FD6A5B468C}"/>
+                <a16:creationId xmlns:a16="http://schemas.microsoft.com/office/drawing/2014/main" id="{63C55900-CBF2-4D5D-8A09-9F5E11F67CAA}"/>
               </a:ext>
             </a:extLst>
           </p:cNvPr>
@@ -10115,8 +11706,8 @@
         </p:nvSpPr>
         <p:spPr>
           <a:xfrm xmlns:a="http://schemas.openxmlformats.org/drawingml/2006/main">
-            <a:off x="11334750" y="6429375"/>
-            <a:ext cx="476250" cy="266700"/>
+            <a:off x="6858000" y="1666875"/>
+            <a:ext cx="4667250" cy="4095750"/>
           </a:xfrm>
           <a:prstGeom xmlns:a="http://schemas.openxmlformats.org/drawingml/2006/main" prst="rect">
             <a:avLst/>
@@ -10124,16 +11715,17 @@
           <a:noFill xmlns:a="http://schemas.openxmlformats.org/drawingml/2006/main"/>
           <a:ln xmlns:a="http://schemas.openxmlformats.org/drawingml/2006/main" w="0">
             <a:noFill/>
-            <a:prstDash val="solid"/>
           </a:ln>
         </p:spPr>
         <p:txBody>
-          <a:bodyPr xmlns:a="http://schemas.openxmlformats.org/drawingml/2006/main"/>
+          <a:bodyPr xmlns:a="http://schemas.openxmlformats.org/drawingml/2006/main">
+            <a:noAutofit/>
+          </a:bodyPr>
           <a:lstStyle xmlns:a="http://schemas.openxmlformats.org/drawingml/2006/main">
             <a:defPPr>
-              <a:defRPr sz="1350" b="0">
-                <a:solidFill>
-                  <a:srgbClr val="526574"/>
+              <a:defRPr sz="2025" b="0">
+                <a:solidFill>
+                  <a:srgbClr val="18334A"/>
                 </a:solidFill>
                 <a:latin typeface="Arial"/>
                 <a:ea typeface="Arial"/>
@@ -10142,20 +11734,209 @@
             </a:defPPr>
           </a:lstStyle>
           <a:p xmlns:a="http://schemas.openxmlformats.org/drawingml/2006/main">
+            <a:pPr marL="228600" indent="-152400">
+              <a:spcAft>
+                <a:spcPts val="1600"/>
+              </a:spcAft>
+              <a:buChar char="•"/>
+              <a:defRPr sz="2025" b="0">
+                <a:solidFill>
+                  <a:srgbClr val="18334A"/>
+                </a:solidFill>
+                <a:latin typeface="Arial"/>
+                <a:ea typeface="Arial"/>
+                <a:cs typeface="Arial"/>
+              </a:defRPr>
+            </a:pPr>
+            <a:r>
+              <a:t>.dbtools: native project settings and filters.</a:t>
+            </a:r>
+          </a:p>
+          <a:p xmlns:a="http://schemas.openxmlformats.org/drawingml/2006/main">
+            <a:pPr marL="228600" indent="-152400">
+              <a:spcAft>
+                <a:spcPts val="1600"/>
+              </a:spcAft>
+              <a:buChar char="•"/>
+              <a:defRPr sz="2025" b="0">
+                <a:solidFill>
+                  <a:srgbClr val="18334A"/>
+                </a:solidFill>
+                <a:latin typeface="Arial"/>
+                <a:ea typeface="Arial"/>
+                <a:cs typeface="Arial"/>
+              </a:defRPr>
+            </a:pPr>
+            <a:r>
+              <a:t>src: Main APEX SQL, readable YAML and schema definitions.</a:t>
+            </a:r>
+          </a:p>
+          <a:p xmlns:a="http://schemas.openxmlformats.org/drawingml/2006/main">
+            <a:pPr marL="228600" indent="-152400">
+              <a:spcAft>
+                <a:spcPts val="1600"/>
+              </a:spcAft>
+              <a:buChar char="•"/>
+              <a:defRPr sz="2025" b="0">
+                <a:solidFill>
+                  <a:srgbClr val="18334A"/>
+                </a:solidFill>
+                <a:latin typeface="Arial"/>
+                <a:ea typeface="Arial"/>
+                <a:cs typeface="Arial"/>
+              </a:defRPr>
+            </a:pPr>
+            <a:r>
+              <a:t>dist: staged migrations, custom SQL and the added contract.</a:t>
+            </a:r>
+          </a:p>
+          <a:p xmlns:a="http://schemas.openxmlformats.org/drawingml/2006/main">
+            <a:pPr marL="228600" indent="-152400">
+              <a:spcAft>
+                <a:spcPts val="1600"/>
+              </a:spcAft>
+              <a:buChar char="•"/>
+              <a:defRPr sz="2025" b="0">
+                <a:solidFill>
+                  <a:srgbClr val="18334A"/>
+                </a:solidFill>
+                <a:latin typeface="Arial"/>
+                <a:ea typeface="Arial"/>
+                <a:cs typeface="Arial"/>
+              </a:defRPr>
+            </a:pPr>
+            <a:r>
+              <a:t>artifact: generated candidate ZIPs, outside tracked source.</a:t>
+            </a:r>
+          </a:p>
+        </p:txBody>
+      </p:sp>
+      <p:sp>
+        <p:nvSpPr>
+          <p:cNvPr id="4" name="context">
+            <a:extLst xmlns:a="http://schemas.openxmlformats.org/drawingml/2006/main">
+              <a:ext uri="{FF2B5EF4-FFF2-40B4-BE49-F238E27FC236}">
+                <a16:creationId xmlns:a16="http://schemas.microsoft.com/office/drawing/2014/main" id="{8DDA109A-F252-4299-9CD2-1377790C6C43}"/>
+              </a:ext>
+            </a:extLst>
+          </p:cNvPr>
+          <p:cNvSpPr>
+            <a:spLocks xmlns:a="http://schemas.openxmlformats.org/drawingml/2006/main" noGrp="1"/>
+          </p:cNvSpPr>
+          <p:nvPr/>
+        </p:nvSpPr>
+        <p:spPr>
+          <a:xfrm xmlns:a="http://schemas.openxmlformats.org/drawingml/2006/main">
+            <a:off x="609600" y="6000750"/>
+            <a:ext cx="10972800" cy="428625"/>
+          </a:xfrm>
+          <a:prstGeom xmlns:a="http://schemas.openxmlformats.org/drawingml/2006/main" prst="rect">
+            <a:avLst/>
+          </a:prstGeom>
+          <a:noFill xmlns:a="http://schemas.openxmlformats.org/drawingml/2006/main"/>
+          <a:ln xmlns:a="http://schemas.openxmlformats.org/drawingml/2006/main" w="0">
+            <a:noFill/>
+          </a:ln>
+        </p:spPr>
+        <p:txBody>
+          <a:bodyPr xmlns:a="http://schemas.openxmlformats.org/drawingml/2006/main">
+            <a:noAutofit/>
+          </a:bodyPr>
+          <a:lstStyle xmlns:a="http://schemas.openxmlformats.org/drawingml/2006/main">
+            <a:defPPr>
+              <a:defRPr sz="1725" b="0">
+                <a:solidFill>
+                  <a:srgbClr val="18334A"/>
+                </a:solidFill>
+                <a:latin typeface="Arial"/>
+                <a:ea typeface="Arial"/>
+                <a:cs typeface="Arial"/>
+              </a:defRPr>
+            </a:defPPr>
+          </a:lstStyle>
+          <a:p xmlns:a="http://schemas.openxmlformats.org/drawingml/2006/main">
             <a:pPr>
-              <a:defRPr sz="1350" b="0">
-                <a:solidFill>
-                  <a:srgbClr val="526574"/>
-                </a:solidFill>
-                <a:latin typeface="Arial"/>
-                <a:ea typeface="Arial"/>
-                <a:cs typeface="Arial"/>
-              </a:defRPr>
-            </a:pPr>
-            <a:r>
-              <a:rPr sz="1350" b="0">
-                <a:solidFill>
-                  <a:srgbClr val="526574"/>
+              <a:defRPr sz="1725" b="0">
+                <a:solidFill>
+                  <a:srgbClr val="18334A"/>
+                </a:solidFill>
+                <a:latin typeface="Arial"/>
+                <a:ea typeface="Arial"/>
+                <a:cs typeface="Arial"/>
+              </a:defRPr>
+            </a:pPr>
+            <a:r>
+              <a:rPr sz="1725" b="0">
+                <a:solidFill>
+                  <a:srgbClr val="18334A"/>
+                </a:solidFill>
+                <a:latin typeface="Arial"/>
+                <a:ea typeface="Arial"/>
+                <a:cs typeface="Arial"/>
+              </a:rPr>
+              <a:t>Application source and Git history retained; laboratory resources are disposable.</a:t>
+            </a:r>
+          </a:p>
+        </p:txBody>
+      </p:sp>
+      <p:sp>
+        <p:nvSpPr>
+          <p:cNvPr id="5" name="page">
+            <a:extLst xmlns:a="http://schemas.openxmlformats.org/drawingml/2006/main">
+              <a:ext uri="{FF2B5EF4-FFF2-40B4-BE49-F238E27FC236}">
+                <a16:creationId xmlns:a16="http://schemas.microsoft.com/office/drawing/2014/main" id="{41CA461F-5E88-4DD7-B7C5-B032BAB9DC13}"/>
+              </a:ext>
+            </a:extLst>
+          </p:cNvPr>
+          <p:cNvSpPr>
+            <a:spLocks xmlns:a="http://schemas.openxmlformats.org/drawingml/2006/main" noGrp="1"/>
+          </p:cNvSpPr>
+          <p:nvPr/>
+        </p:nvSpPr>
+        <p:spPr>
+          <a:xfrm xmlns:a="http://schemas.openxmlformats.org/drawingml/2006/main">
+            <a:off x="11239500" y="6477000"/>
+            <a:ext cx="523875" cy="238125"/>
+          </a:xfrm>
+          <a:prstGeom xmlns:a="http://schemas.openxmlformats.org/drawingml/2006/main" prst="rect">
+            <a:avLst/>
+          </a:prstGeom>
+          <a:noFill xmlns:a="http://schemas.openxmlformats.org/drawingml/2006/main"/>
+          <a:ln xmlns:a="http://schemas.openxmlformats.org/drawingml/2006/main" w="0">
+            <a:noFill/>
+          </a:ln>
+        </p:spPr>
+        <p:txBody>
+          <a:bodyPr xmlns:a="http://schemas.openxmlformats.org/drawingml/2006/main">
+            <a:noAutofit/>
+          </a:bodyPr>
+          <a:lstStyle xmlns:a="http://schemas.openxmlformats.org/drawingml/2006/main">
+            <a:defPPr>
+              <a:defRPr sz="1050" b="0">
+                <a:solidFill>
+                  <a:srgbClr val="18334A"/>
+                </a:solidFill>
+                <a:latin typeface="Arial"/>
+                <a:ea typeface="Arial"/>
+                <a:cs typeface="Arial"/>
+              </a:defRPr>
+            </a:defPPr>
+          </a:lstStyle>
+          <a:p xmlns:a="http://schemas.openxmlformats.org/drawingml/2006/main">
+            <a:pPr>
+              <a:defRPr sz="1050" b="0">
+                <a:solidFill>
+                  <a:srgbClr val="18334A"/>
+                </a:solidFill>
+                <a:latin typeface="Arial"/>
+                <a:ea typeface="Arial"/>
+                <a:cs typeface="Arial"/>
+              </a:defRPr>
+            </a:pPr>
+            <a:r>
+              <a:rPr sz="1050" b="0">
+                <a:solidFill>
+                  <a:srgbClr val="18334A"/>
                 </a:solidFill>
                 <a:latin typeface="Arial"/>
                 <a:ea typeface="Arial"/>
@@ -10169,7 +11950,7 @@
     </p:spTree>
     <p:extLst>
       <p:ext uri="{BB962C8B-B14F-4D97-AF65-F5344CB8AC3E}">
-        <p14:creationId xmlns:p14="http://schemas.microsoft.com/office/powerpoint/2010/main" val="809993795"/>
+        <p14:creationId xmlns:p14="http://schemas.microsoft.com/office/powerpoint/2010/main" val="1718750814"/>
       </p:ext>
     </p:extLst>
   </p:cSld>
@@ -10200,7 +11981,7 @@
           <p:cNvPr id="4" name="title">
             <a:extLst xmlns:a="http://schemas.openxmlformats.org/drawingml/2006/main">
               <a:ext uri="{FF2B5EF4-FFF2-40B4-BE49-F238E27FC236}">
-                <a16:creationId xmlns:a16="http://schemas.microsoft.com/office/drawing/2014/main" id="{2DA0F30A-8B0F-4BA3-8C94-575478F246A9}"/>
+                <a16:creationId xmlns:a16="http://schemas.microsoft.com/office/drawing/2014/main" id="{30B22EE1-60B4-4C4E-AAFF-6C1B09238408}"/>
               </a:ext>
             </a:extLst>
           </p:cNvPr>
@@ -10239,6 +12020,7 @@
           </a:lstStyle>
           <a:p xmlns:a="http://schemas.openxmlformats.org/drawingml/2006/main">
             <a:pPr>
+              <a:buNone/>
               <a:defRPr sz="3300" b="1">
                 <a:solidFill>
                   <a:srgbClr val="18334A"/>
@@ -10257,166 +12039,7 @@
                 <a:ea typeface="Arial"/>
                 <a:cs typeface="Arial"/>
               </a:rPr>
-              <a:t>Observed blocker · full native verification</a:t>
-            </a:r>
-          </a:p>
-        </p:txBody>
-      </p:sp>
-      <p:sp>
-        <p:nvSpPr>
-          <p:cNvPr id="2" name="body">
-            <a:extLst xmlns:a="http://schemas.openxmlformats.org/drawingml/2006/main">
-              <a:ext uri="{FF2B5EF4-FFF2-40B4-BE49-F238E27FC236}">
-                <a16:creationId xmlns:a16="http://schemas.microsoft.com/office/drawing/2014/main" id="{9FC7F656-CEB6-427C-90AF-A8D4C19B28DD}"/>
-              </a:ext>
-            </a:extLst>
-          </p:cNvPr>
-          <p:cNvSpPr>
-            <a:spLocks xmlns:a="http://schemas.openxmlformats.org/drawingml/2006/main" noGrp="1"/>
-          </p:cNvSpPr>
-          <p:nvPr/>
-        </p:nvSpPr>
-        <p:spPr>
-          <a:xfrm xmlns:a="http://schemas.openxmlformats.org/drawingml/2006/main">
-            <a:off x="609600" y="1666875"/>
-            <a:ext cx="10972800" cy="4191000"/>
-          </a:xfrm>
-          <a:prstGeom xmlns:a="http://schemas.openxmlformats.org/drawingml/2006/main" prst="rect">
-            <a:avLst/>
-          </a:prstGeom>
-          <a:noFill xmlns:a="http://schemas.openxmlformats.org/drawingml/2006/main"/>
-          <a:ln xmlns:a="http://schemas.openxmlformats.org/drawingml/2006/main" w="0">
-            <a:noFill/>
-            <a:prstDash val="solid"/>
-          </a:ln>
-        </p:spPr>
-        <p:txBody>
-          <a:bodyPr xmlns:a="http://schemas.openxmlformats.org/drawingml/2006/main"/>
-          <a:lstStyle xmlns:a="http://schemas.openxmlformats.org/drawingml/2006/main">
-            <a:defPPr>
-              <a:defRPr sz="2250" b="0">
-                <a:solidFill>
-                  <a:srgbClr val="18334A"/>
-                </a:solidFill>
-                <a:latin typeface="Arial"/>
-                <a:ea typeface="Arial"/>
-                <a:cs typeface="Arial"/>
-              </a:defRPr>
-            </a:defPPr>
-          </a:lstStyle>
-          <a:p xmlns:a="http://schemas.openxmlformats.org/drawingml/2006/main">
-            <a:pPr>
-              <a:defRPr sz="2250" b="0">
-                <a:solidFill>
-                  <a:srgbClr val="18334A"/>
-                </a:solidFill>
-                <a:latin typeface="Arial"/>
-                <a:ea typeface="Arial"/>
-                <a:cs typeface="Arial"/>
-              </a:defRPr>
-            </a:pPr>
-            <a:r>
-              <a:rPr sz="2250" b="0">
-                <a:solidFill>
-                  <a:srgbClr val="18334A"/>
-                </a:solidFill>
-                <a:latin typeface="Arial"/>
-                <a:ea typeface="Arial"/>
-                <a:cs typeface="Arial"/>
-              </a:rPr>
-              <a:t>Slash-containing stage branches expose a path mismatch.</a:t>
-            </a:r>
-          </a:p>
-          <a:p xmlns:a="http://schemas.openxmlformats.org/drawingml/2006/main">
-            <a:pPr>
-              <a:defRPr sz="2250" b="0">
-                <a:solidFill>
-                  <a:srgbClr val="18334A"/>
-                </a:solidFill>
-                <a:latin typeface="Arial"/>
-                <a:ea typeface="Arial"/>
-                <a:cs typeface="Arial"/>
-              </a:defRPr>
-            </a:pPr>
-            <a:r>
-              <a:rPr sz="2250" b="0">
-                <a:solidFill>
-                  <a:srgbClr val="18334A"/>
-                </a:solidFill>
-                <a:latin typeface="Arial"/>
-                <a:ea typeface="Arial"/>
-                <a:cs typeface="Arial"/>
-              </a:rPr>
-              <a:t>Slashless branches remove that error; full verify still fails.</a:t>
-            </a:r>
-          </a:p>
-          <a:p xmlns:a="http://schemas.openxmlformats.org/drawingml/2006/main">
-            <a:pPr>
-              <a:defRPr sz="2250" b="0">
-                <a:solidFill>
-                  <a:srgbClr val="18334A"/>
-                </a:solidFill>
-                <a:latin typeface="Arial"/>
-                <a:ea typeface="Arial"/>
-                <a:cs typeface="Arial"/>
-              </a:defRPr>
-            </a:pPr>
-            <a:r>
-              <a:rPr sz="2250" b="0">
-                <a:solidFill>
-                  <a:srgbClr val="18334A"/>
-                </a:solidFill>
-                <a:latin typeface="Arial"/>
-                <a:ea typeface="Arial"/>
-                <a:cs typeface="Arial"/>
-              </a:rPr>
-              <a:t>Initial: APEX SQL missing. Combined comparison: all six SQL files.</a:t>
-            </a:r>
-          </a:p>
-          <a:p xmlns:a="http://schemas.openxmlformats.org/drawingml/2006/main">
-            <a:pPr>
-              <a:defRPr sz="2250" b="0">
-                <a:solidFill>
-                  <a:srgbClr val="18334A"/>
-                </a:solidFill>
-                <a:latin typeface="Arial"/>
-                <a:ea typeface="Arial"/>
-                <a:cs typeface="Arial"/>
-              </a:defRPr>
-            </a:pPr>
-            <a:r>
-              <a:rPr sz="2250" b="0">
-                <a:solidFill>
-                  <a:srgbClr val="18334A"/>
-                </a:solidFill>
-                <a:latin typeface="Arial"/>
-                <a:ea typeface="Arial"/>
-                <a:cs typeface="Arial"/>
-              </a:rPr>
-              <a:t>Other checks report matching source/distribution changes.</a:t>
-            </a:r>
-          </a:p>
-          <a:p xmlns:a="http://schemas.openxmlformats.org/drawingml/2006/main">
-            <a:pPr>
-              <a:defRPr sz="2250" b="0">
-                <a:solidFill>
-                  <a:srgbClr val="18334A"/>
-                </a:solidFill>
-                <a:latin typeface="Arial"/>
-                <a:ea typeface="Arial"/>
-                <a:cs typeface="Arial"/>
-              </a:defRPr>
-            </a:pPr>
-            <a:r>
-              <a:rPr sz="2250" b="0">
-                <a:solidFill>
-                  <a:srgbClr val="18334A"/>
-                </a:solidFill>
-                <a:latin typeface="Arial"/>
-                <a:ea typeface="Arial"/>
-                <a:cs typeface="Arial"/>
-              </a:rPr>
-              <a:t>No formal release; inspect the retained Errors summary.</a:t>
+              <a:t>Supported mapping, deliberate data changes</a:t>
             </a:r>
           </a:p>
         </p:txBody>
@@ -10426,7 +12049,7 @@
           <p:cNvPr id="3" name="page">
             <a:extLst xmlns:a="http://schemas.openxmlformats.org/drawingml/2006/main">
               <a:ext uri="{FF2B5EF4-FFF2-40B4-BE49-F238E27FC236}">
-                <a16:creationId xmlns:a16="http://schemas.microsoft.com/office/drawing/2014/main" id="{43E9BE36-A363-46F5-BA28-64A867D1521D}"/>
+                <a16:creationId xmlns:a16="http://schemas.microsoft.com/office/drawing/2014/main" id="{FCD5A5B4-59F5-460B-B873-72FD6A5B468C}"/>
               </a:ext>
             </a:extLst>
           </p:cNvPr>
@@ -10465,6 +12088,7 @@
           </a:lstStyle>
           <a:p xmlns:a="http://schemas.openxmlformats.org/drawingml/2006/main">
             <a:pPr>
+              <a:buNone/>
               <a:defRPr sz="1350" b="0">
                 <a:solidFill>
                   <a:srgbClr val="526574"/>
@@ -10484,6 +12108,186 @@
                 <a:cs typeface="Arial"/>
               </a:rPr>
               <a:t>8</a:t>
+            </a:r>
+          </a:p>
+        </p:txBody>
+      </p:sp>
+      <p:sp>
+        <p:nvSpPr>
+          <p:cNvPr id="5" name="body">
+            <a:extLst xmlns:a="http://schemas.openxmlformats.org/drawingml/2006/main">
+              <a:ext uri="{FF2B5EF4-FFF2-40B4-BE49-F238E27FC236}">
+                <a16:creationId xmlns:a16="http://schemas.microsoft.com/office/drawing/2014/main" id="{C4B51612-ECD1-43C4-BE72-82AE9D85608C}"/>
+              </a:ext>
+            </a:extLst>
+          </p:cNvPr>
+          <p:cNvSpPr>
+            <a:spLocks xmlns:a="http://schemas.openxmlformats.org/drawingml/2006/main" noGrp="1"/>
+          </p:cNvSpPr>
+          <p:nvPr/>
+        </p:nvSpPr>
+        <p:spPr>
+          <a:xfrm xmlns:a="http://schemas.openxmlformats.org/drawingml/2006/main">
+            <a:off x="609600" y="1666875"/>
+            <a:ext cx="10972800" cy="4191000"/>
+          </a:xfrm>
+          <a:prstGeom xmlns:a="http://schemas.openxmlformats.org/drawingml/2006/main" prst="rect">
+            <a:avLst/>
+          </a:prstGeom>
+          <a:noFill xmlns:a="http://schemas.openxmlformats.org/drawingml/2006/main"/>
+          <a:ln xmlns:a="http://schemas.openxmlformats.org/drawingml/2006/main" w="0">
+            <a:noFill/>
+          </a:ln>
+        </p:spPr>
+        <p:txBody>
+          <a:bodyPr xmlns:a="http://schemas.openxmlformats.org/drawingml/2006/main">
+            <a:noAutofit/>
+          </a:bodyPr>
+          <a:lstStyle xmlns:a="http://schemas.openxmlformats.org/drawingml/2006/main">
+            <a:defPPr>
+              <a:defRPr sz="2250">
+                <a:solidFill>
+                  <a:srgbClr val="18334A"/>
+                </a:solidFill>
+                <a:latin typeface="Arial"/>
+                <a:ea typeface="Arial"/>
+                <a:cs typeface="Arial"/>
+              </a:defRPr>
+            </a:defPPr>
+          </a:lstStyle>
+          <a:p xmlns:a="http://schemas.openxmlformats.org/drawingml/2006/main">
+            <a:pPr marL="228600" indent="-152400">
+              <a:spcAft>
+                <a:spcPts val="600"/>
+              </a:spcAft>
+              <a:buChar char="•"/>
+              <a:defRPr sz="2250">
+                <a:solidFill>
+                  <a:srgbClr val="18334A"/>
+                </a:solidFill>
+                <a:latin typeface="Arial"/>
+                <a:ea typeface="Arial"/>
+                <a:cs typeface="Arial"/>
+              </a:defRPr>
+            </a:pPr>
+            <a:r>
+              <a:rPr sz="2250">
+                <a:solidFill>
+                  <a:srgbClr val="18334A"/>
+                </a:solidFill>
+                <a:latin typeface="Arial"/>
+                <a:ea typeface="Arial"/>
+                <a:cs typeface="Arial"/>
+              </a:rPr>
+              <a:t>Oracle defaults-file hook maps workspace, schema and app ID.</a:t>
+            </a:r>
+          </a:p>
+          <a:p xmlns:a="http://schemas.openxmlformats.org/drawingml/2006/main">
+            <a:pPr marL="228600" indent="-152400">
+              <a:spcAft>
+                <a:spcPts val="600"/>
+              </a:spcAft>
+              <a:buChar char="•"/>
+              <a:defRPr sz="2250">
+                <a:solidFill>
+                  <a:srgbClr val="18334A"/>
+                </a:solidFill>
+                <a:latin typeface="Arial"/>
+                <a:ea typeface="Arial"/>
+                <a:cs typeface="Arial"/>
+              </a:defRPr>
+            </a:pPr>
+            <a:r>
+              <a:rPr sz="2250">
+                <a:solidFill>
+                  <a:srgbClr val="18334A"/>
+                </a:solidFill>
+                <a:latin typeface="Arial"/>
+                <a:ea typeface="Arial"/>
+                <a:cs typeface="Arial"/>
+              </a:rPr>
+              <a:t>Initial native install: 7 changesets. Patch fresh: 9.</a:t>
+            </a:r>
+          </a:p>
+          <a:p xmlns:a="http://schemas.openxmlformats.org/drawingml/2006/main">
+            <a:pPr marL="228600" indent="-152400">
+              <a:spcAft>
+                <a:spcPts val="600"/>
+              </a:spcAft>
+              <a:buChar char="•"/>
+              <a:defRPr sz="2250">
+                <a:solidFill>
+                  <a:srgbClr val="18334A"/>
+                </a:solidFill>
+                <a:latin typeface="Arial"/>
+                <a:ea typeface="Arial"/>
+                <a:cs typeface="Arial"/>
+              </a:defRPr>
+            </a:pPr>
+            <a:r>
+              <a:rPr sz="2250">
+                <a:solidFill>
+                  <a:srgbClr val="18334A"/>
+                </a:solidFill>
+                <a:latin typeface="Arial"/>
+                <a:ea typeface="Arial"/>
+                <a:cs typeface="Arial"/>
+              </a:rPr>
+              <a:t>Populated patch: 3 run / 6 previous; repeat: 0 run.</a:t>
+            </a:r>
+          </a:p>
+          <a:p xmlns:a="http://schemas.openxmlformats.org/drawingml/2006/main">
+            <a:pPr marL="228600" indent="-152400">
+              <a:spcAft>
+                <a:spcPts val="600"/>
+              </a:spcAft>
+              <a:buChar char="•"/>
+              <a:defRPr sz="2250">
+                <a:solidFill>
+                  <a:srgbClr val="18334A"/>
+                </a:solidFill>
+                <a:latin typeface="Arial"/>
+                <a:ea typeface="Arial"/>
+                <a:cs typeface="Arial"/>
+              </a:defRPr>
+            </a:pPr>
+            <a:r>
+              <a:rPr sz="2250">
+                <a:solidFill>
+                  <a:srgbClr val="18334A"/>
+                </a:solidFill>
+                <a:latin typeface="Arial"/>
+                <a:ea typeface="Arial"/>
+                <a:cs typeface="Arial"/>
+              </a:rPr>
+              <a:t>Retained user setting and exact history fields survived.</a:t>
+            </a:r>
+          </a:p>
+          <a:p xmlns:a="http://schemas.openxmlformats.org/drawingml/2006/main">
+            <a:pPr marL="228600" indent="-152400">
+              <a:spcAft>
+                <a:spcPts val="600"/>
+              </a:spcAft>
+              <a:buChar char="•"/>
+              <a:defRPr sz="2250">
+                <a:solidFill>
+                  <a:srgbClr val="18334A"/>
+                </a:solidFill>
+                <a:latin typeface="Arial"/>
+                <a:ea typeface="Arial"/>
+                <a:cs typeface="Arial"/>
+              </a:defRPr>
+            </a:pPr>
+            <a:r>
+              <a:rPr sz="2250">
+                <a:solidFill>
+                  <a:srgbClr val="18334A"/>
+                </a:solidFill>
+                <a:latin typeface="Arial"/>
+                <a:ea typeface="Arial"/>
+                <a:cs typeface="Arial"/>
+              </a:rPr>
+              <a:t>Candidate success does not authorize formal release.</a:t>
             </a:r>
           </a:p>
         </p:txBody>
@@ -10491,7 +12295,7 @@
     </p:spTree>
     <p:extLst>
       <p:ext uri="{BB962C8B-B14F-4D97-AF65-F5344CB8AC3E}">
-        <p14:creationId xmlns:p14="http://schemas.microsoft.com/office/powerpoint/2010/main" val="1114912375"/>
+        <p14:creationId xmlns:p14="http://schemas.microsoft.com/office/powerpoint/2010/main" val="809993795"/>
       </p:ext>
     </p:extLst>
   </p:cSld>
@@ -10522,7 +12326,7 @@
           <p:cNvPr id="4" name="title">
             <a:extLst xmlns:a="http://schemas.openxmlformats.org/drawingml/2006/main">
               <a:ext uri="{FF2B5EF4-FFF2-40B4-BE49-F238E27FC236}">
-                <a16:creationId xmlns:a16="http://schemas.microsoft.com/office/drawing/2014/main" id="{647200AF-2C9F-4FDC-A840-9E7859F96209}"/>
+                <a16:creationId xmlns:a16="http://schemas.microsoft.com/office/drawing/2014/main" id="{2DA0F30A-8B0F-4BA3-8C94-575478F246A9}"/>
               </a:ext>
             </a:extLst>
           </p:cNvPr>
@@ -10561,6 +12365,7 @@
           </a:lstStyle>
           <a:p xmlns:a="http://schemas.openxmlformats.org/drawingml/2006/main">
             <a:pPr>
+              <a:buNone/>
               <a:defRPr sz="3300" b="1">
                 <a:solidFill>
                   <a:srgbClr val="18334A"/>
@@ -10579,166 +12384,7 @@
                 <a:ea typeface="Arial"/>
                 <a:cs typeface="Arial"/>
               </a:rPr>
-              <a:t>Existing repository · bounded coexistence</a:t>
-            </a:r>
-          </a:p>
-        </p:txBody>
-      </p:sp>
-      <p:sp>
-        <p:nvSpPr>
-          <p:cNvPr id="2" name="body">
-            <a:extLst xmlns:a="http://schemas.openxmlformats.org/drawingml/2006/main">
-              <a:ext uri="{FF2B5EF4-FFF2-40B4-BE49-F238E27FC236}">
-                <a16:creationId xmlns:a16="http://schemas.microsoft.com/office/drawing/2014/main" id="{6ACD3282-2DC2-475D-AE81-2A46E90CC7C6}"/>
-              </a:ext>
-            </a:extLst>
-          </p:cNvPr>
-          <p:cNvSpPr>
-            <a:spLocks xmlns:a="http://schemas.openxmlformats.org/drawingml/2006/main" noGrp="1"/>
-          </p:cNvSpPr>
-          <p:nvPr/>
-        </p:nvSpPr>
-        <p:spPr>
-          <a:xfrm xmlns:a="http://schemas.openxmlformats.org/drawingml/2006/main">
-            <a:off x="609600" y="1666875"/>
-            <a:ext cx="10972800" cy="4191000"/>
-          </a:xfrm>
-          <a:prstGeom xmlns:a="http://schemas.openxmlformats.org/drawingml/2006/main" prst="rect">
-            <a:avLst/>
-          </a:prstGeom>
-          <a:noFill xmlns:a="http://schemas.openxmlformats.org/drawingml/2006/main"/>
-          <a:ln xmlns:a="http://schemas.openxmlformats.org/drawingml/2006/main" w="0">
-            <a:noFill/>
-            <a:prstDash val="solid"/>
-          </a:ln>
-        </p:spPr>
-        <p:txBody>
-          <a:bodyPr xmlns:a="http://schemas.openxmlformats.org/drawingml/2006/main"/>
-          <a:lstStyle xmlns:a="http://schemas.openxmlformats.org/drawingml/2006/main">
-            <a:defPPr>
-              <a:defRPr sz="2250" b="0">
-                <a:solidFill>
-                  <a:srgbClr val="18334A"/>
-                </a:solidFill>
-                <a:latin typeface="Arial"/>
-                <a:ea typeface="Arial"/>
-                <a:cs typeface="Arial"/>
-              </a:defRPr>
-            </a:defPPr>
-          </a:lstStyle>
-          <a:p xmlns:a="http://schemas.openxmlformats.org/drawingml/2006/main">
-            <a:pPr>
-              <a:defRPr sz="2250" b="0">
-                <a:solidFill>
-                  <a:srgbClr val="18334A"/>
-                </a:solidFill>
-                <a:latin typeface="Arial"/>
-                <a:ea typeface="Arial"/>
-                <a:cs typeface="Arial"/>
-              </a:defRPr>
-            </a:pPr>
-            <a:r>
-              <a:rPr sz="2250" b="0">
-                <a:solidFill>
-                  <a:srgbClr val="18334A"/>
-                </a:solidFill>
-                <a:latin typeface="Arial"/>
-                <a:ea typeface="Arial"/>
-                <a:cs typeface="Arial"/>
-              </a:rPr>
-              <a:t>PROJECT init preserved 117 of 118 frozen input files.</a:t>
-            </a:r>
-          </a:p>
-          <a:p xmlns:a="http://schemas.openxmlformats.org/drawingml/2006/main">
-            <a:pPr>
-              <a:defRPr sz="2250" b="0">
-                <a:solidFill>
-                  <a:srgbClr val="18334A"/>
-                </a:solidFill>
-                <a:latin typeface="Arial"/>
-                <a:ea typeface="Arial"/>
-                <a:cs typeface="Arial"/>
-              </a:defRPr>
-            </a:pPr>
-            <a:r>
-              <a:rPr sz="2250" b="0">
-                <a:solidFill>
-                  <a:srgbClr val="18334A"/>
-                </a:solidFill>
-                <a:latin typeface="Arial"/>
-                <a:ea typeface="Arial"/>
-                <a:cs typeface="Arial"/>
-              </a:rPr>
-              <a:t>It overwrote README.md; Git restored the original bytes.</a:t>
-            </a:r>
-          </a:p>
-          <a:p xmlns:a="http://schemas.openxmlformats.org/drawingml/2006/main">
-            <a:pPr>
-              <a:defRPr sz="2250" b="0">
-                <a:solidFill>
-                  <a:srgbClr val="18334A"/>
-                </a:solidFill>
-                <a:latin typeface="Arial"/>
-                <a:ea typeface="Arial"/>
-                <a:cs typeface="Arial"/>
-              </a:defRPr>
-            </a:pPr>
-            <a:r>
-              <a:rPr sz="2250" b="0">
-                <a:solidFill>
-                  <a:srgbClr val="18334A"/>
-                </a:solidFill>
-                <a:latin typeface="Arial"/>
-                <a:ea typeface="Arial"/>
-                <a:cs typeface="Arial"/>
-              </a:rPr>
-              <a:t>Generated README was retained separately.</a:t>
-            </a:r>
-          </a:p>
-          <a:p xmlns:a="http://schemas.openxmlformats.org/drawingml/2006/main">
-            <a:pPr>
-              <a:defRPr sz="2250" b="0">
-                <a:solidFill>
-                  <a:srgbClr val="18334A"/>
-                </a:solidFill>
-                <a:latin typeface="Arial"/>
-                <a:ea typeface="Arial"/>
-                <a:cs typeface="Arial"/>
-              </a:defRPr>
-            </a:pPr>
-            <a:r>
-              <a:rPr sz="2250" b="0">
-                <a:solidFill>
-                  <a:srgbClr val="18334A"/>
-                </a:solidFill>
-                <a:latin typeface="Arial"/>
-                <a:ea typeface="Arial"/>
-                <a:cs typeface="Arial"/>
-              </a:rPr>
-              <a:t>Physical coexistence needs a reviewed adoption procedure.</a:t>
-            </a:r>
-          </a:p>
-          <a:p xmlns:a="http://schemas.openxmlformats.org/drawingml/2006/main">
-            <a:pPr>
-              <a:defRPr sz="2250" b="0">
-                <a:solidFill>
-                  <a:srgbClr val="18334A"/>
-                </a:solidFill>
-                <a:latin typeface="Arial"/>
-                <a:ea typeface="Arial"/>
-                <a:cs typeface="Arial"/>
-              </a:defRPr>
-            </a:pPr>
-            <a:r>
-              <a:rPr sz="2250" b="0">
-                <a:solidFill>
-                  <a:srgbClr val="18334A"/>
-                </a:solidFill>
-                <a:latin typeface="Arial"/>
-                <a:ea typeface="Arial"/>
-                <a:cs typeface="Arial"/>
-              </a:rPr>
-              <a:t>Existing E.1 migration history is not adopted automatically.</a:t>
+              <a:t>Observed blocker · full native verification</a:t>
             </a:r>
           </a:p>
         </p:txBody>
@@ -10748,7 +12394,7 @@
           <p:cNvPr id="3" name="page">
             <a:extLst xmlns:a="http://schemas.openxmlformats.org/drawingml/2006/main">
               <a:ext uri="{FF2B5EF4-FFF2-40B4-BE49-F238E27FC236}">
-                <a16:creationId xmlns:a16="http://schemas.microsoft.com/office/drawing/2014/main" id="{01E591AA-E4C8-4E5B-A91E-F1218A57F4A9}"/>
+                <a16:creationId xmlns:a16="http://schemas.microsoft.com/office/drawing/2014/main" id="{43E9BE36-A363-46F5-BA28-64A867D1521D}"/>
               </a:ext>
             </a:extLst>
           </p:cNvPr>
@@ -10787,6 +12433,7 @@
           </a:lstStyle>
           <a:p xmlns:a="http://schemas.openxmlformats.org/drawingml/2006/main">
             <a:pPr>
+              <a:buNone/>
               <a:defRPr sz="1350" b="0">
                 <a:solidFill>
                   <a:srgbClr val="526574"/>
@@ -10806,6 +12453,186 @@
                 <a:cs typeface="Arial"/>
               </a:rPr>
               <a:t>9</a:t>
+            </a:r>
+          </a:p>
+        </p:txBody>
+      </p:sp>
+      <p:sp>
+        <p:nvSpPr>
+          <p:cNvPr id="5" name="body">
+            <a:extLst xmlns:a="http://schemas.openxmlformats.org/drawingml/2006/main">
+              <a:ext uri="{FF2B5EF4-FFF2-40B4-BE49-F238E27FC236}">
+                <a16:creationId xmlns:a16="http://schemas.microsoft.com/office/drawing/2014/main" id="{98281463-B245-4CCC-9BE8-D13F68F67B07}"/>
+              </a:ext>
+            </a:extLst>
+          </p:cNvPr>
+          <p:cNvSpPr>
+            <a:spLocks xmlns:a="http://schemas.openxmlformats.org/drawingml/2006/main" noGrp="1"/>
+          </p:cNvSpPr>
+          <p:nvPr/>
+        </p:nvSpPr>
+        <p:spPr>
+          <a:xfrm xmlns:a="http://schemas.openxmlformats.org/drawingml/2006/main">
+            <a:off x="609600" y="1666875"/>
+            <a:ext cx="10972800" cy="4191000"/>
+          </a:xfrm>
+          <a:prstGeom xmlns:a="http://schemas.openxmlformats.org/drawingml/2006/main" prst="rect">
+            <a:avLst/>
+          </a:prstGeom>
+          <a:noFill xmlns:a="http://schemas.openxmlformats.org/drawingml/2006/main"/>
+          <a:ln xmlns:a="http://schemas.openxmlformats.org/drawingml/2006/main" w="0">
+            <a:noFill/>
+          </a:ln>
+        </p:spPr>
+        <p:txBody>
+          <a:bodyPr xmlns:a="http://schemas.openxmlformats.org/drawingml/2006/main">
+            <a:noAutofit/>
+          </a:bodyPr>
+          <a:lstStyle xmlns:a="http://schemas.openxmlformats.org/drawingml/2006/main">
+            <a:defPPr>
+              <a:defRPr sz="2250">
+                <a:solidFill>
+                  <a:srgbClr val="18334A"/>
+                </a:solidFill>
+                <a:latin typeface="Arial"/>
+                <a:ea typeface="Arial"/>
+                <a:cs typeface="Arial"/>
+              </a:defRPr>
+            </a:defPPr>
+          </a:lstStyle>
+          <a:p xmlns:a="http://schemas.openxmlformats.org/drawingml/2006/main">
+            <a:pPr marL="228600" indent="-152400">
+              <a:spcAft>
+                <a:spcPts val="600"/>
+              </a:spcAft>
+              <a:buChar char="•"/>
+              <a:defRPr sz="2250">
+                <a:solidFill>
+                  <a:srgbClr val="18334A"/>
+                </a:solidFill>
+                <a:latin typeface="Arial"/>
+                <a:ea typeface="Arial"/>
+                <a:cs typeface="Arial"/>
+              </a:defRPr>
+            </a:pPr>
+            <a:r>
+              <a:rPr sz="2250">
+                <a:solidFill>
+                  <a:srgbClr val="18334A"/>
+                </a:solidFill>
+                <a:latin typeface="Arial"/>
+                <a:ea typeface="Arial"/>
+                <a:cs typeface="Arial"/>
+              </a:rPr>
+              <a:t>Slash-containing stage branches expose a path mismatch.</a:t>
+            </a:r>
+          </a:p>
+          <a:p xmlns:a="http://schemas.openxmlformats.org/drawingml/2006/main">
+            <a:pPr marL="228600" indent="-152400">
+              <a:spcAft>
+                <a:spcPts val="600"/>
+              </a:spcAft>
+              <a:buChar char="•"/>
+              <a:defRPr sz="2250">
+                <a:solidFill>
+                  <a:srgbClr val="18334A"/>
+                </a:solidFill>
+                <a:latin typeface="Arial"/>
+                <a:ea typeface="Arial"/>
+                <a:cs typeface="Arial"/>
+              </a:defRPr>
+            </a:pPr>
+            <a:r>
+              <a:rPr sz="2250">
+                <a:solidFill>
+                  <a:srgbClr val="18334A"/>
+                </a:solidFill>
+                <a:latin typeface="Arial"/>
+                <a:ea typeface="Arial"/>
+                <a:cs typeface="Arial"/>
+              </a:rPr>
+              <a:t>Slashless branches remove that error; full verify still fails.</a:t>
+            </a:r>
+          </a:p>
+          <a:p xmlns:a="http://schemas.openxmlformats.org/drawingml/2006/main">
+            <a:pPr marL="228600" indent="-152400">
+              <a:spcAft>
+                <a:spcPts val="600"/>
+              </a:spcAft>
+              <a:buChar char="•"/>
+              <a:defRPr sz="2250">
+                <a:solidFill>
+                  <a:srgbClr val="18334A"/>
+                </a:solidFill>
+                <a:latin typeface="Arial"/>
+                <a:ea typeface="Arial"/>
+                <a:cs typeface="Arial"/>
+              </a:defRPr>
+            </a:pPr>
+            <a:r>
+              <a:rPr sz="2250">
+                <a:solidFill>
+                  <a:srgbClr val="18334A"/>
+                </a:solidFill>
+                <a:latin typeface="Arial"/>
+                <a:ea typeface="Arial"/>
+                <a:cs typeface="Arial"/>
+              </a:rPr>
+              <a:t>Initial: APEX SQL missing. Combined comparison: all six SQL files.</a:t>
+            </a:r>
+          </a:p>
+          <a:p xmlns:a="http://schemas.openxmlformats.org/drawingml/2006/main">
+            <a:pPr marL="228600" indent="-152400">
+              <a:spcAft>
+                <a:spcPts val="600"/>
+              </a:spcAft>
+              <a:buChar char="•"/>
+              <a:defRPr sz="2250">
+                <a:solidFill>
+                  <a:srgbClr val="18334A"/>
+                </a:solidFill>
+                <a:latin typeface="Arial"/>
+                <a:ea typeface="Arial"/>
+                <a:cs typeface="Arial"/>
+              </a:defRPr>
+            </a:pPr>
+            <a:r>
+              <a:rPr sz="2250">
+                <a:solidFill>
+                  <a:srgbClr val="18334A"/>
+                </a:solidFill>
+                <a:latin typeface="Arial"/>
+                <a:ea typeface="Arial"/>
+                <a:cs typeface="Arial"/>
+              </a:rPr>
+              <a:t>Other checks report matching source/distribution changes.</a:t>
+            </a:r>
+          </a:p>
+          <a:p xmlns:a="http://schemas.openxmlformats.org/drawingml/2006/main">
+            <a:pPr marL="228600" indent="-152400">
+              <a:spcAft>
+                <a:spcPts val="600"/>
+              </a:spcAft>
+              <a:buChar char="•"/>
+              <a:defRPr sz="2250">
+                <a:solidFill>
+                  <a:srgbClr val="18334A"/>
+                </a:solidFill>
+                <a:latin typeface="Arial"/>
+                <a:ea typeface="Arial"/>
+                <a:cs typeface="Arial"/>
+              </a:defRPr>
+            </a:pPr>
+            <a:r>
+              <a:rPr sz="2250">
+                <a:solidFill>
+                  <a:srgbClr val="18334A"/>
+                </a:solidFill>
+                <a:latin typeface="Arial"/>
+                <a:ea typeface="Arial"/>
+                <a:cs typeface="Arial"/>
+              </a:rPr>
+              <a:t>No formal release; inspect the retained Errors summary.</a:t>
             </a:r>
           </a:p>
         </p:txBody>
@@ -10813,7 +12640,7 @@
     </p:spTree>
     <p:extLst>
       <p:ext uri="{BB962C8B-B14F-4D97-AF65-F5344CB8AC3E}">
-        <p14:creationId xmlns:p14="http://schemas.microsoft.com/office/powerpoint/2010/main" val="1516976207"/>
+        <p14:creationId xmlns:p14="http://schemas.microsoft.com/office/powerpoint/2010/main" val="1114912375"/>
       </p:ext>
     </p:extLst>
   </p:cSld>
